--- a/docs/test/golden-outputs/p7-sutaek-r2/sutaek_dev_r2_basic.pptx
+++ b/docs/test/golden-outputs/p7-sutaek-r2/sutaek_dev_r2_basic.pptx
@@ -1692,7 +1692,7 @@
         <p:spPr>
           <a:xfrm>
             <a:off x="502920" y="3273552"/>
-            <a:ext cx="7315200" cy="365760"/>
+            <a:ext cx="7315200" cy="329184"/>
           </a:xfrm>
           <a:prstGeom prst="rect">
             <a:avLst/>
@@ -1730,8 +1730,8 @@
         </p:nvSpPr>
         <p:spPr>
           <a:xfrm>
-            <a:off x="502920" y="3639312"/>
-            <a:ext cx="7315200" cy="292608"/>
+            <a:off x="502920" y="3657600"/>
+            <a:ext cx="7315200" cy="256032"/>
           </a:xfrm>
           <a:prstGeom prst="rect">
             <a:avLst/>
@@ -1769,7 +1769,7 @@
         </p:nvSpPr>
         <p:spPr>
           <a:xfrm>
-            <a:off x="502920" y="4160520"/>
+            <a:off x="502920" y="4078224"/>
             <a:ext cx="1243584" cy="292608"/>
           </a:xfrm>
           <a:prstGeom prst="roundRect">
@@ -1791,7 +1791,7 @@
         </p:nvSpPr>
         <p:spPr>
           <a:xfrm>
-            <a:off x="502920" y="4160520"/>
+            <a:off x="502920" y="4078224"/>
             <a:ext cx="1243584" cy="292608"/>
           </a:xfrm>
           <a:prstGeom prst="rect">
@@ -1830,7 +1830,7 @@
         </p:nvSpPr>
         <p:spPr>
           <a:xfrm>
-            <a:off x="1837944" y="4160520"/>
+            <a:off x="1837944" y="4078224"/>
             <a:ext cx="1005840" cy="292608"/>
           </a:xfrm>
           <a:prstGeom prst="roundRect">
@@ -1852,7 +1852,7 @@
         </p:nvSpPr>
         <p:spPr>
           <a:xfrm>
-            <a:off x="1837944" y="4160520"/>
+            <a:off x="1837944" y="4078224"/>
             <a:ext cx="1005840" cy="292608"/>
           </a:xfrm>
           <a:prstGeom prst="rect">
@@ -1891,7 +1891,7 @@
         </p:nvSpPr>
         <p:spPr>
           <a:xfrm>
-            <a:off x="502920" y="4663440"/>
+            <a:off x="502920" y="4517136"/>
             <a:ext cx="6858000" cy="1051560"/>
           </a:xfrm>
           <a:prstGeom prst="roundRect">
@@ -1918,7 +1918,7 @@
         </p:nvSpPr>
         <p:spPr>
           <a:xfrm>
-            <a:off x="758952" y="4773168"/>
+            <a:off x="758952" y="4626864"/>
             <a:ext cx="6345936" cy="832104"/>
           </a:xfrm>
           <a:prstGeom prst="rect">
@@ -2021,7 +2021,7 @@
                 <a:ea typeface="맑은 고딕" pitchFamily="34" charset="-122"/>
                 <a:cs typeface="맑은 고딕" pitchFamily="34" charset="-120"/>
               </a:rPr>
-              <a:t>2026.09.20  |  담당자  |  CREDEAL</a:t>
+              <a:t>2026.09.22  |  담당자  |  CREDEAL</a:t>
             </a:r>
             <a:endParaRPr lang="en-US" sz="900" dirty="0"/>
           </a:p>
@@ -2060,7 +2060,7 @@
                 <a:ea typeface="맑은 고딕" pitchFamily="34" charset="-122"/>
                 <a:cs typeface="맑은 고딕" pitchFamily="34" charset="-120"/>
               </a:rPr>
-              <a:t>CRE DEAL   |   </a:t>
+              <a:t>CRE DEAL</a:t>
             </a:r>
             <a:endParaRPr lang="en-US" sz="800" dirty="0"/>
           </a:p>
@@ -2364,10 +2364,13 @@
           <a:lstStyle/>
           <a:p>
             <a:pPr indent="0" marL="0">
-              <a:buNone/>
-            </a:pPr>
-            <a:r>
-              <a:rPr lang="en-US" sz="1700" b="1" dirty="0">
+              <a:lnSpc>
+                <a:spcPct val="100000"/>
+              </a:lnSpc>
+              <a:buNone/>
+            </a:pPr>
+            <a:r>
+              <a:rPr lang="en-US" sz="2200" b="1" dirty="0">
                 <a:solidFill>
                   <a:srgbClr val="132A3A"/>
                 </a:solidFill>
@@ -2377,7 +2380,7 @@
               </a:rPr>
               <a:t>89억 원</a:t>
             </a:r>
-            <a:endParaRPr lang="en-US" sz="1700" dirty="0"/>
+            <a:endParaRPr lang="en-US" sz="2200" dirty="0"/>
           </a:p>
         </p:txBody>
       </p:sp>
@@ -2471,10 +2474,13 @@
           <a:lstStyle/>
           <a:p>
             <a:pPr indent="0" marL="0">
-              <a:buNone/>
-            </a:pPr>
-            <a:r>
-              <a:rPr lang="en-US" sz="1700" b="1" dirty="0">
+              <a:lnSpc>
+                <a:spcPct val="100000"/>
+              </a:lnSpc>
+              <a:buNone/>
+            </a:pPr>
+            <a:r>
+              <a:rPr lang="en-US" sz="2200" b="1" dirty="0">
                 <a:solidFill>
                   <a:srgbClr val="132A3A"/>
                 </a:solidFill>
@@ -2484,7 +2490,7 @@
               </a:rPr>
               <a:t>197평</a:t>
             </a:r>
-            <a:endParaRPr lang="en-US" sz="1700" dirty="0"/>
+            <a:endParaRPr lang="en-US" sz="2200" dirty="0"/>
           </a:p>
         </p:txBody>
       </p:sp>
@@ -2578,10 +2584,13 @@
           <a:lstStyle/>
           <a:p>
             <a:pPr indent="0" marL="0">
-              <a:buNone/>
-            </a:pPr>
-            <a:r>
-              <a:rPr lang="en-US" sz="1700" b="1" dirty="0">
+              <a:lnSpc>
+                <a:spcPct val="100000"/>
+              </a:lnSpc>
+              <a:buNone/>
+            </a:pPr>
+            <a:r>
+              <a:rPr lang="en-US" sz="1400" b="1" dirty="0">
                 <a:solidFill>
                   <a:srgbClr val="132A3A"/>
                 </a:solidFill>
@@ -2591,7 +2600,7 @@
               </a:rPr>
               <a:t>만실 운영 (공실 0%)</a:t>
             </a:r>
-            <a:endParaRPr lang="en-US" sz="1700" dirty="0"/>
+            <a:endParaRPr lang="en-US" sz="1400" dirty="0"/>
           </a:p>
         </p:txBody>
       </p:sp>
@@ -2685,10 +2694,13 @@
           <a:lstStyle/>
           <a:p>
             <a:pPr indent="0" marL="0">
-              <a:buNone/>
-            </a:pPr>
-            <a:r>
-              <a:rPr lang="en-US" sz="1700" b="1" dirty="0">
+              <a:lnSpc>
+                <a:spcPct val="100000"/>
+              </a:lnSpc>
+              <a:buNone/>
+            </a:pPr>
+            <a:r>
+              <a:rPr lang="en-US" sz="1800" b="1" dirty="0">
                 <a:solidFill>
                   <a:srgbClr val="132A3A"/>
                 </a:solidFill>
@@ -2698,7 +2710,7 @@
               </a:rPr>
               <a:t>약 89억 원</a:t>
             </a:r>
-            <a:endParaRPr lang="en-US" sz="1700" dirty="0"/>
+            <a:endParaRPr lang="en-US" sz="1800" dirty="0"/>
           </a:p>
         </p:txBody>
       </p:sp>
@@ -2754,7 +2766,7 @@
               <a:buNone/>
             </a:pPr>
             <a:r>
-              <a:rPr lang="en-US" sz="950" dirty="0">
+              <a:rPr lang="en-US" sz="850" dirty="0">
                 <a:solidFill>
                   <a:srgbClr val="5B6B73"/>
                 </a:solidFill>
@@ -2764,7 +2776,7 @@
               </a:rPr>
               <a:t>연 수익률(Cap Rate)</a:t>
             </a:r>
-            <a:endParaRPr lang="en-US" sz="950" dirty="0"/>
+            <a:endParaRPr lang="en-US" sz="850" dirty="0"/>
           </a:p>
         </p:txBody>
       </p:sp>
@@ -2792,10 +2804,13 @@
           <a:lstStyle/>
           <a:p>
             <a:pPr indent="0" marL="0">
-              <a:buNone/>
-            </a:pPr>
-            <a:r>
-              <a:rPr lang="en-US" sz="1700" b="1" dirty="0">
+              <a:lnSpc>
+                <a:spcPct val="100000"/>
+              </a:lnSpc>
+              <a:buNone/>
+            </a:pPr>
+            <a:r>
+              <a:rPr lang="en-US" sz="2200" b="1" dirty="0">
                 <a:solidFill>
                   <a:srgbClr val="132A3A"/>
                 </a:solidFill>
@@ -2805,7 +2820,7 @@
               </a:rPr>
               <a:t>-</a:t>
             </a:r>
-            <a:endParaRPr lang="en-US" sz="1700" dirty="0"/>
+            <a:endParaRPr lang="en-US" sz="2200" dirty="0"/>
           </a:p>
         </p:txBody>
       </p:sp>
@@ -2899,10 +2914,13 @@
           <a:lstStyle/>
           <a:p>
             <a:pPr indent="0" marL="0">
-              <a:buNone/>
-            </a:pPr>
-            <a:r>
-              <a:rPr lang="en-US" sz="1700" b="1" dirty="0">
+              <a:lnSpc>
+                <a:spcPct val="100000"/>
+              </a:lnSpc>
+              <a:buNone/>
+            </a:pPr>
+            <a:r>
+              <a:rPr lang="en-US" sz="2200" b="1" dirty="0">
                 <a:solidFill>
                   <a:srgbClr val="132A3A"/>
                 </a:solidFill>
@@ -2912,7 +2930,7 @@
               </a:rPr>
               <a:t>-</a:t>
             </a:r>
-            <a:endParaRPr lang="en-US" sz="1700" dirty="0"/>
+            <a:endParaRPr lang="en-US" sz="2200" dirty="0"/>
           </a:p>
         </p:txBody>
       </p:sp>
@@ -3384,7 +3402,7 @@
                 <a:ea typeface="맑은 고딕" pitchFamily="34" charset="-122"/>
                 <a:cs typeface="맑은 고딕" pitchFamily="34" charset="-120"/>
               </a:rPr>
-              <a:t>CRE DEAL   |   </a:t>
+              <a:t>CRE DEAL</a:t>
             </a:r>
             <a:endParaRPr lang="en-US" sz="800" dirty="0"/>
           </a:p>
@@ -3646,7 +3664,7 @@
         <p:spPr>
           <a:xfrm>
             <a:off x="502920" y="1645920"/>
-            <a:ext cx="1920240" cy="347472"/>
+            <a:ext cx="1920240" cy="329184"/>
           </a:xfrm>
           <a:prstGeom prst="rect">
             <a:avLst/>
@@ -3688,7 +3706,7 @@
         <p:spPr>
           <a:xfrm>
             <a:off x="2423160" y="1645920"/>
-            <a:ext cx="4937760" cy="347472"/>
+            <a:ext cx="4937760" cy="329184"/>
           </a:xfrm>
           <a:prstGeom prst="rect">
             <a:avLst/>
@@ -3729,7 +3747,7 @@
         </p:nvSpPr>
         <p:spPr>
           <a:xfrm>
-            <a:off x="502920" y="1993392"/>
+            <a:off x="502920" y="1975104"/>
             <a:ext cx="6858000" cy="0"/>
           </a:xfrm>
           <a:prstGeom prst="line">
@@ -3752,8 +3770,8 @@
         </p:nvSpPr>
         <p:spPr>
           <a:xfrm>
-            <a:off x="502920" y="1993392"/>
-            <a:ext cx="1920240" cy="347472"/>
+            <a:off x="502920" y="1975104"/>
+            <a:ext cx="1920240" cy="329184"/>
           </a:xfrm>
           <a:prstGeom prst="rect">
             <a:avLst/>
@@ -3794,8 +3812,8 @@
         </p:nvSpPr>
         <p:spPr>
           <a:xfrm>
-            <a:off x="2423160" y="1993392"/>
-            <a:ext cx="4937760" cy="347472"/>
+            <a:off x="2423160" y="1975104"/>
+            <a:ext cx="4937760" cy="329184"/>
           </a:xfrm>
           <a:prstGeom prst="rect">
             <a:avLst/>
@@ -3836,7 +3854,7 @@
         </p:nvSpPr>
         <p:spPr>
           <a:xfrm>
-            <a:off x="502920" y="2340864"/>
+            <a:off x="502920" y="2304288"/>
             <a:ext cx="6858000" cy="0"/>
           </a:xfrm>
           <a:prstGeom prst="line">
@@ -3859,8 +3877,8 @@
         </p:nvSpPr>
         <p:spPr>
           <a:xfrm>
-            <a:off x="502920" y="2340864"/>
-            <a:ext cx="1920240" cy="347472"/>
+            <a:off x="502920" y="2304288"/>
+            <a:ext cx="1920240" cy="329184"/>
           </a:xfrm>
           <a:prstGeom prst="rect">
             <a:avLst/>
@@ -3901,8 +3919,8 @@
         </p:nvSpPr>
         <p:spPr>
           <a:xfrm>
-            <a:off x="2423160" y="2340864"/>
-            <a:ext cx="4937760" cy="347472"/>
+            <a:off x="2423160" y="2304288"/>
+            <a:ext cx="4937760" cy="329184"/>
           </a:xfrm>
           <a:prstGeom prst="rect">
             <a:avLst/>
@@ -3929,7 +3947,7 @@
                 <a:ea typeface="맑은 고딕" pitchFamily="34" charset="-122"/>
                 <a:cs typeface="맑은 고딕" pitchFamily="34" charset="-120"/>
               </a:rPr>
-              <a:t>[확인 필요]㎡ ([확인 필요]평)</a:t>
+              <a:t>- (-)</a:t>
             </a:r>
             <a:endParaRPr lang="en-US" sz="1200" dirty="0"/>
           </a:p>
@@ -3943,7 +3961,7 @@
         </p:nvSpPr>
         <p:spPr>
           <a:xfrm>
-            <a:off x="502920" y="2688336"/>
+            <a:off x="502920" y="2633472"/>
             <a:ext cx="6858000" cy="0"/>
           </a:xfrm>
           <a:prstGeom prst="line">
@@ -3966,8 +3984,8 @@
         </p:nvSpPr>
         <p:spPr>
           <a:xfrm>
-            <a:off x="502920" y="2688336"/>
-            <a:ext cx="1920240" cy="347472"/>
+            <a:off x="502920" y="2633472"/>
+            <a:ext cx="1920240" cy="329184"/>
           </a:xfrm>
           <a:prstGeom prst="rect">
             <a:avLst/>
@@ -4008,8 +4026,8 @@
         </p:nvSpPr>
         <p:spPr>
           <a:xfrm>
-            <a:off x="2423160" y="2688336"/>
-            <a:ext cx="4937760" cy="347472"/>
+            <a:off x="2423160" y="2633472"/>
+            <a:ext cx="4937760" cy="329184"/>
           </a:xfrm>
           <a:prstGeom prst="rect">
             <a:avLst/>
@@ -4050,7 +4068,7 @@
         </p:nvSpPr>
         <p:spPr>
           <a:xfrm>
-            <a:off x="502920" y="3035808"/>
+            <a:off x="502920" y="2962656"/>
             <a:ext cx="6858000" cy="0"/>
           </a:xfrm>
           <a:prstGeom prst="line">
@@ -4073,8 +4091,8 @@
         </p:nvSpPr>
         <p:spPr>
           <a:xfrm>
-            <a:off x="502920" y="3035808"/>
-            <a:ext cx="1920240" cy="347472"/>
+            <a:off x="502920" y="2962656"/>
+            <a:ext cx="1920240" cy="329184"/>
           </a:xfrm>
           <a:prstGeom prst="rect">
             <a:avLst/>
@@ -4115,8 +4133,8 @@
         </p:nvSpPr>
         <p:spPr>
           <a:xfrm>
-            <a:off x="2423160" y="3035808"/>
-            <a:ext cx="4937760" cy="347472"/>
+            <a:off x="2423160" y="2962656"/>
+            <a:ext cx="4937760" cy="329184"/>
           </a:xfrm>
           <a:prstGeom prst="rect">
             <a:avLst/>
@@ -4143,7 +4161,7 @@
                 <a:ea typeface="맑은 고딕" pitchFamily="34" charset="-122"/>
                 <a:cs typeface="맑은 고딕" pitchFamily="34" charset="-120"/>
               </a:rPr>
-              <a:t>[확인 필요]년</a:t>
+              <a:t>-년</a:t>
             </a:r>
             <a:endParaRPr lang="en-US" sz="1200" dirty="0"/>
           </a:p>
@@ -4157,7 +4175,7 @@
         </p:nvSpPr>
         <p:spPr>
           <a:xfrm>
-            <a:off x="502920" y="3383280"/>
+            <a:off x="502920" y="3291840"/>
             <a:ext cx="6858000" cy="0"/>
           </a:xfrm>
           <a:prstGeom prst="line">
@@ -4180,8 +4198,8 @@
         </p:nvSpPr>
         <p:spPr>
           <a:xfrm>
-            <a:off x="502920" y="3383280"/>
-            <a:ext cx="1920240" cy="347472"/>
+            <a:off x="502920" y="3291840"/>
+            <a:ext cx="6858000" cy="329184"/>
           </a:xfrm>
           <a:prstGeom prst="rect">
             <a:avLst/>
@@ -4202,7 +4220,7 @@
             <a:r>
               <a:rPr lang="en-US" sz="1200" dirty="0">
                 <a:solidFill>
-                  <a:srgbClr val="5B6B73"/>
+                  <a:srgbClr val="132A3A"/>
                 </a:solidFill>
                 <a:latin typeface="맑은 고딕" pitchFamily="34" charset="0"/>
                 <a:ea typeface="맑은 고딕" pitchFamily="34" charset="-122"/>
@@ -4216,55 +4234,13 @@
       </p:sp>
       <p:sp>
         <p:nvSpPr>
-          <p:cNvPr id="23" name="Text 21"/>
-          <p:cNvSpPr/>
-          <p:nvPr/>
-        </p:nvSpPr>
-        <p:spPr>
-          <a:xfrm>
-            <a:off x="2423160" y="3383280"/>
-            <a:ext cx="4937760" cy="347472"/>
-          </a:xfrm>
-          <a:prstGeom prst="rect">
-            <a:avLst/>
-          </a:prstGeom>
-          <a:noFill/>
-          <a:ln/>
-        </p:spPr>
-        <p:txBody>
-          <a:bodyPr wrap="square" lIns="0" tIns="0" rIns="0" bIns="0" rtlCol="0" anchor="ctr"/>
-          <a:lstStyle/>
-          <a:p>
-            <a:pPr indent="0" marL="0">
-              <a:lnSpc>
-                <a:spcPct val="115000"/>
-              </a:lnSpc>
-              <a:buNone/>
-            </a:pPr>
-            <a:r>
-              <a:rPr lang="en-US" sz="1200" b="1" dirty="0">
-                <a:solidFill>
-                  <a:srgbClr val="132A3A"/>
-                </a:solidFill>
-                <a:latin typeface="맑은 고딕" pitchFamily="34" charset="0"/>
-                <a:ea typeface="맑은 고딕" pitchFamily="34" charset="-122"/>
-                <a:cs typeface="맑은 고딕" pitchFamily="34" charset="-120"/>
-              </a:rPr>
-              <a:t>[확인 필요]</a:t>
-            </a:r>
-            <a:endParaRPr lang="en-US" sz="1200" dirty="0"/>
-          </a:p>
-        </p:txBody>
-      </p:sp>
-      <p:sp>
-        <p:nvSpPr>
-          <p:cNvPr id="24" name="Shape 22"/>
-          <p:cNvSpPr/>
-          <p:nvPr/>
-        </p:nvSpPr>
-        <p:spPr>
-          <a:xfrm>
-            <a:off x="502920" y="3730752"/>
+          <p:cNvPr id="23" name="Shape 21"/>
+          <p:cNvSpPr/>
+          <p:nvPr/>
+        </p:nvSpPr>
+        <p:spPr>
+          <a:xfrm>
+            <a:off x="502920" y="3621024"/>
             <a:ext cx="6858000" cy="0"/>
           </a:xfrm>
           <a:prstGeom prst="line">
@@ -4281,14 +4257,14 @@
       </p:sp>
       <p:sp>
         <p:nvSpPr>
-          <p:cNvPr id="25" name="Text 23"/>
-          <p:cNvSpPr/>
-          <p:nvPr/>
-        </p:nvSpPr>
-        <p:spPr>
-          <a:xfrm>
-            <a:off x="502920" y="3730752"/>
-            <a:ext cx="1920240" cy="347472"/>
+          <p:cNvPr id="24" name="Text 22"/>
+          <p:cNvSpPr/>
+          <p:nvPr/>
+        </p:nvSpPr>
+        <p:spPr>
+          <a:xfrm>
+            <a:off x="502920" y="3621024"/>
+            <a:ext cx="1920240" cy="329184"/>
           </a:xfrm>
           <a:prstGeom prst="rect">
             <a:avLst/>
@@ -4323,14 +4299,14 @@
       </p:sp>
       <p:sp>
         <p:nvSpPr>
-          <p:cNvPr id="26" name="Text 24"/>
-          <p:cNvSpPr/>
-          <p:nvPr/>
-        </p:nvSpPr>
-        <p:spPr>
-          <a:xfrm>
-            <a:off x="2423160" y="3730752"/>
-            <a:ext cx="4937760" cy="347472"/>
+          <p:cNvPr id="25" name="Text 23"/>
+          <p:cNvSpPr/>
+          <p:nvPr/>
+        </p:nvSpPr>
+        <p:spPr>
+          <a:xfrm>
+            <a:off x="2423160" y="3621024"/>
+            <a:ext cx="4937760" cy="329184"/>
           </a:xfrm>
           <a:prstGeom prst="rect">
             <a:avLst/>
@@ -4357,7 +4333,7 @@
                 <a:ea typeface="맑은 고딕" pitchFamily="34" charset="-122"/>
                 <a:cs typeface="맑은 고딕" pitchFamily="34" charset="-120"/>
               </a:rPr>
-              <a:t>자주식 [확인 필요]대</a:t>
+              <a:t>자주식 -대</a:t>
             </a:r>
             <a:endParaRPr lang="en-US" sz="1200" dirty="0"/>
           </a:p>
@@ -4365,13 +4341,13 @@
       </p:sp>
       <p:sp>
         <p:nvSpPr>
-          <p:cNvPr id="27" name="Shape 25"/>
-          <p:cNvSpPr/>
-          <p:nvPr/>
-        </p:nvSpPr>
-        <p:spPr>
-          <a:xfrm>
-            <a:off x="502920" y="4078224"/>
+          <p:cNvPr id="26" name="Shape 24"/>
+          <p:cNvSpPr/>
+          <p:nvPr/>
+        </p:nvSpPr>
+        <p:spPr>
+          <a:xfrm>
+            <a:off x="502920" y="3950208"/>
             <a:ext cx="6858000" cy="0"/>
           </a:xfrm>
           <a:prstGeom prst="line">
@@ -4388,14 +4364,14 @@
       </p:sp>
       <p:sp>
         <p:nvSpPr>
-          <p:cNvPr id="28" name="Text 26"/>
-          <p:cNvSpPr/>
-          <p:nvPr/>
-        </p:nvSpPr>
-        <p:spPr>
-          <a:xfrm>
-            <a:off x="502920" y="4078224"/>
-            <a:ext cx="1920240" cy="347472"/>
+          <p:cNvPr id="27" name="Text 25"/>
+          <p:cNvSpPr/>
+          <p:nvPr/>
+        </p:nvSpPr>
+        <p:spPr>
+          <a:xfrm>
+            <a:off x="502920" y="3950208"/>
+            <a:ext cx="1920240" cy="329184"/>
           </a:xfrm>
           <a:prstGeom prst="rect">
             <a:avLst/>
@@ -4430,14 +4406,14 @@
       </p:sp>
       <p:sp>
         <p:nvSpPr>
-          <p:cNvPr id="29" name="Text 27"/>
-          <p:cNvSpPr/>
-          <p:nvPr/>
-        </p:nvSpPr>
-        <p:spPr>
-          <a:xfrm>
-            <a:off x="2423160" y="4078224"/>
-            <a:ext cx="4937760" cy="347472"/>
+          <p:cNvPr id="28" name="Text 26"/>
+          <p:cNvSpPr/>
+          <p:nvPr/>
+        </p:nvSpPr>
+        <p:spPr>
+          <a:xfrm>
+            <a:off x="2423160" y="3950208"/>
+            <a:ext cx="4937760" cy="329184"/>
           </a:xfrm>
           <a:prstGeom prst="rect">
             <a:avLst/>
@@ -4464,7 +4440,7 @@
                 <a:ea typeface="맑은 고딕" pitchFamily="34" charset="-122"/>
                 <a:cs typeface="맑은 고딕" pitchFamily="34" charset="-120"/>
               </a:rPr>
-              <a:t>[확인 필요]대</a:t>
+              <a:t>-대</a:t>
             </a:r>
             <a:endParaRPr lang="en-US" sz="1200" dirty="0"/>
           </a:p>
@@ -4472,13 +4448,13 @@
       </p:sp>
       <p:sp>
         <p:nvSpPr>
-          <p:cNvPr id="30" name="Shape 28"/>
-          <p:cNvSpPr/>
-          <p:nvPr/>
-        </p:nvSpPr>
-        <p:spPr>
-          <a:xfrm>
-            <a:off x="502920" y="4517136"/>
+          <p:cNvPr id="29" name="Shape 27"/>
+          <p:cNvSpPr/>
+          <p:nvPr/>
+        </p:nvSpPr>
+        <p:spPr>
+          <a:xfrm>
+            <a:off x="502920" y="4389120"/>
             <a:ext cx="6858000" cy="1005840"/>
           </a:xfrm>
           <a:prstGeom prst="rect">
@@ -4497,52 +4473,52 @@
       </p:sp>
       <p:sp>
         <p:nvSpPr>
+          <p:cNvPr id="30" name="Text 28"/>
+          <p:cNvSpPr/>
+          <p:nvPr/>
+        </p:nvSpPr>
+        <p:spPr>
+          <a:xfrm>
+            <a:off x="685800" y="4389120"/>
+            <a:ext cx="2726741" cy="502920"/>
+          </a:xfrm>
+          <a:prstGeom prst="rect">
+            <a:avLst/>
+          </a:prstGeom>
+          <a:noFill/>
+          <a:ln/>
+        </p:spPr>
+        <p:txBody>
+          <a:bodyPr wrap="square" lIns="0" tIns="0" rIns="0" bIns="0" rtlCol="0" anchor="ctr"/>
+          <a:lstStyle/>
+          <a:p>
+            <a:pPr algn="l" indent="0" marL="0">
+              <a:buNone/>
+            </a:pPr>
+            <a:r>
+              <a:rPr lang="en-US" sz="1200" b="1" dirty="0">
+                <a:solidFill>
+                  <a:srgbClr val="132A3A"/>
+                </a:solidFill>
+                <a:latin typeface="맑은 고딕" pitchFamily="34" charset="0"/>
+                <a:ea typeface="맑은 고딕" pitchFamily="34" charset="-122"/>
+                <a:cs typeface="맑은 고딕" pitchFamily="34" charset="-120"/>
+              </a:rPr>
+              <a:t>매매 희망가</a:t>
+            </a:r>
+            <a:endParaRPr lang="en-US" sz="1200" dirty="0"/>
+          </a:p>
+        </p:txBody>
+      </p:sp>
+      <p:sp>
+        <p:nvSpPr>
           <p:cNvPr id="31" name="Text 29"/>
           <p:cNvSpPr/>
           <p:nvPr/>
         </p:nvSpPr>
         <p:spPr>
           <a:xfrm>
-            <a:off x="685800" y="4517136"/>
-            <a:ext cx="2726741" cy="502920"/>
-          </a:xfrm>
-          <a:prstGeom prst="rect">
-            <a:avLst/>
-          </a:prstGeom>
-          <a:noFill/>
-          <a:ln/>
-        </p:spPr>
-        <p:txBody>
-          <a:bodyPr wrap="square" lIns="0" tIns="0" rIns="0" bIns="0" rtlCol="0" anchor="ctr"/>
-          <a:lstStyle/>
-          <a:p>
-            <a:pPr algn="l" indent="0" marL="0">
-              <a:buNone/>
-            </a:pPr>
-            <a:r>
-              <a:rPr lang="en-US" sz="1200" b="1" dirty="0">
-                <a:solidFill>
-                  <a:srgbClr val="132A3A"/>
-                </a:solidFill>
-                <a:latin typeface="맑은 고딕" pitchFamily="34" charset="0"/>
-                <a:ea typeface="맑은 고딕" pitchFamily="34" charset="-122"/>
-                <a:cs typeface="맑은 고딕" pitchFamily="34" charset="-120"/>
-              </a:rPr>
-              <a:t>매매 희망가</a:t>
-            </a:r>
-            <a:endParaRPr lang="en-US" sz="1200" dirty="0"/>
-          </a:p>
-        </p:txBody>
-      </p:sp>
-      <p:sp>
-        <p:nvSpPr>
-          <p:cNvPr id="32" name="Text 30"/>
-          <p:cNvSpPr/>
-          <p:nvPr/>
-        </p:nvSpPr>
-        <p:spPr>
-          <a:xfrm>
-            <a:off x="3412541" y="4517136"/>
+            <a:off x="3412541" y="4389120"/>
             <a:ext cx="3765499" cy="502920"/>
           </a:xfrm>
           <a:prstGeom prst="rect">
@@ -4575,13 +4551,13 @@
       </p:sp>
       <p:sp>
         <p:nvSpPr>
-          <p:cNvPr id="33" name="Shape 31"/>
-          <p:cNvSpPr/>
-          <p:nvPr/>
-        </p:nvSpPr>
-        <p:spPr>
-          <a:xfrm>
-            <a:off x="640080" y="5020056"/>
+          <p:cNvPr id="32" name="Shape 30"/>
+          <p:cNvSpPr/>
+          <p:nvPr/>
+        </p:nvSpPr>
+        <p:spPr>
+          <a:xfrm>
+            <a:off x="640080" y="4892040"/>
             <a:ext cx="6583680" cy="0"/>
           </a:xfrm>
           <a:prstGeom prst="line">
@@ -4598,52 +4574,52 @@
       </p:sp>
       <p:sp>
         <p:nvSpPr>
+          <p:cNvPr id="33" name="Text 31"/>
+          <p:cNvSpPr/>
+          <p:nvPr/>
+        </p:nvSpPr>
+        <p:spPr>
+          <a:xfrm>
+            <a:off x="685800" y="4892040"/>
+            <a:ext cx="2726741" cy="457200"/>
+          </a:xfrm>
+          <a:prstGeom prst="rect">
+            <a:avLst/>
+          </a:prstGeom>
+          <a:noFill/>
+          <a:ln/>
+        </p:spPr>
+        <p:txBody>
+          <a:bodyPr wrap="square" lIns="0" tIns="0" rIns="0" bIns="0" rtlCol="0" anchor="ctr"/>
+          <a:lstStyle/>
+          <a:p>
+            <a:pPr algn="l" indent="0" marL="0">
+              <a:buNone/>
+            </a:pPr>
+            <a:r>
+              <a:rPr lang="en-US" sz="1100" b="1" dirty="0">
+                <a:solidFill>
+                  <a:srgbClr val="132A3A"/>
+                </a:solidFill>
+                <a:latin typeface="맑은 고딕" pitchFamily="34" charset="0"/>
+                <a:ea typeface="맑은 고딕" pitchFamily="34" charset="-122"/>
+                <a:cs typeface="맑은 고딕" pitchFamily="34" charset="-120"/>
+              </a:rPr>
+              <a:t>토지평당가</a:t>
+            </a:r>
+            <a:endParaRPr lang="en-US" sz="1100" dirty="0"/>
+          </a:p>
+        </p:txBody>
+      </p:sp>
+      <p:sp>
+        <p:nvSpPr>
           <p:cNvPr id="34" name="Text 32"/>
           <p:cNvSpPr/>
           <p:nvPr/>
         </p:nvSpPr>
         <p:spPr>
           <a:xfrm>
-            <a:off x="685800" y="5020056"/>
-            <a:ext cx="2726741" cy="457200"/>
-          </a:xfrm>
-          <a:prstGeom prst="rect">
-            <a:avLst/>
-          </a:prstGeom>
-          <a:noFill/>
-          <a:ln/>
-        </p:spPr>
-        <p:txBody>
-          <a:bodyPr wrap="square" lIns="0" tIns="0" rIns="0" bIns="0" rtlCol="0" anchor="ctr"/>
-          <a:lstStyle/>
-          <a:p>
-            <a:pPr algn="l" indent="0" marL="0">
-              <a:buNone/>
-            </a:pPr>
-            <a:r>
-              <a:rPr lang="en-US" sz="1100" b="1" dirty="0">
-                <a:solidFill>
-                  <a:srgbClr val="132A3A"/>
-                </a:solidFill>
-                <a:latin typeface="맑은 고딕" pitchFamily="34" charset="0"/>
-                <a:ea typeface="맑은 고딕" pitchFamily="34" charset="-122"/>
-                <a:cs typeface="맑은 고딕" pitchFamily="34" charset="-120"/>
-              </a:rPr>
-              <a:t>토지평당가</a:t>
-            </a:r>
-            <a:endParaRPr lang="en-US" sz="1100" dirty="0"/>
-          </a:p>
-        </p:txBody>
-      </p:sp>
-      <p:sp>
-        <p:nvSpPr>
-          <p:cNvPr id="35" name="Text 33"/>
-          <p:cNvSpPr/>
-          <p:nvPr/>
-        </p:nvSpPr>
-        <p:spPr>
-          <a:xfrm>
-            <a:off x="3412541" y="5020056"/>
+            <a:off x="3412541" y="4892040"/>
             <a:ext cx="3765499" cy="457200"/>
           </a:xfrm>
           <a:prstGeom prst="rect">
@@ -4676,7 +4652,7 @@
       </p:sp>
       <p:sp>
         <p:nvSpPr>
-          <p:cNvPr id="36" name="Shape 34"/>
+          <p:cNvPr id="35" name="Shape 33"/>
           <p:cNvSpPr/>
           <p:nvPr/>
         </p:nvSpPr>
@@ -4699,7 +4675,7 @@
       </p:sp>
       <p:sp>
         <p:nvSpPr>
-          <p:cNvPr id="37" name="Shape 35"/>
+          <p:cNvPr id="36" name="Shape 34"/>
           <p:cNvSpPr/>
           <p:nvPr/>
         </p:nvSpPr>
@@ -4721,7 +4697,7 @@
       </p:sp>
       <p:sp>
         <p:nvSpPr>
-          <p:cNvPr id="38" name="Shape 36"/>
+          <p:cNvPr id="37" name="Shape 35"/>
           <p:cNvSpPr/>
           <p:nvPr/>
         </p:nvSpPr>
@@ -4741,7 +4717,7 @@
       </p:sp>
       <p:sp>
         <p:nvSpPr>
-          <p:cNvPr id="39" name="Text 37"/>
+          <p:cNvPr id="38" name="Text 36"/>
           <p:cNvSpPr/>
           <p:nvPr/>
         </p:nvSpPr>
@@ -4780,7 +4756,7 @@
       </p:sp>
       <p:sp>
         <p:nvSpPr>
-          <p:cNvPr id="40" name="Text 38"/>
+          <p:cNvPr id="39" name="Text 37"/>
           <p:cNvSpPr/>
           <p:nvPr/>
         </p:nvSpPr>
@@ -4815,15 +4791,63 @@
                 <a:ea typeface="맑은 고딕" pitchFamily="34" charset="-122"/>
                 <a:cs typeface="맑은 고딕" pitchFamily="34" charset="-120"/>
               </a:rPr>
-              <a:t>투자 검토 대상 상업용 자산\n• 권리관계 및 임대차 현황 실사 확인 필요\n• 상세 인접 인프라 및 입지 환경 분석 권장</a:t>
+              <a:t>투자 검토 대상 상업용 자산</a:t>
             </a:r>
             <a:endParaRPr lang="en-US" sz="980" dirty="0"/>
           </a:p>
-        </p:txBody>
-      </p:sp>
-      <p:sp>
-        <p:nvSpPr>
-          <p:cNvPr id="41" name="Shape 39"/>
+          <a:p>
+            <a:pPr marL="342900" indent="-342900">
+              <a:lnSpc>
+                <a:spcPct val="108000"/>
+              </a:lnSpc>
+              <a:spcBef>
+                <a:spcPts val="300"/>
+              </a:spcBef>
+              <a:buSzPct val="100000"/>
+              <a:buChar char="•"/>
+            </a:pPr>
+            <a:r>
+              <a:rPr lang="en-US" sz="980" dirty="0">
+                <a:solidFill>
+                  <a:srgbClr val="2B2B2B"/>
+                </a:solidFill>
+                <a:latin typeface="맑은 고딕" pitchFamily="34" charset="0"/>
+                <a:ea typeface="맑은 고딕" pitchFamily="34" charset="-122"/>
+                <a:cs typeface="맑은 고딕" pitchFamily="34" charset="-120"/>
+              </a:rPr>
+              <a:t>권리관계 및 임대차 계약 구조 분석</a:t>
+            </a:r>
+            <a:endParaRPr lang="en-US" sz="980" dirty="0"/>
+          </a:p>
+          <a:p>
+            <a:pPr marL="342900" indent="-342900">
+              <a:lnSpc>
+                <a:spcPct val="108000"/>
+              </a:lnSpc>
+              <a:spcBef>
+                <a:spcPts val="300"/>
+              </a:spcBef>
+              <a:buSzPct val="100000"/>
+              <a:buChar char="•"/>
+            </a:pPr>
+            <a:r>
+              <a:rPr lang="en-US" sz="980" dirty="0">
+                <a:solidFill>
+                  <a:srgbClr val="2B2B2B"/>
+                </a:solidFill>
+                <a:latin typeface="맑은 고딕" pitchFamily="34" charset="0"/>
+                <a:ea typeface="맑은 고딕" pitchFamily="34" charset="-122"/>
+                <a:cs typeface="맑은 고딕" pitchFamily="34" charset="-120"/>
+              </a:rPr>
+              <a:t>상세 인접 인프라 및 입지 환경 분석</a:t>
+            </a:r>
+            <a:endParaRPr lang="en-US" sz="980" dirty="0"/>
+          </a:p>
+        </p:txBody>
+      </p:sp>
+      <p:sp>
+        <p:nvSpPr>
+          <p:cNvPr id="40" name="Shape 38"/>
           <p:cNvSpPr/>
           <p:nvPr/>
         </p:nvSpPr>
@@ -4845,7 +4869,7 @@
       </p:sp>
       <p:sp>
         <p:nvSpPr>
-          <p:cNvPr id="42" name="Shape 40"/>
+          <p:cNvPr id="41" name="Shape 39"/>
           <p:cNvSpPr/>
           <p:nvPr/>
         </p:nvSpPr>
@@ -4865,7 +4889,7 @@
       </p:sp>
       <p:sp>
         <p:nvSpPr>
-          <p:cNvPr id="43" name="Text 41"/>
+          <p:cNvPr id="42" name="Text 40"/>
           <p:cNvSpPr/>
           <p:nvPr/>
         </p:nvSpPr>
@@ -4904,7 +4928,7 @@
       </p:sp>
       <p:sp>
         <p:nvSpPr>
-          <p:cNvPr id="44" name="Text 42"/>
+          <p:cNvPr id="43" name="Text 41"/>
           <p:cNvSpPr/>
           <p:nvPr/>
         </p:nvSpPr>
@@ -4939,15 +4963,63 @@
                 <a:ea typeface="맑은 고딕" pitchFamily="34" charset="-122"/>
                 <a:cs typeface="맑은 고딕" pitchFamily="34" charset="-120"/>
               </a:rPr>
-              <a:t>투자 검토 대상 자산\n• 임대차 계약 현황 및 운영비 실사 확인 필요\n• 매입 후 운용 계획에 따른 수익성 분석 권장</a:t>
+              <a:t>투자 검토 대상 자산</a:t>
             </a:r>
             <a:endParaRPr lang="en-US" sz="980" dirty="0"/>
           </a:p>
-        </p:txBody>
-      </p:sp>
-      <p:sp>
-        <p:nvSpPr>
-          <p:cNvPr id="45" name="Text 43"/>
+          <a:p>
+            <a:pPr marL="342900" indent="-342900">
+              <a:lnSpc>
+                <a:spcPct val="108000"/>
+              </a:lnSpc>
+              <a:spcBef>
+                <a:spcPts val="300"/>
+              </a:spcBef>
+              <a:buSzPct val="100000"/>
+              <a:buChar char="•"/>
+            </a:pPr>
+            <a:r>
+              <a:rPr lang="en-US" sz="980" dirty="0">
+                <a:solidFill>
+                  <a:srgbClr val="2B2B2B"/>
+                </a:solidFill>
+                <a:latin typeface="맑은 고딕" pitchFamily="34" charset="0"/>
+                <a:ea typeface="맑은 고딕" pitchFamily="34" charset="-122"/>
+                <a:cs typeface="맑은 고딕" pitchFamily="34" charset="-120"/>
+              </a:rPr>
+              <a:t>임대차 계약 조건 및 운영비 구조 분석</a:t>
+            </a:r>
+            <a:endParaRPr lang="en-US" sz="980" dirty="0"/>
+          </a:p>
+          <a:p>
+            <a:pPr marL="342900" indent="-342900">
+              <a:lnSpc>
+                <a:spcPct val="108000"/>
+              </a:lnSpc>
+              <a:spcBef>
+                <a:spcPts val="300"/>
+              </a:spcBef>
+              <a:buSzPct val="100000"/>
+              <a:buChar char="•"/>
+            </a:pPr>
+            <a:r>
+              <a:rPr lang="en-US" sz="980" dirty="0">
+                <a:solidFill>
+                  <a:srgbClr val="2B2B2B"/>
+                </a:solidFill>
+                <a:latin typeface="맑은 고딕" pitchFamily="34" charset="0"/>
+                <a:ea typeface="맑은 고딕" pitchFamily="34" charset="-122"/>
+                <a:cs typeface="맑은 고딕" pitchFamily="34" charset="-120"/>
+              </a:rPr>
+              <a:t>매입 후 운용 계획에 따른 수익성 분석</a:t>
+            </a:r>
+            <a:endParaRPr lang="en-US" sz="980" dirty="0"/>
+          </a:p>
+        </p:txBody>
+      </p:sp>
+      <p:sp>
+        <p:nvSpPr>
+          <p:cNvPr id="44" name="Text 42"/>
           <p:cNvSpPr/>
           <p:nvPr/>
         </p:nvSpPr>
@@ -4978,7 +5050,7 @@
                 <a:ea typeface="맑은 고딕" pitchFamily="34" charset="-122"/>
                 <a:cs typeface="맑은 고딕" pitchFamily="34" charset="-120"/>
               </a:rPr>
-              <a:t>CRE DEAL   |   </a:t>
+              <a:t>CRE DEAL</a:t>
             </a:r>
             <a:endParaRPr lang="en-US" sz="800" dirty="0"/>
           </a:p>
@@ -4986,7 +5058,7 @@
       </p:sp>
       <p:sp>
         <p:nvSpPr>
-          <p:cNvPr id="46" name="Text 44"/>
+          <p:cNvPr id="45" name="Text 43"/>
           <p:cNvSpPr/>
           <p:nvPr/>
         </p:nvSpPr>
@@ -5264,7 +5336,7 @@
         <p:spPr>
           <a:xfrm>
             <a:off x="5989320" y="1801368"/>
-            <a:ext cx="1560003" cy="493776"/>
+            <a:ext cx="1560003" cy="457200"/>
           </a:xfrm>
           <a:prstGeom prst="rect">
             <a:avLst/>
@@ -5283,7 +5355,7 @@
               <a:buNone/>
             </a:pPr>
             <a:r>
-              <a:rPr lang="en-US" sz="1300" dirty="0">
+              <a:rPr lang="en-US" sz="1250" dirty="0">
                 <a:solidFill>
                   <a:srgbClr val="5B6B73"/>
                 </a:solidFill>
@@ -5291,9 +5363,9 @@
                 <a:ea typeface="맑은 고딕" pitchFamily="34" charset="-122"/>
                 <a:cs typeface="맑은 고딕" pitchFamily="34" charset="-120"/>
               </a:rPr>
-              <a:t>대중교통</a:t>
-            </a:r>
-            <a:endParaRPr lang="en-US" sz="1300" dirty="0"/>
+              <a:t>소재지</a:t>
+            </a:r>
+            <a:endParaRPr lang="en-US" sz="1250" dirty="0"/>
           </a:p>
         </p:txBody>
       </p:sp>
@@ -5306,7 +5378,7 @@
         <p:spPr>
           <a:xfrm>
             <a:off x="7549323" y="1801368"/>
-            <a:ext cx="4011436" cy="493776"/>
+            <a:ext cx="4011436" cy="457200"/>
           </a:xfrm>
           <a:prstGeom prst="rect">
             <a:avLst/>
@@ -5325,7 +5397,7 @@
               <a:buNone/>
             </a:pPr>
             <a:r>
-              <a:rPr lang="en-US" sz="1300" b="1" dirty="0">
+              <a:rPr lang="en-US" sz="1250" b="1" dirty="0">
                 <a:solidFill>
                   <a:srgbClr val="132A3A"/>
                 </a:solidFill>
@@ -5333,9 +5405,9 @@
                 <a:ea typeface="맑은 고딕" pitchFamily="34" charset="-122"/>
                 <a:cs typeface="맑은 고딕" pitchFamily="34" charset="-120"/>
               </a:rPr>
-              <a:t>인접 지하철역 역세권 (상세 확인 필요)</a:t>
-            </a:r>
-            <a:endParaRPr lang="en-US" sz="1300" dirty="0"/>
+              <a:t>경기도 구리시 수택동 419-19 외 2필지</a:t>
+            </a:r>
+            <a:endParaRPr lang="en-US" sz="1250" dirty="0"/>
           </a:p>
         </p:txBody>
       </p:sp>
@@ -5347,7 +5419,7 @@
         </p:nvSpPr>
         <p:spPr>
           <a:xfrm>
-            <a:off x="5989320" y="2295144"/>
+            <a:off x="5989320" y="2258568"/>
             <a:ext cx="5571439" cy="0"/>
           </a:xfrm>
           <a:prstGeom prst="line">
@@ -5370,8 +5442,8 @@
         </p:nvSpPr>
         <p:spPr>
           <a:xfrm>
-            <a:off x="5989320" y="2295144"/>
-            <a:ext cx="1560003" cy="493776"/>
+            <a:off x="5989320" y="2258568"/>
+            <a:ext cx="1560003" cy="457200"/>
           </a:xfrm>
           <a:prstGeom prst="rect">
             <a:avLst/>
@@ -5390,7 +5462,7 @@
               <a:buNone/>
             </a:pPr>
             <a:r>
-              <a:rPr lang="en-US" sz="1300" dirty="0">
+              <a:rPr lang="en-US" sz="1250" dirty="0">
                 <a:solidFill>
                   <a:srgbClr val="5B6B73"/>
                 </a:solidFill>
@@ -5398,9 +5470,9 @@
                 <a:ea typeface="맑은 고딕" pitchFamily="34" charset="-122"/>
                 <a:cs typeface="맑은 고딕" pitchFamily="34" charset="-120"/>
               </a:rPr>
-              <a:t>상권권역</a:t>
-            </a:r>
-            <a:endParaRPr lang="en-US" sz="1300" dirty="0"/>
+              <a:t>대중교통</a:t>
+            </a:r>
+            <a:endParaRPr lang="en-US" sz="1250" dirty="0"/>
           </a:p>
         </p:txBody>
       </p:sp>
@@ -5412,8 +5484,8 @@
         </p:nvSpPr>
         <p:spPr>
           <a:xfrm>
-            <a:off x="7549323" y="2295144"/>
-            <a:ext cx="4011436" cy="493776"/>
+            <a:off x="7549323" y="2258568"/>
+            <a:ext cx="4011436" cy="457200"/>
           </a:xfrm>
           <a:prstGeom prst="rect">
             <a:avLst/>
@@ -5432,7 +5504,7 @@
               <a:buNone/>
             </a:pPr>
             <a:r>
-              <a:rPr lang="en-US" sz="1300" b="1" dirty="0">
+              <a:rPr lang="en-US" sz="1250" b="1" dirty="0">
                 <a:solidFill>
                   <a:srgbClr val="132A3A"/>
                 </a:solidFill>
@@ -5440,9 +5512,9 @@
                 <a:ea typeface="맑은 고딕" pitchFamily="34" charset="-122"/>
                 <a:cs typeface="맑은 고딕" pitchFamily="34" charset="-120"/>
               </a:rPr>
-              <a:t>89억 주요 상업·업무 권역</a:t>
-            </a:r>
-            <a:endParaRPr lang="en-US" sz="1300" dirty="0"/>
+              <a:t>지하철 및 간선버스 인접</a:t>
+            </a:r>
+            <a:endParaRPr lang="en-US" sz="1250" dirty="0"/>
           </a:p>
         </p:txBody>
       </p:sp>
@@ -5454,12 +5526,119 @@
         </p:nvSpPr>
         <p:spPr>
           <a:xfrm>
-            <a:off x="5989320" y="2926080"/>
-            <a:ext cx="5571439" cy="658368"/>
+            <a:off x="5989320" y="2715768"/>
+            <a:ext cx="5571439" cy="0"/>
+          </a:xfrm>
+          <a:prstGeom prst="line">
+            <a:avLst/>
+          </a:prstGeom>
+          <a:noFill/>
+          <a:ln w="3810">
+            <a:solidFill>
+              <a:srgbClr val="CBD5E0"/>
+            </a:solidFill>
+            <a:prstDash val="solid"/>
+          </a:ln>
+        </p:spPr>
+      </p:sp>
+      <p:sp>
+        <p:nvSpPr>
+          <p:cNvPr id="14" name="Text 11"/>
+          <p:cNvSpPr/>
+          <p:nvPr/>
+        </p:nvSpPr>
+        <p:spPr>
+          <a:xfrm>
+            <a:off x="5989320" y="2715768"/>
+            <a:ext cx="1560003" cy="457200"/>
+          </a:xfrm>
+          <a:prstGeom prst="rect">
+            <a:avLst/>
+          </a:prstGeom>
+          <a:noFill/>
+          <a:ln/>
+        </p:spPr>
+        <p:txBody>
+          <a:bodyPr wrap="square" lIns="0" tIns="0" rIns="0" bIns="0" rtlCol="0" anchor="ctr"/>
+          <a:lstStyle/>
+          <a:p>
+            <a:pPr indent="0" marL="0">
+              <a:lnSpc>
+                <a:spcPct val="115000"/>
+              </a:lnSpc>
+              <a:buNone/>
+            </a:pPr>
+            <a:r>
+              <a:rPr lang="en-US" sz="1250" dirty="0">
+                <a:solidFill>
+                  <a:srgbClr val="5B6B73"/>
+                </a:solidFill>
+                <a:latin typeface="맑은 고딕" pitchFamily="34" charset="0"/>
+                <a:ea typeface="맑은 고딕" pitchFamily="34" charset="-122"/>
+                <a:cs typeface="맑은 고딕" pitchFamily="34" charset="-120"/>
+              </a:rPr>
+              <a:t>상권권역</a:t>
+            </a:r>
+            <a:endParaRPr lang="en-US" sz="1250" dirty="0"/>
+          </a:p>
+        </p:txBody>
+      </p:sp>
+      <p:sp>
+        <p:nvSpPr>
+          <p:cNvPr id="15" name="Text 12"/>
+          <p:cNvSpPr/>
+          <p:nvPr/>
+        </p:nvSpPr>
+        <p:spPr>
+          <a:xfrm>
+            <a:off x="7549323" y="2715768"/>
+            <a:ext cx="4011436" cy="457200"/>
+          </a:xfrm>
+          <a:prstGeom prst="rect">
+            <a:avLst/>
+          </a:prstGeom>
+          <a:noFill/>
+          <a:ln/>
+        </p:spPr>
+        <p:txBody>
+          <a:bodyPr wrap="square" lIns="0" tIns="0" rIns="0" bIns="0" rtlCol="0" anchor="ctr"/>
+          <a:lstStyle/>
+          <a:p>
+            <a:pPr indent="0" marL="0">
+              <a:lnSpc>
+                <a:spcPct val="115000"/>
+              </a:lnSpc>
+              <a:buNone/>
+            </a:pPr>
+            <a:r>
+              <a:rPr lang="en-US" sz="1250" b="1" dirty="0">
+                <a:solidFill>
+                  <a:srgbClr val="132A3A"/>
+                </a:solidFill>
+                <a:latin typeface="맑은 고딕" pitchFamily="34" charset="0"/>
+                <a:ea typeface="맑은 고딕" pitchFamily="34" charset="-122"/>
+                <a:cs typeface="맑은 고딕" pitchFamily="34" charset="-120"/>
+              </a:rPr>
+              <a:t>경기도 구리시 수택동 주요 상업·업무 권역</a:t>
+            </a:r>
+            <a:endParaRPr lang="en-US" sz="1250" dirty="0"/>
+          </a:p>
+        </p:txBody>
+      </p:sp>
+      <p:sp>
+        <p:nvSpPr>
+          <p:cNvPr id="16" name="Shape 13"/>
+          <p:cNvSpPr/>
+          <p:nvPr/>
+        </p:nvSpPr>
+        <p:spPr>
+          <a:xfrm>
+            <a:off x="5989320" y="3282696"/>
+            <a:ext cx="5571439" cy="877824"/>
           </a:xfrm>
           <a:prstGeom prst="roundRect">
             <a:avLst>
-              <a:gd name="adj" fmla="val 8333"/>
+              <a:gd name="adj" fmla="val 6250"/>
             </a:avLst>
           </a:prstGeom>
           <a:solidFill>
@@ -5470,14 +5649,14 @@
       </p:sp>
       <p:sp>
         <p:nvSpPr>
-          <p:cNvPr id="14" name="Shape 11"/>
-          <p:cNvSpPr/>
-          <p:nvPr/>
-        </p:nvSpPr>
-        <p:spPr>
-          <a:xfrm>
-            <a:off x="5989320" y="2980944"/>
-            <a:ext cx="36576" cy="548640"/>
+          <p:cNvPr id="17" name="Shape 14"/>
+          <p:cNvSpPr/>
+          <p:nvPr/>
+        </p:nvSpPr>
+        <p:spPr>
+          <a:xfrm>
+            <a:off x="5989320" y="3337560"/>
+            <a:ext cx="36576" cy="768096"/>
           </a:xfrm>
           <a:prstGeom prst="rect">
             <a:avLst/>
@@ -5490,13 +5669,13 @@
       </p:sp>
       <p:sp>
         <p:nvSpPr>
-          <p:cNvPr id="15" name="Text 12"/>
-          <p:cNvSpPr/>
-          <p:nvPr/>
-        </p:nvSpPr>
-        <p:spPr>
-          <a:xfrm>
-            <a:off x="6135624" y="3017520"/>
+          <p:cNvPr id="18" name="Text 15"/>
+          <p:cNvSpPr/>
+          <p:nvPr/>
+        </p:nvSpPr>
+        <p:spPr>
+          <a:xfrm>
+            <a:off x="6135624" y="3374136"/>
             <a:ext cx="5315407" cy="201168"/>
           </a:xfrm>
           <a:prstGeom prst="rect">
@@ -5529,14 +5708,14 @@
       </p:sp>
       <p:sp>
         <p:nvSpPr>
-          <p:cNvPr id="16" name="Text 13"/>
-          <p:cNvSpPr/>
-          <p:nvPr/>
-        </p:nvSpPr>
-        <p:spPr>
-          <a:xfrm>
-            <a:off x="6135624" y="3218688"/>
-            <a:ext cx="5315407" cy="329184"/>
+          <p:cNvPr id="19" name="Text 16"/>
+          <p:cNvSpPr/>
+          <p:nvPr/>
+        </p:nvSpPr>
+        <p:spPr>
+          <a:xfrm>
+            <a:off x="6135624" y="3575304"/>
+            <a:ext cx="5315407" cy="548640"/>
           </a:xfrm>
           <a:prstGeom prst="rect">
             <a:avLst/>
@@ -5564,7 +5743,7 @@
                 <a:ea typeface="맑은 고딕" pitchFamily="34" charset="-122"/>
                 <a:cs typeface="맑은 고딕" pitchFamily="34" charset="-120"/>
               </a:rPr>
-              <a:t>89억 배후 상권 기반 안정적 임대 수요</a:t>
+              <a:t>경기도 구리시 수택동 배후 상권 기반 안정적 임대 수요</a:t>
             </a:r>
             <a:endParaRPr lang="en-US" sz="980" dirty="0"/>
           </a:p>
@@ -5572,7 +5751,7 @@
       </p:sp>
       <p:sp>
         <p:nvSpPr>
-          <p:cNvPr id="17" name="Text 14"/>
+          <p:cNvPr id="20" name="Text 17"/>
           <p:cNvSpPr/>
           <p:nvPr/>
         </p:nvSpPr>
@@ -5603,7 +5782,7 @@
                 <a:ea typeface="맑은 고딕" pitchFamily="34" charset="-122"/>
                 <a:cs typeface="맑은 고딕" pitchFamily="34" charset="-120"/>
               </a:rPr>
-              <a:t>CRE DEAL   |   </a:t>
+              <a:t>CRE DEAL</a:t>
             </a:r>
             <a:endParaRPr lang="en-US" sz="800" dirty="0"/>
           </a:p>
@@ -5611,7 +5790,7 @@
       </p:sp>
       <p:sp>
         <p:nvSpPr>
-          <p:cNvPr id="18" name="Text 15"/>
+          <p:cNvPr id="21" name="Text 18"/>
           <p:cNvSpPr/>
           <p:nvPr/>
         </p:nvSpPr>
@@ -5865,7 +6044,7 @@
         <p:spPr>
           <a:xfrm>
             <a:off x="502920" y="1645920"/>
-            <a:ext cx="1920240" cy="420624"/>
+            <a:ext cx="1920240" cy="402336"/>
           </a:xfrm>
           <a:prstGeom prst="rect">
             <a:avLst/>
@@ -5907,7 +6086,7 @@
         <p:spPr>
           <a:xfrm>
             <a:off x="2423160" y="1645920"/>
-            <a:ext cx="4937760" cy="420624"/>
+            <a:ext cx="4937760" cy="402336"/>
           </a:xfrm>
           <a:prstGeom prst="rect">
             <a:avLst/>
@@ -5948,7 +6127,7 @@
         </p:nvSpPr>
         <p:spPr>
           <a:xfrm>
-            <a:off x="502920" y="2066544"/>
+            <a:off x="502920" y="2048256"/>
             <a:ext cx="6858000" cy="0"/>
           </a:xfrm>
           <a:prstGeom prst="line">
@@ -5971,8 +6150,8 @@
         </p:nvSpPr>
         <p:spPr>
           <a:xfrm>
-            <a:off x="502920" y="2066544"/>
-            <a:ext cx="1920240" cy="420624"/>
+            <a:off x="502920" y="2048256"/>
+            <a:ext cx="1920240" cy="402336"/>
           </a:xfrm>
           <a:prstGeom prst="rect">
             <a:avLst/>
@@ -6013,8 +6192,8 @@
         </p:nvSpPr>
         <p:spPr>
           <a:xfrm>
-            <a:off x="2423160" y="2066544"/>
-            <a:ext cx="4937760" cy="420624"/>
+            <a:off x="2423160" y="2048256"/>
+            <a:ext cx="4937760" cy="402336"/>
           </a:xfrm>
           <a:prstGeom prst="rect">
             <a:avLst/>
@@ -6055,7 +6234,7 @@
         </p:nvSpPr>
         <p:spPr>
           <a:xfrm>
-            <a:off x="502920" y="2487168"/>
+            <a:off x="502920" y="2450592"/>
             <a:ext cx="6858000" cy="0"/>
           </a:xfrm>
           <a:prstGeom prst="line">
@@ -6078,8 +6257,8 @@
         </p:nvSpPr>
         <p:spPr>
           <a:xfrm>
-            <a:off x="502920" y="2487168"/>
-            <a:ext cx="1920240" cy="420624"/>
+            <a:off x="502920" y="2450592"/>
+            <a:ext cx="1920240" cy="402336"/>
           </a:xfrm>
           <a:prstGeom prst="rect">
             <a:avLst/>
@@ -6120,8 +6299,8 @@
         </p:nvSpPr>
         <p:spPr>
           <a:xfrm>
-            <a:off x="2423160" y="2487168"/>
-            <a:ext cx="4937760" cy="420624"/>
+            <a:off x="2423160" y="2450592"/>
+            <a:ext cx="4937760" cy="402336"/>
           </a:xfrm>
           <a:prstGeom prst="rect">
             <a:avLst/>
@@ -6162,7 +6341,7 @@
         </p:nvSpPr>
         <p:spPr>
           <a:xfrm>
-            <a:off x="502920" y="2907792"/>
+            <a:off x="502920" y="2852928"/>
             <a:ext cx="6858000" cy="0"/>
           </a:xfrm>
           <a:prstGeom prst="line">
@@ -6185,8 +6364,8 @@
         </p:nvSpPr>
         <p:spPr>
           <a:xfrm>
-            <a:off x="502920" y="2907792"/>
-            <a:ext cx="1920240" cy="420624"/>
+            <a:off x="502920" y="2852928"/>
+            <a:ext cx="1920240" cy="402336"/>
           </a:xfrm>
           <a:prstGeom prst="rect">
             <a:avLst/>
@@ -6227,8 +6406,8 @@
         </p:nvSpPr>
         <p:spPr>
           <a:xfrm>
-            <a:off x="2423160" y="2907792"/>
-            <a:ext cx="4937760" cy="420624"/>
+            <a:off x="2423160" y="2852928"/>
+            <a:ext cx="4937760" cy="402336"/>
           </a:xfrm>
           <a:prstGeom prst="rect">
             <a:avLst/>
@@ -6269,7 +6448,7 @@
         </p:nvSpPr>
         <p:spPr>
           <a:xfrm>
-            <a:off x="502920" y="3328416"/>
+            <a:off x="502920" y="3255264"/>
             <a:ext cx="6858000" cy="0"/>
           </a:xfrm>
           <a:prstGeom prst="line">
@@ -6292,8 +6471,8 @@
         </p:nvSpPr>
         <p:spPr>
           <a:xfrm>
-            <a:off x="502920" y="3328416"/>
-            <a:ext cx="1920240" cy="420624"/>
+            <a:off x="502920" y="3255264"/>
+            <a:ext cx="1920240" cy="402336"/>
           </a:xfrm>
           <a:prstGeom prst="rect">
             <a:avLst/>
@@ -6320,7 +6499,7 @@
                 <a:ea typeface="맑은 고딕" pitchFamily="34" charset="-122"/>
                 <a:cs typeface="맑은 고딕" pitchFamily="34" charset="-120"/>
               </a:rPr>
-              <a:t>필지 형상</a:t>
+              <a:t>지목</a:t>
             </a:r>
             <a:endParaRPr lang="en-US" sz="1350" dirty="0"/>
           </a:p>
@@ -6334,8 +6513,8 @@
         </p:nvSpPr>
         <p:spPr>
           <a:xfrm>
-            <a:off x="2423160" y="3328416"/>
-            <a:ext cx="4937760" cy="420624"/>
+            <a:off x="2423160" y="3255264"/>
+            <a:ext cx="4937760" cy="402336"/>
           </a:xfrm>
           <a:prstGeom prst="rect">
             <a:avLst/>
@@ -6362,7 +6541,7 @@
                 <a:ea typeface="맑은 고딕" pitchFamily="34" charset="-122"/>
                 <a:cs typeface="맑은 고딕" pitchFamily="34" charset="-120"/>
               </a:rPr>
-              <a:t>[필지 형상 확인 필요]</a:t>
+              <a:t>대</a:t>
             </a:r>
             <a:endParaRPr lang="en-US" sz="1350" dirty="0"/>
           </a:p>
@@ -6376,7 +6555,7 @@
         </p:nvSpPr>
         <p:spPr>
           <a:xfrm>
-            <a:off x="502920" y="3749040"/>
+            <a:off x="502920" y="3657600"/>
             <a:ext cx="6858000" cy="0"/>
           </a:xfrm>
           <a:prstGeom prst="line">
@@ -6399,8 +6578,8 @@
         </p:nvSpPr>
         <p:spPr>
           <a:xfrm>
-            <a:off x="502920" y="3749040"/>
-            <a:ext cx="1920240" cy="420624"/>
+            <a:off x="502920" y="3657600"/>
+            <a:ext cx="1920240" cy="402336"/>
           </a:xfrm>
           <a:prstGeom prst="rect">
             <a:avLst/>
@@ -6427,7 +6606,7 @@
                 <a:ea typeface="맑은 고딕" pitchFamily="34" charset="-122"/>
                 <a:cs typeface="맑은 고딕" pitchFamily="34" charset="-120"/>
               </a:rPr>
-              <a:t>지목</a:t>
+              <a:t>토지평당가</a:t>
             </a:r>
             <a:endParaRPr lang="en-US" sz="1350" dirty="0"/>
           </a:p>
@@ -6441,8 +6620,8 @@
         </p:nvSpPr>
         <p:spPr>
           <a:xfrm>
-            <a:off x="2423160" y="3749040"/>
-            <a:ext cx="4937760" cy="420624"/>
+            <a:off x="2423160" y="3657600"/>
+            <a:ext cx="4937760" cy="402336"/>
           </a:xfrm>
           <a:prstGeom prst="rect">
             <a:avLst/>
@@ -6469,7 +6648,7 @@
                 <a:ea typeface="맑은 고딕" pitchFamily="34" charset="-122"/>
                 <a:cs typeface="맑은 고딕" pitchFamily="34" charset="-120"/>
               </a:rPr>
-              <a:t>대</a:t>
+              <a:t>약 4,518만 원/평</a:t>
             </a:r>
             <a:endParaRPr lang="en-US" sz="1350" dirty="0"/>
           </a:p>
@@ -6478,113 +6657,6 @@
       <p:sp>
         <p:nvSpPr>
           <p:cNvPr id="24" name="Shape 22"/>
-          <p:cNvSpPr/>
-          <p:nvPr/>
-        </p:nvSpPr>
-        <p:spPr>
-          <a:xfrm>
-            <a:off x="502920" y="4169664"/>
-            <a:ext cx="6858000" cy="0"/>
-          </a:xfrm>
-          <a:prstGeom prst="line">
-            <a:avLst/>
-          </a:prstGeom>
-          <a:noFill/>
-          <a:ln w="3810">
-            <a:solidFill>
-              <a:srgbClr val="CBD5E0"/>
-            </a:solidFill>
-            <a:prstDash val="solid"/>
-          </a:ln>
-        </p:spPr>
-      </p:sp>
-      <p:sp>
-        <p:nvSpPr>
-          <p:cNvPr id="25" name="Text 23"/>
-          <p:cNvSpPr/>
-          <p:nvPr/>
-        </p:nvSpPr>
-        <p:spPr>
-          <a:xfrm>
-            <a:off x="502920" y="4169664"/>
-            <a:ext cx="1920240" cy="420624"/>
-          </a:xfrm>
-          <a:prstGeom prst="rect">
-            <a:avLst/>
-          </a:prstGeom>
-          <a:noFill/>
-          <a:ln/>
-        </p:spPr>
-        <p:txBody>
-          <a:bodyPr wrap="square" lIns="0" tIns="0" rIns="0" bIns="0" rtlCol="0" anchor="ctr"/>
-          <a:lstStyle/>
-          <a:p>
-            <a:pPr indent="0" marL="0">
-              <a:lnSpc>
-                <a:spcPct val="115000"/>
-              </a:lnSpc>
-              <a:buNone/>
-            </a:pPr>
-            <a:r>
-              <a:rPr lang="en-US" sz="1350" dirty="0">
-                <a:solidFill>
-                  <a:srgbClr val="5B6B73"/>
-                </a:solidFill>
-                <a:latin typeface="맑은 고딕" pitchFamily="34" charset="0"/>
-                <a:ea typeface="맑은 고딕" pitchFamily="34" charset="-122"/>
-                <a:cs typeface="맑은 고딕" pitchFamily="34" charset="-120"/>
-              </a:rPr>
-              <a:t>토지평당가</a:t>
-            </a:r>
-            <a:endParaRPr lang="en-US" sz="1350" dirty="0"/>
-          </a:p>
-        </p:txBody>
-      </p:sp>
-      <p:sp>
-        <p:nvSpPr>
-          <p:cNvPr id="26" name="Text 24"/>
-          <p:cNvSpPr/>
-          <p:nvPr/>
-        </p:nvSpPr>
-        <p:spPr>
-          <a:xfrm>
-            <a:off x="2423160" y="4169664"/>
-            <a:ext cx="4937760" cy="420624"/>
-          </a:xfrm>
-          <a:prstGeom prst="rect">
-            <a:avLst/>
-          </a:prstGeom>
-          <a:noFill/>
-          <a:ln/>
-        </p:spPr>
-        <p:txBody>
-          <a:bodyPr wrap="square" lIns="0" tIns="0" rIns="0" bIns="0" rtlCol="0" anchor="ctr"/>
-          <a:lstStyle/>
-          <a:p>
-            <a:pPr indent="0" marL="0">
-              <a:lnSpc>
-                <a:spcPct val="115000"/>
-              </a:lnSpc>
-              <a:buNone/>
-            </a:pPr>
-            <a:r>
-              <a:rPr lang="en-US" sz="1350" b="1" dirty="0">
-                <a:solidFill>
-                  <a:srgbClr val="132A3A"/>
-                </a:solidFill>
-                <a:latin typeface="맑은 고딕" pitchFamily="34" charset="0"/>
-                <a:ea typeface="맑은 고딕" pitchFamily="34" charset="-122"/>
-                <a:cs typeface="맑은 고딕" pitchFamily="34" charset="-120"/>
-              </a:rPr>
-              <a:t>약 4,518만 원/평</a:t>
-            </a:r>
-            <a:endParaRPr lang="en-US" sz="1350" dirty="0"/>
-          </a:p>
-        </p:txBody>
-      </p:sp>
-      <p:sp>
-        <p:nvSpPr>
-          <p:cNvPr id="27" name="Shape 25"/>
           <p:cNvSpPr/>
           <p:nvPr/>
         </p:nvSpPr>
@@ -6607,7 +6679,7 @@
       </p:sp>
       <p:sp>
         <p:nvSpPr>
-          <p:cNvPr id="28" name="Shape 26"/>
+          <p:cNvPr id="25" name="Shape 23"/>
           <p:cNvSpPr/>
           <p:nvPr/>
         </p:nvSpPr>
@@ -6629,7 +6701,7 @@
       </p:sp>
       <p:sp>
         <p:nvSpPr>
-          <p:cNvPr id="29" name="Shape 27"/>
+          <p:cNvPr id="26" name="Shape 24"/>
           <p:cNvSpPr/>
           <p:nvPr/>
         </p:nvSpPr>
@@ -6649,7 +6721,7 @@
       </p:sp>
       <p:sp>
         <p:nvSpPr>
-          <p:cNvPr id="30" name="Text 28"/>
+          <p:cNvPr id="27" name="Text 25"/>
           <p:cNvSpPr/>
           <p:nvPr/>
         </p:nvSpPr>
@@ -6688,7 +6760,7 @@
       </p:sp>
       <p:sp>
         <p:nvSpPr>
-          <p:cNvPr id="31" name="Text 29"/>
+          <p:cNvPr id="28" name="Text 26"/>
           <p:cNvSpPr/>
           <p:nvPr/>
         </p:nvSpPr>
@@ -6779,7 +6851,7 @@
       </p:sp>
       <p:sp>
         <p:nvSpPr>
-          <p:cNvPr id="32" name="Text 30"/>
+          <p:cNvPr id="29" name="Text 27"/>
           <p:cNvSpPr/>
           <p:nvPr/>
         </p:nvSpPr>
@@ -6810,7 +6882,7 @@
                 <a:ea typeface="맑은 고딕" pitchFamily="34" charset="-122"/>
                 <a:cs typeface="맑은 고딕" pitchFamily="34" charset="-120"/>
               </a:rPr>
-              <a:t>CRE DEAL   |   </a:t>
+              <a:t>CRE DEAL</a:t>
             </a:r>
             <a:endParaRPr lang="en-US" sz="800" dirty="0"/>
           </a:p>
@@ -6818,7 +6890,7 @@
       </p:sp>
       <p:sp>
         <p:nvSpPr>
-          <p:cNvPr id="33" name="Text 31"/>
+          <p:cNvPr id="30" name="Text 28"/>
           <p:cNvSpPr/>
           <p:nvPr/>
         </p:nvSpPr>
@@ -7699,7 +7771,7 @@
                 <a:ea typeface="맑은 고딕" pitchFamily="34" charset="-122"/>
                 <a:cs typeface="맑은 고딕" pitchFamily="34" charset="-120"/>
               </a:rPr>
-              <a:t>CRE DEAL   |   </a:t>
+              <a:t>CRE DEAL</a:t>
             </a:r>
             <a:endParaRPr lang="en-US" sz="800" dirty="0"/>
           </a:p>
@@ -9385,7 +9457,7 @@
                 <a:ea typeface="맑은 고딕" pitchFamily="34" charset="-122"/>
                 <a:cs typeface="맑은 고딕" pitchFamily="34" charset="-120"/>
               </a:rPr>
-              <a:t>CRE DEAL   |   </a:t>
+              <a:t>CRE DEAL</a:t>
             </a:r>
             <a:endParaRPr lang="en-US" sz="800" dirty="0"/>
           </a:p>

--- a/docs/test/golden-outputs/p7-sutaek-r2/sutaek_dev_r2_basic.pptx
+++ b/docs/test/golden-outputs/p7-sutaek-r2/sutaek_dev_r2_basic.pptx
@@ -2021,7 +2021,7 @@
                 <a:ea typeface="맑은 고딕" pitchFamily="34" charset="-122"/>
                 <a:cs typeface="맑은 고딕" pitchFamily="34" charset="-120"/>
               </a:rPr>
-              <a:t>2026.09.22  |  담당자  |  CREDEAL</a:t>
+              <a:t>2026.09.23  |  담당자  |  CREDEAL</a:t>
             </a:r>
             <a:endParaRPr lang="en-US" sz="900" dirty="0"/>
           </a:p>

--- a/docs/test/golden-outputs/p7-sutaek-r2/sutaek_dev_r2_basic.pptx
+++ b/docs/test/golden-outputs/p7-sutaek-r2/sutaek_dev_r2_basic.pptx
@@ -2021,7 +2021,7 @@
                 <a:ea typeface="맑은 고딕" pitchFamily="34" charset="-122"/>
                 <a:cs typeface="맑은 고딕" pitchFamily="34" charset="-120"/>
               </a:rPr>
-              <a:t>2026.09.23  |  담당자  |  CREDEAL</a:t>
+              <a:t>2026.09.24  |  담당자  |  CREDEAL</a:t>
             </a:r>
             <a:endParaRPr lang="en-US" sz="900" dirty="0"/>
           </a:p>

--- a/docs/test/golden-outputs/p7-sutaek-r2/sutaek_dev_r2_basic.pptx
+++ b/docs/test/golden-outputs/p7-sutaek-r2/sutaek_dev_r2_basic.pptx
@@ -2021,7 +2021,7 @@
                 <a:ea typeface="맑은 고딕" pitchFamily="34" charset="-122"/>
                 <a:cs typeface="맑은 고딕" pitchFamily="34" charset="-120"/>
               </a:rPr>
-              <a:t>2026.09.24  |  담당자  |  CREDEAL</a:t>
+              <a:t>2026.09.29  |  담당자  |  CREDEAL</a:t>
             </a:r>
             <a:endParaRPr lang="en-US" sz="900" dirty="0"/>
           </a:p>
@@ -7105,231 +7105,11 @@
         <p:spPr>
           <a:xfrm>
             <a:off x="502920" y="1371600"/>
-            <a:ext cx="11057839" cy="1188720"/>
+            <a:ext cx="11057839" cy="4389120"/>
           </a:xfrm>
           <a:prstGeom prst="roundRect">
             <a:avLst>
-              <a:gd name="adj" fmla="val 6154"/>
-            </a:avLst>
-          </a:prstGeom>
-          <a:solidFill>
-            <a:srgbClr val="F7FAFC"/>
-          </a:solidFill>
-          <a:ln w="9525">
-            <a:solidFill>
-              <a:srgbClr val="CBD5E0"/>
-            </a:solidFill>
-            <a:prstDash val="solid"/>
-          </a:ln>
-        </p:spPr>
-      </p:sp>
-      <p:sp>
-        <p:nvSpPr>
-          <p:cNvPr id="7" name="Text 5"/>
-          <p:cNvSpPr/>
-          <p:nvPr/>
-        </p:nvSpPr>
-        <p:spPr>
-          <a:xfrm>
-            <a:off x="868680" y="1508760"/>
-            <a:ext cx="3200400" cy="822960"/>
-          </a:xfrm>
-          <a:prstGeom prst="rect">
-            <a:avLst/>
-          </a:prstGeom>
-          <a:noFill/>
-          <a:ln/>
-        </p:spPr>
-        <p:txBody>
-          <a:bodyPr wrap="square" rtlCol="0" anchor="ctr"/>
-          <a:lstStyle/>
-          <a:p>
-            <a:pPr indent="0" marL="0">
-              <a:buNone/>
-            </a:pPr>
-            <a:r>
-              <a:rPr lang="en-US" sz="1600" b="1" dirty="0">
-                <a:solidFill>
-                  <a:srgbClr val="132A3A"/>
-                </a:solidFill>
-                <a:latin typeface="맑은 고딕" pitchFamily="34" charset="0"/>
-                <a:ea typeface="맑은 고딕" pitchFamily="34" charset="-122"/>
-                <a:cs typeface="맑은 고딕" pitchFamily="34" charset="-120"/>
-              </a:rPr>
-              <a:t>표면 임대수익률  =</a:t>
-            </a:r>
-            <a:endParaRPr lang="en-US" sz="1600" dirty="0"/>
-          </a:p>
-        </p:txBody>
-      </p:sp>
-      <p:sp>
-        <p:nvSpPr>
-          <p:cNvPr id="8" name="Text 6"/>
-          <p:cNvSpPr/>
-          <p:nvPr/>
-        </p:nvSpPr>
-        <p:spPr>
-          <a:xfrm>
-            <a:off x="4343400" y="1508760"/>
-            <a:ext cx="4572000" cy="365760"/>
-          </a:xfrm>
-          <a:prstGeom prst="rect">
-            <a:avLst/>
-          </a:prstGeom>
-          <a:noFill/>
-          <a:ln/>
-        </p:spPr>
-        <p:txBody>
-          <a:bodyPr wrap="square" rtlCol="0" anchor="b"/>
-          <a:lstStyle/>
-          <a:p>
-            <a:pPr algn="ctr" indent="0" marL="0">
-              <a:buNone/>
-            </a:pPr>
-            <a:r>
-              <a:rPr lang="en-US" sz="1300" b="1" dirty="0">
-                <a:solidFill>
-                  <a:srgbClr val="132A3A"/>
-                </a:solidFill>
-                <a:latin typeface="맑은 고딕" pitchFamily="34" charset="0"/>
-                <a:ea typeface="맑은 고딕" pitchFamily="34" charset="-122"/>
-                <a:cs typeface="맑은 고딕" pitchFamily="34" charset="-120"/>
-              </a:rPr>
-              <a:t>연간 임대료 합계 (관리비 제외)</a:t>
-            </a:r>
-            <a:endParaRPr lang="en-US" sz="1300" dirty="0"/>
-          </a:p>
-        </p:txBody>
-      </p:sp>
-      <p:sp>
-        <p:nvSpPr>
-          <p:cNvPr id="9" name="Shape 7"/>
-          <p:cNvSpPr/>
-          <p:nvPr/>
-        </p:nvSpPr>
-        <p:spPr>
-          <a:xfrm>
-            <a:off x="4526280" y="1920240"/>
-            <a:ext cx="4206240" cy="0"/>
-          </a:xfrm>
-          <a:prstGeom prst="line">
-            <a:avLst/>
-          </a:prstGeom>
-          <a:noFill/>
-          <a:ln w="25400">
-            <a:solidFill>
-              <a:srgbClr val="B8860B"/>
-            </a:solidFill>
-            <a:prstDash val="solid"/>
-          </a:ln>
-        </p:spPr>
-      </p:sp>
-      <p:sp>
-        <p:nvSpPr>
-          <p:cNvPr id="10" name="Text 8"/>
-          <p:cNvSpPr/>
-          <p:nvPr/>
-        </p:nvSpPr>
-        <p:spPr>
-          <a:xfrm>
-            <a:off x="4343400" y="1965960"/>
-            <a:ext cx="4572000" cy="365760"/>
-          </a:xfrm>
-          <a:prstGeom prst="rect">
-            <a:avLst/>
-          </a:prstGeom>
-          <a:noFill/>
-          <a:ln/>
-        </p:spPr>
-        <p:txBody>
-          <a:bodyPr wrap="square" rtlCol="0" anchor="t"/>
-          <a:lstStyle/>
-          <a:p>
-            <a:pPr algn="ctr" indent="0" marL="0">
-              <a:buNone/>
-            </a:pPr>
-            <a:r>
-              <a:rPr lang="en-US" sz="1300" b="1" dirty="0">
-                <a:solidFill>
-                  <a:srgbClr val="132A3A"/>
-                </a:solidFill>
-                <a:latin typeface="맑은 고딕" pitchFamily="34" charset="0"/>
-                <a:ea typeface="맑은 고딕" pitchFamily="34" charset="-122"/>
-                <a:cs typeface="맑은 고딕" pitchFamily="34" charset="-120"/>
-              </a:rPr>
-              <a:t>매매가  −  승계 보증금 합계</a:t>
-            </a:r>
-            <a:endParaRPr lang="en-US" sz="1300" dirty="0"/>
-          </a:p>
-        </p:txBody>
-      </p:sp>
-      <p:sp>
-        <p:nvSpPr>
-          <p:cNvPr id="11" name="Text 9"/>
-          <p:cNvSpPr/>
-          <p:nvPr/>
-        </p:nvSpPr>
-        <p:spPr>
-          <a:xfrm>
-            <a:off x="8726119" y="1508760"/>
-            <a:ext cx="2697480" cy="822960"/>
-          </a:xfrm>
-          <a:prstGeom prst="rect">
-            <a:avLst/>
-          </a:prstGeom>
-          <a:noFill/>
-          <a:ln/>
-        </p:spPr>
-        <p:txBody>
-          <a:bodyPr wrap="square" rtlCol="0" anchor="ctr"/>
-          <a:lstStyle/>
-          <a:p>
-            <a:pPr algn="r" indent="0" marL="0">
-              <a:buNone/>
-            </a:pPr>
-            <a:r>
-              <a:rPr lang="en-US" sz="1100" b="1" dirty="0">
-                <a:solidFill>
-                  <a:srgbClr val="B8860B"/>
-                </a:solidFill>
-                <a:latin typeface="맑은 고딕" pitchFamily="34" charset="0"/>
-                <a:ea typeface="맑은 고딕" pitchFamily="34" charset="-122"/>
-                <a:cs typeface="맑은 고딕" pitchFamily="34" charset="-120"/>
-              </a:rPr>
-              <a:t>0만원</a:t>
-            </a:r>
-            <a:pPr algn="r" indent="0" marL="0">
-              <a:buNone/>
-            </a:pPr>
-            <a:r>
-              <a:rPr lang="en-US" sz="1100" dirty="0">
-                <a:solidFill>
-                  <a:srgbClr val="5B6B73"/>
-                </a:solidFill>
-                <a:latin typeface="맑은 고딕" pitchFamily="34" charset="0"/>
-                <a:ea typeface="맑은 고딕" pitchFamily="34" charset="-122"/>
-                <a:cs typeface="맑은 고딕" pitchFamily="34" charset="-120"/>
-              </a:rPr>
-              <a:t> ÷ (89.0억원 − 0만원)</a:t>
-            </a:r>
-            <a:endParaRPr lang="en-US" sz="1100" dirty="0"/>
-          </a:p>
-        </p:txBody>
-      </p:sp>
-      <p:sp>
-        <p:nvSpPr>
-          <p:cNvPr id="12" name="Shape 10"/>
-          <p:cNvSpPr/>
-          <p:nvPr/>
-        </p:nvSpPr>
-        <p:spPr>
-          <a:xfrm>
-            <a:off x="502920" y="2834640"/>
-            <a:ext cx="11057839" cy="3063240"/>
-          </a:xfrm>
-          <a:prstGeom prst="roundRect">
-            <a:avLst>
-              <a:gd name="adj" fmla="val 2388"/>
+              <a:gd name="adj" fmla="val 1667"/>
             </a:avLst>
           </a:prstGeom>
           <a:solidFill>
@@ -7345,36 +7125,36 @@
       </p:sp>
       <p:sp>
         <p:nvSpPr>
-          <p:cNvPr id="13" name="Shape 11"/>
-          <p:cNvSpPr/>
-          <p:nvPr/>
-        </p:nvSpPr>
-        <p:spPr>
-          <a:xfrm>
-            <a:off x="685800" y="3017520"/>
-            <a:ext cx="1280160" cy="329184"/>
+          <p:cNvPr id="7" name="Shape 5"/>
+          <p:cNvSpPr/>
+          <p:nvPr/>
+        </p:nvSpPr>
+        <p:spPr>
+          <a:xfrm>
+            <a:off x="731520" y="1600200"/>
+            <a:ext cx="10600639" cy="1005840"/>
           </a:xfrm>
           <a:prstGeom prst="roundRect">
             <a:avLst>
-              <a:gd name="adj" fmla="val 11111"/>
+              <a:gd name="adj" fmla="val 7273"/>
             </a:avLst>
           </a:prstGeom>
           <a:solidFill>
-            <a:srgbClr val="F3F6F7"/>
+            <a:srgbClr val="132A3A"/>
           </a:solidFill>
           <a:ln/>
         </p:spPr>
       </p:sp>
       <p:sp>
         <p:nvSpPr>
-          <p:cNvPr id="14" name="Text 12"/>
-          <p:cNvSpPr/>
-          <p:nvPr/>
-        </p:nvSpPr>
-        <p:spPr>
-          <a:xfrm>
-            <a:off x="685800" y="3017520"/>
-            <a:ext cx="1280160" cy="329184"/>
+          <p:cNvPr id="8" name="Text 6"/>
+          <p:cNvSpPr/>
+          <p:nvPr/>
+        </p:nvSpPr>
+        <p:spPr>
+          <a:xfrm>
+            <a:off x="960120" y="1600200"/>
+            <a:ext cx="2286000" cy="1005840"/>
           </a:xfrm>
           <a:prstGeom prst="rect">
             <a:avLst/>
@@ -7386,34 +7166,34 @@
           <a:bodyPr wrap="square" rtlCol="0" anchor="ctr"/>
           <a:lstStyle/>
           <a:p>
-            <a:pPr algn="ctr" indent="0" marL="0">
-              <a:buNone/>
-            </a:pPr>
-            <a:r>
-              <a:rPr lang="en-US" sz="1000" b="1" dirty="0">
-                <a:solidFill>
-                  <a:srgbClr val="132A3A"/>
-                </a:solidFill>
-                <a:latin typeface="맑은 고딕" pitchFamily="34" charset="0"/>
-                <a:ea typeface="맑은 고딕" pitchFamily="34" charset="-122"/>
-                <a:cs typeface="맑은 고딕" pitchFamily="34" charset="-120"/>
-              </a:rPr>
-              <a:t>As-Is (현재)</a:t>
-            </a:r>
-            <a:endParaRPr lang="en-US" sz="1000" dirty="0"/>
-          </a:p>
-        </p:txBody>
-      </p:sp>
-      <p:sp>
-        <p:nvSpPr>
-          <p:cNvPr id="15" name="Text 13"/>
-          <p:cNvSpPr/>
-          <p:nvPr/>
-        </p:nvSpPr>
-        <p:spPr>
-          <a:xfrm>
-            <a:off x="777240" y="3520440"/>
-            <a:ext cx="2743200" cy="402336"/>
+            <a:pPr indent="0" marL="0">
+              <a:buNone/>
+            </a:pPr>
+            <a:r>
+              <a:rPr lang="en-US" sz="1600" b="1" dirty="0">
+                <a:solidFill>
+                  <a:srgbClr val="FFFFFF"/>
+                </a:solidFill>
+                <a:latin typeface="맑은 고딕" pitchFamily="34" charset="0"/>
+                <a:ea typeface="맑은 고딕" pitchFamily="34" charset="-122"/>
+                <a:cs typeface="맑은 고딕" pitchFamily="34" charset="-120"/>
+              </a:rPr>
+              <a:t>수익률</a:t>
+            </a:r>
+            <a:endParaRPr lang="en-US" sz="1600" dirty="0"/>
+          </a:p>
+        </p:txBody>
+      </p:sp>
+      <p:sp>
+        <p:nvSpPr>
+          <p:cNvPr id="9" name="Text 7"/>
+          <p:cNvSpPr/>
+          <p:nvPr/>
+        </p:nvSpPr>
+        <p:spPr>
+          <a:xfrm>
+            <a:off x="8360359" y="1600200"/>
+            <a:ext cx="2743200" cy="1005840"/>
           </a:xfrm>
           <a:prstGeom prst="rect">
             <a:avLst/>
@@ -7425,73 +7205,34 @@
           <a:bodyPr wrap="square" rtlCol="0" anchor="ctr"/>
           <a:lstStyle/>
           <a:p>
-            <a:pPr indent="0" marL="0">
-              <a:buNone/>
-            </a:pPr>
-            <a:r>
-              <a:rPr lang="en-US" sz="1100" dirty="0">
-                <a:solidFill>
-                  <a:srgbClr val="5B6B73"/>
-                </a:solidFill>
-                <a:latin typeface="맑은 고딕" pitchFamily="34" charset="0"/>
-                <a:ea typeface="맑은 고딕" pitchFamily="34" charset="-122"/>
-                <a:cs typeface="맑은 고딕" pitchFamily="34" charset="-120"/>
-              </a:rPr>
-              <a:t>연간 임대료</a:t>
-            </a:r>
-            <a:endParaRPr lang="en-US" sz="1100" dirty="0"/>
-          </a:p>
-        </p:txBody>
-      </p:sp>
-      <p:sp>
-        <p:nvSpPr>
-          <p:cNvPr id="16" name="Text 14"/>
-          <p:cNvSpPr/>
-          <p:nvPr/>
-        </p:nvSpPr>
-        <p:spPr>
-          <a:xfrm>
-            <a:off x="9457639" y="3520440"/>
-            <a:ext cx="1828800" cy="402336"/>
-          </a:xfrm>
-          <a:prstGeom prst="rect">
-            <a:avLst/>
-          </a:prstGeom>
-          <a:noFill/>
-          <a:ln/>
-        </p:spPr>
-        <p:txBody>
-          <a:bodyPr wrap="square" rtlCol="0" anchor="ctr"/>
-          <a:lstStyle/>
-          <a:p>
             <a:pPr algn="r" indent="0" marL="0">
               <a:buNone/>
             </a:pPr>
             <a:r>
-              <a:rPr lang="en-US" sz="1200" b="1" dirty="0">
-                <a:solidFill>
-                  <a:srgbClr val="132A3A"/>
+              <a:rPr lang="en-US" sz="2800" b="1" dirty="0">
+                <a:solidFill>
+                  <a:srgbClr val="B8860B"/>
                 </a:solidFill>
                 <a:latin typeface="Arial" pitchFamily="34" charset="0"/>
                 <a:ea typeface="Arial" pitchFamily="34" charset="-122"/>
                 <a:cs typeface="Arial" pitchFamily="34" charset="-120"/>
               </a:rPr>
-              <a:t>0만원</a:t>
-            </a:r>
-            <a:endParaRPr lang="en-US" sz="1200" dirty="0"/>
-          </a:p>
-        </p:txBody>
-      </p:sp>
-      <p:sp>
-        <p:nvSpPr>
-          <p:cNvPr id="17" name="Text 15"/>
-          <p:cNvSpPr/>
-          <p:nvPr/>
-        </p:nvSpPr>
-        <p:spPr>
-          <a:xfrm>
-            <a:off x="777240" y="3922776"/>
-            <a:ext cx="2743200" cy="402336"/>
+              <a:t>0.00%</a:t>
+            </a:r>
+            <a:endParaRPr lang="en-US" sz="2800" dirty="0"/>
+          </a:p>
+        </p:txBody>
+      </p:sp>
+      <p:sp>
+        <p:nvSpPr>
+          <p:cNvPr id="10" name="Text 8"/>
+          <p:cNvSpPr/>
+          <p:nvPr/>
+        </p:nvSpPr>
+        <p:spPr>
+          <a:xfrm>
+            <a:off x="822960" y="2834640"/>
+            <a:ext cx="2743200" cy="347472"/>
           </a:xfrm>
           <a:prstGeom prst="rect">
             <a:avLst/>
@@ -7515,7 +7256,7 @@
                 <a:ea typeface="맑은 고딕" pitchFamily="34" charset="-122"/>
                 <a:cs typeface="맑은 고딕" pitchFamily="34" charset="-120"/>
               </a:rPr>
-              <a:t>승계 보증금</a:t>
+              <a:t>연간 임대수입</a:t>
             </a:r>
             <a:endParaRPr lang="en-US" sz="1100" dirty="0"/>
           </a:p>
@@ -7523,14 +7264,14 @@
       </p:sp>
       <p:sp>
         <p:nvSpPr>
-          <p:cNvPr id="18" name="Text 16"/>
-          <p:cNvSpPr/>
-          <p:nvPr/>
-        </p:nvSpPr>
-        <p:spPr>
-          <a:xfrm>
-            <a:off x="9457639" y="3922776"/>
-            <a:ext cx="1828800" cy="402336"/>
+          <p:cNvPr id="11" name="Text 9"/>
+          <p:cNvSpPr/>
+          <p:nvPr/>
+        </p:nvSpPr>
+        <p:spPr>
+          <a:xfrm>
+            <a:off x="9000439" y="2834640"/>
+            <a:ext cx="2194560" cy="347472"/>
           </a:xfrm>
           <a:prstGeom prst="rect">
             <a:avLst/>
@@ -7546,7 +7287,7 @@
               <a:buNone/>
             </a:pPr>
             <a:r>
-              <a:rPr lang="en-US" sz="1200" b="1" dirty="0">
+              <a:rPr lang="en-US" sz="1200" dirty="0">
                 <a:solidFill>
                   <a:srgbClr val="132A3A"/>
                 </a:solidFill>
@@ -7562,14 +7303,37 @@
       </p:sp>
       <p:sp>
         <p:nvSpPr>
-          <p:cNvPr id="19" name="Text 17"/>
-          <p:cNvSpPr/>
-          <p:nvPr/>
-        </p:nvSpPr>
-        <p:spPr>
-          <a:xfrm>
-            <a:off x="777240" y="4325112"/>
-            <a:ext cx="2743200" cy="402336"/>
+          <p:cNvPr id="12" name="Shape 10"/>
+          <p:cNvSpPr/>
+          <p:nvPr/>
+        </p:nvSpPr>
+        <p:spPr>
+          <a:xfrm>
+            <a:off x="731520" y="3182112"/>
+            <a:ext cx="10600639" cy="0"/>
+          </a:xfrm>
+          <a:prstGeom prst="line">
+            <a:avLst/>
+          </a:prstGeom>
+          <a:noFill/>
+          <a:ln w="6350">
+            <a:solidFill>
+              <a:srgbClr val="E8E8E8"/>
+            </a:solidFill>
+            <a:prstDash val="solid"/>
+          </a:ln>
+        </p:spPr>
+      </p:sp>
+      <p:sp>
+        <p:nvSpPr>
+          <p:cNvPr id="13" name="Text 11"/>
+          <p:cNvSpPr/>
+          <p:nvPr/>
+        </p:nvSpPr>
+        <p:spPr>
+          <a:xfrm>
+            <a:off x="822960" y="3182112"/>
+            <a:ext cx="2743200" cy="347472"/>
           </a:xfrm>
           <a:prstGeom prst="rect">
             <a:avLst/>
@@ -7593,7 +7357,7 @@
                 <a:ea typeface="맑은 고딕" pitchFamily="34" charset="-122"/>
                 <a:cs typeface="맑은 고딕" pitchFamily="34" charset="-120"/>
               </a:rPr>
-              <a:t>매매가</a:t>
+              <a:t>승계 보증금</a:t>
             </a:r>
             <a:endParaRPr lang="en-US" sz="1100" dirty="0"/>
           </a:p>
@@ -7601,14 +7365,14 @@
       </p:sp>
       <p:sp>
         <p:nvSpPr>
-          <p:cNvPr id="20" name="Text 18"/>
-          <p:cNvSpPr/>
-          <p:nvPr/>
-        </p:nvSpPr>
-        <p:spPr>
-          <a:xfrm>
-            <a:off x="9457639" y="4325112"/>
-            <a:ext cx="1828800" cy="402336"/>
+          <p:cNvPr id="14" name="Text 12"/>
+          <p:cNvSpPr/>
+          <p:nvPr/>
+        </p:nvSpPr>
+        <p:spPr>
+          <a:xfrm>
+            <a:off x="9000439" y="3182112"/>
+            <a:ext cx="2194560" cy="347472"/>
           </a:xfrm>
           <a:prstGeom prst="rect">
             <a:avLst/>
@@ -7624,7 +7388,7 @@
               <a:buNone/>
             </a:pPr>
             <a:r>
-              <a:rPr lang="en-US" sz="1200" b="1" dirty="0">
+              <a:rPr lang="en-US" sz="1200" dirty="0">
                 <a:solidFill>
                   <a:srgbClr val="132A3A"/>
                 </a:solidFill>
@@ -7632,7 +7396,7 @@
                 <a:ea typeface="Arial" pitchFamily="34" charset="-122"/>
                 <a:cs typeface="Arial" pitchFamily="34" charset="-120"/>
               </a:rPr>
-              <a:t>89.0억원</a:t>
+              <a:t>0만원</a:t>
             </a:r>
             <a:endParaRPr lang="en-US" sz="1200" dirty="0"/>
           </a:p>
@@ -7640,36 +7404,37 @@
       </p:sp>
       <p:sp>
         <p:nvSpPr>
-          <p:cNvPr id="21" name="Shape 19"/>
-          <p:cNvSpPr/>
-          <p:nvPr/>
-        </p:nvSpPr>
-        <p:spPr>
-          <a:xfrm>
-            <a:off x="685800" y="4837176"/>
-            <a:ext cx="10692079" cy="594360"/>
-          </a:xfrm>
-          <a:prstGeom prst="roundRect">
-            <a:avLst>
-              <a:gd name="adj" fmla="val 9231"/>
-            </a:avLst>
-          </a:prstGeom>
-          <a:solidFill>
-            <a:srgbClr val="132A3A"/>
-          </a:solidFill>
-          <a:ln/>
-        </p:spPr>
-      </p:sp>
-      <p:sp>
-        <p:nvSpPr>
-          <p:cNvPr id="22" name="Text 20"/>
-          <p:cNvSpPr/>
-          <p:nvPr/>
-        </p:nvSpPr>
-        <p:spPr>
-          <a:xfrm>
-            <a:off x="868680" y="4837176"/>
-            <a:ext cx="2286000" cy="594360"/>
+          <p:cNvPr id="15" name="Shape 13"/>
+          <p:cNvSpPr/>
+          <p:nvPr/>
+        </p:nvSpPr>
+        <p:spPr>
+          <a:xfrm>
+            <a:off x="731520" y="3529584"/>
+            <a:ext cx="10600639" cy="0"/>
+          </a:xfrm>
+          <a:prstGeom prst="line">
+            <a:avLst/>
+          </a:prstGeom>
+          <a:noFill/>
+          <a:ln w="6350">
+            <a:solidFill>
+              <a:srgbClr val="E8E8E8"/>
+            </a:solidFill>
+            <a:prstDash val="solid"/>
+          </a:ln>
+        </p:spPr>
+      </p:sp>
+      <p:sp>
+        <p:nvSpPr>
+          <p:cNvPr id="16" name="Text 14"/>
+          <p:cNvSpPr/>
+          <p:nvPr/>
+        </p:nvSpPr>
+        <p:spPr>
+          <a:xfrm>
+            <a:off x="822960" y="3529584"/>
+            <a:ext cx="2743200" cy="347472"/>
           </a:xfrm>
           <a:prstGeom prst="rect">
             <a:avLst/>
@@ -7685,30 +7450,30 @@
               <a:buNone/>
             </a:pPr>
             <a:r>
-              <a:rPr lang="en-US" sz="1200" b="1" dirty="0">
-                <a:solidFill>
-                  <a:srgbClr val="FFFFFF"/>
-                </a:solidFill>
-                <a:latin typeface="맑은 고딕" pitchFamily="34" charset="0"/>
-                <a:ea typeface="맑은 고딕" pitchFamily="34" charset="-122"/>
-                <a:cs typeface="맑은 고딕" pitchFamily="34" charset="-120"/>
-              </a:rPr>
-              <a:t>Cap Rate</a:t>
-            </a:r>
-            <a:endParaRPr lang="en-US" sz="1200" dirty="0"/>
-          </a:p>
-        </p:txBody>
-      </p:sp>
-      <p:sp>
-        <p:nvSpPr>
-          <p:cNvPr id="23" name="Text 21"/>
-          <p:cNvSpPr/>
-          <p:nvPr/>
-        </p:nvSpPr>
-        <p:spPr>
-          <a:xfrm>
-            <a:off x="9183319" y="4837176"/>
-            <a:ext cx="2011680" cy="594360"/>
+              <a:rPr lang="en-US" sz="1100" dirty="0">
+                <a:solidFill>
+                  <a:srgbClr val="5B6B73"/>
+                </a:solidFill>
+                <a:latin typeface="맑은 고딕" pitchFamily="34" charset="0"/>
+                <a:ea typeface="맑은 고딕" pitchFamily="34" charset="-122"/>
+                <a:cs typeface="맑은 고딕" pitchFamily="34" charset="-120"/>
+              </a:rPr>
+              <a:t>매매가</a:t>
+            </a:r>
+            <a:endParaRPr lang="en-US" sz="1100" dirty="0"/>
+          </a:p>
+        </p:txBody>
+      </p:sp>
+      <p:sp>
+        <p:nvSpPr>
+          <p:cNvPr id="17" name="Text 15"/>
+          <p:cNvSpPr/>
+          <p:nvPr/>
+        </p:nvSpPr>
+        <p:spPr>
+          <a:xfrm>
+            <a:off x="9000439" y="3529584"/>
+            <a:ext cx="2194560" cy="347472"/>
           </a:xfrm>
           <a:prstGeom prst="rect">
             <a:avLst/>
@@ -7724,23 +7489,147 @@
               <a:buNone/>
             </a:pPr>
             <a:r>
-              <a:rPr lang="en-US" sz="2200" b="1" dirty="0">
-                <a:solidFill>
-                  <a:srgbClr val="FFFFFF"/>
+              <a:rPr lang="en-US" sz="1200" dirty="0">
+                <a:solidFill>
+                  <a:srgbClr val="132A3A"/>
                 </a:solidFill>
                 <a:latin typeface="Arial" pitchFamily="34" charset="0"/>
                 <a:ea typeface="Arial" pitchFamily="34" charset="-122"/>
                 <a:cs typeface="Arial" pitchFamily="34" charset="-120"/>
               </a:rPr>
-              <a:t>0.00%</a:t>
-            </a:r>
-            <a:endParaRPr lang="en-US" sz="2200" dirty="0"/>
-          </a:p>
-        </p:txBody>
-      </p:sp>
-      <p:sp>
-        <p:nvSpPr>
-          <p:cNvPr id="24" name="Text 22"/>
+              <a:t>89.0억원</a:t>
+            </a:r>
+            <a:endParaRPr lang="en-US" sz="1200" dirty="0"/>
+          </a:p>
+        </p:txBody>
+      </p:sp>
+      <p:sp>
+        <p:nvSpPr>
+          <p:cNvPr id="18" name="Shape 16"/>
+          <p:cNvSpPr/>
+          <p:nvPr/>
+        </p:nvSpPr>
+        <p:spPr>
+          <a:xfrm>
+            <a:off x="731520" y="3877056"/>
+            <a:ext cx="10600639" cy="0"/>
+          </a:xfrm>
+          <a:prstGeom prst="line">
+            <a:avLst/>
+          </a:prstGeom>
+          <a:noFill/>
+          <a:ln w="6350">
+            <a:solidFill>
+              <a:srgbClr val="E8E8E8"/>
+            </a:solidFill>
+            <a:prstDash val="solid"/>
+          </a:ln>
+        </p:spPr>
+      </p:sp>
+      <p:sp>
+        <p:nvSpPr>
+          <p:cNvPr id="19" name="Text 17"/>
+          <p:cNvSpPr/>
+          <p:nvPr/>
+        </p:nvSpPr>
+        <p:spPr>
+          <a:xfrm>
+            <a:off x="822960" y="3877056"/>
+            <a:ext cx="2743200" cy="347472"/>
+          </a:xfrm>
+          <a:prstGeom prst="rect">
+            <a:avLst/>
+          </a:prstGeom>
+          <a:noFill/>
+          <a:ln/>
+        </p:spPr>
+        <p:txBody>
+          <a:bodyPr wrap="square" rtlCol="0" anchor="ctr"/>
+          <a:lstStyle/>
+          <a:p>
+            <a:pPr indent="0" marL="0">
+              <a:buNone/>
+            </a:pPr>
+            <a:r>
+              <a:rPr lang="en-US" sz="1100" dirty="0">
+                <a:solidFill>
+                  <a:srgbClr val="5B6B73"/>
+                </a:solidFill>
+                <a:latin typeface="맑은 고딕" pitchFamily="34" charset="0"/>
+                <a:ea typeface="맑은 고딕" pitchFamily="34" charset="-122"/>
+                <a:cs typeface="맑은 고딕" pitchFamily="34" charset="-120"/>
+              </a:rPr>
+              <a:t>순투자금 (매매가 − 보증금)</a:t>
+            </a:r>
+            <a:endParaRPr lang="en-US" sz="1100" dirty="0"/>
+          </a:p>
+        </p:txBody>
+      </p:sp>
+      <p:sp>
+        <p:nvSpPr>
+          <p:cNvPr id="20" name="Text 18"/>
+          <p:cNvSpPr/>
+          <p:nvPr/>
+        </p:nvSpPr>
+        <p:spPr>
+          <a:xfrm>
+            <a:off x="9000439" y="3877056"/>
+            <a:ext cx="2194560" cy="347472"/>
+          </a:xfrm>
+          <a:prstGeom prst="rect">
+            <a:avLst/>
+          </a:prstGeom>
+          <a:noFill/>
+          <a:ln/>
+        </p:spPr>
+        <p:txBody>
+          <a:bodyPr wrap="square" rtlCol="0" anchor="ctr"/>
+          <a:lstStyle/>
+          <a:p>
+            <a:pPr algn="r" indent="0" marL="0">
+              <a:buNone/>
+            </a:pPr>
+            <a:r>
+              <a:rPr lang="en-US" sz="1200" b="1" dirty="0">
+                <a:solidFill>
+                  <a:srgbClr val="B8860B"/>
+                </a:solidFill>
+                <a:latin typeface="Arial" pitchFamily="34" charset="0"/>
+                <a:ea typeface="Arial" pitchFamily="34" charset="-122"/>
+                <a:cs typeface="Arial" pitchFamily="34" charset="-120"/>
+              </a:rPr>
+              <a:t>89.0억원</a:t>
+            </a:r>
+            <a:endParaRPr lang="en-US" sz="1200" dirty="0"/>
+          </a:p>
+        </p:txBody>
+      </p:sp>
+      <p:sp>
+        <p:nvSpPr>
+          <p:cNvPr id="21" name="Shape 19"/>
+          <p:cNvSpPr/>
+          <p:nvPr/>
+        </p:nvSpPr>
+        <p:spPr>
+          <a:xfrm>
+            <a:off x="731520" y="4224528"/>
+            <a:ext cx="10600639" cy="0"/>
+          </a:xfrm>
+          <a:prstGeom prst="line">
+            <a:avLst/>
+          </a:prstGeom>
+          <a:noFill/>
+          <a:ln w="6350">
+            <a:solidFill>
+              <a:srgbClr val="E8E8E8"/>
+            </a:solidFill>
+            <a:prstDash val="solid"/>
+          </a:ln>
+        </p:spPr>
+      </p:sp>
+      <p:sp>
+        <p:nvSpPr>
+          <p:cNvPr id="22" name="Text 20"/>
           <p:cNvSpPr/>
           <p:nvPr/>
         </p:nvSpPr>
@@ -7779,7 +7668,7 @@
       </p:sp>
       <p:sp>
         <p:nvSpPr>
-          <p:cNvPr id="25" name="Text 23"/>
+          <p:cNvPr id="23" name="Text 21"/>
           <p:cNvSpPr/>
           <p:nvPr/>
         </p:nvSpPr>

--- a/docs/test/golden-outputs/p7-sutaek-r2/sutaek_dev_r2_basic.pptx
+++ b/docs/test/golden-outputs/p7-sutaek-r2/sutaek_dev_r2_basic.pptx
@@ -12,9 +12,11 @@
     <p:sldId id="260" r:id="rId6"/>
     <p:sldId id="261" r:id="rId7"/>
     <p:sldId id="262" r:id="rId8"/>
+    <p:sldId id="263" r:id="rId9"/>
+    <p:sldId id="264" r:id="rId10"/>
   </p:sldIdLst>
   <p:notesMasterIdLst>
-    <p:notesMasterId r:id="rId9"/>
+    <p:notesMasterId r:id="rId11"/>
   </p:notesMasterIdLst>
   <p:sldSz cx="12192000" cy="6858000"/>
   <p:notesSz cx="6858000" cy="12192000"/>
@@ -1060,6 +1062,182 @@
             <a:fld id="{F7021451-1387-4CA6-816F-3879F97B5CBC}" type="slidenum">
               <a:rPr lang="en-US"/>
               <a:t>7</a:t>
+            </a:fld>
+            <a:endParaRPr lang="en-US"/>
+          </a:p>
+        </p:txBody>
+      </p:sp>
+    </p:spTree>
+    <p:extLst>
+      <p:ext uri="{BB962C8B-B14F-4D97-AF65-F5344CB8AC3E}">
+        <p14:creationId xmlns:p14="http://schemas.microsoft.com/office/powerpoint/2010/main" val="1024086991"/>
+      </p:ext>
+    </p:extLst>
+  </p:cSld>
+  <p:clrMapOvr>
+    <a:masterClrMapping/>
+  </p:clrMapOvr>
+</p:notes>
+</file>
+
+<file path=ppt/notesSlides/notesSlide8.xml><?xml version="1.0" encoding="utf-8"?>
+<p:notes xmlns:a="http://schemas.openxmlformats.org/drawingml/2006/main" xmlns:r="http://schemas.openxmlformats.org/officeDocument/2006/relationships" xmlns:p="http://schemas.openxmlformats.org/presentationml/2006/main">
+  <p:cSld>
+    <p:spTree>
+      <p:nvGrpSpPr>
+        <p:cNvPr id="1" name=""/>
+        <p:cNvGrpSpPr/>
+        <p:nvPr/>
+      </p:nvGrpSpPr>
+      <p:grpSpPr>
+        <a:xfrm>
+          <a:off x="0" y="0"/>
+          <a:ext cx="0" cy="0"/>
+          <a:chOff x="0" y="0"/>
+          <a:chExt cx="0" cy="0"/>
+        </a:xfrm>
+      </p:grpSpPr>
+      <p:sp>
+        <p:nvSpPr>
+          <p:cNvPr id="2" name="Slide Image Placeholder 1"/>
+          <p:cNvSpPr>
+            <a:spLocks noGrp="1" noRot="1" noChangeAspect="1"/>
+          </p:cNvSpPr>
+          <p:nvPr>
+            <p:ph type="sldImg"/>
+          </p:nvPr>
+        </p:nvSpPr>
+        <p:spPr/>
+      </p:sp>
+      <p:sp>
+        <p:nvSpPr>
+          <p:cNvPr id="3" name="Notes Placeholder 2"/>
+          <p:cNvSpPr>
+            <a:spLocks noGrp="1"/>
+          </p:cNvSpPr>
+          <p:nvPr>
+            <p:ph type="body" idx="1"/>
+          </p:nvPr>
+        </p:nvSpPr>
+        <p:spPr/>
+        <p:txBody>
+          <a:bodyPr/>
+          <a:lstStyle/>
+          <a:p>
+            <a:r>
+              <a:rPr lang="en-US" dirty="0"/>
+              <a:t/>
+            </a:r>
+            <a:endParaRPr lang="en-US" dirty="0"/>
+          </a:p>
+        </p:txBody>
+      </p:sp>
+      <p:sp>
+        <p:nvSpPr>
+          <p:cNvPr id="4" name="Slide Number Placeholder 3"/>
+          <p:cNvSpPr>
+            <a:spLocks noGrp="1"/>
+          </p:cNvSpPr>
+          <p:nvPr>
+            <p:ph type="sldNum" sz="quarter" idx="10"/>
+          </p:nvPr>
+        </p:nvSpPr>
+        <p:spPr/>
+        <p:txBody>
+          <a:bodyPr/>
+          <a:lstStyle/>
+          <a:p>
+            <a:fld id="{F7021451-1387-4CA6-816F-3879F97B5CBC}" type="slidenum">
+              <a:rPr lang="en-US"/>
+              <a:t>8</a:t>
+            </a:fld>
+            <a:endParaRPr lang="en-US"/>
+          </a:p>
+        </p:txBody>
+      </p:sp>
+    </p:spTree>
+    <p:extLst>
+      <p:ext uri="{BB962C8B-B14F-4D97-AF65-F5344CB8AC3E}">
+        <p14:creationId xmlns:p14="http://schemas.microsoft.com/office/powerpoint/2010/main" val="1024086991"/>
+      </p:ext>
+    </p:extLst>
+  </p:cSld>
+  <p:clrMapOvr>
+    <a:masterClrMapping/>
+  </p:clrMapOvr>
+</p:notes>
+</file>
+
+<file path=ppt/notesSlides/notesSlide9.xml><?xml version="1.0" encoding="utf-8"?>
+<p:notes xmlns:a="http://schemas.openxmlformats.org/drawingml/2006/main" xmlns:r="http://schemas.openxmlformats.org/officeDocument/2006/relationships" xmlns:p="http://schemas.openxmlformats.org/presentationml/2006/main">
+  <p:cSld>
+    <p:spTree>
+      <p:nvGrpSpPr>
+        <p:cNvPr id="1" name=""/>
+        <p:cNvGrpSpPr/>
+        <p:nvPr/>
+      </p:nvGrpSpPr>
+      <p:grpSpPr>
+        <a:xfrm>
+          <a:off x="0" y="0"/>
+          <a:ext cx="0" cy="0"/>
+          <a:chOff x="0" y="0"/>
+          <a:chExt cx="0" cy="0"/>
+        </a:xfrm>
+      </p:grpSpPr>
+      <p:sp>
+        <p:nvSpPr>
+          <p:cNvPr id="2" name="Slide Image Placeholder 1"/>
+          <p:cNvSpPr>
+            <a:spLocks noGrp="1" noRot="1" noChangeAspect="1"/>
+          </p:cNvSpPr>
+          <p:nvPr>
+            <p:ph type="sldImg"/>
+          </p:nvPr>
+        </p:nvSpPr>
+        <p:spPr/>
+      </p:sp>
+      <p:sp>
+        <p:nvSpPr>
+          <p:cNvPr id="3" name="Notes Placeholder 2"/>
+          <p:cNvSpPr>
+            <a:spLocks noGrp="1"/>
+          </p:cNvSpPr>
+          <p:nvPr>
+            <p:ph type="body" idx="1"/>
+          </p:nvPr>
+        </p:nvSpPr>
+        <p:spPr/>
+        <p:txBody>
+          <a:bodyPr/>
+          <a:lstStyle/>
+          <a:p>
+            <a:r>
+              <a:rPr lang="en-US" dirty="0"/>
+              <a:t/>
+            </a:r>
+            <a:endParaRPr lang="en-US" dirty="0"/>
+          </a:p>
+        </p:txBody>
+      </p:sp>
+      <p:sp>
+        <p:nvSpPr>
+          <p:cNvPr id="4" name="Slide Number Placeholder 3"/>
+          <p:cNvSpPr>
+            <a:spLocks noGrp="1"/>
+          </p:cNvSpPr>
+          <p:nvPr>
+            <p:ph type="sldNum" sz="quarter" idx="10"/>
+          </p:nvPr>
+        </p:nvSpPr>
+        <p:spPr/>
+        <p:txBody>
+          <a:bodyPr/>
+          <a:lstStyle/>
+          <a:p>
+            <a:fld id="{F7021451-1387-4CA6-816F-3879F97B5CBC}" type="slidenum">
+              <a:rPr lang="en-US"/>
+              <a:t>9</a:t>
             </a:fld>
             <a:endParaRPr lang="en-US"/>
           </a:p>
@@ -1560,7 +1738,7 @@
         </p:nvSpPr>
         <p:spPr>
           <a:xfrm>
-            <a:off x="502920" y="475488"/>
+            <a:off x="566928" y="475488"/>
             <a:ext cx="2743200" cy="365760"/>
           </a:xfrm>
           <a:prstGeom prst="rect">
@@ -1613,7 +1791,7 @@
         </p:nvSpPr>
         <p:spPr>
           <a:xfrm>
-            <a:off x="502920" y="2029968"/>
+            <a:off x="566928" y="2029968"/>
             <a:ext cx="7315200" cy="274320"/>
           </a:xfrm>
           <a:prstGeom prst="rect">
@@ -1652,8 +1830,8 @@
         </p:nvSpPr>
         <p:spPr>
           <a:xfrm>
-            <a:off x="502920" y="2304288"/>
-            <a:ext cx="7315200" cy="914400"/>
+            <a:off x="566928" y="2304288"/>
+            <a:ext cx="7315200" cy="1051560"/>
           </a:xfrm>
           <a:prstGeom prst="rect">
             <a:avLst/>
@@ -1669,7 +1847,7 @@
               <a:buNone/>
             </a:pPr>
             <a:r>
-              <a:rPr lang="en-US" sz="2600" b="1" dirty="0">
+              <a:rPr lang="en-US" sz="2400" b="1" dirty="0">
                 <a:solidFill>
                   <a:srgbClr val="FFFFFF"/>
                 </a:solidFill>
@@ -1679,7 +1857,7 @@
               </a:rPr>
               <a:t>경기도 구리시 수택동 419-19 외 2필지 투자설명서</a:t>
             </a:r>
-            <a:endParaRPr lang="en-US" sz="2600" dirty="0"/>
+            <a:endParaRPr lang="en-US" sz="2400" dirty="0"/>
           </a:p>
         </p:txBody>
       </p:sp>
@@ -1691,7 +1869,7 @@
         </p:nvSpPr>
         <p:spPr>
           <a:xfrm>
-            <a:off x="502920" y="3273552"/>
+            <a:off x="566928" y="3410712"/>
             <a:ext cx="7315200" cy="329184"/>
           </a:xfrm>
           <a:prstGeom prst="rect">
@@ -1730,7 +1908,7 @@
         </p:nvSpPr>
         <p:spPr>
           <a:xfrm>
-            <a:off x="502920" y="3657600"/>
+            <a:off x="566928" y="3794760"/>
             <a:ext cx="7315200" cy="256032"/>
           </a:xfrm>
           <a:prstGeom prst="rect">
@@ -1769,7 +1947,7 @@
         </p:nvSpPr>
         <p:spPr>
           <a:xfrm>
-            <a:off x="502920" y="4078224"/>
+            <a:off x="566928" y="4215384"/>
             <a:ext cx="1243584" cy="292608"/>
           </a:xfrm>
           <a:prstGeom prst="roundRect">
@@ -1791,7 +1969,7 @@
         </p:nvSpPr>
         <p:spPr>
           <a:xfrm>
-            <a:off x="502920" y="4078224"/>
+            <a:off x="566928" y="4215384"/>
             <a:ext cx="1243584" cy="292608"/>
           </a:xfrm>
           <a:prstGeom prst="rect">
@@ -1830,7 +2008,7 @@
         </p:nvSpPr>
         <p:spPr>
           <a:xfrm>
-            <a:off x="1837944" y="4078224"/>
+            <a:off x="1901952" y="4215384"/>
             <a:ext cx="1005840" cy="292608"/>
           </a:xfrm>
           <a:prstGeom prst="roundRect">
@@ -1852,7 +2030,7 @@
         </p:nvSpPr>
         <p:spPr>
           <a:xfrm>
-            <a:off x="1837944" y="4078224"/>
+            <a:off x="1901952" y="4215384"/>
             <a:ext cx="1005840" cy="292608"/>
           </a:xfrm>
           <a:prstGeom prst="rect">
@@ -1891,7 +2069,7 @@
         </p:nvSpPr>
         <p:spPr>
           <a:xfrm>
-            <a:off x="502920" y="4517136"/>
+            <a:off x="566928" y="4654296"/>
             <a:ext cx="6858000" cy="1051560"/>
           </a:xfrm>
           <a:prstGeom prst="roundRect">
@@ -1918,7 +2096,7 @@
         </p:nvSpPr>
         <p:spPr>
           <a:xfrm>
-            <a:off x="758952" y="4626864"/>
+            <a:off x="822960" y="4764024"/>
             <a:ext cx="6345936" cy="832104"/>
           </a:xfrm>
           <a:prstGeom prst="rect">
@@ -1957,7 +2135,7 @@
         </p:nvSpPr>
         <p:spPr>
           <a:xfrm>
-            <a:off x="502920" y="1700784"/>
+            <a:off x="566928" y="1700784"/>
             <a:ext cx="7315200" cy="256032"/>
           </a:xfrm>
           <a:prstGeom prst="rect">
@@ -1996,8 +2174,8 @@
         </p:nvSpPr>
         <p:spPr>
           <a:xfrm>
-            <a:off x="502920" y="6035040"/>
-            <a:ext cx="11057839" cy="274320"/>
+            <a:off x="566928" y="5943600"/>
+            <a:ext cx="11057839" cy="201168"/>
           </a:xfrm>
           <a:prstGeom prst="rect">
             <a:avLst/>
@@ -2021,7 +2199,7 @@
                 <a:ea typeface="맑은 고딕" pitchFamily="34" charset="-122"/>
                 <a:cs typeface="맑은 고딕" pitchFamily="34" charset="-120"/>
               </a:rPr>
-              <a:t>2026.09.29  |  담당자  |  CREDEAL</a:t>
+              <a:t>2026.10.02  |  담당자  |  CREDEAL</a:t>
             </a:r>
             <a:endParaRPr lang="en-US" sz="900" dirty="0"/>
           </a:p>
@@ -2035,7 +2213,7 @@
         </p:nvSpPr>
         <p:spPr>
           <a:xfrm>
-            <a:off x="502920" y="6382512"/>
+            <a:off x="566928" y="6382512"/>
             <a:ext cx="7315200" cy="219456"/>
           </a:xfrm>
           <a:prstGeom prst="rect">
@@ -2074,7 +2252,7 @@
         </p:nvSpPr>
         <p:spPr>
           <a:xfrm>
-            <a:off x="10774375" y="6382512"/>
+            <a:off x="10710367" y="6382512"/>
             <a:ext cx="914400" cy="219456"/>
           </a:xfrm>
           <a:prstGeom prst="rect">
@@ -2145,7 +2323,7 @@
         </p:nvSpPr>
         <p:spPr>
           <a:xfrm>
-            <a:off x="502920" y="457200"/>
+            <a:off x="566928" y="457200"/>
             <a:ext cx="384048" cy="384048"/>
           </a:xfrm>
           <a:prstGeom prst="ellipse">
@@ -2165,7 +2343,7 @@
         </p:nvSpPr>
         <p:spPr>
           <a:xfrm>
-            <a:off x="502920" y="457200"/>
+            <a:off x="566928" y="457200"/>
             <a:ext cx="384048" cy="384048"/>
           </a:xfrm>
           <a:prstGeom prst="rect">
@@ -2204,7 +2382,7 @@
         </p:nvSpPr>
         <p:spPr>
           <a:xfrm>
-            <a:off x="1069848" y="457200"/>
+            <a:off x="1133856" y="457200"/>
             <a:ext cx="10490911" cy="182880"/>
           </a:xfrm>
           <a:prstGeom prst="rect">
@@ -2243,7 +2421,7 @@
         </p:nvSpPr>
         <p:spPr>
           <a:xfrm>
-            <a:off x="1069848" y="640080"/>
+            <a:off x="1133856" y="640080"/>
             <a:ext cx="10490911" cy="365760"/>
           </a:xfrm>
           <a:prstGeom prst="rect">
@@ -2253,7 +2431,9 @@
           <a:ln/>
         </p:spPr>
         <p:txBody>
-          <a:bodyPr wrap="square" lIns="0" tIns="0" rIns="0" bIns="0" rtlCol="0" anchor="ctr"/>
+          <a:bodyPr wrap="square" lIns="0" tIns="0" rIns="0" bIns="0" rtlCol="0" anchor="ctr">
+            <a:normAutofit/>
+          </a:bodyPr>
           <a:lstStyle/>
           <a:p>
             <a:pPr indent="0" marL="0">
@@ -2282,7 +2462,7 @@
         </p:nvSpPr>
         <p:spPr>
           <a:xfrm>
-            <a:off x="502920" y="1371600"/>
+            <a:off x="566928" y="1371600"/>
             <a:ext cx="3576218" cy="960120"/>
           </a:xfrm>
           <a:prstGeom prst="roundRect">
@@ -2309,47 +2489,8 @@
         </p:nvSpPr>
         <p:spPr>
           <a:xfrm>
-            <a:off x="667512" y="1499616"/>
+            <a:off x="731520" y="1499616"/>
             <a:ext cx="3247034" cy="201168"/>
-          </a:xfrm>
-          <a:prstGeom prst="rect">
-            <a:avLst/>
-          </a:prstGeom>
-          <a:noFill/>
-          <a:ln/>
-        </p:spPr>
-        <p:txBody>
-          <a:bodyPr wrap="square" lIns="0" tIns="0" rIns="0" bIns="0" rtlCol="0" anchor="ctr"/>
-          <a:lstStyle/>
-          <a:p>
-            <a:pPr indent="0" marL="0">
-              <a:buNone/>
-            </a:pPr>
-            <a:r>
-              <a:rPr lang="en-US" sz="950" dirty="0">
-                <a:solidFill>
-                  <a:srgbClr val="5B6B73"/>
-                </a:solidFill>
-                <a:latin typeface="맑은 고딕" pitchFamily="34" charset="0"/>
-                <a:ea typeface="맑은 고딕" pitchFamily="34" charset="-122"/>
-                <a:cs typeface="맑은 고딕" pitchFamily="34" charset="-120"/>
-              </a:rPr>
-              <a:t>매매 희망가</a:t>
-            </a:r>
-            <a:endParaRPr lang="en-US" sz="950" dirty="0"/>
-          </a:p>
-        </p:txBody>
-      </p:sp>
-      <p:sp>
-        <p:nvSpPr>
-          <p:cNvPr id="8" name="Text 6"/>
-          <p:cNvSpPr/>
-          <p:nvPr/>
-        </p:nvSpPr>
-        <p:spPr>
-          <a:xfrm>
-            <a:off x="667512" y="1719072"/>
-            <a:ext cx="3247034" cy="274320"/>
           </a:xfrm>
           <a:prstGeom prst="rect">
             <a:avLst/>
@@ -2364,6 +2505,47 @@
           <a:lstStyle/>
           <a:p>
             <a:pPr indent="0" marL="0">
+              <a:buNone/>
+            </a:pPr>
+            <a:r>
+              <a:rPr lang="en-US" sz="950" dirty="0">
+                <a:solidFill>
+                  <a:srgbClr val="5B6B73"/>
+                </a:solidFill>
+                <a:latin typeface="맑은 고딕" pitchFamily="34" charset="0"/>
+                <a:ea typeface="맑은 고딕" pitchFamily="34" charset="-122"/>
+                <a:cs typeface="맑은 고딕" pitchFamily="34" charset="-120"/>
+              </a:rPr>
+              <a:t>매매 희망가</a:t>
+            </a:r>
+            <a:endParaRPr lang="en-US" sz="950" dirty="0"/>
+          </a:p>
+        </p:txBody>
+      </p:sp>
+      <p:sp>
+        <p:nvSpPr>
+          <p:cNvPr id="8" name="Text 6"/>
+          <p:cNvSpPr/>
+          <p:nvPr/>
+        </p:nvSpPr>
+        <p:spPr>
+          <a:xfrm>
+            <a:off x="731520" y="1719072"/>
+            <a:ext cx="3247034" cy="279400"/>
+          </a:xfrm>
+          <a:prstGeom prst="rect">
+            <a:avLst/>
+          </a:prstGeom>
+          <a:noFill/>
+          <a:ln/>
+        </p:spPr>
+        <p:txBody>
+          <a:bodyPr wrap="square" lIns="0" tIns="0" rIns="0" bIns="0" rtlCol="0" anchor="ctr">
+            <a:normAutofit/>
+          </a:bodyPr>
+          <a:lstStyle/>
+          <a:p>
+            <a:pPr indent="0" marL="0">
               <a:lnSpc>
                 <a:spcPct val="100000"/>
               </a:lnSpc>
@@ -2392,7 +2574,7 @@
         </p:nvSpPr>
         <p:spPr>
           <a:xfrm>
-            <a:off x="4243730" y="1371600"/>
+            <a:off x="4307738" y="1371600"/>
             <a:ext cx="3576218" cy="960120"/>
           </a:xfrm>
           <a:prstGeom prst="roundRect">
@@ -2419,47 +2601,8 @@
         </p:nvSpPr>
         <p:spPr>
           <a:xfrm>
-            <a:off x="4408322" y="1499616"/>
+            <a:off x="4472330" y="1499616"/>
             <a:ext cx="3247034" cy="201168"/>
-          </a:xfrm>
-          <a:prstGeom prst="rect">
-            <a:avLst/>
-          </a:prstGeom>
-          <a:noFill/>
-          <a:ln/>
-        </p:spPr>
-        <p:txBody>
-          <a:bodyPr wrap="square" lIns="0" tIns="0" rIns="0" bIns="0" rtlCol="0" anchor="ctr"/>
-          <a:lstStyle/>
-          <a:p>
-            <a:pPr indent="0" marL="0">
-              <a:buNone/>
-            </a:pPr>
-            <a:r>
-              <a:rPr lang="en-US" sz="950" dirty="0">
-                <a:solidFill>
-                  <a:srgbClr val="5B6B73"/>
-                </a:solidFill>
-                <a:latin typeface="맑은 고딕" pitchFamily="34" charset="0"/>
-                <a:ea typeface="맑은 고딕" pitchFamily="34" charset="-122"/>
-                <a:cs typeface="맑은 고딕" pitchFamily="34" charset="-120"/>
-              </a:rPr>
-              <a:t>대지면적</a:t>
-            </a:r>
-            <a:endParaRPr lang="en-US" sz="950" dirty="0"/>
-          </a:p>
-        </p:txBody>
-      </p:sp>
-      <p:sp>
-        <p:nvSpPr>
-          <p:cNvPr id="11" name="Text 9"/>
-          <p:cNvSpPr/>
-          <p:nvPr/>
-        </p:nvSpPr>
-        <p:spPr>
-          <a:xfrm>
-            <a:off x="4408322" y="1719072"/>
-            <a:ext cx="3247034" cy="274320"/>
           </a:xfrm>
           <a:prstGeom prst="rect">
             <a:avLst/>
@@ -2474,6 +2617,47 @@
           <a:lstStyle/>
           <a:p>
             <a:pPr indent="0" marL="0">
+              <a:buNone/>
+            </a:pPr>
+            <a:r>
+              <a:rPr lang="en-US" sz="950" dirty="0">
+                <a:solidFill>
+                  <a:srgbClr val="5B6B73"/>
+                </a:solidFill>
+                <a:latin typeface="맑은 고딕" pitchFamily="34" charset="0"/>
+                <a:ea typeface="맑은 고딕" pitchFamily="34" charset="-122"/>
+                <a:cs typeface="맑은 고딕" pitchFamily="34" charset="-120"/>
+              </a:rPr>
+              <a:t>대지면적</a:t>
+            </a:r>
+            <a:endParaRPr lang="en-US" sz="950" dirty="0"/>
+          </a:p>
+        </p:txBody>
+      </p:sp>
+      <p:sp>
+        <p:nvSpPr>
+          <p:cNvPr id="11" name="Text 9"/>
+          <p:cNvSpPr/>
+          <p:nvPr/>
+        </p:nvSpPr>
+        <p:spPr>
+          <a:xfrm>
+            <a:off x="4472330" y="1719072"/>
+            <a:ext cx="3247034" cy="279400"/>
+          </a:xfrm>
+          <a:prstGeom prst="rect">
+            <a:avLst/>
+          </a:prstGeom>
+          <a:noFill/>
+          <a:ln/>
+        </p:spPr>
+        <p:txBody>
+          <a:bodyPr wrap="square" lIns="0" tIns="0" rIns="0" bIns="0" rtlCol="0" anchor="ctr">
+            <a:normAutofit/>
+          </a:bodyPr>
+          <a:lstStyle/>
+          <a:p>
+            <a:pPr indent="0" marL="0">
               <a:lnSpc>
                 <a:spcPct val="100000"/>
               </a:lnSpc>
@@ -2502,7 +2686,7 @@
         </p:nvSpPr>
         <p:spPr>
           <a:xfrm>
-            <a:off x="7984541" y="1371600"/>
+            <a:off x="8048549" y="1371600"/>
             <a:ext cx="3576218" cy="960120"/>
           </a:xfrm>
           <a:prstGeom prst="roundRect">
@@ -2529,47 +2713,8 @@
         </p:nvSpPr>
         <p:spPr>
           <a:xfrm>
-            <a:off x="8149133" y="1499616"/>
+            <a:off x="8213141" y="1499616"/>
             <a:ext cx="3247034" cy="201168"/>
-          </a:xfrm>
-          <a:prstGeom prst="rect">
-            <a:avLst/>
-          </a:prstGeom>
-          <a:noFill/>
-          <a:ln/>
-        </p:spPr>
-        <p:txBody>
-          <a:bodyPr wrap="square" lIns="0" tIns="0" rIns="0" bIns="0" rtlCol="0" anchor="ctr"/>
-          <a:lstStyle/>
-          <a:p>
-            <a:pPr indent="0" marL="0">
-              <a:buNone/>
-            </a:pPr>
-            <a:r>
-              <a:rPr lang="en-US" sz="950" dirty="0">
-                <a:solidFill>
-                  <a:srgbClr val="5B6B73"/>
-                </a:solidFill>
-                <a:latin typeface="맑은 고딕" pitchFamily="34" charset="0"/>
-                <a:ea typeface="맑은 고딕" pitchFamily="34" charset="-122"/>
-                <a:cs typeface="맑은 고딕" pitchFamily="34" charset="-120"/>
-              </a:rPr>
-              <a:t>공실 현황</a:t>
-            </a:r>
-            <a:endParaRPr lang="en-US" sz="950" dirty="0"/>
-          </a:p>
-        </p:txBody>
-      </p:sp>
-      <p:sp>
-        <p:nvSpPr>
-          <p:cNvPr id="14" name="Text 12"/>
-          <p:cNvSpPr/>
-          <p:nvPr/>
-        </p:nvSpPr>
-        <p:spPr>
-          <a:xfrm>
-            <a:off x="8149133" y="1719072"/>
-            <a:ext cx="3247034" cy="274320"/>
           </a:xfrm>
           <a:prstGeom prst="rect">
             <a:avLst/>
@@ -2584,13 +2729,54 @@
           <a:lstStyle/>
           <a:p>
             <a:pPr indent="0" marL="0">
+              <a:buNone/>
+            </a:pPr>
+            <a:r>
+              <a:rPr lang="en-US" sz="950" dirty="0">
+                <a:solidFill>
+                  <a:srgbClr val="5B6B73"/>
+                </a:solidFill>
+                <a:latin typeface="맑은 고딕" pitchFamily="34" charset="0"/>
+                <a:ea typeface="맑은 고딕" pitchFamily="34" charset="-122"/>
+                <a:cs typeface="맑은 고딕" pitchFamily="34" charset="-120"/>
+              </a:rPr>
+              <a:t>공실 현황</a:t>
+            </a:r>
+            <a:endParaRPr lang="en-US" sz="950" dirty="0"/>
+          </a:p>
+        </p:txBody>
+      </p:sp>
+      <p:sp>
+        <p:nvSpPr>
+          <p:cNvPr id="14" name="Text 12"/>
+          <p:cNvSpPr/>
+          <p:nvPr/>
+        </p:nvSpPr>
+        <p:spPr>
+          <a:xfrm>
+            <a:off x="8213141" y="1719072"/>
+            <a:ext cx="3247034" cy="279400"/>
+          </a:xfrm>
+          <a:prstGeom prst="rect">
+            <a:avLst/>
+          </a:prstGeom>
+          <a:noFill/>
+          <a:ln/>
+        </p:spPr>
+        <p:txBody>
+          <a:bodyPr wrap="square" lIns="0" tIns="0" rIns="0" bIns="0" rtlCol="0" anchor="ctr">
+            <a:normAutofit/>
+          </a:bodyPr>
+          <a:lstStyle/>
+          <a:p>
+            <a:pPr indent="0" marL="0">
               <a:lnSpc>
                 <a:spcPct val="100000"/>
               </a:lnSpc>
               <a:buNone/>
             </a:pPr>
             <a:r>
-              <a:rPr lang="en-US" sz="1400" b="1" dirty="0">
+              <a:rPr lang="en-US" sz="2200" b="1" dirty="0">
                 <a:solidFill>
                   <a:srgbClr val="132A3A"/>
                 </a:solidFill>
@@ -2600,7 +2786,7 @@
               </a:rPr>
               <a:t>만실 운영 (공실 0%)</a:t>
             </a:r>
-            <a:endParaRPr lang="en-US" sz="1400" dirty="0"/>
+            <a:endParaRPr lang="en-US" sz="2200" dirty="0"/>
           </a:p>
         </p:txBody>
       </p:sp>
@@ -2612,7 +2798,7 @@
         </p:nvSpPr>
         <p:spPr>
           <a:xfrm>
-            <a:off x="502920" y="2496312"/>
+            <a:off x="566928" y="2496312"/>
             <a:ext cx="3576218" cy="960120"/>
           </a:xfrm>
           <a:prstGeom prst="roundRect">
@@ -2639,47 +2825,8 @@
         </p:nvSpPr>
         <p:spPr>
           <a:xfrm>
-            <a:off x="667512" y="2624328"/>
+            <a:off x="731520" y="2624328"/>
             <a:ext cx="3247034" cy="201168"/>
-          </a:xfrm>
-          <a:prstGeom prst="rect">
-            <a:avLst/>
-          </a:prstGeom>
-          <a:noFill/>
-          <a:ln/>
-        </p:spPr>
-        <p:txBody>
-          <a:bodyPr wrap="square" lIns="0" tIns="0" rIns="0" bIns="0" rtlCol="0" anchor="ctr"/>
-          <a:lstStyle/>
-          <a:p>
-            <a:pPr indent="0" marL="0">
-              <a:buNone/>
-            </a:pPr>
-            <a:r>
-              <a:rPr lang="en-US" sz="950" dirty="0">
-                <a:solidFill>
-                  <a:srgbClr val="5B6B73"/>
-                </a:solidFill>
-                <a:latin typeface="맑은 고딕" pitchFamily="34" charset="0"/>
-                <a:ea typeface="맑은 고딕" pitchFamily="34" charset="-122"/>
-                <a:cs typeface="맑은 고딕" pitchFamily="34" charset="-120"/>
-              </a:rPr>
-              <a:t>실투자금</a:t>
-            </a:r>
-            <a:endParaRPr lang="en-US" sz="950" dirty="0"/>
-          </a:p>
-        </p:txBody>
-      </p:sp>
-      <p:sp>
-        <p:nvSpPr>
-          <p:cNvPr id="17" name="Text 15"/>
-          <p:cNvSpPr/>
-          <p:nvPr/>
-        </p:nvSpPr>
-        <p:spPr>
-          <a:xfrm>
-            <a:off x="667512" y="2843784"/>
-            <a:ext cx="3247034" cy="274320"/>
           </a:xfrm>
           <a:prstGeom prst="rect">
             <a:avLst/>
@@ -2694,13 +2841,54 @@
           <a:lstStyle/>
           <a:p>
             <a:pPr indent="0" marL="0">
+              <a:buNone/>
+            </a:pPr>
+            <a:r>
+              <a:rPr lang="en-US" sz="950" dirty="0">
+                <a:solidFill>
+                  <a:srgbClr val="5B6B73"/>
+                </a:solidFill>
+                <a:latin typeface="맑은 고딕" pitchFamily="34" charset="0"/>
+                <a:ea typeface="맑은 고딕" pitchFamily="34" charset="-122"/>
+                <a:cs typeface="맑은 고딕" pitchFamily="34" charset="-120"/>
+              </a:rPr>
+              <a:t>실투자금</a:t>
+            </a:r>
+            <a:endParaRPr lang="en-US" sz="950" dirty="0"/>
+          </a:p>
+        </p:txBody>
+      </p:sp>
+      <p:sp>
+        <p:nvSpPr>
+          <p:cNvPr id="17" name="Text 15"/>
+          <p:cNvSpPr/>
+          <p:nvPr/>
+        </p:nvSpPr>
+        <p:spPr>
+          <a:xfrm>
+            <a:off x="731520" y="2843784"/>
+            <a:ext cx="3247034" cy="279400"/>
+          </a:xfrm>
+          <a:prstGeom prst="rect">
+            <a:avLst/>
+          </a:prstGeom>
+          <a:noFill/>
+          <a:ln/>
+        </p:spPr>
+        <p:txBody>
+          <a:bodyPr wrap="square" lIns="0" tIns="0" rIns="0" bIns="0" rtlCol="0" anchor="ctr">
+            <a:normAutofit/>
+          </a:bodyPr>
+          <a:lstStyle/>
+          <a:p>
+            <a:pPr indent="0" marL="0">
               <a:lnSpc>
                 <a:spcPct val="100000"/>
               </a:lnSpc>
               <a:buNone/>
             </a:pPr>
             <a:r>
-              <a:rPr lang="en-US" sz="1800" b="1" dirty="0">
+              <a:rPr lang="en-US" sz="2200" b="1" dirty="0">
                 <a:solidFill>
                   <a:srgbClr val="132A3A"/>
                 </a:solidFill>
@@ -2710,7 +2898,7 @@
               </a:rPr>
               <a:t>약 89억 원</a:t>
             </a:r>
-            <a:endParaRPr lang="en-US" sz="1800" dirty="0"/>
+            <a:endParaRPr lang="en-US" sz="2200" dirty="0"/>
           </a:p>
         </p:txBody>
       </p:sp>
@@ -2722,7 +2910,7 @@
         </p:nvSpPr>
         <p:spPr>
           <a:xfrm>
-            <a:off x="4243730" y="2496312"/>
+            <a:off x="4307738" y="2496312"/>
             <a:ext cx="3576218" cy="960120"/>
           </a:xfrm>
           <a:prstGeom prst="roundRect">
@@ -2749,47 +2937,8 @@
         </p:nvSpPr>
         <p:spPr>
           <a:xfrm>
-            <a:off x="4408322" y="2624328"/>
+            <a:off x="4472330" y="2624328"/>
             <a:ext cx="3247034" cy="201168"/>
-          </a:xfrm>
-          <a:prstGeom prst="rect">
-            <a:avLst/>
-          </a:prstGeom>
-          <a:noFill/>
-          <a:ln/>
-        </p:spPr>
-        <p:txBody>
-          <a:bodyPr wrap="square" lIns="0" tIns="0" rIns="0" bIns="0" rtlCol="0" anchor="ctr"/>
-          <a:lstStyle/>
-          <a:p>
-            <a:pPr indent="0" marL="0">
-              <a:buNone/>
-            </a:pPr>
-            <a:r>
-              <a:rPr lang="en-US" sz="850" dirty="0">
-                <a:solidFill>
-                  <a:srgbClr val="5B6B73"/>
-                </a:solidFill>
-                <a:latin typeface="맑은 고딕" pitchFamily="34" charset="0"/>
-                <a:ea typeface="맑은 고딕" pitchFamily="34" charset="-122"/>
-                <a:cs typeface="맑은 고딕" pitchFamily="34" charset="-120"/>
-              </a:rPr>
-              <a:t>연 수익률(Cap Rate)</a:t>
-            </a:r>
-            <a:endParaRPr lang="en-US" sz="850" dirty="0"/>
-          </a:p>
-        </p:txBody>
-      </p:sp>
-      <p:sp>
-        <p:nvSpPr>
-          <p:cNvPr id="20" name="Text 18"/>
-          <p:cNvSpPr/>
-          <p:nvPr/>
-        </p:nvSpPr>
-        <p:spPr>
-          <a:xfrm>
-            <a:off x="4408322" y="2843784"/>
-            <a:ext cx="3247034" cy="274320"/>
           </a:xfrm>
           <a:prstGeom prst="rect">
             <a:avLst/>
@@ -2804,6 +2953,47 @@
           <a:lstStyle/>
           <a:p>
             <a:pPr indent="0" marL="0">
+              <a:buNone/>
+            </a:pPr>
+            <a:r>
+              <a:rPr lang="en-US" sz="850" dirty="0">
+                <a:solidFill>
+                  <a:srgbClr val="5B6B73"/>
+                </a:solidFill>
+                <a:latin typeface="맑은 고딕" pitchFamily="34" charset="0"/>
+                <a:ea typeface="맑은 고딕" pitchFamily="34" charset="-122"/>
+                <a:cs typeface="맑은 고딕" pitchFamily="34" charset="-120"/>
+              </a:rPr>
+              <a:t>연 수익률(Cap Rate)</a:t>
+            </a:r>
+            <a:endParaRPr lang="en-US" sz="850" dirty="0"/>
+          </a:p>
+        </p:txBody>
+      </p:sp>
+      <p:sp>
+        <p:nvSpPr>
+          <p:cNvPr id="20" name="Text 18"/>
+          <p:cNvSpPr/>
+          <p:nvPr/>
+        </p:nvSpPr>
+        <p:spPr>
+          <a:xfrm>
+            <a:off x="4472330" y="2843784"/>
+            <a:ext cx="3247034" cy="279400"/>
+          </a:xfrm>
+          <a:prstGeom prst="rect">
+            <a:avLst/>
+          </a:prstGeom>
+          <a:noFill/>
+          <a:ln/>
+        </p:spPr>
+        <p:txBody>
+          <a:bodyPr wrap="square" lIns="0" tIns="0" rIns="0" bIns="0" rtlCol="0" anchor="ctr">
+            <a:normAutofit/>
+          </a:bodyPr>
+          <a:lstStyle/>
+          <a:p>
+            <a:pPr indent="0" marL="0">
               <a:lnSpc>
                 <a:spcPct val="100000"/>
               </a:lnSpc>
@@ -2832,7 +3022,7 @@
         </p:nvSpPr>
         <p:spPr>
           <a:xfrm>
-            <a:off x="7984541" y="2496312"/>
+            <a:off x="8048549" y="2496312"/>
             <a:ext cx="3576218" cy="960120"/>
           </a:xfrm>
           <a:prstGeom prst="roundRect">
@@ -2859,47 +3049,8 @@
         </p:nvSpPr>
         <p:spPr>
           <a:xfrm>
-            <a:off x="8149133" y="2624328"/>
+            <a:off x="8213141" y="2624328"/>
             <a:ext cx="3247034" cy="201168"/>
-          </a:xfrm>
-          <a:prstGeom prst="rect">
-            <a:avLst/>
-          </a:prstGeom>
-          <a:noFill/>
-          <a:ln/>
-        </p:spPr>
-        <p:txBody>
-          <a:bodyPr wrap="square" lIns="0" tIns="0" rIns="0" bIns="0" rtlCol="0" anchor="ctr"/>
-          <a:lstStyle/>
-          <a:p>
-            <a:pPr indent="0" marL="0">
-              <a:buNone/>
-            </a:pPr>
-            <a:r>
-              <a:rPr lang="en-US" sz="950" dirty="0">
-                <a:solidFill>
-                  <a:srgbClr val="5B6B73"/>
-                </a:solidFill>
-                <a:latin typeface="맑은 고딕" pitchFamily="34" charset="0"/>
-                <a:ea typeface="맑은 고딕" pitchFamily="34" charset="-122"/>
-                <a:cs typeface="맑은 고딕" pitchFamily="34" charset="-120"/>
-              </a:rPr>
-              <a:t>연면적</a:t>
-            </a:r>
-            <a:endParaRPr lang="en-US" sz="950" dirty="0"/>
-          </a:p>
-        </p:txBody>
-      </p:sp>
-      <p:sp>
-        <p:nvSpPr>
-          <p:cNvPr id="23" name="Text 21"/>
-          <p:cNvSpPr/>
-          <p:nvPr/>
-        </p:nvSpPr>
-        <p:spPr>
-          <a:xfrm>
-            <a:off x="8149133" y="2843784"/>
-            <a:ext cx="3247034" cy="274320"/>
           </a:xfrm>
           <a:prstGeom prst="rect">
             <a:avLst/>
@@ -2914,6 +3065,47 @@
           <a:lstStyle/>
           <a:p>
             <a:pPr indent="0" marL="0">
+              <a:buNone/>
+            </a:pPr>
+            <a:r>
+              <a:rPr lang="en-US" sz="950" dirty="0">
+                <a:solidFill>
+                  <a:srgbClr val="5B6B73"/>
+                </a:solidFill>
+                <a:latin typeface="맑은 고딕" pitchFamily="34" charset="0"/>
+                <a:ea typeface="맑은 고딕" pitchFamily="34" charset="-122"/>
+                <a:cs typeface="맑은 고딕" pitchFamily="34" charset="-120"/>
+              </a:rPr>
+              <a:t>연면적</a:t>
+            </a:r>
+            <a:endParaRPr lang="en-US" sz="950" dirty="0"/>
+          </a:p>
+        </p:txBody>
+      </p:sp>
+      <p:sp>
+        <p:nvSpPr>
+          <p:cNvPr id="23" name="Text 21"/>
+          <p:cNvSpPr/>
+          <p:nvPr/>
+        </p:nvSpPr>
+        <p:spPr>
+          <a:xfrm>
+            <a:off x="8213141" y="2843784"/>
+            <a:ext cx="3247034" cy="279400"/>
+          </a:xfrm>
+          <a:prstGeom prst="rect">
+            <a:avLst/>
+          </a:prstGeom>
+          <a:noFill/>
+          <a:ln/>
+        </p:spPr>
+        <p:txBody>
+          <a:bodyPr wrap="square" lIns="0" tIns="0" rIns="0" bIns="0" rtlCol="0" anchor="ctr">
+            <a:normAutofit/>
+          </a:bodyPr>
+          <a:lstStyle/>
+          <a:p>
+            <a:pPr indent="0" marL="0">
               <a:lnSpc>
                 <a:spcPct val="100000"/>
               </a:lnSpc>
@@ -2942,7 +3134,7 @@
         </p:nvSpPr>
         <p:spPr>
           <a:xfrm>
-            <a:off x="502920" y="3712464"/>
+            <a:off x="566928" y="3712464"/>
             <a:ext cx="11057839" cy="274320"/>
           </a:xfrm>
           <a:prstGeom prst="rect">
@@ -2981,7 +3173,7 @@
         </p:nvSpPr>
         <p:spPr>
           <a:xfrm>
-            <a:off x="502920" y="4041648"/>
+            <a:off x="566928" y="4041648"/>
             <a:ext cx="11057839" cy="585216"/>
           </a:xfrm>
           <a:prstGeom prst="roundRect">
@@ -3008,7 +3200,7 @@
         </p:nvSpPr>
         <p:spPr>
           <a:xfrm>
-            <a:off x="612648" y="4151376"/>
+            <a:off x="676656" y="4151376"/>
             <a:ext cx="411480" cy="365760"/>
           </a:xfrm>
           <a:prstGeom prst="roundRect">
@@ -3035,7 +3227,7 @@
         </p:nvSpPr>
         <p:spPr>
           <a:xfrm>
-            <a:off x="612648" y="4151376"/>
+            <a:off x="676656" y="4151376"/>
             <a:ext cx="411480" cy="365760"/>
           </a:xfrm>
           <a:prstGeom prst="rect">
@@ -3074,7 +3266,7 @@
         </p:nvSpPr>
         <p:spPr>
           <a:xfrm>
-            <a:off x="1143000" y="4078224"/>
+            <a:off x="1207008" y="4078224"/>
             <a:ext cx="10280599" cy="512064"/>
           </a:xfrm>
           <a:prstGeom prst="rect">
@@ -3113,7 +3305,7 @@
         </p:nvSpPr>
         <p:spPr>
           <a:xfrm>
-            <a:off x="502920" y="4722876"/>
+            <a:off x="566928" y="4722876"/>
             <a:ext cx="11057839" cy="585216"/>
           </a:xfrm>
           <a:prstGeom prst="roundRect">
@@ -3140,7 +3332,7 @@
         </p:nvSpPr>
         <p:spPr>
           <a:xfrm>
-            <a:off x="612648" y="4832604"/>
+            <a:off x="676656" y="4832604"/>
             <a:ext cx="411480" cy="365760"/>
           </a:xfrm>
           <a:prstGeom prst="roundRect">
@@ -3167,7 +3359,7 @@
         </p:nvSpPr>
         <p:spPr>
           <a:xfrm>
-            <a:off x="612648" y="4832604"/>
+            <a:off x="676656" y="4832604"/>
             <a:ext cx="411480" cy="365760"/>
           </a:xfrm>
           <a:prstGeom prst="rect">
@@ -3206,7 +3398,7 @@
         </p:nvSpPr>
         <p:spPr>
           <a:xfrm>
-            <a:off x="1143000" y="4759452"/>
+            <a:off x="1207008" y="4759452"/>
             <a:ext cx="10280599" cy="512064"/>
           </a:xfrm>
           <a:prstGeom prst="rect">
@@ -3245,7 +3437,7 @@
         </p:nvSpPr>
         <p:spPr>
           <a:xfrm>
-            <a:off x="502920" y="5404104"/>
+            <a:off x="566928" y="5404104"/>
             <a:ext cx="11057839" cy="585216"/>
           </a:xfrm>
           <a:prstGeom prst="roundRect">
@@ -3272,7 +3464,7 @@
         </p:nvSpPr>
         <p:spPr>
           <a:xfrm>
-            <a:off x="612648" y="5513832"/>
+            <a:off x="676656" y="5513832"/>
             <a:ext cx="411480" cy="365760"/>
           </a:xfrm>
           <a:prstGeom prst="roundRect">
@@ -3299,7 +3491,7 @@
         </p:nvSpPr>
         <p:spPr>
           <a:xfrm>
-            <a:off x="612648" y="5513832"/>
+            <a:off x="676656" y="5513832"/>
             <a:ext cx="411480" cy="365760"/>
           </a:xfrm>
           <a:prstGeom prst="rect">
@@ -3338,7 +3530,7 @@
         </p:nvSpPr>
         <p:spPr>
           <a:xfrm>
-            <a:off x="1143000" y="5440680"/>
+            <a:off x="1207008" y="5440680"/>
             <a:ext cx="10280599" cy="512064"/>
           </a:xfrm>
           <a:prstGeom prst="rect">
@@ -3377,7 +3569,7 @@
         </p:nvSpPr>
         <p:spPr>
           <a:xfrm>
-            <a:off x="502920" y="6382512"/>
+            <a:off x="566928" y="6382512"/>
             <a:ext cx="7315200" cy="219456"/>
           </a:xfrm>
           <a:prstGeom prst="rect">
@@ -3416,7 +3608,7 @@
         </p:nvSpPr>
         <p:spPr>
           <a:xfrm>
-            <a:off x="10774375" y="6382512"/>
+            <a:off x="10710367" y="6382512"/>
             <a:ext cx="914400" cy="219456"/>
           </a:xfrm>
           <a:prstGeom prst="rect">
@@ -3487,7 +3679,7 @@
         </p:nvSpPr>
         <p:spPr>
           <a:xfrm>
-            <a:off x="502920" y="457200"/>
+            <a:off x="566928" y="457200"/>
             <a:ext cx="384048" cy="384048"/>
           </a:xfrm>
           <a:prstGeom prst="ellipse">
@@ -3507,7 +3699,7 @@
         </p:nvSpPr>
         <p:spPr>
           <a:xfrm>
-            <a:off x="502920" y="457200"/>
+            <a:off x="566928" y="457200"/>
             <a:ext cx="384048" cy="384048"/>
           </a:xfrm>
           <a:prstGeom prst="rect">
@@ -3546,7 +3738,7 @@
         </p:nvSpPr>
         <p:spPr>
           <a:xfrm>
-            <a:off x="1069848" y="457200"/>
+            <a:off x="1133856" y="457200"/>
             <a:ext cx="10490911" cy="182880"/>
           </a:xfrm>
           <a:prstGeom prst="rect">
@@ -3585,7 +3777,7 @@
         </p:nvSpPr>
         <p:spPr>
           <a:xfrm>
-            <a:off x="1069848" y="640080"/>
+            <a:off x="1133856" y="640080"/>
             <a:ext cx="10490911" cy="365760"/>
           </a:xfrm>
           <a:prstGeom prst="rect">
@@ -3595,6 +3787,47 @@
           <a:ln/>
         </p:spPr>
         <p:txBody>
+          <a:bodyPr wrap="square" lIns="0" tIns="0" rIns="0" bIns="0" rtlCol="0" anchor="ctr">
+            <a:normAutofit/>
+          </a:bodyPr>
+          <a:lstStyle/>
+          <a:p>
+            <a:pPr indent="0" marL="0">
+              <a:buNone/>
+            </a:pPr>
+            <a:r>
+              <a:rPr lang="en-US" sz="2300" b="1" dirty="0">
+                <a:solidFill>
+                  <a:srgbClr val="132A3A"/>
+                </a:solidFill>
+                <a:latin typeface="맑은 고딕" pitchFamily="34" charset="0"/>
+                <a:ea typeface="맑은 고딕" pitchFamily="34" charset="-122"/>
+                <a:cs typeface="맑은 고딕" pitchFamily="34" charset="-120"/>
+              </a:rPr>
+              <a:t>물건 개요</a:t>
+            </a:r>
+            <a:endParaRPr lang="en-US" sz="2300" dirty="0"/>
+          </a:p>
+        </p:txBody>
+      </p:sp>
+      <p:sp>
+        <p:nvSpPr>
+          <p:cNvPr id="6" name="Text 4"/>
+          <p:cNvSpPr/>
+          <p:nvPr/>
+        </p:nvSpPr>
+        <p:spPr>
+          <a:xfrm>
+            <a:off x="566928" y="1371600"/>
+            <a:ext cx="6858000" cy="237744"/>
+          </a:xfrm>
+          <a:prstGeom prst="rect">
+            <a:avLst/>
+          </a:prstGeom>
+          <a:noFill/>
+          <a:ln/>
+        </p:spPr>
+        <p:txBody>
           <a:bodyPr wrap="square" lIns="0" tIns="0" rIns="0" bIns="0" rtlCol="0" anchor="ctr"/>
           <a:lstStyle/>
           <a:p>
@@ -3602,7 +3835,7 @@
               <a:buNone/>
             </a:pPr>
             <a:r>
-              <a:rPr lang="en-US" sz="2300" b="1" dirty="0">
+              <a:rPr lang="en-US" sz="1100" b="1" dirty="0">
                 <a:solidFill>
                   <a:srgbClr val="132A3A"/>
                 </a:solidFill>
@@ -3610,45 +3843,6 @@
                 <a:ea typeface="맑은 고딕" pitchFamily="34" charset="-122"/>
                 <a:cs typeface="맑은 고딕" pitchFamily="34" charset="-120"/>
               </a:rPr>
-              <a:t>물건 개요</a:t>
-            </a:r>
-            <a:endParaRPr lang="en-US" sz="2300" dirty="0"/>
-          </a:p>
-        </p:txBody>
-      </p:sp>
-      <p:sp>
-        <p:nvSpPr>
-          <p:cNvPr id="6" name="Text 4"/>
-          <p:cNvSpPr/>
-          <p:nvPr/>
-        </p:nvSpPr>
-        <p:spPr>
-          <a:xfrm>
-            <a:off x="502920" y="1371600"/>
-            <a:ext cx="6858000" cy="237744"/>
-          </a:xfrm>
-          <a:prstGeom prst="rect">
-            <a:avLst/>
-          </a:prstGeom>
-          <a:noFill/>
-          <a:ln/>
-        </p:spPr>
-        <p:txBody>
-          <a:bodyPr wrap="square" lIns="0" tIns="0" rIns="0" bIns="0" rtlCol="0" anchor="ctr"/>
-          <a:lstStyle/>
-          <a:p>
-            <a:pPr indent="0" marL="0">
-              <a:buNone/>
-            </a:pPr>
-            <a:r>
-              <a:rPr lang="en-US" sz="1100" b="1" dirty="0">
-                <a:solidFill>
-                  <a:srgbClr val="132A3A"/>
-                </a:solidFill>
-                <a:latin typeface="맑은 고딕" pitchFamily="34" charset="0"/>
-                <a:ea typeface="맑은 고딕" pitchFamily="34" charset="-122"/>
-                <a:cs typeface="맑은 고딕" pitchFamily="34" charset="-120"/>
-              </a:rPr>
               <a:t>건물 기본 정보</a:t>
             </a:r>
             <a:endParaRPr lang="en-US" sz="1100" dirty="0"/>
@@ -3663,7 +3857,7 @@
         </p:nvSpPr>
         <p:spPr>
           <a:xfrm>
-            <a:off x="502920" y="1645920"/>
+            <a:off x="566928" y="1645920"/>
             <a:ext cx="1920240" cy="329184"/>
           </a:xfrm>
           <a:prstGeom prst="rect">
@@ -3673,7 +3867,9 @@
           <a:ln/>
         </p:spPr>
         <p:txBody>
-          <a:bodyPr wrap="square" lIns="0" tIns="0" rIns="0" bIns="0" rtlCol="0" anchor="ctr"/>
+          <a:bodyPr wrap="square" lIns="0" tIns="0" rIns="0" bIns="0" rtlCol="0" anchor="ctr">
+            <a:normAutofit/>
+          </a:bodyPr>
           <a:lstStyle/>
           <a:p>
             <a:pPr indent="0" marL="0">
@@ -3705,7 +3901,7 @@
         </p:nvSpPr>
         <p:spPr>
           <a:xfrm>
-            <a:off x="2423160" y="1645920"/>
+            <a:off x="2487168" y="1645920"/>
             <a:ext cx="4937760" cy="329184"/>
           </a:xfrm>
           <a:prstGeom prst="rect">
@@ -3715,7 +3911,9 @@
           <a:ln/>
         </p:spPr>
         <p:txBody>
-          <a:bodyPr wrap="square" lIns="0" tIns="0" rIns="0" bIns="0" rtlCol="0" anchor="ctr"/>
+          <a:bodyPr wrap="square" lIns="0" tIns="0" rIns="0" bIns="0" rtlCol="0" anchor="ctr">
+            <a:normAutofit/>
+          </a:bodyPr>
           <a:lstStyle/>
           <a:p>
             <a:pPr indent="0" marL="0">
@@ -3747,7 +3945,7 @@
         </p:nvSpPr>
         <p:spPr>
           <a:xfrm>
-            <a:off x="502920" y="1975104"/>
+            <a:off x="566928" y="1975104"/>
             <a:ext cx="6858000" cy="0"/>
           </a:xfrm>
           <a:prstGeom prst="line">
@@ -3770,7 +3968,7 @@
         </p:nvSpPr>
         <p:spPr>
           <a:xfrm>
-            <a:off x="502920" y="1975104"/>
+            <a:off x="566928" y="1975104"/>
             <a:ext cx="1920240" cy="329184"/>
           </a:xfrm>
           <a:prstGeom prst="rect">
@@ -3780,7 +3978,9 @@
           <a:ln/>
         </p:spPr>
         <p:txBody>
-          <a:bodyPr wrap="square" lIns="0" tIns="0" rIns="0" bIns="0" rtlCol="0" anchor="ctr"/>
+          <a:bodyPr wrap="square" lIns="0" tIns="0" rIns="0" bIns="0" rtlCol="0" anchor="ctr">
+            <a:normAutofit/>
+          </a:bodyPr>
           <a:lstStyle/>
           <a:p>
             <a:pPr indent="0" marL="0">
@@ -3812,7 +4012,7 @@
         </p:nvSpPr>
         <p:spPr>
           <a:xfrm>
-            <a:off x="2423160" y="1975104"/>
+            <a:off x="2487168" y="1975104"/>
             <a:ext cx="4937760" cy="329184"/>
           </a:xfrm>
           <a:prstGeom prst="rect">
@@ -3822,7 +4022,9 @@
           <a:ln/>
         </p:spPr>
         <p:txBody>
-          <a:bodyPr wrap="square" lIns="0" tIns="0" rIns="0" bIns="0" rtlCol="0" anchor="ctr"/>
+          <a:bodyPr wrap="square" lIns="0" tIns="0" rIns="0" bIns="0" rtlCol="0" anchor="ctr">
+            <a:normAutofit/>
+          </a:bodyPr>
           <a:lstStyle/>
           <a:p>
             <a:pPr indent="0" marL="0">
@@ -3854,7 +4056,7 @@
         </p:nvSpPr>
         <p:spPr>
           <a:xfrm>
-            <a:off x="502920" y="2304288"/>
+            <a:off x="566928" y="2304288"/>
             <a:ext cx="6858000" cy="0"/>
           </a:xfrm>
           <a:prstGeom prst="line">
@@ -3877,7 +4079,7 @@
         </p:nvSpPr>
         <p:spPr>
           <a:xfrm>
-            <a:off x="502920" y="2304288"/>
+            <a:off x="566928" y="2304288"/>
             <a:ext cx="1920240" cy="329184"/>
           </a:xfrm>
           <a:prstGeom prst="rect">
@@ -3887,7 +4089,9 @@
           <a:ln/>
         </p:spPr>
         <p:txBody>
-          <a:bodyPr wrap="square" lIns="0" tIns="0" rIns="0" bIns="0" rtlCol="0" anchor="ctr"/>
+          <a:bodyPr wrap="square" lIns="0" tIns="0" rIns="0" bIns="0" rtlCol="0" anchor="ctr">
+            <a:normAutofit/>
+          </a:bodyPr>
           <a:lstStyle/>
           <a:p>
             <a:pPr indent="0" marL="0">
@@ -3919,7 +4123,7 @@
         </p:nvSpPr>
         <p:spPr>
           <a:xfrm>
-            <a:off x="2423160" y="2304288"/>
+            <a:off x="2487168" y="2304288"/>
             <a:ext cx="4937760" cy="329184"/>
           </a:xfrm>
           <a:prstGeom prst="rect">
@@ -3929,7 +4133,9 @@
           <a:ln/>
         </p:spPr>
         <p:txBody>
-          <a:bodyPr wrap="square" lIns="0" tIns="0" rIns="0" bIns="0" rtlCol="0" anchor="ctr"/>
+          <a:bodyPr wrap="square" lIns="0" tIns="0" rIns="0" bIns="0" rtlCol="0" anchor="ctr">
+            <a:normAutofit/>
+          </a:bodyPr>
           <a:lstStyle/>
           <a:p>
             <a:pPr indent="0" marL="0">
@@ -3961,7 +4167,7 @@
         </p:nvSpPr>
         <p:spPr>
           <a:xfrm>
-            <a:off x="502920" y="2633472"/>
+            <a:off x="566928" y="2633472"/>
             <a:ext cx="6858000" cy="0"/>
           </a:xfrm>
           <a:prstGeom prst="line">
@@ -3984,7 +4190,7 @@
         </p:nvSpPr>
         <p:spPr>
           <a:xfrm>
-            <a:off x="502920" y="2633472"/>
+            <a:off x="566928" y="2633472"/>
             <a:ext cx="1920240" cy="329184"/>
           </a:xfrm>
           <a:prstGeom prst="rect">
@@ -3994,7 +4200,9 @@
           <a:ln/>
         </p:spPr>
         <p:txBody>
-          <a:bodyPr wrap="square" lIns="0" tIns="0" rIns="0" bIns="0" rtlCol="0" anchor="ctr"/>
+          <a:bodyPr wrap="square" lIns="0" tIns="0" rIns="0" bIns="0" rtlCol="0" anchor="ctr">
+            <a:normAutofit/>
+          </a:bodyPr>
           <a:lstStyle/>
           <a:p>
             <a:pPr indent="0" marL="0">
@@ -4026,7 +4234,7 @@
         </p:nvSpPr>
         <p:spPr>
           <a:xfrm>
-            <a:off x="2423160" y="2633472"/>
+            <a:off x="2487168" y="2633472"/>
             <a:ext cx="4937760" cy="329184"/>
           </a:xfrm>
           <a:prstGeom prst="rect">
@@ -4036,7 +4244,9 @@
           <a:ln/>
         </p:spPr>
         <p:txBody>
-          <a:bodyPr wrap="square" lIns="0" tIns="0" rIns="0" bIns="0" rtlCol="0" anchor="ctr"/>
+          <a:bodyPr wrap="square" lIns="0" tIns="0" rIns="0" bIns="0" rtlCol="0" anchor="ctr">
+            <a:normAutofit/>
+          </a:bodyPr>
           <a:lstStyle/>
           <a:p>
             <a:pPr indent="0" marL="0">
@@ -4068,7 +4278,7 @@
         </p:nvSpPr>
         <p:spPr>
           <a:xfrm>
-            <a:off x="502920" y="2962656"/>
+            <a:off x="566928" y="2962656"/>
             <a:ext cx="6858000" cy="0"/>
           </a:xfrm>
           <a:prstGeom prst="line">
@@ -4091,7 +4301,7 @@
         </p:nvSpPr>
         <p:spPr>
           <a:xfrm>
-            <a:off x="502920" y="2962656"/>
+            <a:off x="566928" y="2962656"/>
             <a:ext cx="1920240" cy="329184"/>
           </a:xfrm>
           <a:prstGeom prst="rect">
@@ -4101,7 +4311,9 @@
           <a:ln/>
         </p:spPr>
         <p:txBody>
-          <a:bodyPr wrap="square" lIns="0" tIns="0" rIns="0" bIns="0" rtlCol="0" anchor="ctr"/>
+          <a:bodyPr wrap="square" lIns="0" tIns="0" rIns="0" bIns="0" rtlCol="0" anchor="ctr">
+            <a:normAutofit/>
+          </a:bodyPr>
           <a:lstStyle/>
           <a:p>
             <a:pPr indent="0" marL="0">
@@ -4133,7 +4345,7 @@
         </p:nvSpPr>
         <p:spPr>
           <a:xfrm>
-            <a:off x="2423160" y="2962656"/>
+            <a:off x="2487168" y="2962656"/>
             <a:ext cx="4937760" cy="329184"/>
           </a:xfrm>
           <a:prstGeom prst="rect">
@@ -4143,7 +4355,9 @@
           <a:ln/>
         </p:spPr>
         <p:txBody>
-          <a:bodyPr wrap="square" lIns="0" tIns="0" rIns="0" bIns="0" rtlCol="0" anchor="ctr"/>
+          <a:bodyPr wrap="square" lIns="0" tIns="0" rIns="0" bIns="0" rtlCol="0" anchor="ctr">
+            <a:normAutofit/>
+          </a:bodyPr>
           <a:lstStyle/>
           <a:p>
             <a:pPr indent="0" marL="0">
@@ -4175,7 +4389,7 @@
         </p:nvSpPr>
         <p:spPr>
           <a:xfrm>
-            <a:off x="502920" y="3291840"/>
+            <a:off x="566928" y="3291840"/>
             <a:ext cx="6858000" cy="0"/>
           </a:xfrm>
           <a:prstGeom prst="line">
@@ -4198,7 +4412,7 @@
         </p:nvSpPr>
         <p:spPr>
           <a:xfrm>
-            <a:off x="502920" y="3291840"/>
+            <a:off x="566928" y="3291840"/>
             <a:ext cx="6858000" cy="329184"/>
           </a:xfrm>
           <a:prstGeom prst="rect">
@@ -4208,7 +4422,9 @@
           <a:ln/>
         </p:spPr>
         <p:txBody>
-          <a:bodyPr wrap="square" lIns="0" tIns="0" rIns="0" bIns="0" rtlCol="0" anchor="ctr"/>
+          <a:bodyPr wrap="square" lIns="0" tIns="0" rIns="0" bIns="0" rtlCol="0" anchor="ctr">
+            <a:normAutofit/>
+          </a:bodyPr>
           <a:lstStyle/>
           <a:p>
             <a:pPr indent="0" marL="0">
@@ -4240,7 +4456,7 @@
         </p:nvSpPr>
         <p:spPr>
           <a:xfrm>
-            <a:off x="502920" y="3621024"/>
+            <a:off x="566928" y="3621024"/>
             <a:ext cx="6858000" cy="0"/>
           </a:xfrm>
           <a:prstGeom prst="line">
@@ -4263,7 +4479,7 @@
         </p:nvSpPr>
         <p:spPr>
           <a:xfrm>
-            <a:off x="502920" y="3621024"/>
+            <a:off x="566928" y="3621024"/>
             <a:ext cx="1920240" cy="329184"/>
           </a:xfrm>
           <a:prstGeom prst="rect">
@@ -4273,7 +4489,9 @@
           <a:ln/>
         </p:spPr>
         <p:txBody>
-          <a:bodyPr wrap="square" lIns="0" tIns="0" rIns="0" bIns="0" rtlCol="0" anchor="ctr"/>
+          <a:bodyPr wrap="square" lIns="0" tIns="0" rIns="0" bIns="0" rtlCol="0" anchor="ctr">
+            <a:normAutofit/>
+          </a:bodyPr>
           <a:lstStyle/>
           <a:p>
             <a:pPr indent="0" marL="0">
@@ -4305,7 +4523,7 @@
         </p:nvSpPr>
         <p:spPr>
           <a:xfrm>
-            <a:off x="2423160" y="3621024"/>
+            <a:off x="2487168" y="3621024"/>
             <a:ext cx="4937760" cy="329184"/>
           </a:xfrm>
           <a:prstGeom prst="rect">
@@ -4315,7 +4533,9 @@
           <a:ln/>
         </p:spPr>
         <p:txBody>
-          <a:bodyPr wrap="square" lIns="0" tIns="0" rIns="0" bIns="0" rtlCol="0" anchor="ctr"/>
+          <a:bodyPr wrap="square" lIns="0" tIns="0" rIns="0" bIns="0" rtlCol="0" anchor="ctr">
+            <a:normAutofit/>
+          </a:bodyPr>
           <a:lstStyle/>
           <a:p>
             <a:pPr indent="0" marL="0">
@@ -4347,7 +4567,7 @@
         </p:nvSpPr>
         <p:spPr>
           <a:xfrm>
-            <a:off x="502920" y="3950208"/>
+            <a:off x="566928" y="3950208"/>
             <a:ext cx="6858000" cy="0"/>
           </a:xfrm>
           <a:prstGeom prst="line">
@@ -4370,7 +4590,7 @@
         </p:nvSpPr>
         <p:spPr>
           <a:xfrm>
-            <a:off x="502920" y="3950208"/>
+            <a:off x="566928" y="3950208"/>
             <a:ext cx="1920240" cy="329184"/>
           </a:xfrm>
           <a:prstGeom prst="rect">
@@ -4380,7 +4600,9 @@
           <a:ln/>
         </p:spPr>
         <p:txBody>
-          <a:bodyPr wrap="square" lIns="0" tIns="0" rIns="0" bIns="0" rtlCol="0" anchor="ctr"/>
+          <a:bodyPr wrap="square" lIns="0" tIns="0" rIns="0" bIns="0" rtlCol="0" anchor="ctr">
+            <a:normAutofit/>
+          </a:bodyPr>
           <a:lstStyle/>
           <a:p>
             <a:pPr indent="0" marL="0">
@@ -4412,7 +4634,7 @@
         </p:nvSpPr>
         <p:spPr>
           <a:xfrm>
-            <a:off x="2423160" y="3950208"/>
+            <a:off x="2487168" y="3950208"/>
             <a:ext cx="4937760" cy="329184"/>
           </a:xfrm>
           <a:prstGeom prst="rect">
@@ -4422,7 +4644,9 @@
           <a:ln/>
         </p:spPr>
         <p:txBody>
-          <a:bodyPr wrap="square" lIns="0" tIns="0" rIns="0" bIns="0" rtlCol="0" anchor="ctr"/>
+          <a:bodyPr wrap="square" lIns="0" tIns="0" rIns="0" bIns="0" rtlCol="0" anchor="ctr">
+            <a:normAutofit/>
+          </a:bodyPr>
           <a:lstStyle/>
           <a:p>
             <a:pPr indent="0" marL="0">
@@ -4454,7 +4678,7 @@
         </p:nvSpPr>
         <p:spPr>
           <a:xfrm>
-            <a:off x="502920" y="4389120"/>
+            <a:off x="566928" y="4389120"/>
             <a:ext cx="6858000" cy="1005840"/>
           </a:xfrm>
           <a:prstGeom prst="rect">
@@ -4479,7 +4703,7 @@
         </p:nvSpPr>
         <p:spPr>
           <a:xfrm>
-            <a:off x="685800" y="4389120"/>
+            <a:off x="749808" y="4389120"/>
             <a:ext cx="2726741" cy="502920"/>
           </a:xfrm>
           <a:prstGeom prst="rect">
@@ -4518,7 +4742,7 @@
         </p:nvSpPr>
         <p:spPr>
           <a:xfrm>
-            <a:off x="3412541" y="4389120"/>
+            <a:off x="3476549" y="4389120"/>
             <a:ext cx="3765499" cy="502920"/>
           </a:xfrm>
           <a:prstGeom prst="rect">
@@ -4557,7 +4781,7 @@
         </p:nvSpPr>
         <p:spPr>
           <a:xfrm>
-            <a:off x="640080" y="4892040"/>
+            <a:off x="704088" y="4892040"/>
             <a:ext cx="6583680" cy="0"/>
           </a:xfrm>
           <a:prstGeom prst="line">
@@ -4580,7 +4804,7 @@
         </p:nvSpPr>
         <p:spPr>
           <a:xfrm>
-            <a:off x="685800" y="4892040"/>
+            <a:off x="749808" y="4892040"/>
             <a:ext cx="2726741" cy="457200"/>
           </a:xfrm>
           <a:prstGeom prst="rect">
@@ -4619,7 +4843,7 @@
         </p:nvSpPr>
         <p:spPr>
           <a:xfrm>
-            <a:off x="3412541" y="4892040"/>
+            <a:off x="3476549" y="4892040"/>
             <a:ext cx="3765499" cy="457200"/>
           </a:xfrm>
           <a:prstGeom prst="rect">
@@ -4658,7 +4882,7 @@
         </p:nvSpPr>
         <p:spPr>
           <a:xfrm>
-            <a:off x="7540600" y="1371600"/>
+            <a:off x="7604608" y="1371600"/>
             <a:ext cx="0" cy="4754880"/>
           </a:xfrm>
           <a:prstGeom prst="line">
@@ -4681,7 +4905,7 @@
         </p:nvSpPr>
         <p:spPr>
           <a:xfrm>
-            <a:off x="7720279" y="1645920"/>
+            <a:off x="7784287" y="1645920"/>
             <a:ext cx="3840480" cy="2103120"/>
           </a:xfrm>
           <a:prstGeom prst="roundRect">
@@ -4703,7 +4927,7 @@
         </p:nvSpPr>
         <p:spPr>
           <a:xfrm>
-            <a:off x="7720279" y="1700784"/>
+            <a:off x="7784287" y="1700784"/>
             <a:ext cx="36576" cy="1993392"/>
           </a:xfrm>
           <a:prstGeom prst="rect">
@@ -4723,7 +4947,7 @@
         </p:nvSpPr>
         <p:spPr>
           <a:xfrm>
-            <a:off x="7866583" y="1737360"/>
+            <a:off x="7930591" y="1737360"/>
             <a:ext cx="3584448" cy="201168"/>
           </a:xfrm>
           <a:prstGeom prst="rect">
@@ -4762,7 +4986,7 @@
         </p:nvSpPr>
         <p:spPr>
           <a:xfrm>
-            <a:off x="7866583" y="1938528"/>
+            <a:off x="7930591" y="1938528"/>
             <a:ext cx="3584448" cy="1773936"/>
           </a:xfrm>
           <a:prstGeom prst="rect">
@@ -4853,7 +5077,7 @@
         </p:nvSpPr>
         <p:spPr>
           <a:xfrm>
-            <a:off x="7720279" y="3977640"/>
+            <a:off x="7784287" y="3977640"/>
             <a:ext cx="3840480" cy="2148840"/>
           </a:xfrm>
           <a:prstGeom prst="roundRect">
@@ -4875,7 +5099,7 @@
         </p:nvSpPr>
         <p:spPr>
           <a:xfrm>
-            <a:off x="7720279" y="4032504"/>
+            <a:off x="7784287" y="4032504"/>
             <a:ext cx="36576" cy="2039112"/>
           </a:xfrm>
           <a:prstGeom prst="rect">
@@ -4895,7 +5119,7 @@
         </p:nvSpPr>
         <p:spPr>
           <a:xfrm>
-            <a:off x="7866583" y="4069080"/>
+            <a:off x="7930591" y="4069080"/>
             <a:ext cx="3584448" cy="201168"/>
           </a:xfrm>
           <a:prstGeom prst="rect">
@@ -4934,7 +5158,7 @@
         </p:nvSpPr>
         <p:spPr>
           <a:xfrm>
-            <a:off x="7866583" y="4270248"/>
+            <a:off x="7930591" y="4270248"/>
             <a:ext cx="3584448" cy="1819656"/>
           </a:xfrm>
           <a:prstGeom prst="rect">
@@ -5025,7 +5249,7 @@
         </p:nvSpPr>
         <p:spPr>
           <a:xfrm>
-            <a:off x="502920" y="6382512"/>
+            <a:off x="566928" y="6382512"/>
             <a:ext cx="7315200" cy="219456"/>
           </a:xfrm>
           <a:prstGeom prst="rect">
@@ -5064,7 +5288,7 @@
         </p:nvSpPr>
         <p:spPr>
           <a:xfrm>
-            <a:off x="10774375" y="6382512"/>
+            <a:off x="10710367" y="6382512"/>
             <a:ext cx="914400" cy="219456"/>
           </a:xfrm>
           <a:prstGeom prst="rect">
@@ -5135,7 +5359,7 @@
         </p:nvSpPr>
         <p:spPr>
           <a:xfrm>
-            <a:off x="502920" y="457200"/>
+            <a:off x="566928" y="457200"/>
             <a:ext cx="384048" cy="384048"/>
           </a:xfrm>
           <a:prstGeom prst="ellipse">
@@ -5155,7 +5379,7 @@
         </p:nvSpPr>
         <p:spPr>
           <a:xfrm>
-            <a:off x="502920" y="457200"/>
+            <a:off x="566928" y="457200"/>
             <a:ext cx="384048" cy="384048"/>
           </a:xfrm>
           <a:prstGeom prst="rect">
@@ -5194,7 +5418,7 @@
         </p:nvSpPr>
         <p:spPr>
           <a:xfrm>
-            <a:off x="1069848" y="457200"/>
+            <a:off x="1133856" y="457200"/>
             <a:ext cx="10490911" cy="182880"/>
           </a:xfrm>
           <a:prstGeom prst="rect">
@@ -5233,7 +5457,7 @@
         </p:nvSpPr>
         <p:spPr>
           <a:xfrm>
-            <a:off x="1069848" y="640080"/>
+            <a:off x="1133856" y="640080"/>
             <a:ext cx="10490911" cy="365760"/>
           </a:xfrm>
           <a:prstGeom prst="rect">
@@ -5243,7 +5467,9 @@
           <a:ln/>
         </p:spPr>
         <p:txBody>
-          <a:bodyPr wrap="square" lIns="0" tIns="0" rIns="0" bIns="0" rtlCol="0" anchor="ctr"/>
+          <a:bodyPr wrap="square" lIns="0" tIns="0" rIns="0" bIns="0" rtlCol="0" anchor="ctr">
+            <a:normAutofit/>
+          </a:bodyPr>
           <a:lstStyle/>
           <a:p>
             <a:pPr indent="0" marL="0">
@@ -5280,7 +5506,7 @@
         </p:blipFill>
         <p:spPr>
           <a:xfrm>
-            <a:off x="502920" y="1481328"/>
+            <a:off x="566928" y="1481328"/>
             <a:ext cx="5120640" cy="4114800"/>
           </a:xfrm>
           <a:prstGeom prst="rect">
@@ -5296,7 +5522,7 @@
         </p:nvSpPr>
         <p:spPr>
           <a:xfrm>
-            <a:off x="5989320" y="1481328"/>
+            <a:off x="6053328" y="1481328"/>
             <a:ext cx="5571439" cy="237744"/>
           </a:xfrm>
           <a:prstGeom prst="rect">
@@ -5335,7 +5561,7 @@
         </p:nvSpPr>
         <p:spPr>
           <a:xfrm>
-            <a:off x="5989320" y="1801368"/>
+            <a:off x="6053328" y="1801368"/>
             <a:ext cx="1560003" cy="457200"/>
           </a:xfrm>
           <a:prstGeom prst="rect">
@@ -5345,7 +5571,9 @@
           <a:ln/>
         </p:spPr>
         <p:txBody>
-          <a:bodyPr wrap="square" lIns="0" tIns="0" rIns="0" bIns="0" rtlCol="0" anchor="ctr"/>
+          <a:bodyPr wrap="square" lIns="0" tIns="0" rIns="0" bIns="0" rtlCol="0" anchor="ctr">
+            <a:normAutofit/>
+          </a:bodyPr>
           <a:lstStyle/>
           <a:p>
             <a:pPr indent="0" marL="0">
@@ -5377,7 +5605,7 @@
         </p:nvSpPr>
         <p:spPr>
           <a:xfrm>
-            <a:off x="7549323" y="1801368"/>
+            <a:off x="7613331" y="1801368"/>
             <a:ext cx="4011436" cy="457200"/>
           </a:xfrm>
           <a:prstGeom prst="rect">
@@ -5387,7 +5615,9 @@
           <a:ln/>
         </p:spPr>
         <p:txBody>
-          <a:bodyPr wrap="square" lIns="0" tIns="0" rIns="0" bIns="0" rtlCol="0" anchor="ctr"/>
+          <a:bodyPr wrap="square" lIns="0" tIns="0" rIns="0" bIns="0" rtlCol="0" anchor="ctr">
+            <a:normAutofit/>
+          </a:bodyPr>
           <a:lstStyle/>
           <a:p>
             <a:pPr indent="0" marL="0">
@@ -5419,7 +5649,7 @@
         </p:nvSpPr>
         <p:spPr>
           <a:xfrm>
-            <a:off x="5989320" y="2258568"/>
+            <a:off x="6053328" y="2258568"/>
             <a:ext cx="5571439" cy="0"/>
           </a:xfrm>
           <a:prstGeom prst="line">
@@ -5442,7 +5672,7 @@
         </p:nvSpPr>
         <p:spPr>
           <a:xfrm>
-            <a:off x="5989320" y="2258568"/>
+            <a:off x="6053328" y="2258568"/>
             <a:ext cx="1560003" cy="457200"/>
           </a:xfrm>
           <a:prstGeom prst="rect">
@@ -5452,7 +5682,9 @@
           <a:ln/>
         </p:spPr>
         <p:txBody>
-          <a:bodyPr wrap="square" lIns="0" tIns="0" rIns="0" bIns="0" rtlCol="0" anchor="ctr"/>
+          <a:bodyPr wrap="square" lIns="0" tIns="0" rIns="0" bIns="0" rtlCol="0" anchor="ctr">
+            <a:normAutofit/>
+          </a:bodyPr>
           <a:lstStyle/>
           <a:p>
             <a:pPr indent="0" marL="0">
@@ -5484,7 +5716,7 @@
         </p:nvSpPr>
         <p:spPr>
           <a:xfrm>
-            <a:off x="7549323" y="2258568"/>
+            <a:off x="7613331" y="2258568"/>
             <a:ext cx="4011436" cy="457200"/>
           </a:xfrm>
           <a:prstGeom prst="rect">
@@ -5494,7 +5726,9 @@
           <a:ln/>
         </p:spPr>
         <p:txBody>
-          <a:bodyPr wrap="square" lIns="0" tIns="0" rIns="0" bIns="0" rtlCol="0" anchor="ctr"/>
+          <a:bodyPr wrap="square" lIns="0" tIns="0" rIns="0" bIns="0" rtlCol="0" anchor="ctr">
+            <a:normAutofit/>
+          </a:bodyPr>
           <a:lstStyle/>
           <a:p>
             <a:pPr indent="0" marL="0">
@@ -5526,7 +5760,7 @@
         </p:nvSpPr>
         <p:spPr>
           <a:xfrm>
-            <a:off x="5989320" y="2715768"/>
+            <a:off x="6053328" y="2715768"/>
             <a:ext cx="5571439" cy="0"/>
           </a:xfrm>
           <a:prstGeom prst="line">
@@ -5549,7 +5783,7 @@
         </p:nvSpPr>
         <p:spPr>
           <a:xfrm>
-            <a:off x="5989320" y="2715768"/>
+            <a:off x="6053328" y="2715768"/>
             <a:ext cx="1560003" cy="457200"/>
           </a:xfrm>
           <a:prstGeom prst="rect">
@@ -5559,7 +5793,9 @@
           <a:ln/>
         </p:spPr>
         <p:txBody>
-          <a:bodyPr wrap="square" lIns="0" tIns="0" rIns="0" bIns="0" rtlCol="0" anchor="ctr"/>
+          <a:bodyPr wrap="square" lIns="0" tIns="0" rIns="0" bIns="0" rtlCol="0" anchor="ctr">
+            <a:normAutofit/>
+          </a:bodyPr>
           <a:lstStyle/>
           <a:p>
             <a:pPr indent="0" marL="0">
@@ -5591,7 +5827,7 @@
         </p:nvSpPr>
         <p:spPr>
           <a:xfrm>
-            <a:off x="7549323" y="2715768"/>
+            <a:off x="7613331" y="2715768"/>
             <a:ext cx="4011436" cy="457200"/>
           </a:xfrm>
           <a:prstGeom prst="rect">
@@ -5601,7 +5837,9 @@
           <a:ln/>
         </p:spPr>
         <p:txBody>
-          <a:bodyPr wrap="square" lIns="0" tIns="0" rIns="0" bIns="0" rtlCol="0" anchor="ctr"/>
+          <a:bodyPr wrap="square" lIns="0" tIns="0" rIns="0" bIns="0" rtlCol="0" anchor="ctr">
+            <a:normAutofit/>
+          </a:bodyPr>
           <a:lstStyle/>
           <a:p>
             <a:pPr indent="0" marL="0">
@@ -5633,7 +5871,7 @@
         </p:nvSpPr>
         <p:spPr>
           <a:xfrm>
-            <a:off x="5989320" y="3282696"/>
+            <a:off x="6053328" y="3282696"/>
             <a:ext cx="5571439" cy="877824"/>
           </a:xfrm>
           <a:prstGeom prst="roundRect">
@@ -5655,7 +5893,7 @@
         </p:nvSpPr>
         <p:spPr>
           <a:xfrm>
-            <a:off x="5989320" y="3337560"/>
+            <a:off x="6053328" y="3337560"/>
             <a:ext cx="36576" cy="768096"/>
           </a:xfrm>
           <a:prstGeom prst="rect">
@@ -5675,7 +5913,7 @@
         </p:nvSpPr>
         <p:spPr>
           <a:xfrm>
-            <a:off x="6135624" y="3374136"/>
+            <a:off x="6199632" y="3374136"/>
             <a:ext cx="5315407" cy="201168"/>
           </a:xfrm>
           <a:prstGeom prst="rect">
@@ -5714,7 +5952,7 @@
         </p:nvSpPr>
         <p:spPr>
           <a:xfrm>
-            <a:off x="6135624" y="3575304"/>
+            <a:off x="6199632" y="3575304"/>
             <a:ext cx="5315407" cy="548640"/>
           </a:xfrm>
           <a:prstGeom prst="rect">
@@ -5757,7 +5995,7 @@
         </p:nvSpPr>
         <p:spPr>
           <a:xfrm>
-            <a:off x="502920" y="6382512"/>
+            <a:off x="566928" y="6382512"/>
             <a:ext cx="7315200" cy="219456"/>
           </a:xfrm>
           <a:prstGeom prst="rect">
@@ -5796,7 +6034,7 @@
         </p:nvSpPr>
         <p:spPr>
           <a:xfrm>
-            <a:off x="10774375" y="6382512"/>
+            <a:off x="10710367" y="6382512"/>
             <a:ext cx="914400" cy="219456"/>
           </a:xfrm>
           <a:prstGeom prst="rect">
@@ -5867,7 +6105,7 @@
         </p:nvSpPr>
         <p:spPr>
           <a:xfrm>
-            <a:off x="502920" y="457200"/>
+            <a:off x="566928" y="457200"/>
             <a:ext cx="384048" cy="384048"/>
           </a:xfrm>
           <a:prstGeom prst="ellipse">
@@ -5887,7 +6125,7 @@
         </p:nvSpPr>
         <p:spPr>
           <a:xfrm>
-            <a:off x="502920" y="457200"/>
+            <a:off x="566928" y="457200"/>
             <a:ext cx="384048" cy="384048"/>
           </a:xfrm>
           <a:prstGeom prst="rect">
@@ -5926,7 +6164,7 @@
         </p:nvSpPr>
         <p:spPr>
           <a:xfrm>
-            <a:off x="1069848" y="457200"/>
+            <a:off x="1133856" y="457200"/>
             <a:ext cx="10490911" cy="182880"/>
           </a:xfrm>
           <a:prstGeom prst="rect">
@@ -5965,7 +6203,7 @@
         </p:nvSpPr>
         <p:spPr>
           <a:xfrm>
-            <a:off x="1069848" y="640080"/>
+            <a:off x="1133856" y="640080"/>
             <a:ext cx="10490911" cy="365760"/>
           </a:xfrm>
           <a:prstGeom prst="rect">
@@ -5975,6 +6213,47 @@
           <a:ln/>
         </p:spPr>
         <p:txBody>
+          <a:bodyPr wrap="square" lIns="0" tIns="0" rIns="0" bIns="0" rtlCol="0" anchor="ctr">
+            <a:normAutofit/>
+          </a:bodyPr>
+          <a:lstStyle/>
+          <a:p>
+            <a:pPr indent="0" marL="0">
+              <a:buNone/>
+            </a:pPr>
+            <a:r>
+              <a:rPr lang="en-US" sz="2300" b="1" dirty="0">
+                <a:solidFill>
+                  <a:srgbClr val="132A3A"/>
+                </a:solidFill>
+                <a:latin typeface="맑은 고딕" pitchFamily="34" charset="0"/>
+                <a:ea typeface="맑은 고딕" pitchFamily="34" charset="-122"/>
+                <a:cs typeface="맑은 고딕" pitchFamily="34" charset="-120"/>
+              </a:rPr>
+              <a:t>토지 정보</a:t>
+            </a:r>
+            <a:endParaRPr lang="en-US" sz="2300" dirty="0"/>
+          </a:p>
+        </p:txBody>
+      </p:sp>
+      <p:sp>
+        <p:nvSpPr>
+          <p:cNvPr id="6" name="Text 4"/>
+          <p:cNvSpPr/>
+          <p:nvPr/>
+        </p:nvSpPr>
+        <p:spPr>
+          <a:xfrm>
+            <a:off x="566928" y="1371600"/>
+            <a:ext cx="6858000" cy="237744"/>
+          </a:xfrm>
+          <a:prstGeom prst="rect">
+            <a:avLst/>
+          </a:prstGeom>
+          <a:noFill/>
+          <a:ln/>
+        </p:spPr>
+        <p:txBody>
           <a:bodyPr wrap="square" lIns="0" tIns="0" rIns="0" bIns="0" rtlCol="0" anchor="ctr"/>
           <a:lstStyle/>
           <a:p>
@@ -5982,7 +6261,7 @@
               <a:buNone/>
             </a:pPr>
             <a:r>
-              <a:rPr lang="en-US" sz="2300" b="1" dirty="0">
+              <a:rPr lang="en-US" sz="1100" b="1" dirty="0">
                 <a:solidFill>
                   <a:srgbClr val="132A3A"/>
                 </a:solidFill>
@@ -5990,45 +6269,6 @@
                 <a:ea typeface="맑은 고딕" pitchFamily="34" charset="-122"/>
                 <a:cs typeface="맑은 고딕" pitchFamily="34" charset="-120"/>
               </a:rPr>
-              <a:t>토지 정보</a:t>
-            </a:r>
-            <a:endParaRPr lang="en-US" sz="2300" dirty="0"/>
-          </a:p>
-        </p:txBody>
-      </p:sp>
-      <p:sp>
-        <p:nvSpPr>
-          <p:cNvPr id="6" name="Text 4"/>
-          <p:cNvSpPr/>
-          <p:nvPr/>
-        </p:nvSpPr>
-        <p:spPr>
-          <a:xfrm>
-            <a:off x="502920" y="1371600"/>
-            <a:ext cx="6858000" cy="237744"/>
-          </a:xfrm>
-          <a:prstGeom prst="rect">
-            <a:avLst/>
-          </a:prstGeom>
-          <a:noFill/>
-          <a:ln/>
-        </p:spPr>
-        <p:txBody>
-          <a:bodyPr wrap="square" lIns="0" tIns="0" rIns="0" bIns="0" rtlCol="0" anchor="ctr"/>
-          <a:lstStyle/>
-          <a:p>
-            <a:pPr indent="0" marL="0">
-              <a:buNone/>
-            </a:pPr>
-            <a:r>
-              <a:rPr lang="en-US" sz="1100" b="1" dirty="0">
-                <a:solidFill>
-                  <a:srgbClr val="132A3A"/>
-                </a:solidFill>
-                <a:latin typeface="맑은 고딕" pitchFamily="34" charset="0"/>
-                <a:ea typeface="맑은 고딕" pitchFamily="34" charset="-122"/>
-                <a:cs typeface="맑은 고딕" pitchFamily="34" charset="-120"/>
-              </a:rPr>
               <a:t>토지이용계획 · 규제 분석</a:t>
             </a:r>
             <a:endParaRPr lang="en-US" sz="1100" dirty="0"/>
@@ -6043,7 +6283,7 @@
         </p:nvSpPr>
         <p:spPr>
           <a:xfrm>
-            <a:off x="502920" y="1645920"/>
+            <a:off x="566928" y="1645920"/>
             <a:ext cx="1920240" cy="402336"/>
           </a:xfrm>
           <a:prstGeom prst="rect">
@@ -6053,7 +6293,9 @@
           <a:ln/>
         </p:spPr>
         <p:txBody>
-          <a:bodyPr wrap="square" lIns="0" tIns="0" rIns="0" bIns="0" rtlCol="0" anchor="ctr"/>
+          <a:bodyPr wrap="square" lIns="0" tIns="0" rIns="0" bIns="0" rtlCol="0" anchor="ctr">
+            <a:normAutofit/>
+          </a:bodyPr>
           <a:lstStyle/>
           <a:p>
             <a:pPr indent="0" marL="0">
@@ -6085,7 +6327,7 @@
         </p:nvSpPr>
         <p:spPr>
           <a:xfrm>
-            <a:off x="2423160" y="1645920"/>
+            <a:off x="2487168" y="1645920"/>
             <a:ext cx="4937760" cy="402336"/>
           </a:xfrm>
           <a:prstGeom prst="rect">
@@ -6095,7 +6337,9 @@
           <a:ln/>
         </p:spPr>
         <p:txBody>
-          <a:bodyPr wrap="square" lIns="0" tIns="0" rIns="0" bIns="0" rtlCol="0" anchor="ctr"/>
+          <a:bodyPr wrap="square" lIns="0" tIns="0" rIns="0" bIns="0" rtlCol="0" anchor="ctr">
+            <a:normAutofit/>
+          </a:bodyPr>
           <a:lstStyle/>
           <a:p>
             <a:pPr indent="0" marL="0">
@@ -6127,7 +6371,7 @@
         </p:nvSpPr>
         <p:spPr>
           <a:xfrm>
-            <a:off x="502920" y="2048256"/>
+            <a:off x="566928" y="2048256"/>
             <a:ext cx="6858000" cy="0"/>
           </a:xfrm>
           <a:prstGeom prst="line">
@@ -6150,7 +6394,7 @@
         </p:nvSpPr>
         <p:spPr>
           <a:xfrm>
-            <a:off x="502920" y="2048256"/>
+            <a:off x="566928" y="2048256"/>
             <a:ext cx="1920240" cy="402336"/>
           </a:xfrm>
           <a:prstGeom prst="rect">
@@ -6160,7 +6404,9 @@
           <a:ln/>
         </p:spPr>
         <p:txBody>
-          <a:bodyPr wrap="square" lIns="0" tIns="0" rIns="0" bIns="0" rtlCol="0" anchor="ctr"/>
+          <a:bodyPr wrap="square" lIns="0" tIns="0" rIns="0" bIns="0" rtlCol="0" anchor="ctr">
+            <a:normAutofit/>
+          </a:bodyPr>
           <a:lstStyle/>
           <a:p>
             <a:pPr indent="0" marL="0">
@@ -6192,7 +6438,7 @@
         </p:nvSpPr>
         <p:spPr>
           <a:xfrm>
-            <a:off x="2423160" y="2048256"/>
+            <a:off x="2487168" y="2048256"/>
             <a:ext cx="4937760" cy="402336"/>
           </a:xfrm>
           <a:prstGeom prst="rect">
@@ -6202,7 +6448,9 @@
           <a:ln/>
         </p:spPr>
         <p:txBody>
-          <a:bodyPr wrap="square" lIns="0" tIns="0" rIns="0" bIns="0" rtlCol="0" anchor="ctr"/>
+          <a:bodyPr wrap="square" lIns="0" tIns="0" rIns="0" bIns="0" rtlCol="0" anchor="ctr">
+            <a:normAutofit/>
+          </a:bodyPr>
           <a:lstStyle/>
           <a:p>
             <a:pPr indent="0" marL="0">
@@ -6234,7 +6482,7 @@
         </p:nvSpPr>
         <p:spPr>
           <a:xfrm>
-            <a:off x="502920" y="2450592"/>
+            <a:off x="566928" y="2450592"/>
             <a:ext cx="6858000" cy="0"/>
           </a:xfrm>
           <a:prstGeom prst="line">
@@ -6257,7 +6505,7 @@
         </p:nvSpPr>
         <p:spPr>
           <a:xfrm>
-            <a:off x="502920" y="2450592"/>
+            <a:off x="566928" y="2450592"/>
             <a:ext cx="1920240" cy="402336"/>
           </a:xfrm>
           <a:prstGeom prst="rect">
@@ -6267,7 +6515,9 @@
           <a:ln/>
         </p:spPr>
         <p:txBody>
-          <a:bodyPr wrap="square" lIns="0" tIns="0" rIns="0" bIns="0" rtlCol="0" anchor="ctr"/>
+          <a:bodyPr wrap="square" lIns="0" tIns="0" rIns="0" bIns="0" rtlCol="0" anchor="ctr">
+            <a:normAutofit/>
+          </a:bodyPr>
           <a:lstStyle/>
           <a:p>
             <a:pPr indent="0" marL="0">
@@ -6299,7 +6549,7 @@
         </p:nvSpPr>
         <p:spPr>
           <a:xfrm>
-            <a:off x="2423160" y="2450592"/>
+            <a:off x="2487168" y="2450592"/>
             <a:ext cx="4937760" cy="402336"/>
           </a:xfrm>
           <a:prstGeom prst="rect">
@@ -6309,7 +6559,9 @@
           <a:ln/>
         </p:spPr>
         <p:txBody>
-          <a:bodyPr wrap="square" lIns="0" tIns="0" rIns="0" bIns="0" rtlCol="0" anchor="ctr"/>
+          <a:bodyPr wrap="square" lIns="0" tIns="0" rIns="0" bIns="0" rtlCol="0" anchor="ctr">
+            <a:normAutofit/>
+          </a:bodyPr>
           <a:lstStyle/>
           <a:p>
             <a:pPr indent="0" marL="0">
@@ -6341,7 +6593,7 @@
         </p:nvSpPr>
         <p:spPr>
           <a:xfrm>
-            <a:off x="502920" y="2852928"/>
+            <a:off x="566928" y="2852928"/>
             <a:ext cx="6858000" cy="0"/>
           </a:xfrm>
           <a:prstGeom prst="line">
@@ -6364,7 +6616,7 @@
         </p:nvSpPr>
         <p:spPr>
           <a:xfrm>
-            <a:off x="502920" y="2852928"/>
+            <a:off x="566928" y="2852928"/>
             <a:ext cx="1920240" cy="402336"/>
           </a:xfrm>
           <a:prstGeom prst="rect">
@@ -6374,7 +6626,9 @@
           <a:ln/>
         </p:spPr>
         <p:txBody>
-          <a:bodyPr wrap="square" lIns="0" tIns="0" rIns="0" bIns="0" rtlCol="0" anchor="ctr"/>
+          <a:bodyPr wrap="square" lIns="0" tIns="0" rIns="0" bIns="0" rtlCol="0" anchor="ctr">
+            <a:normAutofit/>
+          </a:bodyPr>
           <a:lstStyle/>
           <a:p>
             <a:pPr indent="0" marL="0">
@@ -6406,7 +6660,7 @@
         </p:nvSpPr>
         <p:spPr>
           <a:xfrm>
-            <a:off x="2423160" y="2852928"/>
+            <a:off x="2487168" y="2852928"/>
             <a:ext cx="4937760" cy="402336"/>
           </a:xfrm>
           <a:prstGeom prst="rect">
@@ -6416,7 +6670,9 @@
           <a:ln/>
         </p:spPr>
         <p:txBody>
-          <a:bodyPr wrap="square" lIns="0" tIns="0" rIns="0" bIns="0" rtlCol="0" anchor="ctr"/>
+          <a:bodyPr wrap="square" lIns="0" tIns="0" rIns="0" bIns="0" rtlCol="0" anchor="ctr">
+            <a:normAutofit/>
+          </a:bodyPr>
           <a:lstStyle/>
           <a:p>
             <a:pPr indent="0" marL="0">
@@ -6448,7 +6704,7 @@
         </p:nvSpPr>
         <p:spPr>
           <a:xfrm>
-            <a:off x="502920" y="3255264"/>
+            <a:off x="566928" y="3255264"/>
             <a:ext cx="6858000" cy="0"/>
           </a:xfrm>
           <a:prstGeom prst="line">
@@ -6471,7 +6727,7 @@
         </p:nvSpPr>
         <p:spPr>
           <a:xfrm>
-            <a:off x="502920" y="3255264"/>
+            <a:off x="566928" y="3255264"/>
             <a:ext cx="1920240" cy="402336"/>
           </a:xfrm>
           <a:prstGeom prst="rect">
@@ -6481,7 +6737,9 @@
           <a:ln/>
         </p:spPr>
         <p:txBody>
-          <a:bodyPr wrap="square" lIns="0" tIns="0" rIns="0" bIns="0" rtlCol="0" anchor="ctr"/>
+          <a:bodyPr wrap="square" lIns="0" tIns="0" rIns="0" bIns="0" rtlCol="0" anchor="ctr">
+            <a:normAutofit/>
+          </a:bodyPr>
           <a:lstStyle/>
           <a:p>
             <a:pPr indent="0" marL="0">
@@ -6513,7 +6771,7 @@
         </p:nvSpPr>
         <p:spPr>
           <a:xfrm>
-            <a:off x="2423160" y="3255264"/>
+            <a:off x="2487168" y="3255264"/>
             <a:ext cx="4937760" cy="402336"/>
           </a:xfrm>
           <a:prstGeom prst="rect">
@@ -6523,7 +6781,9 @@
           <a:ln/>
         </p:spPr>
         <p:txBody>
-          <a:bodyPr wrap="square" lIns="0" tIns="0" rIns="0" bIns="0" rtlCol="0" anchor="ctr"/>
+          <a:bodyPr wrap="square" lIns="0" tIns="0" rIns="0" bIns="0" rtlCol="0" anchor="ctr">
+            <a:normAutofit/>
+          </a:bodyPr>
           <a:lstStyle/>
           <a:p>
             <a:pPr indent="0" marL="0">
@@ -6555,7 +6815,7 @@
         </p:nvSpPr>
         <p:spPr>
           <a:xfrm>
-            <a:off x="502920" y="3657600"/>
+            <a:off x="566928" y="3657600"/>
             <a:ext cx="6858000" cy="0"/>
           </a:xfrm>
           <a:prstGeom prst="line">
@@ -6578,7 +6838,7 @@
         </p:nvSpPr>
         <p:spPr>
           <a:xfrm>
-            <a:off x="502920" y="3657600"/>
+            <a:off x="566928" y="3657600"/>
             <a:ext cx="1920240" cy="402336"/>
           </a:xfrm>
           <a:prstGeom prst="rect">
@@ -6588,7 +6848,9 @@
           <a:ln/>
         </p:spPr>
         <p:txBody>
-          <a:bodyPr wrap="square" lIns="0" tIns="0" rIns="0" bIns="0" rtlCol="0" anchor="ctr"/>
+          <a:bodyPr wrap="square" lIns="0" tIns="0" rIns="0" bIns="0" rtlCol="0" anchor="ctr">
+            <a:normAutofit/>
+          </a:bodyPr>
           <a:lstStyle/>
           <a:p>
             <a:pPr indent="0" marL="0">
@@ -6620,7 +6882,7 @@
         </p:nvSpPr>
         <p:spPr>
           <a:xfrm>
-            <a:off x="2423160" y="3657600"/>
+            <a:off x="2487168" y="3657600"/>
             <a:ext cx="4937760" cy="402336"/>
           </a:xfrm>
           <a:prstGeom prst="rect">
@@ -6630,7 +6892,9 @@
           <a:ln/>
         </p:spPr>
         <p:txBody>
-          <a:bodyPr wrap="square" lIns="0" tIns="0" rIns="0" bIns="0" rtlCol="0" anchor="ctr"/>
+          <a:bodyPr wrap="square" lIns="0" tIns="0" rIns="0" bIns="0" rtlCol="0" anchor="ctr">
+            <a:normAutofit/>
+          </a:bodyPr>
           <a:lstStyle/>
           <a:p>
             <a:pPr indent="0" marL="0">
@@ -6662,7 +6926,7 @@
         </p:nvSpPr>
         <p:spPr>
           <a:xfrm>
-            <a:off x="7540600" y="1371600"/>
+            <a:off x="7604608" y="1371600"/>
             <a:ext cx="0" cy="4754880"/>
           </a:xfrm>
           <a:prstGeom prst="line">
@@ -6685,7 +6949,7 @@
         </p:nvSpPr>
         <p:spPr>
           <a:xfrm>
-            <a:off x="7720279" y="1645920"/>
+            <a:off x="7784287" y="1645920"/>
             <a:ext cx="3840480" cy="2103120"/>
           </a:xfrm>
           <a:prstGeom prst="roundRect">
@@ -6707,7 +6971,7 @@
         </p:nvSpPr>
         <p:spPr>
           <a:xfrm>
-            <a:off x="7720279" y="1700784"/>
+            <a:off x="7784287" y="1700784"/>
             <a:ext cx="36576" cy="1993392"/>
           </a:xfrm>
           <a:prstGeom prst="rect">
@@ -6727,7 +6991,7 @@
         </p:nvSpPr>
         <p:spPr>
           <a:xfrm>
-            <a:off x="7866583" y="1737360"/>
+            <a:off x="7930591" y="1737360"/>
             <a:ext cx="3584448" cy="201168"/>
           </a:xfrm>
           <a:prstGeom prst="rect">
@@ -6766,7 +7030,7 @@
         </p:nvSpPr>
         <p:spPr>
           <a:xfrm>
-            <a:off x="7866583" y="1938528"/>
+            <a:off x="7930591" y="1938528"/>
             <a:ext cx="3584448" cy="1773936"/>
           </a:xfrm>
           <a:prstGeom prst="rect">
@@ -6857,7 +7121,7 @@
         </p:nvSpPr>
         <p:spPr>
           <a:xfrm>
-            <a:off x="502920" y="6382512"/>
+            <a:off x="566928" y="6382512"/>
             <a:ext cx="7315200" cy="219456"/>
           </a:xfrm>
           <a:prstGeom prst="rect">
@@ -6896,7 +7160,7 @@
         </p:nvSpPr>
         <p:spPr>
           <a:xfrm>
-            <a:off x="10774375" y="6382512"/>
+            <a:off x="10710367" y="6382512"/>
             <a:ext cx="914400" cy="219456"/>
           </a:xfrm>
           <a:prstGeom prst="rect">
@@ -6967,7 +7231,7 @@
         </p:nvSpPr>
         <p:spPr>
           <a:xfrm>
-            <a:off x="502920" y="457200"/>
+            <a:off x="566928" y="457200"/>
             <a:ext cx="384048" cy="384048"/>
           </a:xfrm>
           <a:prstGeom prst="ellipse">
@@ -6987,7 +7251,7 @@
         </p:nvSpPr>
         <p:spPr>
           <a:xfrm>
-            <a:off x="502920" y="457200"/>
+            <a:off x="566928" y="457200"/>
             <a:ext cx="384048" cy="384048"/>
           </a:xfrm>
           <a:prstGeom prst="rect">
@@ -7026,7 +7290,7 @@
         </p:nvSpPr>
         <p:spPr>
           <a:xfrm>
-            <a:off x="1069848" y="457200"/>
+            <a:off x="1133856" y="457200"/>
             <a:ext cx="10490911" cy="182880"/>
           </a:xfrm>
           <a:prstGeom prst="rect">
@@ -7051,7 +7315,7 @@
                 <a:ea typeface="Arial" pitchFamily="34" charset="-122"/>
                 <a:cs typeface="Arial" pitchFamily="34" charset="-120"/>
               </a:rPr>
-              <a:t>수익률</a:t>
+              <a:t>렌트롤</a:t>
             </a:r>
             <a:endParaRPr lang="en-US" sz="950" dirty="0"/>
           </a:p>
@@ -7065,7 +7329,7 @@
         </p:nvSpPr>
         <p:spPr>
           <a:xfrm>
-            <a:off x="1069848" y="640080"/>
+            <a:off x="1133856" y="640080"/>
             <a:ext cx="10490911" cy="365760"/>
           </a:xfrm>
           <a:prstGeom prst="rect">
@@ -7075,7 +7339,9 @@
           <a:ln/>
         </p:spPr>
         <p:txBody>
-          <a:bodyPr wrap="square" lIns="0" tIns="0" rIns="0" bIns="0" rtlCol="0" anchor="ctr"/>
+          <a:bodyPr wrap="square" lIns="0" tIns="0" rIns="0" bIns="0" rtlCol="0" anchor="ctr">
+            <a:normAutofit/>
+          </a:bodyPr>
           <a:lstStyle/>
           <a:p>
             <a:pPr indent="0" marL="0">
@@ -7090,7 +7356,7 @@
                 <a:ea typeface="맑은 고딕" pitchFamily="34" charset="-122"/>
                 <a:cs typeface="맑은 고딕" pitchFamily="34" charset="-120"/>
               </a:rPr>
-              <a:t>수익률</a:t>
+              <a:t>렌트롤</a:t>
             </a:r>
             <a:endParaRPr lang="en-US" sz="2300" dirty="0"/>
           </a:p>
@@ -7104,18 +7370,18 @@
         </p:nvSpPr>
         <p:spPr>
           <a:xfrm>
-            <a:off x="502920" y="1371600"/>
+            <a:off x="566928" y="1481328"/>
             <a:ext cx="11057839" cy="4389120"/>
           </a:xfrm>
           <a:prstGeom prst="roundRect">
             <a:avLst>
-              <a:gd name="adj" fmla="val 1667"/>
+              <a:gd name="adj" fmla="val 1250"/>
             </a:avLst>
           </a:prstGeom>
           <a:solidFill>
-            <a:srgbClr val="FFFFFF"/>
+            <a:srgbClr val="F3F6F7"/>
           </a:solidFill>
-          <a:ln w="12700">
+          <a:ln w="6350">
             <a:solidFill>
               <a:srgbClr val="CBD5E0"/>
             </a:solidFill>
@@ -7131,194 +7397,20 @@
         </p:nvSpPr>
         <p:spPr>
           <a:xfrm>
-            <a:off x="731520" y="1600200"/>
-            <a:ext cx="10600639" cy="1005840"/>
+            <a:off x="822960" y="1700784"/>
+            <a:ext cx="1435608" cy="219456"/>
           </a:xfrm>
           <a:prstGeom prst="roundRect">
             <a:avLst>
-              <a:gd name="adj" fmla="val 7273"/>
+              <a:gd name="adj" fmla="val 50000"/>
             </a:avLst>
           </a:prstGeom>
           <a:solidFill>
-            <a:srgbClr val="132A3A"/>
+            <a:srgbClr val="F6F1E4"/>
           </a:solidFill>
-          <a:ln/>
-        </p:spPr>
-      </p:sp>
-      <p:sp>
-        <p:nvSpPr>
-          <p:cNvPr id="8" name="Text 6"/>
-          <p:cNvSpPr/>
-          <p:nvPr/>
-        </p:nvSpPr>
-        <p:spPr>
-          <a:xfrm>
-            <a:off x="960120" y="1600200"/>
-            <a:ext cx="2286000" cy="1005840"/>
-          </a:xfrm>
-          <a:prstGeom prst="rect">
-            <a:avLst/>
-          </a:prstGeom>
-          <a:noFill/>
-          <a:ln/>
-        </p:spPr>
-        <p:txBody>
-          <a:bodyPr wrap="square" rtlCol="0" anchor="ctr"/>
-          <a:lstStyle/>
-          <a:p>
-            <a:pPr indent="0" marL="0">
-              <a:buNone/>
-            </a:pPr>
-            <a:r>
-              <a:rPr lang="en-US" sz="1600" b="1" dirty="0">
-                <a:solidFill>
-                  <a:srgbClr val="FFFFFF"/>
-                </a:solidFill>
-                <a:latin typeface="맑은 고딕" pitchFamily="34" charset="0"/>
-                <a:ea typeface="맑은 고딕" pitchFamily="34" charset="-122"/>
-                <a:cs typeface="맑은 고딕" pitchFamily="34" charset="-120"/>
-              </a:rPr>
-              <a:t>수익률</a:t>
-            </a:r>
-            <a:endParaRPr lang="en-US" sz="1600" dirty="0"/>
-          </a:p>
-        </p:txBody>
-      </p:sp>
-      <p:sp>
-        <p:nvSpPr>
-          <p:cNvPr id="9" name="Text 7"/>
-          <p:cNvSpPr/>
-          <p:nvPr/>
-        </p:nvSpPr>
-        <p:spPr>
-          <a:xfrm>
-            <a:off x="8360359" y="1600200"/>
-            <a:ext cx="2743200" cy="1005840"/>
-          </a:xfrm>
-          <a:prstGeom prst="rect">
-            <a:avLst/>
-          </a:prstGeom>
-          <a:noFill/>
-          <a:ln/>
-        </p:spPr>
-        <p:txBody>
-          <a:bodyPr wrap="square" rtlCol="0" anchor="ctr"/>
-          <a:lstStyle/>
-          <a:p>
-            <a:pPr algn="r" indent="0" marL="0">
-              <a:buNone/>
-            </a:pPr>
-            <a:r>
-              <a:rPr lang="en-US" sz="2800" b="1" dirty="0">
-                <a:solidFill>
-                  <a:srgbClr val="B8860B"/>
-                </a:solidFill>
-                <a:latin typeface="Arial" pitchFamily="34" charset="0"/>
-                <a:ea typeface="Arial" pitchFamily="34" charset="-122"/>
-                <a:cs typeface="Arial" pitchFamily="34" charset="-120"/>
-              </a:rPr>
-              <a:t>0.00%</a:t>
-            </a:r>
-            <a:endParaRPr lang="en-US" sz="2800" dirty="0"/>
-          </a:p>
-        </p:txBody>
-      </p:sp>
-      <p:sp>
-        <p:nvSpPr>
-          <p:cNvPr id="10" name="Text 8"/>
-          <p:cNvSpPr/>
-          <p:nvPr/>
-        </p:nvSpPr>
-        <p:spPr>
-          <a:xfrm>
-            <a:off x="822960" y="2834640"/>
-            <a:ext cx="2743200" cy="347472"/>
-          </a:xfrm>
-          <a:prstGeom prst="rect">
-            <a:avLst/>
-          </a:prstGeom>
-          <a:noFill/>
-          <a:ln/>
-        </p:spPr>
-        <p:txBody>
-          <a:bodyPr wrap="square" rtlCol="0" anchor="ctr"/>
-          <a:lstStyle/>
-          <a:p>
-            <a:pPr indent="0" marL="0">
-              <a:buNone/>
-            </a:pPr>
-            <a:r>
-              <a:rPr lang="en-US" sz="1100" dirty="0">
-                <a:solidFill>
-                  <a:srgbClr val="5B6B73"/>
-                </a:solidFill>
-                <a:latin typeface="맑은 고딕" pitchFamily="34" charset="0"/>
-                <a:ea typeface="맑은 고딕" pitchFamily="34" charset="-122"/>
-                <a:cs typeface="맑은 고딕" pitchFamily="34" charset="-120"/>
-              </a:rPr>
-              <a:t>연간 임대수입</a:t>
-            </a:r>
-            <a:endParaRPr lang="en-US" sz="1100" dirty="0"/>
-          </a:p>
-        </p:txBody>
-      </p:sp>
-      <p:sp>
-        <p:nvSpPr>
-          <p:cNvPr id="11" name="Text 9"/>
-          <p:cNvSpPr/>
-          <p:nvPr/>
-        </p:nvSpPr>
-        <p:spPr>
-          <a:xfrm>
-            <a:off x="9000439" y="2834640"/>
-            <a:ext cx="2194560" cy="347472"/>
-          </a:xfrm>
-          <a:prstGeom prst="rect">
-            <a:avLst/>
-          </a:prstGeom>
-          <a:noFill/>
-          <a:ln/>
-        </p:spPr>
-        <p:txBody>
-          <a:bodyPr wrap="square" rtlCol="0" anchor="ctr"/>
-          <a:lstStyle/>
-          <a:p>
-            <a:pPr algn="r" indent="0" marL="0">
-              <a:buNone/>
-            </a:pPr>
-            <a:r>
-              <a:rPr lang="en-US" sz="1200" dirty="0">
-                <a:solidFill>
-                  <a:srgbClr val="132A3A"/>
-                </a:solidFill>
-                <a:latin typeface="Arial" pitchFamily="34" charset="0"/>
-                <a:ea typeface="Arial" pitchFamily="34" charset="-122"/>
-                <a:cs typeface="Arial" pitchFamily="34" charset="-120"/>
-              </a:rPr>
-              <a:t>0만원</a:t>
-            </a:r>
-            <a:endParaRPr lang="en-US" sz="1200" dirty="0"/>
-          </a:p>
-        </p:txBody>
-      </p:sp>
-      <p:sp>
-        <p:nvSpPr>
-          <p:cNvPr id="12" name="Shape 10"/>
-          <p:cNvSpPr/>
-          <p:nvPr/>
-        </p:nvSpPr>
-        <p:spPr>
-          <a:xfrm>
-            <a:off x="731520" y="3182112"/>
-            <a:ext cx="10600639" cy="0"/>
-          </a:xfrm>
-          <a:prstGeom prst="line">
-            <a:avLst/>
-          </a:prstGeom>
-          <a:noFill/>
           <a:ln w="6350">
             <a:solidFill>
-              <a:srgbClr val="E8E8E8"/>
+              <a:srgbClr val="8B6508"/>
             </a:solidFill>
             <a:prstDash val="solid"/>
           </a:ln>
@@ -7326,30 +7418,111 @@
       </p:sp>
       <p:sp>
         <p:nvSpPr>
-          <p:cNvPr id="13" name="Text 11"/>
-          <p:cNvSpPr/>
-          <p:nvPr/>
-        </p:nvSpPr>
-        <p:spPr>
-          <a:xfrm>
-            <a:off x="822960" y="3182112"/>
-            <a:ext cx="2743200" cy="347472"/>
-          </a:xfrm>
-          <a:prstGeom prst="rect">
-            <a:avLst/>
-          </a:prstGeom>
-          <a:noFill/>
-          <a:ln/>
-        </p:spPr>
-        <p:txBody>
-          <a:bodyPr wrap="square" rtlCol="0" anchor="ctr"/>
-          <a:lstStyle/>
-          <a:p>
-            <a:pPr indent="0" marL="0">
-              <a:buNone/>
-            </a:pPr>
-            <a:r>
-              <a:rPr lang="en-US" sz="1100" dirty="0">
+          <p:cNvPr id="8" name="Text 6"/>
+          <p:cNvSpPr/>
+          <p:nvPr/>
+        </p:nvSpPr>
+        <p:spPr>
+          <a:xfrm>
+            <a:off x="822960" y="1700784"/>
+            <a:ext cx="1435608" cy="219456"/>
+          </a:xfrm>
+          <a:prstGeom prst="rect">
+            <a:avLst/>
+          </a:prstGeom>
+          <a:noFill/>
+          <a:ln/>
+        </p:spPr>
+        <p:txBody>
+          <a:bodyPr wrap="square" lIns="0" tIns="0" rIns="0" bIns="0" rtlCol="0" anchor="ctr"/>
+          <a:lstStyle/>
+          <a:p>
+            <a:pPr algn="ctr" indent="0" marL="0">
+              <a:buNone/>
+            </a:pPr>
+            <a:r>
+              <a:rPr lang="en-US" sz="850" b="1" dirty="0">
+                <a:solidFill>
+                  <a:srgbClr val="8B6508"/>
+                </a:solidFill>
+                <a:latin typeface="맑은 고딕" pitchFamily="34" charset="0"/>
+                <a:ea typeface="맑은 고딕" pitchFamily="34" charset="-122"/>
+                <a:cs typeface="맑은 고딕" pitchFamily="34" charset="-120"/>
+              </a:rPr>
+              <a:t>[ 임대차 실사 안내 ]</a:t>
+            </a:r>
+            <a:endParaRPr lang="en-US" sz="850" dirty="0"/>
+          </a:p>
+        </p:txBody>
+      </p:sp>
+      <p:sp>
+        <p:nvSpPr>
+          <p:cNvPr id="9" name="Text 7"/>
+          <p:cNvSpPr/>
+          <p:nvPr/>
+        </p:nvSpPr>
+        <p:spPr>
+          <a:xfrm>
+            <a:off x="822960" y="1993392"/>
+            <a:ext cx="10545775" cy="274320"/>
+          </a:xfrm>
+          <a:prstGeom prst="rect">
+            <a:avLst/>
+          </a:prstGeom>
+          <a:noFill/>
+          <a:ln/>
+        </p:spPr>
+        <p:txBody>
+          <a:bodyPr wrap="square" lIns="0" tIns="0" rIns="0" bIns="0" rtlCol="0" anchor="ctr"/>
+          <a:lstStyle/>
+          <a:p>
+            <a:pPr indent="0" marL="0">
+              <a:buNone/>
+            </a:pPr>
+            <a:r>
+              <a:rPr lang="en-US" sz="1200" b="1" dirty="0">
+                <a:solidFill>
+                  <a:srgbClr val="132A3A"/>
+                </a:solidFill>
+                <a:latin typeface="맑은 고딕" pitchFamily="34" charset="0"/>
+                <a:ea typeface="맑은 고딕" pitchFamily="34" charset="-122"/>
+                <a:cs typeface="맑은 고딕" pitchFamily="34" charset="-120"/>
+              </a:rPr>
+              <a:t>임대차 계약 및 렌트롤 상세 실사 프로토콜</a:t>
+            </a:r>
+            <a:endParaRPr lang="en-US" sz="1200" dirty="0"/>
+          </a:p>
+        </p:txBody>
+      </p:sp>
+      <p:sp>
+        <p:nvSpPr>
+          <p:cNvPr id="10" name="Text 8"/>
+          <p:cNvSpPr/>
+          <p:nvPr/>
+        </p:nvSpPr>
+        <p:spPr>
+          <a:xfrm>
+            <a:off x="822960" y="2304288"/>
+            <a:ext cx="10545775" cy="438912"/>
+          </a:xfrm>
+          <a:prstGeom prst="rect">
+            <a:avLst/>
+          </a:prstGeom>
+          <a:noFill/>
+          <a:ln/>
+        </p:spPr>
+        <p:txBody>
+          <a:bodyPr wrap="square" lIns="0" tIns="0" rIns="0" bIns="0" rtlCol="0" anchor="t"/>
+          <a:lstStyle/>
+          <a:p>
+            <a:pPr indent="0" marL="0">
+              <a:lnSpc>
+                <a:spcPct val="115000"/>
+              </a:lnSpc>
+              <a:buNone/>
+            </a:pPr>
+            <a:r>
+              <a:rPr lang="en-US" sz="950" dirty="0">
                 <a:solidFill>
                   <a:srgbClr val="5B6B73"/>
                 </a:solidFill>
@@ -7357,69 +7530,30 @@
                 <a:ea typeface="맑은 고딕" pitchFamily="34" charset="-122"/>
                 <a:cs typeface="맑은 고딕" pitchFamily="34" charset="-120"/>
               </a:rPr>
-              <a:t>승계 보증금</a:t>
-            </a:r>
-            <a:endParaRPr lang="en-US" sz="1100" dirty="0"/>
-          </a:p>
-        </p:txBody>
-      </p:sp>
-      <p:sp>
-        <p:nvSpPr>
-          <p:cNvPr id="14" name="Text 12"/>
-          <p:cNvSpPr/>
-          <p:nvPr/>
-        </p:nvSpPr>
-        <p:spPr>
-          <a:xfrm>
-            <a:off x="9000439" y="3182112"/>
-            <a:ext cx="2194560" cy="347472"/>
-          </a:xfrm>
-          <a:prstGeom prst="rect">
-            <a:avLst/>
-          </a:prstGeom>
-          <a:noFill/>
-          <a:ln/>
-        </p:spPr>
-        <p:txBody>
-          <a:bodyPr wrap="square" rtlCol="0" anchor="ctr"/>
-          <a:lstStyle/>
-          <a:p>
-            <a:pPr algn="r" indent="0" marL="0">
-              <a:buNone/>
-            </a:pPr>
-            <a:r>
-              <a:rPr lang="en-US" sz="1200" dirty="0">
-                <a:solidFill>
-                  <a:srgbClr val="132A3A"/>
-                </a:solidFill>
-                <a:latin typeface="Arial" pitchFamily="34" charset="0"/>
-                <a:ea typeface="Arial" pitchFamily="34" charset="-122"/>
-                <a:cs typeface="Arial" pitchFamily="34" charset="-120"/>
-              </a:rPr>
-              <a:t>0만원</a:t>
-            </a:r>
-            <a:endParaRPr lang="en-US" sz="1200" dirty="0"/>
-          </a:p>
-        </p:txBody>
-      </p:sp>
-      <p:sp>
-        <p:nvSpPr>
-          <p:cNvPr id="15" name="Shape 13"/>
-          <p:cNvSpPr/>
-          <p:nvPr/>
-        </p:nvSpPr>
-        <p:spPr>
-          <a:xfrm>
-            <a:off x="731520" y="3529584"/>
-            <a:ext cx="10600639" cy="0"/>
+              <a:t>본 자산의 세부 층별 임대차 계약 원장 및 정산 내역은 매수 의향 접수 및 비밀유지협약(NDA) 체결 후 실측 대조가 진행됩니다.</a:t>
+            </a:r>
+            <a:endParaRPr lang="en-US" sz="950" dirty="0"/>
+          </a:p>
+        </p:txBody>
+      </p:sp>
+      <p:sp>
+        <p:nvSpPr>
+          <p:cNvPr id="11" name="Shape 9"/>
+          <p:cNvSpPr/>
+          <p:nvPr/>
+        </p:nvSpPr>
+        <p:spPr>
+          <a:xfrm>
+            <a:off x="822960" y="2798064"/>
+            <a:ext cx="10545775" cy="0"/>
           </a:xfrm>
           <a:prstGeom prst="line">
             <a:avLst/>
           </a:prstGeom>
           <a:noFill/>
-          <a:ln w="6350">
+          <a:ln w="5080">
             <a:solidFill>
-              <a:srgbClr val="E8E8E8"/>
+              <a:srgbClr val="CBD5E0"/>
             </a:solidFill>
             <a:prstDash val="solid"/>
           </a:ln>
@@ -7427,30 +7561,278 @@
       </p:sp>
       <p:sp>
         <p:nvSpPr>
-          <p:cNvPr id="16" name="Text 14"/>
-          <p:cNvSpPr/>
-          <p:nvPr/>
-        </p:nvSpPr>
-        <p:spPr>
-          <a:xfrm>
-            <a:off x="822960" y="3529584"/>
-            <a:ext cx="2743200" cy="347472"/>
-          </a:xfrm>
-          <a:prstGeom prst="rect">
-            <a:avLst/>
-          </a:prstGeom>
-          <a:noFill/>
-          <a:ln/>
-        </p:spPr>
-        <p:txBody>
-          <a:bodyPr wrap="square" rtlCol="0" anchor="ctr"/>
-          <a:lstStyle/>
-          <a:p>
-            <a:pPr indent="0" marL="0">
-              <a:buNone/>
-            </a:pPr>
-            <a:r>
-              <a:rPr lang="en-US" sz="1100" dirty="0">
+          <p:cNvPr id="12" name="Shape 10"/>
+          <p:cNvSpPr/>
+          <p:nvPr/>
+        </p:nvSpPr>
+        <p:spPr>
+          <a:xfrm>
+            <a:off x="859536" y="2944368"/>
+            <a:ext cx="64008" cy="64008"/>
+          </a:xfrm>
+          <a:prstGeom prst="rect">
+            <a:avLst/>
+          </a:prstGeom>
+          <a:solidFill>
+            <a:srgbClr val="B8860B"/>
+          </a:solidFill>
+          <a:ln/>
+        </p:spPr>
+      </p:sp>
+      <p:sp>
+        <p:nvSpPr>
+          <p:cNvPr id="13" name="Text 11"/>
+          <p:cNvSpPr/>
+          <p:nvPr/>
+        </p:nvSpPr>
+        <p:spPr>
+          <a:xfrm>
+            <a:off x="987552" y="2889504"/>
+            <a:ext cx="10326319" cy="653796"/>
+          </a:xfrm>
+          <a:prstGeom prst="rect">
+            <a:avLst/>
+          </a:prstGeom>
+          <a:noFill/>
+          <a:ln/>
+        </p:spPr>
+        <p:txBody>
+          <a:bodyPr wrap="square" lIns="0" tIns="0" rIns="0" bIns="0" rtlCol="0" anchor="t"/>
+          <a:lstStyle/>
+          <a:p>
+            <a:pPr indent="0" marL="0">
+              <a:lnSpc>
+                <a:spcPct val="112000"/>
+              </a:lnSpc>
+              <a:buNone/>
+            </a:pPr>
+            <a:r>
+              <a:rPr lang="en-US" sz="920" dirty="0">
+                <a:solidFill>
+                  <a:srgbClr val="2B2B2B"/>
+                </a:solidFill>
+                <a:latin typeface="맑은 고딕" pitchFamily="34" charset="0"/>
+                <a:ea typeface="맑은 고딕" pitchFamily="34" charset="-122"/>
+                <a:cs typeface="맑은 고딕" pitchFamily="34" charset="-120"/>
+              </a:rPr>
+              <a:t>임대차 계약서 원본 전수 대조 (임대료, 관리비, 계약기간, 만기일 및 갱신 옵션)</a:t>
+            </a:r>
+            <a:endParaRPr lang="en-US" sz="920" dirty="0"/>
+          </a:p>
+        </p:txBody>
+      </p:sp>
+      <p:sp>
+        <p:nvSpPr>
+          <p:cNvPr id="14" name="Shape 12"/>
+          <p:cNvSpPr/>
+          <p:nvPr/>
+        </p:nvSpPr>
+        <p:spPr>
+          <a:xfrm>
+            <a:off x="859536" y="3634740"/>
+            <a:ext cx="64008" cy="64008"/>
+          </a:xfrm>
+          <a:prstGeom prst="rect">
+            <a:avLst/>
+          </a:prstGeom>
+          <a:solidFill>
+            <a:srgbClr val="B8860B"/>
+          </a:solidFill>
+          <a:ln/>
+        </p:spPr>
+      </p:sp>
+      <p:sp>
+        <p:nvSpPr>
+          <p:cNvPr id="15" name="Text 13"/>
+          <p:cNvSpPr/>
+          <p:nvPr/>
+        </p:nvSpPr>
+        <p:spPr>
+          <a:xfrm>
+            <a:off x="987552" y="3579876"/>
+            <a:ext cx="10326319" cy="653796"/>
+          </a:xfrm>
+          <a:prstGeom prst="rect">
+            <a:avLst/>
+          </a:prstGeom>
+          <a:noFill/>
+          <a:ln/>
+        </p:spPr>
+        <p:txBody>
+          <a:bodyPr wrap="square" lIns="0" tIns="0" rIns="0" bIns="0" rtlCol="0" anchor="t"/>
+          <a:lstStyle/>
+          <a:p>
+            <a:pPr indent="0" marL="0">
+              <a:lnSpc>
+                <a:spcPct val="112000"/>
+              </a:lnSpc>
+              <a:buNone/>
+            </a:pPr>
+            <a:r>
+              <a:rPr lang="en-US" sz="920" dirty="0">
+                <a:solidFill>
+                  <a:srgbClr val="2B2B2B"/>
+                </a:solidFill>
+                <a:latin typeface="맑은 고딕" pitchFamily="34" charset="0"/>
+                <a:ea typeface="맑은 고딕" pitchFamily="34" charset="-122"/>
+                <a:cs typeface="맑은 고딕" pitchFamily="34" charset="-120"/>
+              </a:rPr>
+              <a:t>보증금 및 월임대료 입금 금융 원장 대조·검증 (체납 내역 및 부가가치세 신고서 정합성)</a:t>
+            </a:r>
+            <a:endParaRPr lang="en-US" sz="920" dirty="0"/>
+          </a:p>
+        </p:txBody>
+      </p:sp>
+      <p:sp>
+        <p:nvSpPr>
+          <p:cNvPr id="16" name="Shape 14"/>
+          <p:cNvSpPr/>
+          <p:nvPr/>
+        </p:nvSpPr>
+        <p:spPr>
+          <a:xfrm>
+            <a:off x="859536" y="4325112"/>
+            <a:ext cx="64008" cy="64008"/>
+          </a:xfrm>
+          <a:prstGeom prst="rect">
+            <a:avLst/>
+          </a:prstGeom>
+          <a:solidFill>
+            <a:srgbClr val="B8860B"/>
+          </a:solidFill>
+          <a:ln/>
+        </p:spPr>
+      </p:sp>
+      <p:sp>
+        <p:nvSpPr>
+          <p:cNvPr id="17" name="Text 15"/>
+          <p:cNvSpPr/>
+          <p:nvPr/>
+        </p:nvSpPr>
+        <p:spPr>
+          <a:xfrm>
+            <a:off x="987552" y="4270248"/>
+            <a:ext cx="10326319" cy="653796"/>
+          </a:xfrm>
+          <a:prstGeom prst="rect">
+            <a:avLst/>
+          </a:prstGeom>
+          <a:noFill/>
+          <a:ln/>
+        </p:spPr>
+        <p:txBody>
+          <a:bodyPr wrap="square" lIns="0" tIns="0" rIns="0" bIns="0" rtlCol="0" anchor="t"/>
+          <a:lstStyle/>
+          <a:p>
+            <a:pPr indent="0" marL="0">
+              <a:lnSpc>
+                <a:spcPct val="112000"/>
+              </a:lnSpc>
+              <a:buNone/>
+            </a:pPr>
+            <a:r>
+              <a:rPr lang="en-US" sz="920" dirty="0">
+                <a:solidFill>
+                  <a:srgbClr val="2B2B2B"/>
+                </a:solidFill>
+                <a:latin typeface="맑은 고딕" pitchFamily="34" charset="0"/>
+                <a:ea typeface="맑은 고딕" pitchFamily="34" charset="-122"/>
+                <a:cs typeface="맑은 고딕" pitchFamily="34" charset="-120"/>
+              </a:rPr>
+              <a:t>특약 사항 및 렌트프리(Rent-Free), 핏아웃(Fit-out) 등 실질 유효 임대료(Net Effective Rent) 산정</a:t>
+            </a:r>
+            <a:endParaRPr lang="en-US" sz="920" dirty="0"/>
+          </a:p>
+        </p:txBody>
+      </p:sp>
+      <p:sp>
+        <p:nvSpPr>
+          <p:cNvPr id="18" name="Shape 16"/>
+          <p:cNvSpPr/>
+          <p:nvPr/>
+        </p:nvSpPr>
+        <p:spPr>
+          <a:xfrm>
+            <a:off x="859536" y="5015484"/>
+            <a:ext cx="64008" cy="64008"/>
+          </a:xfrm>
+          <a:prstGeom prst="rect">
+            <a:avLst/>
+          </a:prstGeom>
+          <a:solidFill>
+            <a:srgbClr val="B8860B"/>
+          </a:solidFill>
+          <a:ln/>
+        </p:spPr>
+      </p:sp>
+      <p:sp>
+        <p:nvSpPr>
+          <p:cNvPr id="19" name="Text 17"/>
+          <p:cNvSpPr/>
+          <p:nvPr/>
+        </p:nvSpPr>
+        <p:spPr>
+          <a:xfrm>
+            <a:off x="987552" y="4960620"/>
+            <a:ext cx="10326319" cy="653796"/>
+          </a:xfrm>
+          <a:prstGeom prst="rect">
+            <a:avLst/>
+          </a:prstGeom>
+          <a:noFill/>
+          <a:ln/>
+        </p:spPr>
+        <p:txBody>
+          <a:bodyPr wrap="square" lIns="0" tIns="0" rIns="0" bIns="0" rtlCol="0" anchor="t"/>
+          <a:lstStyle/>
+          <a:p>
+            <a:pPr indent="0" marL="0">
+              <a:lnSpc>
+                <a:spcPct val="112000"/>
+              </a:lnSpc>
+              <a:buNone/>
+            </a:pPr>
+            <a:r>
+              <a:rPr lang="en-US" sz="920" dirty="0">
+                <a:solidFill>
+                  <a:srgbClr val="2B2B2B"/>
+                </a:solidFill>
+                <a:latin typeface="맑은 고딕" pitchFamily="34" charset="0"/>
+                <a:ea typeface="맑은 고딕" pitchFamily="34" charset="-122"/>
+                <a:cs typeface="맑은 고딕" pitchFamily="34" charset="-120"/>
+              </a:rPr>
+              <a:t>상가건물 임대차보호법상 계약갱신요구권 행사 가능 여부 및 명도/재계약 리스크 검토</a:t>
+            </a:r>
+            <a:endParaRPr lang="en-US" sz="920" dirty="0"/>
+          </a:p>
+        </p:txBody>
+      </p:sp>
+      <p:sp>
+        <p:nvSpPr>
+          <p:cNvPr id="20" name="Text 18"/>
+          <p:cNvSpPr/>
+          <p:nvPr/>
+        </p:nvSpPr>
+        <p:spPr>
+          <a:xfrm>
+            <a:off x="566928" y="6382512"/>
+            <a:ext cx="7315200" cy="219456"/>
+          </a:xfrm>
+          <a:prstGeom prst="rect">
+            <a:avLst/>
+          </a:prstGeom>
+          <a:noFill/>
+          <a:ln/>
+        </p:spPr>
+        <p:txBody>
+          <a:bodyPr wrap="square" lIns="0" tIns="0" rIns="0" bIns="0" rtlCol="0" anchor="ctr"/>
+          <a:lstStyle/>
+          <a:p>
+            <a:pPr indent="0" marL="0">
+              <a:buNone/>
+            </a:pPr>
+            <a:r>
+              <a:rPr lang="en-US" sz="800" dirty="0">
                 <a:solidFill>
                   <a:srgbClr val="5B6B73"/>
                 </a:solidFill>
@@ -7458,208 +7840,6 @@
                 <a:ea typeface="맑은 고딕" pitchFamily="34" charset="-122"/>
                 <a:cs typeface="맑은 고딕" pitchFamily="34" charset="-120"/>
               </a:rPr>
-              <a:t>매매가</a:t>
-            </a:r>
-            <a:endParaRPr lang="en-US" sz="1100" dirty="0"/>
-          </a:p>
-        </p:txBody>
-      </p:sp>
-      <p:sp>
-        <p:nvSpPr>
-          <p:cNvPr id="17" name="Text 15"/>
-          <p:cNvSpPr/>
-          <p:nvPr/>
-        </p:nvSpPr>
-        <p:spPr>
-          <a:xfrm>
-            <a:off x="9000439" y="3529584"/>
-            <a:ext cx="2194560" cy="347472"/>
-          </a:xfrm>
-          <a:prstGeom prst="rect">
-            <a:avLst/>
-          </a:prstGeom>
-          <a:noFill/>
-          <a:ln/>
-        </p:spPr>
-        <p:txBody>
-          <a:bodyPr wrap="square" rtlCol="0" anchor="ctr"/>
-          <a:lstStyle/>
-          <a:p>
-            <a:pPr algn="r" indent="0" marL="0">
-              <a:buNone/>
-            </a:pPr>
-            <a:r>
-              <a:rPr lang="en-US" sz="1200" dirty="0">
-                <a:solidFill>
-                  <a:srgbClr val="132A3A"/>
-                </a:solidFill>
-                <a:latin typeface="Arial" pitchFamily="34" charset="0"/>
-                <a:ea typeface="Arial" pitchFamily="34" charset="-122"/>
-                <a:cs typeface="Arial" pitchFamily="34" charset="-120"/>
-              </a:rPr>
-              <a:t>89.0억원</a:t>
-            </a:r>
-            <a:endParaRPr lang="en-US" sz="1200" dirty="0"/>
-          </a:p>
-        </p:txBody>
-      </p:sp>
-      <p:sp>
-        <p:nvSpPr>
-          <p:cNvPr id="18" name="Shape 16"/>
-          <p:cNvSpPr/>
-          <p:nvPr/>
-        </p:nvSpPr>
-        <p:spPr>
-          <a:xfrm>
-            <a:off x="731520" y="3877056"/>
-            <a:ext cx="10600639" cy="0"/>
-          </a:xfrm>
-          <a:prstGeom prst="line">
-            <a:avLst/>
-          </a:prstGeom>
-          <a:noFill/>
-          <a:ln w="6350">
-            <a:solidFill>
-              <a:srgbClr val="E8E8E8"/>
-            </a:solidFill>
-            <a:prstDash val="solid"/>
-          </a:ln>
-        </p:spPr>
-      </p:sp>
-      <p:sp>
-        <p:nvSpPr>
-          <p:cNvPr id="19" name="Text 17"/>
-          <p:cNvSpPr/>
-          <p:nvPr/>
-        </p:nvSpPr>
-        <p:spPr>
-          <a:xfrm>
-            <a:off x="822960" y="3877056"/>
-            <a:ext cx="2743200" cy="347472"/>
-          </a:xfrm>
-          <a:prstGeom prst="rect">
-            <a:avLst/>
-          </a:prstGeom>
-          <a:noFill/>
-          <a:ln/>
-        </p:spPr>
-        <p:txBody>
-          <a:bodyPr wrap="square" rtlCol="0" anchor="ctr"/>
-          <a:lstStyle/>
-          <a:p>
-            <a:pPr indent="0" marL="0">
-              <a:buNone/>
-            </a:pPr>
-            <a:r>
-              <a:rPr lang="en-US" sz="1100" dirty="0">
-                <a:solidFill>
-                  <a:srgbClr val="5B6B73"/>
-                </a:solidFill>
-                <a:latin typeface="맑은 고딕" pitchFamily="34" charset="0"/>
-                <a:ea typeface="맑은 고딕" pitchFamily="34" charset="-122"/>
-                <a:cs typeface="맑은 고딕" pitchFamily="34" charset="-120"/>
-              </a:rPr>
-              <a:t>순투자금 (매매가 − 보증금)</a:t>
-            </a:r>
-            <a:endParaRPr lang="en-US" sz="1100" dirty="0"/>
-          </a:p>
-        </p:txBody>
-      </p:sp>
-      <p:sp>
-        <p:nvSpPr>
-          <p:cNvPr id="20" name="Text 18"/>
-          <p:cNvSpPr/>
-          <p:nvPr/>
-        </p:nvSpPr>
-        <p:spPr>
-          <a:xfrm>
-            <a:off x="9000439" y="3877056"/>
-            <a:ext cx="2194560" cy="347472"/>
-          </a:xfrm>
-          <a:prstGeom prst="rect">
-            <a:avLst/>
-          </a:prstGeom>
-          <a:noFill/>
-          <a:ln/>
-        </p:spPr>
-        <p:txBody>
-          <a:bodyPr wrap="square" rtlCol="0" anchor="ctr"/>
-          <a:lstStyle/>
-          <a:p>
-            <a:pPr algn="r" indent="0" marL="0">
-              <a:buNone/>
-            </a:pPr>
-            <a:r>
-              <a:rPr lang="en-US" sz="1200" b="1" dirty="0">
-                <a:solidFill>
-                  <a:srgbClr val="B8860B"/>
-                </a:solidFill>
-                <a:latin typeface="Arial" pitchFamily="34" charset="0"/>
-                <a:ea typeface="Arial" pitchFamily="34" charset="-122"/>
-                <a:cs typeface="Arial" pitchFamily="34" charset="-120"/>
-              </a:rPr>
-              <a:t>89.0억원</a:t>
-            </a:r>
-            <a:endParaRPr lang="en-US" sz="1200" dirty="0"/>
-          </a:p>
-        </p:txBody>
-      </p:sp>
-      <p:sp>
-        <p:nvSpPr>
-          <p:cNvPr id="21" name="Shape 19"/>
-          <p:cNvSpPr/>
-          <p:nvPr/>
-        </p:nvSpPr>
-        <p:spPr>
-          <a:xfrm>
-            <a:off x="731520" y="4224528"/>
-            <a:ext cx="10600639" cy="0"/>
-          </a:xfrm>
-          <a:prstGeom prst="line">
-            <a:avLst/>
-          </a:prstGeom>
-          <a:noFill/>
-          <a:ln w="6350">
-            <a:solidFill>
-              <a:srgbClr val="E8E8E8"/>
-            </a:solidFill>
-            <a:prstDash val="solid"/>
-          </a:ln>
-        </p:spPr>
-      </p:sp>
-      <p:sp>
-        <p:nvSpPr>
-          <p:cNvPr id="22" name="Text 20"/>
-          <p:cNvSpPr/>
-          <p:nvPr/>
-        </p:nvSpPr>
-        <p:spPr>
-          <a:xfrm>
-            <a:off x="502920" y="6382512"/>
-            <a:ext cx="7315200" cy="219456"/>
-          </a:xfrm>
-          <a:prstGeom prst="rect">
-            <a:avLst/>
-          </a:prstGeom>
-          <a:noFill/>
-          <a:ln/>
-        </p:spPr>
-        <p:txBody>
-          <a:bodyPr wrap="square" lIns="0" tIns="0" rIns="0" bIns="0" rtlCol="0" anchor="ctr"/>
-          <a:lstStyle/>
-          <a:p>
-            <a:pPr indent="0" marL="0">
-              <a:buNone/>
-            </a:pPr>
-            <a:r>
-              <a:rPr lang="en-US" sz="800" dirty="0">
-                <a:solidFill>
-                  <a:srgbClr val="5B6B73"/>
-                </a:solidFill>
-                <a:latin typeface="맑은 고딕" pitchFamily="34" charset="0"/>
-                <a:ea typeface="맑은 고딕" pitchFamily="34" charset="-122"/>
-                <a:cs typeface="맑은 고딕" pitchFamily="34" charset="-120"/>
-              </a:rPr>
               <a:t>CRE DEAL</a:t>
             </a:r>
             <a:endParaRPr lang="en-US" sz="800" dirty="0"/>
@@ -7668,13 +7848,13 @@
       </p:sp>
       <p:sp>
         <p:nvSpPr>
-          <p:cNvPr id="23" name="Text 21"/>
-          <p:cNvSpPr/>
-          <p:nvPr/>
-        </p:nvSpPr>
-        <p:spPr>
-          <a:xfrm>
-            <a:off x="10774375" y="6382512"/>
+          <p:cNvPr id="21" name="Text 19"/>
+          <p:cNvSpPr/>
+          <p:nvPr/>
+        </p:nvSpPr>
+        <p:spPr>
+          <a:xfrm>
+            <a:off x="10710367" y="6382512"/>
             <a:ext cx="914400" cy="219456"/>
           </a:xfrm>
           <a:prstGeom prst="rect">
@@ -7716,6 +7896,1925 @@
 <file path=ppt/slides/slide7.xml><?xml version="1.0" encoding="utf-8"?>
 <p:sld xmlns:a="http://schemas.openxmlformats.org/drawingml/2006/main" xmlns:r="http://schemas.openxmlformats.org/officeDocument/2006/relationships" xmlns:p="http://schemas.openxmlformats.org/presentationml/2006/main">
   <p:cSld name="Slide 7">
+    <p:bg>
+      <p:bgPr>
+        <a:solidFill>
+          <a:srgbClr val="FFFFFF"/>
+        </a:solidFill>
+      </p:bgPr>
+    </p:bg>
+    <p:spTree>
+      <p:nvGrpSpPr>
+        <p:cNvPr id="1" name=""/>
+        <p:cNvGrpSpPr/>
+        <p:nvPr/>
+      </p:nvGrpSpPr>
+      <p:grpSpPr>
+        <a:xfrm>
+          <a:off x="0" y="0"/>
+          <a:ext cx="0" cy="0"/>
+          <a:chOff x="0" y="0"/>
+          <a:chExt cx="0" cy="0"/>
+        </a:xfrm>
+      </p:grpSpPr>
+      <p:sp>
+        <p:nvSpPr>
+          <p:cNvPr id="2" name="Shape 0"/>
+          <p:cNvSpPr/>
+          <p:nvPr/>
+        </p:nvSpPr>
+        <p:spPr>
+          <a:xfrm>
+            <a:off x="566928" y="457200"/>
+            <a:ext cx="384048" cy="384048"/>
+          </a:xfrm>
+          <a:prstGeom prst="ellipse">
+            <a:avLst/>
+          </a:prstGeom>
+          <a:solidFill>
+            <a:srgbClr val="B8860B"/>
+          </a:solidFill>
+          <a:ln/>
+        </p:spPr>
+      </p:sp>
+      <p:sp>
+        <p:nvSpPr>
+          <p:cNvPr id="3" name="Text 1"/>
+          <p:cNvSpPr/>
+          <p:nvPr/>
+        </p:nvSpPr>
+        <p:spPr>
+          <a:xfrm>
+            <a:off x="566928" y="457200"/>
+            <a:ext cx="384048" cy="384048"/>
+          </a:xfrm>
+          <a:prstGeom prst="rect">
+            <a:avLst/>
+          </a:prstGeom>
+          <a:noFill/>
+          <a:ln/>
+        </p:spPr>
+        <p:txBody>
+          <a:bodyPr wrap="square" lIns="0" tIns="0" rIns="0" bIns="0" rtlCol="0" anchor="ctr"/>
+          <a:lstStyle/>
+          <a:p>
+            <a:pPr algn="ctr" indent="0" marL="0">
+              <a:buNone/>
+            </a:pPr>
+            <a:r>
+              <a:rPr lang="en-US" sz="1300" b="1" dirty="0">
+                <a:solidFill>
+                  <a:srgbClr val="FFFFFF"/>
+                </a:solidFill>
+                <a:latin typeface="Arial" pitchFamily="34" charset="0"/>
+                <a:ea typeface="Arial" pitchFamily="34" charset="-122"/>
+                <a:cs typeface="Arial" pitchFamily="34" charset="-120"/>
+              </a:rPr>
+              <a:t>07</a:t>
+            </a:r>
+            <a:endParaRPr lang="en-US" sz="1300" dirty="0"/>
+          </a:p>
+        </p:txBody>
+      </p:sp>
+      <p:sp>
+        <p:nvSpPr>
+          <p:cNvPr id="4" name="Text 2"/>
+          <p:cNvSpPr/>
+          <p:nvPr/>
+        </p:nvSpPr>
+        <p:spPr>
+          <a:xfrm>
+            <a:off x="1133856" y="457200"/>
+            <a:ext cx="10490911" cy="182880"/>
+          </a:xfrm>
+          <a:prstGeom prst="rect">
+            <a:avLst/>
+          </a:prstGeom>
+          <a:noFill/>
+          <a:ln/>
+        </p:spPr>
+        <p:txBody>
+          <a:bodyPr wrap="square" lIns="0" tIns="0" rIns="0" bIns="0" rtlCol="0" anchor="ctr"/>
+          <a:lstStyle/>
+          <a:p>
+            <a:pPr indent="0" marL="0">
+              <a:buNone/>
+            </a:pPr>
+            <a:r>
+              <a:rPr lang="en-US" sz="950" b="1" spc="200" kern="0" dirty="0">
+                <a:solidFill>
+                  <a:srgbClr val="B8860B"/>
+                </a:solidFill>
+                <a:latin typeface="Arial" pitchFamily="34" charset="0"/>
+                <a:ea typeface="Arial" pitchFamily="34" charset="-122"/>
+                <a:cs typeface="Arial" pitchFamily="34" charset="-120"/>
+              </a:rPr>
+              <a:t>수익률</a:t>
+            </a:r>
+            <a:endParaRPr lang="en-US" sz="950" dirty="0"/>
+          </a:p>
+        </p:txBody>
+      </p:sp>
+      <p:sp>
+        <p:nvSpPr>
+          <p:cNvPr id="5" name="Text 3"/>
+          <p:cNvSpPr/>
+          <p:nvPr/>
+        </p:nvSpPr>
+        <p:spPr>
+          <a:xfrm>
+            <a:off x="1133856" y="640080"/>
+            <a:ext cx="10490911" cy="365760"/>
+          </a:xfrm>
+          <a:prstGeom prst="rect">
+            <a:avLst/>
+          </a:prstGeom>
+          <a:noFill/>
+          <a:ln/>
+        </p:spPr>
+        <p:txBody>
+          <a:bodyPr wrap="square" lIns="0" tIns="0" rIns="0" bIns="0" rtlCol="0" anchor="ctr">
+            <a:normAutofit/>
+          </a:bodyPr>
+          <a:lstStyle/>
+          <a:p>
+            <a:pPr indent="0" marL="0">
+              <a:buNone/>
+            </a:pPr>
+            <a:r>
+              <a:rPr lang="en-US" sz="2300" b="1" dirty="0">
+                <a:solidFill>
+                  <a:srgbClr val="132A3A"/>
+                </a:solidFill>
+                <a:latin typeface="맑은 고딕" pitchFamily="34" charset="0"/>
+                <a:ea typeface="맑은 고딕" pitchFamily="34" charset="-122"/>
+                <a:cs typeface="맑은 고딕" pitchFamily="34" charset="-120"/>
+              </a:rPr>
+              <a:t>수익률</a:t>
+            </a:r>
+            <a:endParaRPr lang="en-US" sz="2300" dirty="0"/>
+          </a:p>
+        </p:txBody>
+      </p:sp>
+      <p:sp>
+        <p:nvSpPr>
+          <p:cNvPr id="6" name="Shape 4"/>
+          <p:cNvSpPr/>
+          <p:nvPr/>
+        </p:nvSpPr>
+        <p:spPr>
+          <a:xfrm>
+            <a:off x="566928" y="1371600"/>
+            <a:ext cx="5120640" cy="3840480"/>
+          </a:xfrm>
+          <a:prstGeom prst="roundRect">
+            <a:avLst>
+              <a:gd name="adj" fmla="val 1905"/>
+            </a:avLst>
+          </a:prstGeom>
+          <a:solidFill>
+            <a:srgbClr val="FFFFFF"/>
+          </a:solidFill>
+          <a:ln w="12700">
+            <a:solidFill>
+              <a:srgbClr val="CBD5E0"/>
+            </a:solidFill>
+            <a:prstDash val="solid"/>
+          </a:ln>
+        </p:spPr>
+      </p:sp>
+      <p:sp>
+        <p:nvSpPr>
+          <p:cNvPr id="7" name="Shape 5"/>
+          <p:cNvSpPr/>
+          <p:nvPr/>
+        </p:nvSpPr>
+        <p:spPr>
+          <a:xfrm>
+            <a:off x="795528" y="1600200"/>
+            <a:ext cx="4663440" cy="1005840"/>
+          </a:xfrm>
+          <a:prstGeom prst="roundRect">
+            <a:avLst>
+              <a:gd name="adj" fmla="val 7273"/>
+            </a:avLst>
+          </a:prstGeom>
+          <a:solidFill>
+            <a:srgbClr val="132A3A"/>
+          </a:solidFill>
+          <a:ln/>
+        </p:spPr>
+      </p:sp>
+      <p:sp>
+        <p:nvSpPr>
+          <p:cNvPr id="8" name="Text 6"/>
+          <p:cNvSpPr/>
+          <p:nvPr/>
+        </p:nvSpPr>
+        <p:spPr>
+          <a:xfrm>
+            <a:off x="1024128" y="1600200"/>
+            <a:ext cx="2286000" cy="1005840"/>
+          </a:xfrm>
+          <a:prstGeom prst="rect">
+            <a:avLst/>
+          </a:prstGeom>
+          <a:noFill/>
+          <a:ln/>
+        </p:spPr>
+        <p:txBody>
+          <a:bodyPr wrap="square" rtlCol="0" anchor="ctr"/>
+          <a:lstStyle/>
+          <a:p>
+            <a:pPr indent="0" marL="0">
+              <a:buNone/>
+            </a:pPr>
+            <a:r>
+              <a:rPr lang="en-US" sz="1600" b="1" dirty="0">
+                <a:solidFill>
+                  <a:srgbClr val="FFFFFF"/>
+                </a:solidFill>
+                <a:latin typeface="맑은 고딕" pitchFamily="34" charset="0"/>
+                <a:ea typeface="맑은 고딕" pitchFamily="34" charset="-122"/>
+                <a:cs typeface="맑은 고딕" pitchFamily="34" charset="-120"/>
+              </a:rPr>
+              <a:t>수익률</a:t>
+            </a:r>
+            <a:endParaRPr lang="en-US" sz="1600" dirty="0"/>
+          </a:p>
+        </p:txBody>
+      </p:sp>
+      <p:sp>
+        <p:nvSpPr>
+          <p:cNvPr id="9" name="Text 7"/>
+          <p:cNvSpPr/>
+          <p:nvPr/>
+        </p:nvSpPr>
+        <p:spPr>
+          <a:xfrm>
+            <a:off x="2487168" y="1600200"/>
+            <a:ext cx="2743200" cy="1005840"/>
+          </a:xfrm>
+          <a:prstGeom prst="rect">
+            <a:avLst/>
+          </a:prstGeom>
+          <a:noFill/>
+          <a:ln/>
+        </p:spPr>
+        <p:txBody>
+          <a:bodyPr wrap="square" rtlCol="0" anchor="ctr"/>
+          <a:lstStyle/>
+          <a:p>
+            <a:pPr algn="r" indent="0" marL="0">
+              <a:buNone/>
+            </a:pPr>
+            <a:r>
+              <a:rPr lang="en-US" sz="2800" b="1" dirty="0">
+                <a:solidFill>
+                  <a:srgbClr val="B8860B"/>
+                </a:solidFill>
+                <a:latin typeface="Arial" pitchFamily="34" charset="0"/>
+                <a:ea typeface="Arial" pitchFamily="34" charset="-122"/>
+                <a:cs typeface="Arial" pitchFamily="34" charset="-120"/>
+              </a:rPr>
+              <a:t>0.00%</a:t>
+            </a:r>
+            <a:endParaRPr lang="en-US" sz="2800" dirty="0"/>
+          </a:p>
+        </p:txBody>
+      </p:sp>
+      <p:sp>
+        <p:nvSpPr>
+          <p:cNvPr id="10" name="Text 8"/>
+          <p:cNvSpPr/>
+          <p:nvPr/>
+        </p:nvSpPr>
+        <p:spPr>
+          <a:xfrm>
+            <a:off x="886968" y="2834640"/>
+            <a:ext cx="2743200" cy="347472"/>
+          </a:xfrm>
+          <a:prstGeom prst="rect">
+            <a:avLst/>
+          </a:prstGeom>
+          <a:noFill/>
+          <a:ln/>
+        </p:spPr>
+        <p:txBody>
+          <a:bodyPr wrap="square" rtlCol="0" anchor="ctr"/>
+          <a:lstStyle/>
+          <a:p>
+            <a:pPr indent="0" marL="0">
+              <a:buNone/>
+            </a:pPr>
+            <a:r>
+              <a:rPr lang="en-US" sz="1100" dirty="0">
+                <a:solidFill>
+                  <a:srgbClr val="5B6B73"/>
+                </a:solidFill>
+                <a:latin typeface="맑은 고딕" pitchFamily="34" charset="0"/>
+                <a:ea typeface="맑은 고딕" pitchFamily="34" charset="-122"/>
+                <a:cs typeface="맑은 고딕" pitchFamily="34" charset="-120"/>
+              </a:rPr>
+              <a:t>연간 임대수입</a:t>
+            </a:r>
+            <a:endParaRPr lang="en-US" sz="1100" dirty="0"/>
+          </a:p>
+        </p:txBody>
+      </p:sp>
+      <p:sp>
+        <p:nvSpPr>
+          <p:cNvPr id="11" name="Text 9"/>
+          <p:cNvSpPr/>
+          <p:nvPr/>
+        </p:nvSpPr>
+        <p:spPr>
+          <a:xfrm>
+            <a:off x="3127248" y="2834640"/>
+            <a:ext cx="2194560" cy="347472"/>
+          </a:xfrm>
+          <a:prstGeom prst="rect">
+            <a:avLst/>
+          </a:prstGeom>
+          <a:noFill/>
+          <a:ln/>
+        </p:spPr>
+        <p:txBody>
+          <a:bodyPr wrap="square" rtlCol="0" anchor="ctr"/>
+          <a:lstStyle/>
+          <a:p>
+            <a:pPr algn="r" indent="0" marL="0">
+              <a:buNone/>
+            </a:pPr>
+            <a:r>
+              <a:rPr lang="en-US" sz="1200" dirty="0">
+                <a:solidFill>
+                  <a:srgbClr val="132A3A"/>
+                </a:solidFill>
+                <a:latin typeface="Arial" pitchFamily="34" charset="0"/>
+                <a:ea typeface="Arial" pitchFamily="34" charset="-122"/>
+                <a:cs typeface="Arial" pitchFamily="34" charset="-120"/>
+              </a:rPr>
+              <a:t>0만원</a:t>
+            </a:r>
+            <a:endParaRPr lang="en-US" sz="1200" dirty="0"/>
+          </a:p>
+        </p:txBody>
+      </p:sp>
+      <p:sp>
+        <p:nvSpPr>
+          <p:cNvPr id="12" name="Shape 10"/>
+          <p:cNvSpPr/>
+          <p:nvPr/>
+        </p:nvSpPr>
+        <p:spPr>
+          <a:xfrm>
+            <a:off x="795528" y="3182112"/>
+            <a:ext cx="4663440" cy="0"/>
+          </a:xfrm>
+          <a:prstGeom prst="line">
+            <a:avLst/>
+          </a:prstGeom>
+          <a:noFill/>
+          <a:ln w="6350">
+            <a:solidFill>
+              <a:srgbClr val="E8E8E8"/>
+            </a:solidFill>
+            <a:prstDash val="solid"/>
+          </a:ln>
+        </p:spPr>
+      </p:sp>
+      <p:sp>
+        <p:nvSpPr>
+          <p:cNvPr id="13" name="Text 11"/>
+          <p:cNvSpPr/>
+          <p:nvPr/>
+        </p:nvSpPr>
+        <p:spPr>
+          <a:xfrm>
+            <a:off x="886968" y="3182112"/>
+            <a:ext cx="2743200" cy="347472"/>
+          </a:xfrm>
+          <a:prstGeom prst="rect">
+            <a:avLst/>
+          </a:prstGeom>
+          <a:noFill/>
+          <a:ln/>
+        </p:spPr>
+        <p:txBody>
+          <a:bodyPr wrap="square" rtlCol="0" anchor="ctr"/>
+          <a:lstStyle/>
+          <a:p>
+            <a:pPr indent="0" marL="0">
+              <a:buNone/>
+            </a:pPr>
+            <a:r>
+              <a:rPr lang="en-US" sz="1100" dirty="0">
+                <a:solidFill>
+                  <a:srgbClr val="5B6B73"/>
+                </a:solidFill>
+                <a:latin typeface="맑은 고딕" pitchFamily="34" charset="0"/>
+                <a:ea typeface="맑은 고딕" pitchFamily="34" charset="-122"/>
+                <a:cs typeface="맑은 고딕" pitchFamily="34" charset="-120"/>
+              </a:rPr>
+              <a:t>승계 보증금</a:t>
+            </a:r>
+            <a:endParaRPr lang="en-US" sz="1100" dirty="0"/>
+          </a:p>
+        </p:txBody>
+      </p:sp>
+      <p:sp>
+        <p:nvSpPr>
+          <p:cNvPr id="14" name="Text 12"/>
+          <p:cNvSpPr/>
+          <p:nvPr/>
+        </p:nvSpPr>
+        <p:spPr>
+          <a:xfrm>
+            <a:off x="3127248" y="3182112"/>
+            <a:ext cx="2194560" cy="347472"/>
+          </a:xfrm>
+          <a:prstGeom prst="rect">
+            <a:avLst/>
+          </a:prstGeom>
+          <a:noFill/>
+          <a:ln/>
+        </p:spPr>
+        <p:txBody>
+          <a:bodyPr wrap="square" rtlCol="0" anchor="ctr"/>
+          <a:lstStyle/>
+          <a:p>
+            <a:pPr algn="r" indent="0" marL="0">
+              <a:buNone/>
+            </a:pPr>
+            <a:r>
+              <a:rPr lang="en-US" sz="1200" dirty="0">
+                <a:solidFill>
+                  <a:srgbClr val="132A3A"/>
+                </a:solidFill>
+                <a:latin typeface="Arial" pitchFamily="34" charset="0"/>
+                <a:ea typeface="Arial" pitchFamily="34" charset="-122"/>
+                <a:cs typeface="Arial" pitchFamily="34" charset="-120"/>
+              </a:rPr>
+              <a:t>0만원</a:t>
+            </a:r>
+            <a:endParaRPr lang="en-US" sz="1200" dirty="0"/>
+          </a:p>
+        </p:txBody>
+      </p:sp>
+      <p:sp>
+        <p:nvSpPr>
+          <p:cNvPr id="15" name="Shape 13"/>
+          <p:cNvSpPr/>
+          <p:nvPr/>
+        </p:nvSpPr>
+        <p:spPr>
+          <a:xfrm>
+            <a:off x="795528" y="3529584"/>
+            <a:ext cx="4663440" cy="0"/>
+          </a:xfrm>
+          <a:prstGeom prst="line">
+            <a:avLst/>
+          </a:prstGeom>
+          <a:noFill/>
+          <a:ln w="6350">
+            <a:solidFill>
+              <a:srgbClr val="E8E8E8"/>
+            </a:solidFill>
+            <a:prstDash val="solid"/>
+          </a:ln>
+        </p:spPr>
+      </p:sp>
+      <p:sp>
+        <p:nvSpPr>
+          <p:cNvPr id="16" name="Text 14"/>
+          <p:cNvSpPr/>
+          <p:nvPr/>
+        </p:nvSpPr>
+        <p:spPr>
+          <a:xfrm>
+            <a:off x="886968" y="3529584"/>
+            <a:ext cx="2743200" cy="347472"/>
+          </a:xfrm>
+          <a:prstGeom prst="rect">
+            <a:avLst/>
+          </a:prstGeom>
+          <a:noFill/>
+          <a:ln/>
+        </p:spPr>
+        <p:txBody>
+          <a:bodyPr wrap="square" rtlCol="0" anchor="ctr"/>
+          <a:lstStyle/>
+          <a:p>
+            <a:pPr indent="0" marL="0">
+              <a:buNone/>
+            </a:pPr>
+            <a:r>
+              <a:rPr lang="en-US" sz="1100" dirty="0">
+                <a:solidFill>
+                  <a:srgbClr val="5B6B73"/>
+                </a:solidFill>
+                <a:latin typeface="맑은 고딕" pitchFamily="34" charset="0"/>
+                <a:ea typeface="맑은 고딕" pitchFamily="34" charset="-122"/>
+                <a:cs typeface="맑은 고딕" pitchFamily="34" charset="-120"/>
+              </a:rPr>
+              <a:t>매매가</a:t>
+            </a:r>
+            <a:endParaRPr lang="en-US" sz="1100" dirty="0"/>
+          </a:p>
+        </p:txBody>
+      </p:sp>
+      <p:sp>
+        <p:nvSpPr>
+          <p:cNvPr id="17" name="Text 15"/>
+          <p:cNvSpPr/>
+          <p:nvPr/>
+        </p:nvSpPr>
+        <p:spPr>
+          <a:xfrm>
+            <a:off x="3127248" y="3529584"/>
+            <a:ext cx="2194560" cy="347472"/>
+          </a:xfrm>
+          <a:prstGeom prst="rect">
+            <a:avLst/>
+          </a:prstGeom>
+          <a:noFill/>
+          <a:ln/>
+        </p:spPr>
+        <p:txBody>
+          <a:bodyPr wrap="square" rtlCol="0" anchor="ctr"/>
+          <a:lstStyle/>
+          <a:p>
+            <a:pPr algn="r" indent="0" marL="0">
+              <a:buNone/>
+            </a:pPr>
+            <a:r>
+              <a:rPr lang="en-US" sz="1200" dirty="0">
+                <a:solidFill>
+                  <a:srgbClr val="132A3A"/>
+                </a:solidFill>
+                <a:latin typeface="Arial" pitchFamily="34" charset="0"/>
+                <a:ea typeface="Arial" pitchFamily="34" charset="-122"/>
+                <a:cs typeface="Arial" pitchFamily="34" charset="-120"/>
+              </a:rPr>
+              <a:t>89.0억원</a:t>
+            </a:r>
+            <a:endParaRPr lang="en-US" sz="1200" dirty="0"/>
+          </a:p>
+        </p:txBody>
+      </p:sp>
+      <p:sp>
+        <p:nvSpPr>
+          <p:cNvPr id="18" name="Shape 16"/>
+          <p:cNvSpPr/>
+          <p:nvPr/>
+        </p:nvSpPr>
+        <p:spPr>
+          <a:xfrm>
+            <a:off x="795528" y="3877056"/>
+            <a:ext cx="4663440" cy="0"/>
+          </a:xfrm>
+          <a:prstGeom prst="line">
+            <a:avLst/>
+          </a:prstGeom>
+          <a:noFill/>
+          <a:ln w="6350">
+            <a:solidFill>
+              <a:srgbClr val="E8E8E8"/>
+            </a:solidFill>
+            <a:prstDash val="solid"/>
+          </a:ln>
+        </p:spPr>
+      </p:sp>
+      <p:sp>
+        <p:nvSpPr>
+          <p:cNvPr id="19" name="Text 17"/>
+          <p:cNvSpPr/>
+          <p:nvPr/>
+        </p:nvSpPr>
+        <p:spPr>
+          <a:xfrm>
+            <a:off x="886968" y="3877056"/>
+            <a:ext cx="2743200" cy="347472"/>
+          </a:xfrm>
+          <a:prstGeom prst="rect">
+            <a:avLst/>
+          </a:prstGeom>
+          <a:noFill/>
+          <a:ln/>
+        </p:spPr>
+        <p:txBody>
+          <a:bodyPr wrap="square" rtlCol="0" anchor="ctr"/>
+          <a:lstStyle/>
+          <a:p>
+            <a:pPr indent="0" marL="0">
+              <a:buNone/>
+            </a:pPr>
+            <a:r>
+              <a:rPr lang="en-US" sz="1100" dirty="0">
+                <a:solidFill>
+                  <a:srgbClr val="5B6B73"/>
+                </a:solidFill>
+                <a:latin typeface="맑은 고딕" pitchFamily="34" charset="0"/>
+                <a:ea typeface="맑은 고딕" pitchFamily="34" charset="-122"/>
+                <a:cs typeface="맑은 고딕" pitchFamily="34" charset="-120"/>
+              </a:rPr>
+              <a:t>순투자금 (매매가 − 보증금)</a:t>
+            </a:r>
+            <a:endParaRPr lang="en-US" sz="1100" dirty="0"/>
+          </a:p>
+        </p:txBody>
+      </p:sp>
+      <p:sp>
+        <p:nvSpPr>
+          <p:cNvPr id="20" name="Text 18"/>
+          <p:cNvSpPr/>
+          <p:nvPr/>
+        </p:nvSpPr>
+        <p:spPr>
+          <a:xfrm>
+            <a:off x="3127248" y="3877056"/>
+            <a:ext cx="2194560" cy="347472"/>
+          </a:xfrm>
+          <a:prstGeom prst="rect">
+            <a:avLst/>
+          </a:prstGeom>
+          <a:noFill/>
+          <a:ln/>
+        </p:spPr>
+        <p:txBody>
+          <a:bodyPr wrap="square" rtlCol="0" anchor="ctr"/>
+          <a:lstStyle/>
+          <a:p>
+            <a:pPr algn="r" indent="0" marL="0">
+              <a:buNone/>
+            </a:pPr>
+            <a:r>
+              <a:rPr lang="en-US" sz="1200" b="1" dirty="0">
+                <a:solidFill>
+                  <a:srgbClr val="B8860B"/>
+                </a:solidFill>
+                <a:latin typeface="Arial" pitchFamily="34" charset="0"/>
+                <a:ea typeface="Arial" pitchFamily="34" charset="-122"/>
+                <a:cs typeface="Arial" pitchFamily="34" charset="-120"/>
+              </a:rPr>
+              <a:t>89.0억원</a:t>
+            </a:r>
+            <a:endParaRPr lang="en-US" sz="1200" dirty="0"/>
+          </a:p>
+        </p:txBody>
+      </p:sp>
+      <p:sp>
+        <p:nvSpPr>
+          <p:cNvPr id="21" name="Shape 19"/>
+          <p:cNvSpPr/>
+          <p:nvPr/>
+        </p:nvSpPr>
+        <p:spPr>
+          <a:xfrm>
+            <a:off x="795528" y="4224528"/>
+            <a:ext cx="4663440" cy="0"/>
+          </a:xfrm>
+          <a:prstGeom prst="line">
+            <a:avLst/>
+          </a:prstGeom>
+          <a:noFill/>
+          <a:ln w="6350">
+            <a:solidFill>
+              <a:srgbClr val="E8E8E8"/>
+            </a:solidFill>
+            <a:prstDash val="solid"/>
+          </a:ln>
+        </p:spPr>
+      </p:sp>
+      <p:sp>
+        <p:nvSpPr>
+          <p:cNvPr id="22" name="Shape 20"/>
+          <p:cNvSpPr/>
+          <p:nvPr/>
+        </p:nvSpPr>
+        <p:spPr>
+          <a:xfrm>
+            <a:off x="6053328" y="1371600"/>
+            <a:ext cx="5571439" cy="3840480"/>
+          </a:xfrm>
+          <a:prstGeom prst="roundRect">
+            <a:avLst>
+              <a:gd name="adj" fmla="val 1429"/>
+            </a:avLst>
+          </a:prstGeom>
+          <a:solidFill>
+            <a:srgbClr val="F3F6F7"/>
+          </a:solidFill>
+          <a:ln w="6350">
+            <a:solidFill>
+              <a:srgbClr val="CBD5E0"/>
+            </a:solidFill>
+            <a:prstDash val="solid"/>
+          </a:ln>
+        </p:spPr>
+      </p:sp>
+      <p:sp>
+        <p:nvSpPr>
+          <p:cNvPr id="23" name="Shape 21"/>
+          <p:cNvSpPr/>
+          <p:nvPr/>
+        </p:nvSpPr>
+        <p:spPr>
+          <a:xfrm>
+            <a:off x="6309360" y="1591056"/>
+            <a:ext cx="1554480" cy="219456"/>
+          </a:xfrm>
+          <a:prstGeom prst="roundRect">
+            <a:avLst>
+              <a:gd name="adj" fmla="val 50000"/>
+            </a:avLst>
+          </a:prstGeom>
+          <a:solidFill>
+            <a:srgbClr val="F6F1E4"/>
+          </a:solidFill>
+          <a:ln w="6350">
+            <a:solidFill>
+              <a:srgbClr val="8B6508"/>
+            </a:solidFill>
+            <a:prstDash val="solid"/>
+          </a:ln>
+        </p:spPr>
+      </p:sp>
+      <p:sp>
+        <p:nvSpPr>
+          <p:cNvPr id="24" name="Text 22"/>
+          <p:cNvSpPr/>
+          <p:nvPr/>
+        </p:nvSpPr>
+        <p:spPr>
+          <a:xfrm>
+            <a:off x="6309360" y="1591056"/>
+            <a:ext cx="1554480" cy="219456"/>
+          </a:xfrm>
+          <a:prstGeom prst="rect">
+            <a:avLst/>
+          </a:prstGeom>
+          <a:noFill/>
+          <a:ln/>
+        </p:spPr>
+        <p:txBody>
+          <a:bodyPr wrap="square" lIns="0" tIns="0" rIns="0" bIns="0" rtlCol="0" anchor="ctr"/>
+          <a:lstStyle/>
+          <a:p>
+            <a:pPr algn="ctr" indent="0" marL="0">
+              <a:buNone/>
+            </a:pPr>
+            <a:r>
+              <a:rPr lang="en-US" sz="850" b="1" dirty="0">
+                <a:solidFill>
+                  <a:srgbClr val="8B6508"/>
+                </a:solidFill>
+                <a:latin typeface="맑은 고딕" pitchFamily="34" charset="0"/>
+                <a:ea typeface="맑은 고딕" pitchFamily="34" charset="-122"/>
+                <a:cs typeface="맑은 고딕" pitchFamily="34" charset="-120"/>
+              </a:rPr>
+              <a:t>[ 공시지가 열람 안내 ]</a:t>
+            </a:r>
+            <a:endParaRPr lang="en-US" sz="850" dirty="0"/>
+          </a:p>
+        </p:txBody>
+      </p:sp>
+      <p:sp>
+        <p:nvSpPr>
+          <p:cNvPr id="25" name="Text 23"/>
+          <p:cNvSpPr/>
+          <p:nvPr/>
+        </p:nvSpPr>
+        <p:spPr>
+          <a:xfrm>
+            <a:off x="6309360" y="1883664"/>
+            <a:ext cx="5059375" cy="274320"/>
+          </a:xfrm>
+          <a:prstGeom prst="rect">
+            <a:avLst/>
+          </a:prstGeom>
+          <a:noFill/>
+          <a:ln/>
+        </p:spPr>
+        <p:txBody>
+          <a:bodyPr wrap="square" lIns="0" tIns="0" rIns="0" bIns="0" rtlCol="0" anchor="ctr"/>
+          <a:lstStyle/>
+          <a:p>
+            <a:pPr indent="0" marL="0">
+              <a:buNone/>
+            </a:pPr>
+            <a:r>
+              <a:rPr lang="en-US" sz="1200" b="1" dirty="0">
+                <a:solidFill>
+                  <a:srgbClr val="132A3A"/>
+                </a:solidFill>
+                <a:latin typeface="맑은 고딕" pitchFamily="34" charset="0"/>
+                <a:ea typeface="맑은 고딕" pitchFamily="34" charset="-122"/>
+                <a:cs typeface="맑은 고딕" pitchFamily="34" charset="-120"/>
+              </a:rPr>
+              <a:t>개별공시지가 및 토지 가치 평가 안내</a:t>
+            </a:r>
+            <a:endParaRPr lang="en-US" sz="1200" dirty="0"/>
+          </a:p>
+        </p:txBody>
+      </p:sp>
+      <p:sp>
+        <p:nvSpPr>
+          <p:cNvPr id="26" name="Text 24"/>
+          <p:cNvSpPr/>
+          <p:nvPr/>
+        </p:nvSpPr>
+        <p:spPr>
+          <a:xfrm>
+            <a:off x="6309360" y="2194560"/>
+            <a:ext cx="5059375" cy="384048"/>
+          </a:xfrm>
+          <a:prstGeom prst="rect">
+            <a:avLst/>
+          </a:prstGeom>
+          <a:noFill/>
+          <a:ln/>
+        </p:spPr>
+        <p:txBody>
+          <a:bodyPr wrap="square" lIns="0" tIns="0" rIns="0" bIns="0" rtlCol="0" anchor="t"/>
+          <a:lstStyle/>
+          <a:p>
+            <a:pPr indent="0" marL="0">
+              <a:lnSpc>
+                <a:spcPct val="115000"/>
+              </a:lnSpc>
+              <a:buNone/>
+            </a:pPr>
+            <a:r>
+              <a:rPr lang="en-US" sz="950" dirty="0">
+                <a:solidFill>
+                  <a:srgbClr val="5B6B73"/>
+                </a:solidFill>
+                <a:latin typeface="맑은 고딕" pitchFamily="34" charset="0"/>
+                <a:ea typeface="맑은 고딕" pitchFamily="34" charset="-122"/>
+                <a:cs typeface="맑은 고딕" pitchFamily="34" charset="-120"/>
+              </a:rPr>
+              <a:t>대상 필지의 개별공시지가 연도별 이력 및 표준지 공시지가 대비 배율은 부동산 공시가격 알리미 및 감정평가 공적 자료를 통해 확인합니다.</a:t>
+            </a:r>
+            <a:endParaRPr lang="en-US" sz="950" dirty="0"/>
+          </a:p>
+        </p:txBody>
+      </p:sp>
+      <p:sp>
+        <p:nvSpPr>
+          <p:cNvPr id="27" name="Shape 25"/>
+          <p:cNvSpPr/>
+          <p:nvPr/>
+        </p:nvSpPr>
+        <p:spPr>
+          <a:xfrm>
+            <a:off x="6309360" y="2633472"/>
+            <a:ext cx="5059375" cy="0"/>
+          </a:xfrm>
+          <a:prstGeom prst="line">
+            <a:avLst/>
+          </a:prstGeom>
+          <a:noFill/>
+          <a:ln w="5080">
+            <a:solidFill>
+              <a:srgbClr val="CBD5E0"/>
+            </a:solidFill>
+            <a:prstDash val="solid"/>
+          </a:ln>
+        </p:spPr>
+      </p:sp>
+      <p:sp>
+        <p:nvSpPr>
+          <p:cNvPr id="28" name="Shape 26"/>
+          <p:cNvSpPr/>
+          <p:nvPr/>
+        </p:nvSpPr>
+        <p:spPr>
+          <a:xfrm>
+            <a:off x="6345936" y="2779776"/>
+            <a:ext cx="64008" cy="64008"/>
+          </a:xfrm>
+          <a:prstGeom prst="rect">
+            <a:avLst/>
+          </a:prstGeom>
+          <a:solidFill>
+            <a:srgbClr val="B8860B"/>
+          </a:solidFill>
+          <a:ln/>
+        </p:spPr>
+      </p:sp>
+      <p:sp>
+        <p:nvSpPr>
+          <p:cNvPr id="29" name="Text 27"/>
+          <p:cNvSpPr/>
+          <p:nvPr/>
+        </p:nvSpPr>
+        <p:spPr>
+          <a:xfrm>
+            <a:off x="6473952" y="2724912"/>
+            <a:ext cx="4839919" cy="530352"/>
+          </a:xfrm>
+          <a:prstGeom prst="rect">
+            <a:avLst/>
+          </a:prstGeom>
+          <a:noFill/>
+          <a:ln/>
+        </p:spPr>
+        <p:txBody>
+          <a:bodyPr wrap="square" lIns="0" tIns="0" rIns="0" bIns="0" rtlCol="0" anchor="t"/>
+          <a:lstStyle/>
+          <a:p>
+            <a:pPr indent="0" marL="0">
+              <a:lnSpc>
+                <a:spcPct val="112000"/>
+              </a:lnSpc>
+              <a:buNone/>
+            </a:pPr>
+            <a:r>
+              <a:rPr lang="en-US" sz="920" dirty="0">
+                <a:solidFill>
+                  <a:srgbClr val="2B2B2B"/>
+                </a:solidFill>
+                <a:latin typeface="맑은 고딕" pitchFamily="34" charset="0"/>
+                <a:ea typeface="맑은 고딕" pitchFamily="34" charset="-122"/>
+                <a:cs typeface="맑은 고딕" pitchFamily="34" charset="-120"/>
+              </a:rPr>
+              <a:t>최근 5~10개년 개별공시지가 변동 추이 및 연평균 상승률 분석</a:t>
+            </a:r>
+            <a:endParaRPr lang="en-US" sz="920" dirty="0"/>
+          </a:p>
+        </p:txBody>
+      </p:sp>
+      <p:sp>
+        <p:nvSpPr>
+          <p:cNvPr id="30" name="Shape 28"/>
+          <p:cNvSpPr/>
+          <p:nvPr/>
+        </p:nvSpPr>
+        <p:spPr>
+          <a:xfrm>
+            <a:off x="6345936" y="3346704"/>
+            <a:ext cx="64008" cy="64008"/>
+          </a:xfrm>
+          <a:prstGeom prst="rect">
+            <a:avLst/>
+          </a:prstGeom>
+          <a:solidFill>
+            <a:srgbClr val="B8860B"/>
+          </a:solidFill>
+          <a:ln/>
+        </p:spPr>
+      </p:sp>
+      <p:sp>
+        <p:nvSpPr>
+          <p:cNvPr id="31" name="Text 29"/>
+          <p:cNvSpPr/>
+          <p:nvPr/>
+        </p:nvSpPr>
+        <p:spPr>
+          <a:xfrm>
+            <a:off x="6473952" y="3291840"/>
+            <a:ext cx="4839919" cy="530352"/>
+          </a:xfrm>
+          <a:prstGeom prst="rect">
+            <a:avLst/>
+          </a:prstGeom>
+          <a:noFill/>
+          <a:ln/>
+        </p:spPr>
+        <p:txBody>
+          <a:bodyPr wrap="square" lIns="0" tIns="0" rIns="0" bIns="0" rtlCol="0" anchor="t"/>
+          <a:lstStyle/>
+          <a:p>
+            <a:pPr indent="0" marL="0">
+              <a:lnSpc>
+                <a:spcPct val="112000"/>
+              </a:lnSpc>
+              <a:buNone/>
+            </a:pPr>
+            <a:r>
+              <a:rPr lang="en-US" sz="920" dirty="0">
+                <a:solidFill>
+                  <a:srgbClr val="2B2B2B"/>
+                </a:solidFill>
+                <a:latin typeface="맑은 고딕" pitchFamily="34" charset="0"/>
+                <a:ea typeface="맑은 고딕" pitchFamily="34" charset="-122"/>
+                <a:cs typeface="맑은 고딕" pitchFamily="34" charset="-120"/>
+              </a:rPr>
+              <a:t>인근 표준지 공시지가 대비 토지 특성(도로접면, 형상, 방위) 차이 분석</a:t>
+            </a:r>
+            <a:endParaRPr lang="en-US" sz="920" dirty="0"/>
+          </a:p>
+        </p:txBody>
+      </p:sp>
+      <p:sp>
+        <p:nvSpPr>
+          <p:cNvPr id="32" name="Shape 30"/>
+          <p:cNvSpPr/>
+          <p:nvPr/>
+        </p:nvSpPr>
+        <p:spPr>
+          <a:xfrm>
+            <a:off x="6345936" y="3913632"/>
+            <a:ext cx="64008" cy="64008"/>
+          </a:xfrm>
+          <a:prstGeom prst="rect">
+            <a:avLst/>
+          </a:prstGeom>
+          <a:solidFill>
+            <a:srgbClr val="B8860B"/>
+          </a:solidFill>
+          <a:ln/>
+        </p:spPr>
+      </p:sp>
+      <p:sp>
+        <p:nvSpPr>
+          <p:cNvPr id="33" name="Text 31"/>
+          <p:cNvSpPr/>
+          <p:nvPr/>
+        </p:nvSpPr>
+        <p:spPr>
+          <a:xfrm>
+            <a:off x="6473952" y="3858768"/>
+            <a:ext cx="4839919" cy="530352"/>
+          </a:xfrm>
+          <a:prstGeom prst="rect">
+            <a:avLst/>
+          </a:prstGeom>
+          <a:noFill/>
+          <a:ln/>
+        </p:spPr>
+        <p:txBody>
+          <a:bodyPr wrap="square" lIns="0" tIns="0" rIns="0" bIns="0" rtlCol="0" anchor="t"/>
+          <a:lstStyle/>
+          <a:p>
+            <a:pPr indent="0" marL="0">
+              <a:lnSpc>
+                <a:spcPct val="112000"/>
+              </a:lnSpc>
+              <a:buNone/>
+            </a:pPr>
+            <a:r>
+              <a:rPr lang="en-US" sz="920" dirty="0">
+                <a:solidFill>
+                  <a:srgbClr val="2B2B2B"/>
+                </a:solidFill>
+                <a:latin typeface="맑은 고딕" pitchFamily="34" charset="0"/>
+                <a:ea typeface="맑은 고딕" pitchFamily="34" charset="-122"/>
+                <a:cs typeface="맑은 고딕" pitchFamily="34" charset="-120"/>
+              </a:rPr>
+              <a:t>토지 공시지가 대비 실거래가 매매 배율 및 평당 단가 프리미엄 검증</a:t>
+            </a:r>
+            <a:endParaRPr lang="en-US" sz="920" dirty="0"/>
+          </a:p>
+        </p:txBody>
+      </p:sp>
+      <p:sp>
+        <p:nvSpPr>
+          <p:cNvPr id="34" name="Shape 32"/>
+          <p:cNvSpPr/>
+          <p:nvPr/>
+        </p:nvSpPr>
+        <p:spPr>
+          <a:xfrm>
+            <a:off x="6345936" y="4480560"/>
+            <a:ext cx="64008" cy="64008"/>
+          </a:xfrm>
+          <a:prstGeom prst="rect">
+            <a:avLst/>
+          </a:prstGeom>
+          <a:solidFill>
+            <a:srgbClr val="B8860B"/>
+          </a:solidFill>
+          <a:ln/>
+        </p:spPr>
+      </p:sp>
+      <p:sp>
+        <p:nvSpPr>
+          <p:cNvPr id="35" name="Text 33"/>
+          <p:cNvSpPr/>
+          <p:nvPr/>
+        </p:nvSpPr>
+        <p:spPr>
+          <a:xfrm>
+            <a:off x="6473952" y="4425696"/>
+            <a:ext cx="4839919" cy="530352"/>
+          </a:xfrm>
+          <a:prstGeom prst="rect">
+            <a:avLst/>
+          </a:prstGeom>
+          <a:noFill/>
+          <a:ln/>
+        </p:spPr>
+        <p:txBody>
+          <a:bodyPr wrap="square" lIns="0" tIns="0" rIns="0" bIns="0" rtlCol="0" anchor="t"/>
+          <a:lstStyle/>
+          <a:p>
+            <a:pPr indent="0" marL="0">
+              <a:lnSpc>
+                <a:spcPct val="112000"/>
+              </a:lnSpc>
+              <a:buNone/>
+            </a:pPr>
+            <a:r>
+              <a:rPr lang="en-US" sz="920" dirty="0">
+                <a:solidFill>
+                  <a:srgbClr val="2B2B2B"/>
+                </a:solidFill>
+                <a:latin typeface="맑은 고딕" pitchFamily="34" charset="0"/>
+                <a:ea typeface="맑은 고딕" pitchFamily="34" charset="-122"/>
+                <a:cs typeface="맑은 고딕" pitchFamily="34" charset="-120"/>
+              </a:rPr>
+              <a:t>보유세(재산세·종합부동산세) 과세표준 기준액 산출 및 세무 영향 점검</a:t>
+            </a:r>
+            <a:endParaRPr lang="en-US" sz="920" dirty="0"/>
+          </a:p>
+        </p:txBody>
+      </p:sp>
+      <p:sp>
+        <p:nvSpPr>
+          <p:cNvPr id="36" name="Text 34"/>
+          <p:cNvSpPr/>
+          <p:nvPr/>
+        </p:nvSpPr>
+        <p:spPr>
+          <a:xfrm>
+            <a:off x="566928" y="6382512"/>
+            <a:ext cx="7315200" cy="219456"/>
+          </a:xfrm>
+          <a:prstGeom prst="rect">
+            <a:avLst/>
+          </a:prstGeom>
+          <a:noFill/>
+          <a:ln/>
+        </p:spPr>
+        <p:txBody>
+          <a:bodyPr wrap="square" lIns="0" tIns="0" rIns="0" bIns="0" rtlCol="0" anchor="ctr"/>
+          <a:lstStyle/>
+          <a:p>
+            <a:pPr indent="0" marL="0">
+              <a:buNone/>
+            </a:pPr>
+            <a:r>
+              <a:rPr lang="en-US" sz="800" dirty="0">
+                <a:solidFill>
+                  <a:srgbClr val="5B6B73"/>
+                </a:solidFill>
+                <a:latin typeface="맑은 고딕" pitchFamily="34" charset="0"/>
+                <a:ea typeface="맑은 고딕" pitchFamily="34" charset="-122"/>
+                <a:cs typeface="맑은 고딕" pitchFamily="34" charset="-120"/>
+              </a:rPr>
+              <a:t>CRE DEAL</a:t>
+            </a:r>
+            <a:endParaRPr lang="en-US" sz="800" dirty="0"/>
+          </a:p>
+        </p:txBody>
+      </p:sp>
+      <p:sp>
+        <p:nvSpPr>
+          <p:cNvPr id="37" name="Text 35"/>
+          <p:cNvSpPr/>
+          <p:nvPr/>
+        </p:nvSpPr>
+        <p:spPr>
+          <a:xfrm>
+            <a:off x="10710367" y="6382512"/>
+            <a:ext cx="914400" cy="219456"/>
+          </a:xfrm>
+          <a:prstGeom prst="rect">
+            <a:avLst/>
+          </a:prstGeom>
+          <a:noFill/>
+          <a:ln/>
+        </p:spPr>
+        <p:txBody>
+          <a:bodyPr wrap="square" lIns="0" tIns="0" rIns="0" bIns="0" rtlCol="0" anchor="ctr"/>
+          <a:lstStyle/>
+          <a:p>
+            <a:pPr algn="r" indent="0" marL="0">
+              <a:buNone/>
+            </a:pPr>
+            <a:r>
+              <a:rPr lang="en-US" sz="900" b="1" dirty="0">
+                <a:solidFill>
+                  <a:srgbClr val="B8860B"/>
+                </a:solidFill>
+                <a:latin typeface="Arial" pitchFamily="34" charset="0"/>
+                <a:ea typeface="Arial" pitchFamily="34" charset="-122"/>
+                <a:cs typeface="Arial" pitchFamily="34" charset="-120"/>
+              </a:rPr>
+              <a:t>7</a:t>
+            </a:r>
+            <a:endParaRPr lang="en-US" sz="900" dirty="0"/>
+          </a:p>
+        </p:txBody>
+      </p:sp>
+    </p:spTree>
+  </p:cSld>
+  <p:clrMapOvr>
+    <a:masterClrMapping/>
+  </p:clrMapOvr>
+</p:sld>
+</file>
+
+<file path=ppt/slides/slide8.xml><?xml version="1.0" encoding="utf-8"?>
+<p:sld xmlns:a="http://schemas.openxmlformats.org/drawingml/2006/main" xmlns:r="http://schemas.openxmlformats.org/officeDocument/2006/relationships" xmlns:p="http://schemas.openxmlformats.org/presentationml/2006/main">
+  <p:cSld name="Slide 8">
+    <p:bg>
+      <p:bgPr>
+        <a:solidFill>
+          <a:srgbClr val="FFFFFF"/>
+        </a:solidFill>
+      </p:bgPr>
+    </p:bg>
+    <p:spTree>
+      <p:nvGrpSpPr>
+        <p:cNvPr id="1" name=""/>
+        <p:cNvGrpSpPr/>
+        <p:nvPr/>
+      </p:nvGrpSpPr>
+      <p:grpSpPr>
+        <a:xfrm>
+          <a:off x="0" y="0"/>
+          <a:ext cx="0" cy="0"/>
+          <a:chOff x="0" y="0"/>
+          <a:chExt cx="0" cy="0"/>
+        </a:xfrm>
+      </p:grpSpPr>
+      <p:sp>
+        <p:nvSpPr>
+          <p:cNvPr id="2" name="Shape 0"/>
+          <p:cNvSpPr/>
+          <p:nvPr/>
+        </p:nvSpPr>
+        <p:spPr>
+          <a:xfrm>
+            <a:off x="566928" y="457200"/>
+            <a:ext cx="384048" cy="384048"/>
+          </a:xfrm>
+          <a:prstGeom prst="ellipse">
+            <a:avLst/>
+          </a:prstGeom>
+          <a:solidFill>
+            <a:srgbClr val="B8860B"/>
+          </a:solidFill>
+          <a:ln/>
+        </p:spPr>
+      </p:sp>
+      <p:sp>
+        <p:nvSpPr>
+          <p:cNvPr id="3" name="Text 1"/>
+          <p:cNvSpPr/>
+          <p:nvPr/>
+        </p:nvSpPr>
+        <p:spPr>
+          <a:xfrm>
+            <a:off x="566928" y="457200"/>
+            <a:ext cx="384048" cy="384048"/>
+          </a:xfrm>
+          <a:prstGeom prst="rect">
+            <a:avLst/>
+          </a:prstGeom>
+          <a:noFill/>
+          <a:ln/>
+        </p:spPr>
+        <p:txBody>
+          <a:bodyPr wrap="square" lIns="0" tIns="0" rIns="0" bIns="0" rtlCol="0" anchor="ctr"/>
+          <a:lstStyle/>
+          <a:p>
+            <a:pPr algn="ctr" indent="0" marL="0">
+              <a:buNone/>
+            </a:pPr>
+            <a:r>
+              <a:rPr lang="en-US" sz="1300" b="1" dirty="0">
+                <a:solidFill>
+                  <a:srgbClr val="FFFFFF"/>
+                </a:solidFill>
+                <a:latin typeface="Arial" pitchFamily="34" charset="0"/>
+                <a:ea typeface="Arial" pitchFamily="34" charset="-122"/>
+                <a:cs typeface="Arial" pitchFamily="34" charset="-120"/>
+              </a:rPr>
+              <a:t>08</a:t>
+            </a:r>
+            <a:endParaRPr lang="en-US" sz="1300" dirty="0"/>
+          </a:p>
+        </p:txBody>
+      </p:sp>
+      <p:sp>
+        <p:nvSpPr>
+          <p:cNvPr id="4" name="Text 2"/>
+          <p:cNvSpPr/>
+          <p:nvPr/>
+        </p:nvSpPr>
+        <p:spPr>
+          <a:xfrm>
+            <a:off x="1133856" y="457200"/>
+            <a:ext cx="10490911" cy="182880"/>
+          </a:xfrm>
+          <a:prstGeom prst="rect">
+            <a:avLst/>
+          </a:prstGeom>
+          <a:noFill/>
+          <a:ln/>
+        </p:spPr>
+        <p:txBody>
+          <a:bodyPr wrap="square" lIns="0" tIns="0" rIns="0" bIns="0" rtlCol="0" anchor="ctr"/>
+          <a:lstStyle/>
+          <a:p>
+            <a:pPr indent="0" marL="0">
+              <a:buNone/>
+            </a:pPr>
+            <a:r>
+              <a:rPr lang="en-US" sz="950" b="1" spc="200" kern="0" dirty="0">
+                <a:solidFill>
+                  <a:srgbClr val="B8860B"/>
+                </a:solidFill>
+                <a:latin typeface="Arial" pitchFamily="34" charset="0"/>
+                <a:ea typeface="Arial" pitchFamily="34" charset="-122"/>
+                <a:cs typeface="Arial" pitchFamily="34" charset="-120"/>
+              </a:rPr>
+              <a:t>Gallery</a:t>
+            </a:r>
+            <a:endParaRPr lang="en-US" sz="950" dirty="0"/>
+          </a:p>
+        </p:txBody>
+      </p:sp>
+      <p:sp>
+        <p:nvSpPr>
+          <p:cNvPr id="5" name="Text 3"/>
+          <p:cNvSpPr/>
+          <p:nvPr/>
+        </p:nvSpPr>
+        <p:spPr>
+          <a:xfrm>
+            <a:off x="1133856" y="640080"/>
+            <a:ext cx="10490911" cy="365760"/>
+          </a:xfrm>
+          <a:prstGeom prst="rect">
+            <a:avLst/>
+          </a:prstGeom>
+          <a:noFill/>
+          <a:ln/>
+        </p:spPr>
+        <p:txBody>
+          <a:bodyPr wrap="square" lIns="0" tIns="0" rIns="0" bIns="0" rtlCol="0" anchor="ctr">
+            <a:normAutofit/>
+          </a:bodyPr>
+          <a:lstStyle/>
+          <a:p>
+            <a:pPr indent="0" marL="0">
+              <a:buNone/>
+            </a:pPr>
+            <a:r>
+              <a:rPr lang="en-US" sz="2300" b="1" dirty="0">
+                <a:solidFill>
+                  <a:srgbClr val="132A3A"/>
+                </a:solidFill>
+                <a:latin typeface="맑은 고딕" pitchFamily="34" charset="0"/>
+                <a:ea typeface="맑은 고딕" pitchFamily="34" charset="-122"/>
+                <a:cs typeface="맑은 고딕" pitchFamily="34" charset="-120"/>
+              </a:rPr>
+              <a:t>현장 사진</a:t>
+            </a:r>
+            <a:endParaRPr lang="en-US" sz="2300" dirty="0"/>
+          </a:p>
+        </p:txBody>
+      </p:sp>
+      <p:sp>
+        <p:nvSpPr>
+          <p:cNvPr id="6" name="Shape 4"/>
+          <p:cNvSpPr/>
+          <p:nvPr/>
+        </p:nvSpPr>
+        <p:spPr>
+          <a:xfrm>
+            <a:off x="566928" y="1371600"/>
+            <a:ext cx="11057839" cy="4572000"/>
+          </a:xfrm>
+          <a:prstGeom prst="roundRect">
+            <a:avLst>
+              <a:gd name="adj" fmla="val 1200"/>
+            </a:avLst>
+          </a:prstGeom>
+          <a:solidFill>
+            <a:srgbClr val="F3F6F7"/>
+          </a:solidFill>
+          <a:ln w="6350">
+            <a:solidFill>
+              <a:srgbClr val="CBD5E0"/>
+            </a:solidFill>
+            <a:prstDash val="solid"/>
+          </a:ln>
+        </p:spPr>
+      </p:sp>
+      <p:sp>
+        <p:nvSpPr>
+          <p:cNvPr id="7" name="Shape 5"/>
+          <p:cNvSpPr/>
+          <p:nvPr/>
+        </p:nvSpPr>
+        <p:spPr>
+          <a:xfrm>
+            <a:off x="822960" y="1591056"/>
+            <a:ext cx="1316736" cy="219456"/>
+          </a:xfrm>
+          <a:prstGeom prst="roundRect">
+            <a:avLst>
+              <a:gd name="adj" fmla="val 50000"/>
+            </a:avLst>
+          </a:prstGeom>
+          <a:solidFill>
+            <a:srgbClr val="E8F4F8"/>
+          </a:solidFill>
+          <a:ln w="6350">
+            <a:solidFill>
+              <a:srgbClr val="2E6E82"/>
+            </a:solidFill>
+            <a:prstDash val="solid"/>
+          </a:ln>
+        </p:spPr>
+      </p:sp>
+      <p:sp>
+        <p:nvSpPr>
+          <p:cNvPr id="8" name="Text 6"/>
+          <p:cNvSpPr/>
+          <p:nvPr/>
+        </p:nvSpPr>
+        <p:spPr>
+          <a:xfrm>
+            <a:off x="822960" y="1591056"/>
+            <a:ext cx="1316736" cy="219456"/>
+          </a:xfrm>
+          <a:prstGeom prst="rect">
+            <a:avLst/>
+          </a:prstGeom>
+          <a:noFill/>
+          <a:ln/>
+        </p:spPr>
+        <p:txBody>
+          <a:bodyPr wrap="square" lIns="0" tIns="0" rIns="0" bIns="0" rtlCol="0" anchor="ctr"/>
+          <a:lstStyle/>
+          <a:p>
+            <a:pPr algn="ctr" indent="0" marL="0">
+              <a:buNone/>
+            </a:pPr>
+            <a:r>
+              <a:rPr lang="en-US" sz="850" b="1" dirty="0">
+                <a:solidFill>
+                  <a:srgbClr val="2E6E82"/>
+                </a:solidFill>
+                <a:latin typeface="맑은 고딕" pitchFamily="34" charset="0"/>
+                <a:ea typeface="맑은 고딕" pitchFamily="34" charset="-122"/>
+                <a:cs typeface="맑은 고딕" pitchFamily="34" charset="-120"/>
+              </a:rPr>
+              <a:t>[ 현장 실사 예정 ]</a:t>
+            </a:r>
+            <a:endParaRPr lang="en-US" sz="850" dirty="0"/>
+          </a:p>
+        </p:txBody>
+      </p:sp>
+      <p:sp>
+        <p:nvSpPr>
+          <p:cNvPr id="9" name="Text 7"/>
+          <p:cNvSpPr/>
+          <p:nvPr/>
+        </p:nvSpPr>
+        <p:spPr>
+          <a:xfrm>
+            <a:off x="822960" y="1883664"/>
+            <a:ext cx="10545775" cy="274320"/>
+          </a:xfrm>
+          <a:prstGeom prst="rect">
+            <a:avLst/>
+          </a:prstGeom>
+          <a:noFill/>
+          <a:ln/>
+        </p:spPr>
+        <p:txBody>
+          <a:bodyPr wrap="square" lIns="0" tIns="0" rIns="0" bIns="0" rtlCol="0" anchor="ctr"/>
+          <a:lstStyle/>
+          <a:p>
+            <a:pPr indent="0" marL="0">
+              <a:buNone/>
+            </a:pPr>
+            <a:r>
+              <a:rPr lang="en-US" sz="1200" b="1" dirty="0">
+                <a:solidFill>
+                  <a:srgbClr val="132A3A"/>
+                </a:solidFill>
+                <a:latin typeface="맑은 고딕" pitchFamily="34" charset="0"/>
+                <a:ea typeface="맑은 고딕" pitchFamily="34" charset="-122"/>
+                <a:cs typeface="맑은 고딕" pitchFamily="34" charset="-120"/>
+              </a:rPr>
+              <a:t>건축물 현황 및 물리적 실사 점검 안내</a:t>
+            </a:r>
+            <a:endParaRPr lang="en-US" sz="1200" dirty="0"/>
+          </a:p>
+        </p:txBody>
+      </p:sp>
+      <p:sp>
+        <p:nvSpPr>
+          <p:cNvPr id="10" name="Text 8"/>
+          <p:cNvSpPr/>
+          <p:nvPr/>
+        </p:nvSpPr>
+        <p:spPr>
+          <a:xfrm>
+            <a:off x="822960" y="2194560"/>
+            <a:ext cx="10545775" cy="457200"/>
+          </a:xfrm>
+          <a:prstGeom prst="rect">
+            <a:avLst/>
+          </a:prstGeom>
+          <a:noFill/>
+          <a:ln/>
+        </p:spPr>
+        <p:txBody>
+          <a:bodyPr wrap="square" lIns="0" tIns="0" rIns="0" bIns="0" rtlCol="0" anchor="t"/>
+          <a:lstStyle/>
+          <a:p>
+            <a:pPr indent="0" marL="0">
+              <a:lnSpc>
+                <a:spcPct val="115000"/>
+              </a:lnSpc>
+              <a:buNone/>
+            </a:pPr>
+            <a:r>
+              <a:rPr lang="en-US" sz="950" dirty="0">
+                <a:solidFill>
+                  <a:srgbClr val="5B6B73"/>
+                </a:solidFill>
+                <a:latin typeface="맑은 고딕" pitchFamily="34" charset="0"/>
+                <a:ea typeface="맑은 고딕" pitchFamily="34" charset="-122"/>
+                <a:cs typeface="맑은 고딕" pitchFamily="34" charset="-120"/>
+              </a:rPr>
+              <a:t>본 자산의 내·외관 상태 및 주요 설비 사양은 매수 실사 절차 진행 시 현장 방문 조사를 통해 상세 확인 및 촬영이 진행됩니다.</a:t>
+            </a:r>
+            <a:endParaRPr lang="en-US" sz="950" dirty="0"/>
+          </a:p>
+        </p:txBody>
+      </p:sp>
+      <p:sp>
+        <p:nvSpPr>
+          <p:cNvPr id="11" name="Shape 9"/>
+          <p:cNvSpPr/>
+          <p:nvPr/>
+        </p:nvSpPr>
+        <p:spPr>
+          <a:xfrm>
+            <a:off x="822960" y="2706624"/>
+            <a:ext cx="10545775" cy="0"/>
+          </a:xfrm>
+          <a:prstGeom prst="line">
+            <a:avLst/>
+          </a:prstGeom>
+          <a:noFill/>
+          <a:ln w="5080">
+            <a:solidFill>
+              <a:srgbClr val="CBD5E0"/>
+            </a:solidFill>
+            <a:prstDash val="solid"/>
+          </a:ln>
+        </p:spPr>
+      </p:sp>
+      <p:sp>
+        <p:nvSpPr>
+          <p:cNvPr id="12" name="Shape 10"/>
+          <p:cNvSpPr/>
+          <p:nvPr/>
+        </p:nvSpPr>
+        <p:spPr>
+          <a:xfrm>
+            <a:off x="859536" y="2852928"/>
+            <a:ext cx="64008" cy="64008"/>
+          </a:xfrm>
+          <a:prstGeom prst="rect">
+            <a:avLst/>
+          </a:prstGeom>
+          <a:solidFill>
+            <a:srgbClr val="B8860B"/>
+          </a:solidFill>
+          <a:ln/>
+        </p:spPr>
+      </p:sp>
+      <p:sp>
+        <p:nvSpPr>
+          <p:cNvPr id="13" name="Text 11"/>
+          <p:cNvSpPr/>
+          <p:nvPr/>
+        </p:nvSpPr>
+        <p:spPr>
+          <a:xfrm>
+            <a:off x="987552" y="2798064"/>
+            <a:ext cx="10326319" cy="694944"/>
+          </a:xfrm>
+          <a:prstGeom prst="rect">
+            <a:avLst/>
+          </a:prstGeom>
+          <a:noFill/>
+          <a:ln/>
+        </p:spPr>
+        <p:txBody>
+          <a:bodyPr wrap="square" lIns="0" tIns="0" rIns="0" bIns="0" rtlCol="0" anchor="t"/>
+          <a:lstStyle/>
+          <a:p>
+            <a:pPr indent="0" marL="0">
+              <a:lnSpc>
+                <a:spcPct val="112000"/>
+              </a:lnSpc>
+              <a:buNone/>
+            </a:pPr>
+            <a:r>
+              <a:rPr lang="en-US" sz="920" dirty="0">
+                <a:solidFill>
+                  <a:srgbClr val="2B2B2B"/>
+                </a:solidFill>
+                <a:latin typeface="맑은 고딕" pitchFamily="34" charset="0"/>
+                <a:ea typeface="맑은 고딕" pitchFamily="34" charset="-122"/>
+                <a:cs typeface="맑은 고딕" pitchFamily="34" charset="-120"/>
+              </a:rPr>
+              <a:t>외관 파사드 마감재 보존 상태 및 균열·누수 흔적 정밀 점검</a:t>
+            </a:r>
+            <a:endParaRPr lang="en-US" sz="920" dirty="0"/>
+          </a:p>
+        </p:txBody>
+      </p:sp>
+      <p:sp>
+        <p:nvSpPr>
+          <p:cNvPr id="14" name="Shape 12"/>
+          <p:cNvSpPr/>
+          <p:nvPr/>
+        </p:nvSpPr>
+        <p:spPr>
+          <a:xfrm>
+            <a:off x="859536" y="3584448"/>
+            <a:ext cx="64008" cy="64008"/>
+          </a:xfrm>
+          <a:prstGeom prst="rect">
+            <a:avLst/>
+          </a:prstGeom>
+          <a:solidFill>
+            <a:srgbClr val="B8860B"/>
+          </a:solidFill>
+          <a:ln/>
+        </p:spPr>
+      </p:sp>
+      <p:sp>
+        <p:nvSpPr>
+          <p:cNvPr id="15" name="Text 13"/>
+          <p:cNvSpPr/>
+          <p:nvPr/>
+        </p:nvSpPr>
+        <p:spPr>
+          <a:xfrm>
+            <a:off x="987552" y="3529584"/>
+            <a:ext cx="10326319" cy="694944"/>
+          </a:xfrm>
+          <a:prstGeom prst="rect">
+            <a:avLst/>
+          </a:prstGeom>
+          <a:noFill/>
+          <a:ln/>
+        </p:spPr>
+        <p:txBody>
+          <a:bodyPr wrap="square" lIns="0" tIns="0" rIns="0" bIns="0" rtlCol="0" anchor="t"/>
+          <a:lstStyle/>
+          <a:p>
+            <a:pPr indent="0" marL="0">
+              <a:lnSpc>
+                <a:spcPct val="112000"/>
+              </a:lnSpc>
+              <a:buNone/>
+            </a:pPr>
+            <a:r>
+              <a:rPr lang="en-US" sz="920" dirty="0">
+                <a:solidFill>
+                  <a:srgbClr val="2B2B2B"/>
+                </a:solidFill>
+                <a:latin typeface="맑은 고딕" pitchFamily="34" charset="0"/>
+                <a:ea typeface="맑은 고딕" pitchFamily="34" charset="-122"/>
+                <a:cs typeface="맑은 고딕" pitchFamily="34" charset="-120"/>
+              </a:rPr>
+              <a:t>승강기, 기계식 주차설비, 수배전반 등 핵심 설비 내구연한 및 정기검사 이력</a:t>
+            </a:r>
+            <a:endParaRPr lang="en-US" sz="920" dirty="0"/>
+          </a:p>
+        </p:txBody>
+      </p:sp>
+      <p:sp>
+        <p:nvSpPr>
+          <p:cNvPr id="16" name="Shape 14"/>
+          <p:cNvSpPr/>
+          <p:nvPr/>
+        </p:nvSpPr>
+        <p:spPr>
+          <a:xfrm>
+            <a:off x="859536" y="4315968"/>
+            <a:ext cx="64008" cy="64008"/>
+          </a:xfrm>
+          <a:prstGeom prst="rect">
+            <a:avLst/>
+          </a:prstGeom>
+          <a:solidFill>
+            <a:srgbClr val="B8860B"/>
+          </a:solidFill>
+          <a:ln/>
+        </p:spPr>
+      </p:sp>
+      <p:sp>
+        <p:nvSpPr>
+          <p:cNvPr id="17" name="Text 15"/>
+          <p:cNvSpPr/>
+          <p:nvPr/>
+        </p:nvSpPr>
+        <p:spPr>
+          <a:xfrm>
+            <a:off x="987552" y="4261104"/>
+            <a:ext cx="10326319" cy="694944"/>
+          </a:xfrm>
+          <a:prstGeom prst="rect">
+            <a:avLst/>
+          </a:prstGeom>
+          <a:noFill/>
+          <a:ln/>
+        </p:spPr>
+        <p:txBody>
+          <a:bodyPr wrap="square" lIns="0" tIns="0" rIns="0" bIns="0" rtlCol="0" anchor="t"/>
+          <a:lstStyle/>
+          <a:p>
+            <a:pPr indent="0" marL="0">
+              <a:lnSpc>
+                <a:spcPct val="112000"/>
+              </a:lnSpc>
+              <a:buNone/>
+            </a:pPr>
+            <a:r>
+              <a:rPr lang="en-US" sz="920" dirty="0">
+                <a:solidFill>
+                  <a:srgbClr val="2B2B2B"/>
+                </a:solidFill>
+                <a:latin typeface="맑은 고딕" pitchFamily="34" charset="0"/>
+                <a:ea typeface="맑은 고딕" pitchFamily="34" charset="-122"/>
+                <a:cs typeface="맑은 고딕" pitchFamily="34" charset="-120"/>
+              </a:rPr>
+              <a:t>옥상 방수 상태, 지하층 결로/누수 여부 및 공용부(계단실·화장실) 관리 컨디션</a:t>
+            </a:r>
+            <a:endParaRPr lang="en-US" sz="920" dirty="0"/>
+          </a:p>
+        </p:txBody>
+      </p:sp>
+      <p:sp>
+        <p:nvSpPr>
+          <p:cNvPr id="18" name="Shape 16"/>
+          <p:cNvSpPr/>
+          <p:nvPr/>
+        </p:nvSpPr>
+        <p:spPr>
+          <a:xfrm>
+            <a:off x="859536" y="5047488"/>
+            <a:ext cx="64008" cy="64008"/>
+          </a:xfrm>
+          <a:prstGeom prst="rect">
+            <a:avLst/>
+          </a:prstGeom>
+          <a:solidFill>
+            <a:srgbClr val="B8860B"/>
+          </a:solidFill>
+          <a:ln/>
+        </p:spPr>
+      </p:sp>
+      <p:sp>
+        <p:nvSpPr>
+          <p:cNvPr id="19" name="Text 17"/>
+          <p:cNvSpPr/>
+          <p:nvPr/>
+        </p:nvSpPr>
+        <p:spPr>
+          <a:xfrm>
+            <a:off x="987552" y="4992624"/>
+            <a:ext cx="10326319" cy="694944"/>
+          </a:xfrm>
+          <a:prstGeom prst="rect">
+            <a:avLst/>
+          </a:prstGeom>
+          <a:noFill/>
+          <a:ln/>
+        </p:spPr>
+        <p:txBody>
+          <a:bodyPr wrap="square" lIns="0" tIns="0" rIns="0" bIns="0" rtlCol="0" anchor="t"/>
+          <a:lstStyle/>
+          <a:p>
+            <a:pPr indent="0" marL="0">
+              <a:lnSpc>
+                <a:spcPct val="112000"/>
+              </a:lnSpc>
+              <a:buNone/>
+            </a:pPr>
+            <a:r>
+              <a:rPr lang="en-US" sz="920" dirty="0">
+                <a:solidFill>
+                  <a:srgbClr val="2B2B2B"/>
+                </a:solidFill>
+                <a:latin typeface="맑은 고딕" pitchFamily="34" charset="0"/>
+                <a:ea typeface="맑은 고딕" pitchFamily="34" charset="-122"/>
+                <a:cs typeface="맑은 고딕" pitchFamily="34" charset="-120"/>
+              </a:rPr>
+              <a:t>법정 주차대수 확보 여부, 주차장 진입로 회전반경 및 층고 실측 검증</a:t>
+            </a:r>
+            <a:endParaRPr lang="en-US" sz="920" dirty="0"/>
+          </a:p>
+        </p:txBody>
+      </p:sp>
+      <p:sp>
+        <p:nvSpPr>
+          <p:cNvPr id="20" name="Text 18"/>
+          <p:cNvSpPr/>
+          <p:nvPr/>
+        </p:nvSpPr>
+        <p:spPr>
+          <a:xfrm>
+            <a:off x="566928" y="6382512"/>
+            <a:ext cx="7315200" cy="219456"/>
+          </a:xfrm>
+          <a:prstGeom prst="rect">
+            <a:avLst/>
+          </a:prstGeom>
+          <a:noFill/>
+          <a:ln/>
+        </p:spPr>
+        <p:txBody>
+          <a:bodyPr wrap="square" lIns="0" tIns="0" rIns="0" bIns="0" rtlCol="0" anchor="ctr"/>
+          <a:lstStyle/>
+          <a:p>
+            <a:pPr indent="0" marL="0">
+              <a:buNone/>
+            </a:pPr>
+            <a:r>
+              <a:rPr lang="en-US" sz="800" dirty="0">
+                <a:solidFill>
+                  <a:srgbClr val="5B6B73"/>
+                </a:solidFill>
+                <a:latin typeface="맑은 고딕" pitchFamily="34" charset="0"/>
+                <a:ea typeface="맑은 고딕" pitchFamily="34" charset="-122"/>
+                <a:cs typeface="맑은 고딕" pitchFamily="34" charset="-120"/>
+              </a:rPr>
+              <a:t>CRE DEAL</a:t>
+            </a:r>
+            <a:endParaRPr lang="en-US" sz="800" dirty="0"/>
+          </a:p>
+        </p:txBody>
+      </p:sp>
+      <p:sp>
+        <p:nvSpPr>
+          <p:cNvPr id="21" name="Text 19"/>
+          <p:cNvSpPr/>
+          <p:nvPr/>
+        </p:nvSpPr>
+        <p:spPr>
+          <a:xfrm>
+            <a:off x="10710367" y="6382512"/>
+            <a:ext cx="914400" cy="219456"/>
+          </a:xfrm>
+          <a:prstGeom prst="rect">
+            <a:avLst/>
+          </a:prstGeom>
+          <a:noFill/>
+          <a:ln/>
+        </p:spPr>
+        <p:txBody>
+          <a:bodyPr wrap="square" lIns="0" tIns="0" rIns="0" bIns="0" rtlCol="0" anchor="ctr"/>
+          <a:lstStyle/>
+          <a:p>
+            <a:pPr algn="r" indent="0" marL="0">
+              <a:buNone/>
+            </a:pPr>
+            <a:r>
+              <a:rPr lang="en-US" sz="900" b="1" dirty="0">
+                <a:solidFill>
+                  <a:srgbClr val="B8860B"/>
+                </a:solidFill>
+                <a:latin typeface="Arial" pitchFamily="34" charset="0"/>
+                <a:ea typeface="Arial" pitchFamily="34" charset="-122"/>
+                <a:cs typeface="Arial" pitchFamily="34" charset="-120"/>
+              </a:rPr>
+              <a:t>8</a:t>
+            </a:r>
+            <a:endParaRPr lang="en-US" sz="900" dirty="0"/>
+          </a:p>
+        </p:txBody>
+      </p:sp>
+    </p:spTree>
+  </p:cSld>
+  <p:clrMapOvr>
+    <a:masterClrMapping/>
+  </p:clrMapOvr>
+</p:sld>
+</file>
+
+<file path=ppt/slides/slide9.xml><?xml version="1.0" encoding="utf-8"?>
+<p:sld xmlns:a="http://schemas.openxmlformats.org/drawingml/2006/main" xmlns:r="http://schemas.openxmlformats.org/officeDocument/2006/relationships" xmlns:p="http://schemas.openxmlformats.org/presentationml/2006/main">
+  <p:cSld name="Slide 9">
     <p:bg>
       <p:bgPr>
         <a:solidFill>
@@ -7745,7 +9844,7 @@
         </p:nvSpPr>
         <p:spPr>
           <a:xfrm>
-            <a:off x="502920" y="457200"/>
+            <a:off x="566928" y="457200"/>
             <a:ext cx="384048" cy="384048"/>
           </a:xfrm>
           <a:prstGeom prst="ellipse">
@@ -7765,7 +9864,7 @@
         </p:nvSpPr>
         <p:spPr>
           <a:xfrm>
-            <a:off x="502920" y="457200"/>
+            <a:off x="566928" y="457200"/>
             <a:ext cx="384048" cy="384048"/>
           </a:xfrm>
           <a:prstGeom prst="rect">
@@ -7790,7 +9889,7 @@
                 <a:ea typeface="Arial" pitchFamily="34" charset="-122"/>
                 <a:cs typeface="Arial" pitchFamily="34" charset="-120"/>
               </a:rPr>
-              <a:t>07</a:t>
+              <a:t>09</a:t>
             </a:r>
             <a:endParaRPr lang="en-US" sz="1300" dirty="0"/>
           </a:p>
@@ -7804,7 +9903,7 @@
         </p:nvSpPr>
         <p:spPr>
           <a:xfrm>
-            <a:off x="1069848" y="457200"/>
+            <a:off x="1133856" y="457200"/>
             <a:ext cx="10490911" cy="182880"/>
           </a:xfrm>
           <a:prstGeom prst="rect">
@@ -7843,7 +9942,7 @@
         </p:nvSpPr>
         <p:spPr>
           <a:xfrm>
-            <a:off x="1069848" y="658368"/>
+            <a:off x="1133856" y="658368"/>
             <a:ext cx="10490911" cy="420624"/>
           </a:xfrm>
           <a:prstGeom prst="rect">
@@ -7853,7 +9952,9 @@
           <a:ln/>
         </p:spPr>
         <p:txBody>
-          <a:bodyPr wrap="square" lIns="0" tIns="0" rIns="0" bIns="0" rtlCol="0" anchor="ctr"/>
+          <a:bodyPr wrap="square" lIns="0" tIns="0" rIns="0" bIns="0" rtlCol="0" anchor="ctr">
+            <a:normAutofit/>
+          </a:bodyPr>
           <a:lstStyle/>
           <a:p>
             <a:pPr indent="0" marL="0">
@@ -7882,7 +9983,7 @@
         </p:nvSpPr>
         <p:spPr>
           <a:xfrm>
-            <a:off x="502920" y="1463040"/>
+            <a:off x="566928" y="1463040"/>
             <a:ext cx="3588410" cy="658368"/>
           </a:xfrm>
           <a:prstGeom prst="roundRect">
@@ -7904,7 +10005,7 @@
         </p:nvSpPr>
         <p:spPr>
           <a:xfrm>
-            <a:off x="612648" y="1572768"/>
+            <a:off x="676656" y="1572768"/>
             <a:ext cx="438912" cy="438912"/>
           </a:xfrm>
           <a:prstGeom prst="ellipse">
@@ -7924,7 +10025,7 @@
         </p:nvSpPr>
         <p:spPr>
           <a:xfrm>
-            <a:off x="612648" y="1572768"/>
+            <a:off x="676656" y="1572768"/>
             <a:ext cx="438912" cy="438912"/>
           </a:xfrm>
           <a:prstGeom prst="rect">
@@ -7963,7 +10064,7 @@
         </p:nvSpPr>
         <p:spPr>
           <a:xfrm>
-            <a:off x="1161288" y="1554480"/>
+            <a:off x="1225296" y="1554480"/>
             <a:ext cx="2820314" cy="237744"/>
           </a:xfrm>
           <a:prstGeom prst="rect">
@@ -8002,7 +10103,7 @@
         </p:nvSpPr>
         <p:spPr>
           <a:xfrm>
-            <a:off x="1161288" y="1792224"/>
+            <a:off x="1225296" y="1792224"/>
             <a:ext cx="2820314" cy="256032"/>
           </a:xfrm>
           <a:prstGeom prst="rect">
@@ -8041,7 +10142,7 @@
         </p:nvSpPr>
         <p:spPr>
           <a:xfrm>
-            <a:off x="4091330" y="1600200"/>
+            <a:off x="4155338" y="1600200"/>
             <a:ext cx="146304" cy="384048"/>
           </a:xfrm>
           <a:prstGeom prst="rect">
@@ -8080,7 +10181,7 @@
         </p:nvSpPr>
         <p:spPr>
           <a:xfrm>
-            <a:off x="4237634" y="1463040"/>
+            <a:off x="4301642" y="1463040"/>
             <a:ext cx="3588410" cy="658368"/>
           </a:xfrm>
           <a:prstGeom prst="roundRect">
@@ -8102,7 +10203,7 @@
         </p:nvSpPr>
         <p:spPr>
           <a:xfrm>
-            <a:off x="4347362" y="1572768"/>
+            <a:off x="4411370" y="1572768"/>
             <a:ext cx="438912" cy="438912"/>
           </a:xfrm>
           <a:prstGeom prst="ellipse">
@@ -8122,7 +10223,7 @@
         </p:nvSpPr>
         <p:spPr>
           <a:xfrm>
-            <a:off x="4347362" y="1572768"/>
+            <a:off x="4411370" y="1572768"/>
             <a:ext cx="438912" cy="438912"/>
           </a:xfrm>
           <a:prstGeom prst="rect">
@@ -8161,7 +10262,7 @@
         </p:nvSpPr>
         <p:spPr>
           <a:xfrm>
-            <a:off x="4896002" y="1554480"/>
+            <a:off x="4960010" y="1554480"/>
             <a:ext cx="2820314" cy="237744"/>
           </a:xfrm>
           <a:prstGeom prst="rect">
@@ -8200,7 +10301,7 @@
         </p:nvSpPr>
         <p:spPr>
           <a:xfrm>
-            <a:off x="4896002" y="1792224"/>
+            <a:off x="4960010" y="1792224"/>
             <a:ext cx="2820314" cy="256032"/>
           </a:xfrm>
           <a:prstGeom prst="rect">
@@ -8239,7 +10340,7 @@
         </p:nvSpPr>
         <p:spPr>
           <a:xfrm>
-            <a:off x="7826045" y="1600200"/>
+            <a:off x="7890053" y="1600200"/>
             <a:ext cx="146304" cy="384048"/>
           </a:xfrm>
           <a:prstGeom prst="rect">
@@ -8278,7 +10379,7 @@
         </p:nvSpPr>
         <p:spPr>
           <a:xfrm>
-            <a:off x="7972349" y="1463040"/>
+            <a:off x="8036357" y="1463040"/>
             <a:ext cx="3588410" cy="658368"/>
           </a:xfrm>
           <a:prstGeom prst="roundRect">
@@ -8300,7 +10401,7 @@
         </p:nvSpPr>
         <p:spPr>
           <a:xfrm>
-            <a:off x="8082077" y="1572768"/>
+            <a:off x="8146085" y="1572768"/>
             <a:ext cx="438912" cy="438912"/>
           </a:xfrm>
           <a:prstGeom prst="ellipse">
@@ -8320,7 +10421,7 @@
         </p:nvSpPr>
         <p:spPr>
           <a:xfrm>
-            <a:off x="8082077" y="1572768"/>
+            <a:off x="8146085" y="1572768"/>
             <a:ext cx="438912" cy="438912"/>
           </a:xfrm>
           <a:prstGeom prst="rect">
@@ -8359,7 +10460,7 @@
         </p:nvSpPr>
         <p:spPr>
           <a:xfrm>
-            <a:off x="8630717" y="1554480"/>
+            <a:off x="8694725" y="1554480"/>
             <a:ext cx="2820314" cy="237744"/>
           </a:xfrm>
           <a:prstGeom prst="rect">
@@ -8398,7 +10499,7 @@
         </p:nvSpPr>
         <p:spPr>
           <a:xfrm>
-            <a:off x="8630717" y="1792224"/>
+            <a:off x="8694725" y="1792224"/>
             <a:ext cx="2820314" cy="256032"/>
           </a:xfrm>
           <a:prstGeom prst="rect">
@@ -8437,7 +10538,7 @@
         </p:nvSpPr>
         <p:spPr>
           <a:xfrm>
-            <a:off x="502920" y="2395728"/>
+            <a:off x="566928" y="2395728"/>
             <a:ext cx="5486400" cy="237744"/>
           </a:xfrm>
           <a:prstGeom prst="rect">
@@ -8476,7 +10577,7 @@
         </p:nvSpPr>
         <p:spPr>
           <a:xfrm>
-            <a:off x="502920" y="2724912"/>
+            <a:off x="566928" y="2724912"/>
             <a:ext cx="1280160" cy="292608"/>
           </a:xfrm>
           <a:prstGeom prst="roundRect">
@@ -8498,7 +10599,7 @@
         </p:nvSpPr>
         <p:spPr>
           <a:xfrm>
-            <a:off x="502920" y="2724912"/>
+            <a:off x="566928" y="2724912"/>
             <a:ext cx="1280160" cy="292608"/>
           </a:xfrm>
           <a:prstGeom prst="rect">
@@ -8537,7 +10638,7 @@
         </p:nvSpPr>
         <p:spPr>
           <a:xfrm>
-            <a:off x="1929384" y="2706624"/>
+            <a:off x="1993392" y="2706624"/>
             <a:ext cx="3840480" cy="329184"/>
           </a:xfrm>
           <a:prstGeom prst="rect">
@@ -8576,7 +10677,7 @@
         </p:nvSpPr>
         <p:spPr>
           <a:xfrm>
-            <a:off x="502920" y="3127248"/>
+            <a:off x="566928" y="3127248"/>
             <a:ext cx="1280160" cy="292608"/>
           </a:xfrm>
           <a:prstGeom prst="roundRect">
@@ -8598,7 +10699,7 @@
         </p:nvSpPr>
         <p:spPr>
           <a:xfrm>
-            <a:off x="502920" y="3127248"/>
+            <a:off x="566928" y="3127248"/>
             <a:ext cx="1280160" cy="292608"/>
           </a:xfrm>
           <a:prstGeom prst="rect">
@@ -8637,7 +10738,7 @@
         </p:nvSpPr>
         <p:spPr>
           <a:xfrm>
-            <a:off x="1929384" y="3108960"/>
+            <a:off x="1993392" y="3108960"/>
             <a:ext cx="3840480" cy="329184"/>
           </a:xfrm>
           <a:prstGeom prst="rect">
@@ -8676,7 +10777,7 @@
         </p:nvSpPr>
         <p:spPr>
           <a:xfrm>
-            <a:off x="502920" y="3529584"/>
+            <a:off x="566928" y="3529584"/>
             <a:ext cx="1280160" cy="292608"/>
           </a:xfrm>
           <a:prstGeom prst="roundRect">
@@ -8698,7 +10799,7 @@
         </p:nvSpPr>
         <p:spPr>
           <a:xfrm>
-            <a:off x="502920" y="3529584"/>
+            <a:off x="566928" y="3529584"/>
             <a:ext cx="1280160" cy="292608"/>
           </a:xfrm>
           <a:prstGeom prst="rect">
@@ -8737,7 +10838,7 @@
         </p:nvSpPr>
         <p:spPr>
           <a:xfrm>
-            <a:off x="1929384" y="3511296"/>
+            <a:off x="1993392" y="3511296"/>
             <a:ext cx="3840480" cy="329184"/>
           </a:xfrm>
           <a:prstGeom prst="rect">
@@ -8776,7 +10877,7 @@
         </p:nvSpPr>
         <p:spPr>
           <a:xfrm>
-            <a:off x="502920" y="3931920"/>
+            <a:off x="566928" y="3931920"/>
             <a:ext cx="1280160" cy="292608"/>
           </a:xfrm>
           <a:prstGeom prst="roundRect">
@@ -8798,7 +10899,7 @@
         </p:nvSpPr>
         <p:spPr>
           <a:xfrm>
-            <a:off x="502920" y="3931920"/>
+            <a:off x="566928" y="3931920"/>
             <a:ext cx="1280160" cy="292608"/>
           </a:xfrm>
           <a:prstGeom prst="rect">
@@ -8837,7 +10938,7 @@
         </p:nvSpPr>
         <p:spPr>
           <a:xfrm>
-            <a:off x="1929384" y="3913632"/>
+            <a:off x="1993392" y="3913632"/>
             <a:ext cx="3840480" cy="329184"/>
           </a:xfrm>
           <a:prstGeom prst="rect">
@@ -8876,7 +10977,7 @@
         </p:nvSpPr>
         <p:spPr>
           <a:xfrm>
-            <a:off x="502920" y="4334256"/>
+            <a:off x="566928" y="4334256"/>
             <a:ext cx="1280160" cy="292608"/>
           </a:xfrm>
           <a:prstGeom prst="roundRect">
@@ -8898,7 +10999,7 @@
         </p:nvSpPr>
         <p:spPr>
           <a:xfrm>
-            <a:off x="502920" y="4334256"/>
+            <a:off x="566928" y="4334256"/>
             <a:ext cx="1280160" cy="292608"/>
           </a:xfrm>
           <a:prstGeom prst="rect">
@@ -8937,7 +11038,7 @@
         </p:nvSpPr>
         <p:spPr>
           <a:xfrm>
-            <a:off x="1929384" y="4315968"/>
+            <a:off x="1993392" y="4315968"/>
             <a:ext cx="3840480" cy="329184"/>
           </a:xfrm>
           <a:prstGeom prst="rect">
@@ -9262,7 +11363,7 @@
         </p:nvSpPr>
         <p:spPr>
           <a:xfrm>
-            <a:off x="502920" y="5760720"/>
+            <a:off x="566928" y="5760720"/>
             <a:ext cx="11057839" cy="457200"/>
           </a:xfrm>
           <a:prstGeom prst="rect">
@@ -9282,7 +11383,7 @@
         </p:nvSpPr>
         <p:spPr>
           <a:xfrm>
-            <a:off x="685800" y="5806440"/>
+            <a:off x="749808" y="5806440"/>
             <a:ext cx="10692079" cy="365760"/>
           </a:xfrm>
           <a:prstGeom prst="rect">
@@ -9321,7 +11422,7 @@
         </p:nvSpPr>
         <p:spPr>
           <a:xfrm>
-            <a:off x="502920" y="6382512"/>
+            <a:off x="566928" y="6382512"/>
             <a:ext cx="7315200" cy="219456"/>
           </a:xfrm>
           <a:prstGeom prst="rect">
@@ -9360,7 +11461,7 @@
         </p:nvSpPr>
         <p:spPr>
           <a:xfrm>
-            <a:off x="10774375" y="6382512"/>
+            <a:off x="10710367" y="6382512"/>
             <a:ext cx="914400" cy="219456"/>
           </a:xfrm>
           <a:prstGeom prst="rect">
@@ -9385,7 +11486,7 @@
                 <a:ea typeface="Arial" pitchFamily="34" charset="-122"/>
                 <a:cs typeface="Arial" pitchFamily="34" charset="-120"/>
               </a:rPr>
-              <a:t>7</a:t>
+              <a:t>9</a:t>
             </a:r>
             <a:endParaRPr lang="en-US" sz="900" dirty="0"/>
           </a:p>

--- a/docs/test/golden-outputs/p7-sutaek-r2/sutaek_dev_r2_basic.pptx
+++ b/docs/test/golden-outputs/p7-sutaek-r2/sutaek_dev_r2_basic.pptx
@@ -1840,10 +1840,15 @@
           <a:ln/>
         </p:spPr>
         <p:txBody>
-          <a:bodyPr wrap="square" lIns="0" tIns="0" rIns="0" bIns="0" rtlCol="0" anchor="ctr"/>
+          <a:bodyPr wrap="square" lIns="0" tIns="0" rIns="0" bIns="0" rtlCol="0" anchor="ctr">
+            <a:normAutofit/>
+          </a:bodyPr>
           <a:lstStyle/>
           <a:p>
             <a:pPr algn="l" indent="0" marL="0">
+              <a:lnSpc>
+                <a:spcPct val="100000"/>
+              </a:lnSpc>
               <a:buNone/>
             </a:pPr>
             <a:r>
@@ -1918,7 +1923,9 @@
           <a:ln/>
         </p:spPr>
         <p:txBody>
-          <a:bodyPr wrap="square" lIns="0" tIns="0" rIns="0" bIns="0" rtlCol="0" anchor="ctr"/>
+          <a:bodyPr wrap="square" lIns="0" tIns="0" rIns="0" bIns="0" rtlCol="0" anchor="ctr">
+            <a:normAutofit/>
+          </a:bodyPr>
           <a:lstStyle/>
           <a:p>
             <a:pPr algn="l" indent="0" marL="0">
@@ -2199,7 +2206,7 @@
                 <a:ea typeface="맑은 고딕" pitchFamily="34" charset="-122"/>
                 <a:cs typeface="맑은 고딕" pitchFamily="34" charset="-120"/>
               </a:rPr>
-              <a:t>2026.10.02  |  담당자  |  CREDEAL</a:t>
+              <a:t>2026.10.05  |  담당자  |  CREDEAL</a:t>
             </a:r>
             <a:endParaRPr lang="en-US" sz="900" dirty="0"/>
           </a:p>
@@ -2382,46 +2389,7 @@
         </p:nvSpPr>
         <p:spPr>
           <a:xfrm>
-            <a:off x="1133856" y="457200"/>
-            <a:ext cx="10490911" cy="182880"/>
-          </a:xfrm>
-          <a:prstGeom prst="rect">
-            <a:avLst/>
-          </a:prstGeom>
-          <a:noFill/>
-          <a:ln/>
-        </p:spPr>
-        <p:txBody>
-          <a:bodyPr wrap="square" lIns="0" tIns="0" rIns="0" bIns="0" rtlCol="0" anchor="ctr"/>
-          <a:lstStyle/>
-          <a:p>
-            <a:pPr indent="0" marL="0">
-              <a:buNone/>
-            </a:pPr>
-            <a:r>
-              <a:rPr lang="en-US" sz="950" b="1" spc="200" kern="0" dirty="0">
-                <a:solidFill>
-                  <a:srgbClr val="B8860B"/>
-                </a:solidFill>
-                <a:latin typeface="Arial" pitchFamily="34" charset="0"/>
-                <a:ea typeface="Arial" pitchFamily="34" charset="-122"/>
-                <a:cs typeface="Arial" pitchFamily="34" charset="-120"/>
-              </a:rPr>
-              <a:t>요약</a:t>
-            </a:r>
-            <a:endParaRPr lang="en-US" sz="950" dirty="0"/>
-          </a:p>
-        </p:txBody>
-      </p:sp>
-      <p:sp>
-        <p:nvSpPr>
-          <p:cNvPr id="5" name="Text 3"/>
-          <p:cNvSpPr/>
-          <p:nvPr/>
-        </p:nvSpPr>
-        <p:spPr>
-          <a:xfrm>
-            <a:off x="1133856" y="640080"/>
+            <a:off x="1133856" y="466344"/>
             <a:ext cx="10490911" cy="365760"/>
           </a:xfrm>
           <a:prstGeom prst="rect">
@@ -2456,13 +2424,77 @@
       </p:sp>
       <p:sp>
         <p:nvSpPr>
+          <p:cNvPr id="5" name="Text 3"/>
+          <p:cNvSpPr/>
+          <p:nvPr/>
+        </p:nvSpPr>
+        <p:spPr>
+          <a:xfrm>
+            <a:off x="566928" y="1188720"/>
+            <a:ext cx="11057839" cy="219075"/>
+          </a:xfrm>
+          <a:prstGeom prst="rect">
+            <a:avLst/>
+          </a:prstGeom>
+          <a:noFill/>
+          <a:ln/>
+        </p:spPr>
+        <p:txBody>
+          <a:bodyPr wrap="square" lIns="0" tIns="0" rIns="0" bIns="0" rtlCol="0" anchor="ctr">
+            <a:normAutofit/>
+          </a:bodyPr>
+          <a:lstStyle/>
+          <a:p>
+            <a:pPr indent="0" marL="0">
+              <a:buNone/>
+            </a:pPr>
+            <a:r>
+              <a:rPr lang="en-US" sz="1500" b="1" dirty="0">
+                <a:solidFill>
+                  <a:srgbClr val="132A3A"/>
+                </a:solidFill>
+                <a:latin typeface="맑은 고딕" pitchFamily="34" charset="0"/>
+                <a:ea typeface="맑은 고딕" pitchFamily="34" charset="-122"/>
+                <a:cs typeface="맑은 고딕" pitchFamily="34" charset="-120"/>
+              </a:rPr>
+              <a:t>경기도 구리시 수택동 도시지역·상업지역에 위치한 임대수익형 근린생활시설입니다.</a:t>
+            </a:r>
+            <a:endParaRPr lang="en-US" sz="1500" dirty="0"/>
+          </a:p>
+        </p:txBody>
+      </p:sp>
+      <p:sp>
+        <p:nvSpPr>
           <p:cNvPr id="6" name="Shape 4"/>
           <p:cNvSpPr/>
           <p:nvPr/>
         </p:nvSpPr>
         <p:spPr>
           <a:xfrm>
-            <a:off x="566928" y="1371600"/>
+            <a:off x="566928" y="1480947"/>
+            <a:ext cx="11057839" cy="0"/>
+          </a:xfrm>
+          <a:prstGeom prst="line">
+            <a:avLst/>
+          </a:prstGeom>
+          <a:noFill/>
+          <a:ln w="19050">
+            <a:solidFill>
+              <a:srgbClr val="B8860B"/>
+            </a:solidFill>
+            <a:prstDash val="solid"/>
+          </a:ln>
+        </p:spPr>
+      </p:sp>
+      <p:sp>
+        <p:nvSpPr>
+          <p:cNvPr id="7" name="Shape 5"/>
+          <p:cNvSpPr/>
+          <p:nvPr/>
+        </p:nvSpPr>
+        <p:spPr>
+          <a:xfrm>
+            <a:off x="566928" y="1618107"/>
             <a:ext cx="3576218" cy="960120"/>
           </a:xfrm>
           <a:prstGeom prst="roundRect">
@@ -2483,13 +2515,13 @@
       </p:sp>
       <p:sp>
         <p:nvSpPr>
-          <p:cNvPr id="7" name="Text 5"/>
-          <p:cNvSpPr/>
-          <p:nvPr/>
-        </p:nvSpPr>
-        <p:spPr>
-          <a:xfrm>
-            <a:off x="731520" y="1499616"/>
+          <p:cNvPr id="8" name="Text 6"/>
+          <p:cNvSpPr/>
+          <p:nvPr/>
+        </p:nvSpPr>
+        <p:spPr>
+          <a:xfrm>
+            <a:off x="731520" y="1746123"/>
             <a:ext cx="3247034" cy="201168"/>
           </a:xfrm>
           <a:prstGeom prst="rect">
@@ -2524,13 +2556,13 @@
       </p:sp>
       <p:sp>
         <p:nvSpPr>
-          <p:cNvPr id="8" name="Text 6"/>
-          <p:cNvSpPr/>
-          <p:nvPr/>
-        </p:nvSpPr>
-        <p:spPr>
-          <a:xfrm>
-            <a:off x="731520" y="1719072"/>
+          <p:cNvPr id="9" name="Text 7"/>
+          <p:cNvSpPr/>
+          <p:nvPr/>
+        </p:nvSpPr>
+        <p:spPr>
+          <a:xfrm>
+            <a:off x="731520" y="1965579"/>
             <a:ext cx="3247034" cy="279400"/>
           </a:xfrm>
           <a:prstGeom prst="rect">
@@ -2568,13 +2600,13 @@
       </p:sp>
       <p:sp>
         <p:nvSpPr>
-          <p:cNvPr id="9" name="Shape 7"/>
-          <p:cNvSpPr/>
-          <p:nvPr/>
-        </p:nvSpPr>
-        <p:spPr>
-          <a:xfrm>
-            <a:off x="4307738" y="1371600"/>
+          <p:cNvPr id="10" name="Shape 8"/>
+          <p:cNvSpPr/>
+          <p:nvPr/>
+        </p:nvSpPr>
+        <p:spPr>
+          <a:xfrm>
+            <a:off x="4307738" y="1618107"/>
             <a:ext cx="3576218" cy="960120"/>
           </a:xfrm>
           <a:prstGeom prst="roundRect">
@@ -2595,13 +2627,13 @@
       </p:sp>
       <p:sp>
         <p:nvSpPr>
-          <p:cNvPr id="10" name="Text 8"/>
-          <p:cNvSpPr/>
-          <p:nvPr/>
-        </p:nvSpPr>
-        <p:spPr>
-          <a:xfrm>
-            <a:off x="4472330" y="1499616"/>
+          <p:cNvPr id="11" name="Text 9"/>
+          <p:cNvSpPr/>
+          <p:nvPr/>
+        </p:nvSpPr>
+        <p:spPr>
+          <a:xfrm>
+            <a:off x="4472330" y="1746123"/>
             <a:ext cx="3247034" cy="201168"/>
           </a:xfrm>
           <a:prstGeom prst="rect">
@@ -2636,13 +2668,13 @@
       </p:sp>
       <p:sp>
         <p:nvSpPr>
-          <p:cNvPr id="11" name="Text 9"/>
-          <p:cNvSpPr/>
-          <p:nvPr/>
-        </p:nvSpPr>
-        <p:spPr>
-          <a:xfrm>
-            <a:off x="4472330" y="1719072"/>
+          <p:cNvPr id="12" name="Text 10"/>
+          <p:cNvSpPr/>
+          <p:nvPr/>
+        </p:nvSpPr>
+        <p:spPr>
+          <a:xfrm>
+            <a:off x="4472330" y="1965579"/>
             <a:ext cx="3247034" cy="279400"/>
           </a:xfrm>
           <a:prstGeom prst="rect">
@@ -2680,13 +2712,13 @@
       </p:sp>
       <p:sp>
         <p:nvSpPr>
-          <p:cNvPr id="12" name="Shape 10"/>
-          <p:cNvSpPr/>
-          <p:nvPr/>
-        </p:nvSpPr>
-        <p:spPr>
-          <a:xfrm>
-            <a:off x="8048549" y="1371600"/>
+          <p:cNvPr id="13" name="Shape 11"/>
+          <p:cNvSpPr/>
+          <p:nvPr/>
+        </p:nvSpPr>
+        <p:spPr>
+          <a:xfrm>
+            <a:off x="8048549" y="1618107"/>
             <a:ext cx="3576218" cy="960120"/>
           </a:xfrm>
           <a:prstGeom prst="roundRect">
@@ -2707,13 +2739,13 @@
       </p:sp>
       <p:sp>
         <p:nvSpPr>
-          <p:cNvPr id="13" name="Text 11"/>
-          <p:cNvSpPr/>
-          <p:nvPr/>
-        </p:nvSpPr>
-        <p:spPr>
-          <a:xfrm>
-            <a:off x="8213141" y="1499616"/>
+          <p:cNvPr id="14" name="Text 12"/>
+          <p:cNvSpPr/>
+          <p:nvPr/>
+        </p:nvSpPr>
+        <p:spPr>
+          <a:xfrm>
+            <a:off x="8213141" y="1746123"/>
             <a:ext cx="3247034" cy="201168"/>
           </a:xfrm>
           <a:prstGeom prst="rect">
@@ -2748,13 +2780,13 @@
       </p:sp>
       <p:sp>
         <p:nvSpPr>
-          <p:cNvPr id="14" name="Text 12"/>
-          <p:cNvSpPr/>
-          <p:nvPr/>
-        </p:nvSpPr>
-        <p:spPr>
-          <a:xfrm>
-            <a:off x="8213141" y="1719072"/>
+          <p:cNvPr id="15" name="Text 13"/>
+          <p:cNvSpPr/>
+          <p:nvPr/>
+        </p:nvSpPr>
+        <p:spPr>
+          <a:xfrm>
+            <a:off x="8213141" y="1965579"/>
             <a:ext cx="3247034" cy="279400"/>
           </a:xfrm>
           <a:prstGeom prst="rect">
@@ -2792,13 +2824,13 @@
       </p:sp>
       <p:sp>
         <p:nvSpPr>
-          <p:cNvPr id="15" name="Shape 13"/>
-          <p:cNvSpPr/>
-          <p:nvPr/>
-        </p:nvSpPr>
-        <p:spPr>
-          <a:xfrm>
-            <a:off x="566928" y="2496312"/>
+          <p:cNvPr id="16" name="Shape 14"/>
+          <p:cNvSpPr/>
+          <p:nvPr/>
+        </p:nvSpPr>
+        <p:spPr>
+          <a:xfrm>
+            <a:off x="566928" y="2742819"/>
             <a:ext cx="3576218" cy="960120"/>
           </a:xfrm>
           <a:prstGeom prst="roundRect">
@@ -2819,13 +2851,13 @@
       </p:sp>
       <p:sp>
         <p:nvSpPr>
-          <p:cNvPr id="16" name="Text 14"/>
-          <p:cNvSpPr/>
-          <p:nvPr/>
-        </p:nvSpPr>
-        <p:spPr>
-          <a:xfrm>
-            <a:off x="731520" y="2624328"/>
+          <p:cNvPr id="17" name="Text 15"/>
+          <p:cNvSpPr/>
+          <p:nvPr/>
+        </p:nvSpPr>
+        <p:spPr>
+          <a:xfrm>
+            <a:off x="731520" y="2870835"/>
             <a:ext cx="3247034" cy="201168"/>
           </a:xfrm>
           <a:prstGeom prst="rect">
@@ -2844,7 +2876,7 @@
               <a:buNone/>
             </a:pPr>
             <a:r>
-              <a:rPr lang="en-US" sz="950" dirty="0">
+              <a:rPr lang="en-US" sz="850" dirty="0">
                 <a:solidFill>
                   <a:srgbClr val="5B6B73"/>
                 </a:solidFill>
@@ -2852,21 +2884,21 @@
                 <a:ea typeface="맑은 고딕" pitchFamily="34" charset="-122"/>
                 <a:cs typeface="맑은 고딕" pitchFamily="34" charset="-120"/>
               </a:rPr>
-              <a:t>실투자금</a:t>
-            </a:r>
-            <a:endParaRPr lang="en-US" sz="950" dirty="0"/>
-          </a:p>
-        </p:txBody>
-      </p:sp>
-      <p:sp>
-        <p:nvSpPr>
-          <p:cNvPr id="17" name="Text 15"/>
-          <p:cNvSpPr/>
-          <p:nvPr/>
-        </p:nvSpPr>
-        <p:spPr>
-          <a:xfrm>
-            <a:off x="731520" y="2843784"/>
+              <a:t>실투자금 (취득비용 포함)</a:t>
+            </a:r>
+            <a:endParaRPr lang="en-US" sz="850" dirty="0"/>
+          </a:p>
+        </p:txBody>
+      </p:sp>
+      <p:sp>
+        <p:nvSpPr>
+          <p:cNvPr id="18" name="Text 16"/>
+          <p:cNvSpPr/>
+          <p:nvPr/>
+        </p:nvSpPr>
+        <p:spPr>
+          <a:xfrm>
+            <a:off x="731520" y="3090291"/>
             <a:ext cx="3247034" cy="279400"/>
           </a:xfrm>
           <a:prstGeom prst="rect">
@@ -2904,13 +2936,13 @@
       </p:sp>
       <p:sp>
         <p:nvSpPr>
-          <p:cNvPr id="18" name="Shape 16"/>
-          <p:cNvSpPr/>
-          <p:nvPr/>
-        </p:nvSpPr>
-        <p:spPr>
-          <a:xfrm>
-            <a:off x="4307738" y="2496312"/>
+          <p:cNvPr id="19" name="Shape 17"/>
+          <p:cNvSpPr/>
+          <p:nvPr/>
+        </p:nvSpPr>
+        <p:spPr>
+          <a:xfrm>
+            <a:off x="4307738" y="2742819"/>
             <a:ext cx="3576218" cy="960120"/>
           </a:xfrm>
           <a:prstGeom prst="roundRect">
@@ -2931,13 +2963,13 @@
       </p:sp>
       <p:sp>
         <p:nvSpPr>
-          <p:cNvPr id="19" name="Text 17"/>
-          <p:cNvSpPr/>
-          <p:nvPr/>
-        </p:nvSpPr>
-        <p:spPr>
-          <a:xfrm>
-            <a:off x="4472330" y="2624328"/>
+          <p:cNvPr id="20" name="Text 18"/>
+          <p:cNvSpPr/>
+          <p:nvPr/>
+        </p:nvSpPr>
+        <p:spPr>
+          <a:xfrm>
+            <a:off x="4472330" y="2870835"/>
             <a:ext cx="3247034" cy="201168"/>
           </a:xfrm>
           <a:prstGeom prst="rect">
@@ -2956,7 +2988,7 @@
               <a:buNone/>
             </a:pPr>
             <a:r>
-              <a:rPr lang="en-US" sz="850" dirty="0">
+              <a:rPr lang="en-US" sz="950" dirty="0">
                 <a:solidFill>
                   <a:srgbClr val="5B6B73"/>
                 </a:solidFill>
@@ -2964,21 +2996,21 @@
                 <a:ea typeface="맑은 고딕" pitchFamily="34" charset="-122"/>
                 <a:cs typeface="맑은 고딕" pitchFamily="34" charset="-120"/>
               </a:rPr>
-              <a:t>연 수익률(Cap Rate)</a:t>
-            </a:r>
-            <a:endParaRPr lang="en-US" sz="850" dirty="0"/>
-          </a:p>
-        </p:txBody>
-      </p:sp>
-      <p:sp>
-        <p:nvSpPr>
-          <p:cNvPr id="20" name="Text 18"/>
-          <p:cNvSpPr/>
-          <p:nvPr/>
-        </p:nvSpPr>
-        <p:spPr>
-          <a:xfrm>
-            <a:off x="4472330" y="2843784"/>
+              <a:t>연 수익률</a:t>
+            </a:r>
+            <a:endParaRPr lang="en-US" sz="950" dirty="0"/>
+          </a:p>
+        </p:txBody>
+      </p:sp>
+      <p:sp>
+        <p:nvSpPr>
+          <p:cNvPr id="21" name="Text 19"/>
+          <p:cNvSpPr/>
+          <p:nvPr/>
+        </p:nvSpPr>
+        <p:spPr>
+          <a:xfrm>
+            <a:off x="4472330" y="3090291"/>
             <a:ext cx="3247034" cy="279400"/>
           </a:xfrm>
           <a:prstGeom prst="rect">
@@ -3016,13 +3048,13 @@
       </p:sp>
       <p:sp>
         <p:nvSpPr>
-          <p:cNvPr id="21" name="Shape 19"/>
-          <p:cNvSpPr/>
-          <p:nvPr/>
-        </p:nvSpPr>
-        <p:spPr>
-          <a:xfrm>
-            <a:off x="8048549" y="2496312"/>
+          <p:cNvPr id="22" name="Shape 20"/>
+          <p:cNvSpPr/>
+          <p:nvPr/>
+        </p:nvSpPr>
+        <p:spPr>
+          <a:xfrm>
+            <a:off x="8048549" y="2742819"/>
             <a:ext cx="3576218" cy="960120"/>
           </a:xfrm>
           <a:prstGeom prst="roundRect">
@@ -3043,13 +3075,13 @@
       </p:sp>
       <p:sp>
         <p:nvSpPr>
-          <p:cNvPr id="22" name="Text 20"/>
-          <p:cNvSpPr/>
-          <p:nvPr/>
-        </p:nvSpPr>
-        <p:spPr>
-          <a:xfrm>
-            <a:off x="8213141" y="2624328"/>
+          <p:cNvPr id="23" name="Text 21"/>
+          <p:cNvSpPr/>
+          <p:nvPr/>
+        </p:nvSpPr>
+        <p:spPr>
+          <a:xfrm>
+            <a:off x="8213141" y="2870835"/>
             <a:ext cx="3247034" cy="201168"/>
           </a:xfrm>
           <a:prstGeom prst="rect">
@@ -3084,13 +3116,13 @@
       </p:sp>
       <p:sp>
         <p:nvSpPr>
-          <p:cNvPr id="23" name="Text 21"/>
-          <p:cNvSpPr/>
-          <p:nvPr/>
-        </p:nvSpPr>
-        <p:spPr>
-          <a:xfrm>
-            <a:off x="8213141" y="2843784"/>
+          <p:cNvPr id="24" name="Text 22"/>
+          <p:cNvSpPr/>
+          <p:nvPr/>
+        </p:nvSpPr>
+        <p:spPr>
+          <a:xfrm>
+            <a:off x="8213141" y="3090291"/>
             <a:ext cx="3247034" cy="279400"/>
           </a:xfrm>
           <a:prstGeom prst="rect">
@@ -3128,13 +3160,13 @@
       </p:sp>
       <p:sp>
         <p:nvSpPr>
-          <p:cNvPr id="24" name="Text 22"/>
-          <p:cNvSpPr/>
-          <p:nvPr/>
-        </p:nvSpPr>
-        <p:spPr>
-          <a:xfrm>
-            <a:off x="566928" y="3712464"/>
+          <p:cNvPr id="25" name="Text 23"/>
+          <p:cNvSpPr/>
+          <p:nvPr/>
+        </p:nvSpPr>
+        <p:spPr>
+          <a:xfrm>
+            <a:off x="566928" y="3958971"/>
             <a:ext cx="11057839" cy="274320"/>
           </a:xfrm>
           <a:prstGeom prst="rect">
@@ -3167,18 +3199,18 @@
       </p:sp>
       <p:sp>
         <p:nvSpPr>
-          <p:cNvPr id="25" name="Shape 23"/>
-          <p:cNvSpPr/>
-          <p:nvPr/>
-        </p:nvSpPr>
-        <p:spPr>
-          <a:xfrm>
-            <a:off x="566928" y="4041648"/>
-            <a:ext cx="11057839" cy="585216"/>
+          <p:cNvPr id="26" name="Shape 24"/>
+          <p:cNvSpPr/>
+          <p:nvPr/>
+        </p:nvSpPr>
+        <p:spPr>
+          <a:xfrm>
+            <a:off x="566928" y="4288155"/>
+            <a:ext cx="11057839" cy="512191"/>
           </a:xfrm>
           <a:prstGeom prst="roundRect">
             <a:avLst>
-              <a:gd name="adj" fmla="val 7813"/>
+              <a:gd name="adj" fmla="val 8926"/>
             </a:avLst>
           </a:prstGeom>
           <a:solidFill>
@@ -3194,13 +3226,13 @@
       </p:sp>
       <p:sp>
         <p:nvSpPr>
-          <p:cNvPr id="26" name="Shape 24"/>
-          <p:cNvSpPr/>
-          <p:nvPr/>
-        </p:nvSpPr>
-        <p:spPr>
-          <a:xfrm>
-            <a:off x="676656" y="4151376"/>
+          <p:cNvPr id="27" name="Shape 25"/>
+          <p:cNvSpPr/>
+          <p:nvPr/>
+        </p:nvSpPr>
+        <p:spPr>
+          <a:xfrm>
+            <a:off x="676656" y="4361371"/>
             <a:ext cx="411480" cy="365760"/>
           </a:xfrm>
           <a:prstGeom prst="roundRect">
@@ -3221,13 +3253,13 @@
       </p:sp>
       <p:sp>
         <p:nvSpPr>
-          <p:cNvPr id="27" name="Text 25"/>
-          <p:cNvSpPr/>
-          <p:nvPr/>
-        </p:nvSpPr>
-        <p:spPr>
-          <a:xfrm>
-            <a:off x="676656" y="4151376"/>
+          <p:cNvPr id="28" name="Text 26"/>
+          <p:cNvSpPr/>
+          <p:nvPr/>
+        </p:nvSpPr>
+        <p:spPr>
+          <a:xfrm>
+            <a:off x="676656" y="4361371"/>
             <a:ext cx="411480" cy="365760"/>
           </a:xfrm>
           <a:prstGeom prst="rect">
@@ -3260,23 +3292,25 @@
       </p:sp>
       <p:sp>
         <p:nvSpPr>
-          <p:cNvPr id="28" name="Text 26"/>
-          <p:cNvSpPr/>
-          <p:nvPr/>
-        </p:nvSpPr>
-        <p:spPr>
-          <a:xfrm>
-            <a:off x="1207008" y="4078224"/>
-            <a:ext cx="10280599" cy="512064"/>
-          </a:xfrm>
-          <a:prstGeom prst="rect">
-            <a:avLst/>
-          </a:prstGeom>
-          <a:noFill/>
-          <a:ln/>
-        </p:spPr>
-        <p:txBody>
-          <a:bodyPr wrap="square" lIns="0" tIns="0" rIns="0" bIns="0" rtlCol="0" anchor="ctr"/>
+          <p:cNvPr id="29" name="Text 27"/>
+          <p:cNvSpPr/>
+          <p:nvPr/>
+        </p:nvSpPr>
+        <p:spPr>
+          <a:xfrm>
+            <a:off x="1207008" y="4324731"/>
+            <a:ext cx="10280599" cy="439039"/>
+          </a:xfrm>
+          <a:prstGeom prst="rect">
+            <a:avLst/>
+          </a:prstGeom>
+          <a:noFill/>
+          <a:ln/>
+        </p:spPr>
+        <p:txBody>
+          <a:bodyPr wrap="square" lIns="0" tIns="0" rIns="0" bIns="0" rtlCol="0" anchor="ctr">
+            <a:normAutofit/>
+          </a:bodyPr>
           <a:lstStyle/>
           <a:p>
             <a:pPr indent="0" marL="0">
@@ -3291,7 +3325,7 @@
                 <a:ea typeface="맑은 고딕" pitchFamily="34" charset="-122"/>
                 <a:cs typeface="맑은 고딕" pitchFamily="34" charset="-120"/>
               </a:rPr>
-              <a:t>입지 가치: 대중교통 역세권 입지, 해당 권역 업무·상업 중심지 배후 수요 확보</a:t>
+              <a:t>토지 — 도시지역·상업지역 대지 651.2㎡ 규모입니다.</a:t>
             </a:r>
             <a:endParaRPr lang="en-US" sz="1150" dirty="0"/>
           </a:p>
@@ -3299,18 +3333,18 @@
       </p:sp>
       <p:sp>
         <p:nvSpPr>
-          <p:cNvPr id="29" name="Shape 27"/>
-          <p:cNvSpPr/>
-          <p:nvPr/>
-        </p:nvSpPr>
-        <p:spPr>
-          <a:xfrm>
-            <a:off x="566928" y="4722876"/>
-            <a:ext cx="11057839" cy="585216"/>
+          <p:cNvPr id="30" name="Shape 28"/>
+          <p:cNvSpPr/>
+          <p:nvPr/>
+        </p:nvSpPr>
+        <p:spPr>
+          <a:xfrm>
+            <a:off x="566928" y="4882642"/>
+            <a:ext cx="11057839" cy="512191"/>
           </a:xfrm>
           <a:prstGeom prst="roundRect">
             <a:avLst>
-              <a:gd name="adj" fmla="val 7813"/>
+              <a:gd name="adj" fmla="val 8926"/>
             </a:avLst>
           </a:prstGeom>
           <a:solidFill>
@@ -3326,13 +3360,13 @@
       </p:sp>
       <p:sp>
         <p:nvSpPr>
-          <p:cNvPr id="30" name="Shape 28"/>
-          <p:cNvSpPr/>
-          <p:nvPr/>
-        </p:nvSpPr>
-        <p:spPr>
-          <a:xfrm>
-            <a:off x="676656" y="4832604"/>
+          <p:cNvPr id="31" name="Shape 29"/>
+          <p:cNvSpPr/>
+          <p:nvPr/>
+        </p:nvSpPr>
+        <p:spPr>
+          <a:xfrm>
+            <a:off x="676656" y="4955858"/>
             <a:ext cx="411480" cy="365760"/>
           </a:xfrm>
           <a:prstGeom prst="roundRect">
@@ -3353,13 +3387,13 @@
       </p:sp>
       <p:sp>
         <p:nvSpPr>
-          <p:cNvPr id="31" name="Text 29"/>
-          <p:cNvSpPr/>
-          <p:nvPr/>
-        </p:nvSpPr>
-        <p:spPr>
-          <a:xfrm>
-            <a:off x="676656" y="4832604"/>
+          <p:cNvPr id="32" name="Text 30"/>
+          <p:cNvSpPr/>
+          <p:nvPr/>
+        </p:nvSpPr>
+        <p:spPr>
+          <a:xfrm>
+            <a:off x="676656" y="4955858"/>
             <a:ext cx="411480" cy="365760"/>
           </a:xfrm>
           <a:prstGeom prst="rect">
@@ -3392,23 +3426,25 @@
       </p:sp>
       <p:sp>
         <p:nvSpPr>
-          <p:cNvPr id="32" name="Text 30"/>
-          <p:cNvSpPr/>
-          <p:nvPr/>
-        </p:nvSpPr>
-        <p:spPr>
-          <a:xfrm>
-            <a:off x="1207008" y="4759452"/>
-            <a:ext cx="10280599" cy="512064"/>
-          </a:xfrm>
-          <a:prstGeom prst="rect">
-            <a:avLst/>
-          </a:prstGeom>
-          <a:noFill/>
-          <a:ln/>
-        </p:spPr>
-        <p:txBody>
-          <a:bodyPr wrap="square" lIns="0" tIns="0" rIns="0" bIns="0" rtlCol="0" anchor="ctr"/>
+          <p:cNvPr id="33" name="Text 31"/>
+          <p:cNvSpPr/>
+          <p:nvPr/>
+        </p:nvSpPr>
+        <p:spPr>
+          <a:xfrm>
+            <a:off x="1207008" y="4919218"/>
+            <a:ext cx="10280599" cy="439039"/>
+          </a:xfrm>
+          <a:prstGeom prst="rect">
+            <a:avLst/>
+          </a:prstGeom>
+          <a:noFill/>
+          <a:ln/>
+        </p:spPr>
+        <p:txBody>
+          <a:bodyPr wrap="square" lIns="0" tIns="0" rIns="0" bIns="0" rtlCol="0" anchor="ctr">
+            <a:normAutofit/>
+          </a:bodyPr>
           <a:lstStyle/>
           <a:p>
             <a:pPr indent="0" marL="0">
@@ -3423,7 +3459,7 @@
                 <a:ea typeface="맑은 고딕" pitchFamily="34" charset="-122"/>
                 <a:cs typeface="맑은 고딕" pitchFamily="34" charset="-120"/>
               </a:rPr>
-              <a:t>자산 규모: 대지 197평 규모 단독 빌딩</a:t>
+              <a:t>입지 가치: 대중교통 역세권 입지, 해당 권역 업무·상업 중심지 배후 수요 확보</a:t>
             </a:r>
             <a:endParaRPr lang="en-US" sz="1150" dirty="0"/>
           </a:p>
@@ -3431,18 +3467,18 @@
       </p:sp>
       <p:sp>
         <p:nvSpPr>
-          <p:cNvPr id="33" name="Shape 31"/>
-          <p:cNvSpPr/>
-          <p:nvPr/>
-        </p:nvSpPr>
-        <p:spPr>
-          <a:xfrm>
-            <a:off x="566928" y="5404104"/>
-            <a:ext cx="11057839" cy="585216"/>
+          <p:cNvPr id="34" name="Shape 32"/>
+          <p:cNvSpPr/>
+          <p:nvPr/>
+        </p:nvSpPr>
+        <p:spPr>
+          <a:xfrm>
+            <a:off x="566928" y="5477129"/>
+            <a:ext cx="11057839" cy="512191"/>
           </a:xfrm>
           <a:prstGeom prst="roundRect">
             <a:avLst>
-              <a:gd name="adj" fmla="val 7813"/>
+              <a:gd name="adj" fmla="val 8926"/>
             </a:avLst>
           </a:prstGeom>
           <a:solidFill>
@@ -3458,13 +3494,13 @@
       </p:sp>
       <p:sp>
         <p:nvSpPr>
-          <p:cNvPr id="34" name="Shape 32"/>
-          <p:cNvSpPr/>
-          <p:nvPr/>
-        </p:nvSpPr>
-        <p:spPr>
-          <a:xfrm>
-            <a:off x="676656" y="5513832"/>
+          <p:cNvPr id="35" name="Shape 33"/>
+          <p:cNvSpPr/>
+          <p:nvPr/>
+        </p:nvSpPr>
+        <p:spPr>
+          <a:xfrm>
+            <a:off x="676656" y="5550345"/>
             <a:ext cx="411480" cy="365760"/>
           </a:xfrm>
           <a:prstGeom prst="roundRect">
@@ -3485,13 +3521,13 @@
       </p:sp>
       <p:sp>
         <p:nvSpPr>
-          <p:cNvPr id="35" name="Text 33"/>
-          <p:cNvSpPr/>
-          <p:nvPr/>
-        </p:nvSpPr>
-        <p:spPr>
-          <a:xfrm>
-            <a:off x="676656" y="5513832"/>
+          <p:cNvPr id="36" name="Text 34"/>
+          <p:cNvSpPr/>
+          <p:nvPr/>
+        </p:nvSpPr>
+        <p:spPr>
+          <a:xfrm>
+            <a:off x="676656" y="5550345"/>
             <a:ext cx="411480" cy="365760"/>
           </a:xfrm>
           <a:prstGeom prst="rect">
@@ -3524,23 +3560,25 @@
       </p:sp>
       <p:sp>
         <p:nvSpPr>
-          <p:cNvPr id="36" name="Text 34"/>
-          <p:cNvSpPr/>
-          <p:nvPr/>
-        </p:nvSpPr>
-        <p:spPr>
-          <a:xfrm>
-            <a:off x="1207008" y="5440680"/>
-            <a:ext cx="10280599" cy="512064"/>
-          </a:xfrm>
-          <a:prstGeom prst="rect">
-            <a:avLst/>
-          </a:prstGeom>
-          <a:noFill/>
-          <a:ln/>
-        </p:spPr>
-        <p:txBody>
-          <a:bodyPr wrap="square" lIns="0" tIns="0" rIns="0" bIns="0" rtlCol="0" anchor="ctr"/>
+          <p:cNvPr id="37" name="Text 35"/>
+          <p:cNvSpPr/>
+          <p:nvPr/>
+        </p:nvSpPr>
+        <p:spPr>
+          <a:xfrm>
+            <a:off x="1207008" y="5513705"/>
+            <a:ext cx="10280599" cy="439039"/>
+          </a:xfrm>
+          <a:prstGeom prst="rect">
+            <a:avLst/>
+          </a:prstGeom>
+          <a:noFill/>
+          <a:ln/>
+        </p:spPr>
+        <p:txBody>
+          <a:bodyPr wrap="square" lIns="0" tIns="0" rIns="0" bIns="0" rtlCol="0" anchor="ctr">
+            <a:normAutofit/>
+          </a:bodyPr>
           <a:lstStyle/>
           <a:p>
             <a:pPr indent="0" marL="0">
@@ -3555,7 +3593,7 @@
                 <a:ea typeface="맑은 고딕" pitchFamily="34" charset="-122"/>
                 <a:cs typeface="맑은 고딕" pitchFamily="34" charset="-120"/>
               </a:rPr>
-              <a:t>수익 안정성: 안정적 임대수익 기반 투자 매물</a:t>
+              <a:t>안정적 현금흐름: 전 층 임차인 운영 기반의 안정적 월 임대수익 창출</a:t>
             </a:r>
             <a:endParaRPr lang="en-US" sz="1150" dirty="0"/>
           </a:p>
@@ -3563,7 +3601,7 @@
       </p:sp>
       <p:sp>
         <p:nvSpPr>
-          <p:cNvPr id="37" name="Text 35"/>
+          <p:cNvPr id="38" name="Text 36"/>
           <p:cNvSpPr/>
           <p:nvPr/>
         </p:nvSpPr>
@@ -3602,7 +3640,7 @@
       </p:sp>
       <p:sp>
         <p:nvSpPr>
-          <p:cNvPr id="38" name="Text 36"/>
+          <p:cNvPr id="39" name="Text 37"/>
           <p:cNvSpPr/>
           <p:nvPr/>
         </p:nvSpPr>
@@ -3738,46 +3776,7 @@
         </p:nvSpPr>
         <p:spPr>
           <a:xfrm>
-            <a:off x="1133856" y="457200"/>
-            <a:ext cx="10490911" cy="182880"/>
-          </a:xfrm>
-          <a:prstGeom prst="rect">
-            <a:avLst/>
-          </a:prstGeom>
-          <a:noFill/>
-          <a:ln/>
-        </p:spPr>
-        <p:txBody>
-          <a:bodyPr wrap="square" lIns="0" tIns="0" rIns="0" bIns="0" rtlCol="0" anchor="ctr"/>
-          <a:lstStyle/>
-          <a:p>
-            <a:pPr indent="0" marL="0">
-              <a:buNone/>
-            </a:pPr>
-            <a:r>
-              <a:rPr lang="en-US" sz="950" b="1" spc="200" kern="0" dirty="0">
-                <a:solidFill>
-                  <a:srgbClr val="B8860B"/>
-                </a:solidFill>
-                <a:latin typeface="Arial" pitchFamily="34" charset="0"/>
-                <a:ea typeface="Arial" pitchFamily="34" charset="-122"/>
-                <a:cs typeface="Arial" pitchFamily="34" charset="-120"/>
-              </a:rPr>
-              <a:t>물건 개요</a:t>
-            </a:r>
-            <a:endParaRPr lang="en-US" sz="950" dirty="0"/>
-          </a:p>
-        </p:txBody>
-      </p:sp>
-      <p:sp>
-        <p:nvSpPr>
-          <p:cNvPr id="5" name="Text 3"/>
-          <p:cNvSpPr/>
-          <p:nvPr/>
-        </p:nvSpPr>
-        <p:spPr>
-          <a:xfrm>
-            <a:off x="1133856" y="640080"/>
+            <a:off x="1133856" y="466344"/>
             <a:ext cx="10490911" cy="365760"/>
           </a:xfrm>
           <a:prstGeom prst="rect">
@@ -3812,7 +3811,7 @@
       </p:sp>
       <p:sp>
         <p:nvSpPr>
-          <p:cNvPr id="6" name="Text 4"/>
+          <p:cNvPr id="5" name="Text 3"/>
           <p:cNvSpPr/>
           <p:nvPr/>
         </p:nvSpPr>
@@ -3851,7 +3850,7 @@
       </p:sp>
       <p:sp>
         <p:nvSpPr>
-          <p:cNvPr id="7" name="Text 5"/>
+          <p:cNvPr id="6" name="Text 4"/>
           <p:cNvSpPr/>
           <p:nvPr/>
         </p:nvSpPr>
@@ -3895,7 +3894,7 @@
       </p:sp>
       <p:sp>
         <p:nvSpPr>
-          <p:cNvPr id="8" name="Text 6"/>
+          <p:cNvPr id="7" name="Text 5"/>
           <p:cNvSpPr/>
           <p:nvPr/>
         </p:nvSpPr>
@@ -3939,7 +3938,7 @@
       </p:sp>
       <p:sp>
         <p:nvSpPr>
-          <p:cNvPr id="9" name="Shape 7"/>
+          <p:cNvPr id="8" name="Shape 6"/>
           <p:cNvSpPr/>
           <p:nvPr/>
         </p:nvSpPr>
@@ -3962,7 +3961,7 @@
       </p:sp>
       <p:sp>
         <p:nvSpPr>
-          <p:cNvPr id="10" name="Text 8"/>
+          <p:cNvPr id="9" name="Text 7"/>
           <p:cNvSpPr/>
           <p:nvPr/>
         </p:nvSpPr>
@@ -4006,7 +4005,7 @@
       </p:sp>
       <p:sp>
         <p:nvSpPr>
-          <p:cNvPr id="11" name="Text 9"/>
+          <p:cNvPr id="10" name="Text 8"/>
           <p:cNvSpPr/>
           <p:nvPr/>
         </p:nvSpPr>
@@ -4050,7 +4049,7 @@
       </p:sp>
       <p:sp>
         <p:nvSpPr>
-          <p:cNvPr id="12" name="Shape 10"/>
+          <p:cNvPr id="11" name="Shape 9"/>
           <p:cNvSpPr/>
           <p:nvPr/>
         </p:nvSpPr>
@@ -4073,7 +4072,7 @@
       </p:sp>
       <p:sp>
         <p:nvSpPr>
-          <p:cNvPr id="13" name="Text 11"/>
+          <p:cNvPr id="12" name="Text 10"/>
           <p:cNvSpPr/>
           <p:nvPr/>
         </p:nvSpPr>
@@ -4117,7 +4116,7 @@
       </p:sp>
       <p:sp>
         <p:nvSpPr>
-          <p:cNvPr id="14" name="Text 12"/>
+          <p:cNvPr id="13" name="Text 11"/>
           <p:cNvSpPr/>
           <p:nvPr/>
         </p:nvSpPr>
@@ -4161,7 +4160,7 @@
       </p:sp>
       <p:sp>
         <p:nvSpPr>
-          <p:cNvPr id="15" name="Shape 13"/>
+          <p:cNvPr id="14" name="Shape 12"/>
           <p:cNvSpPr/>
           <p:nvPr/>
         </p:nvSpPr>
@@ -4184,7 +4183,7 @@
       </p:sp>
       <p:sp>
         <p:nvSpPr>
-          <p:cNvPr id="16" name="Text 14"/>
+          <p:cNvPr id="15" name="Text 13"/>
           <p:cNvSpPr/>
           <p:nvPr/>
         </p:nvSpPr>
@@ -4228,7 +4227,7 @@
       </p:sp>
       <p:sp>
         <p:nvSpPr>
-          <p:cNvPr id="17" name="Text 15"/>
+          <p:cNvPr id="16" name="Text 14"/>
           <p:cNvSpPr/>
           <p:nvPr/>
         </p:nvSpPr>
@@ -4272,7 +4271,7 @@
       </p:sp>
       <p:sp>
         <p:nvSpPr>
-          <p:cNvPr id="18" name="Shape 16"/>
+          <p:cNvPr id="17" name="Shape 15"/>
           <p:cNvSpPr/>
           <p:nvPr/>
         </p:nvSpPr>
@@ -4295,7 +4294,7 @@
       </p:sp>
       <p:sp>
         <p:nvSpPr>
-          <p:cNvPr id="19" name="Text 17"/>
+          <p:cNvPr id="18" name="Text 16"/>
           <p:cNvSpPr/>
           <p:nvPr/>
         </p:nvSpPr>
@@ -4339,7 +4338,7 @@
       </p:sp>
       <p:sp>
         <p:nvSpPr>
-          <p:cNvPr id="20" name="Text 18"/>
+          <p:cNvPr id="19" name="Text 17"/>
           <p:cNvSpPr/>
           <p:nvPr/>
         </p:nvSpPr>
@@ -4383,7 +4382,7 @@
       </p:sp>
       <p:sp>
         <p:nvSpPr>
-          <p:cNvPr id="21" name="Shape 19"/>
+          <p:cNvPr id="20" name="Shape 18"/>
           <p:cNvSpPr/>
           <p:nvPr/>
         </p:nvSpPr>
@@ -4406,14 +4405,14 @@
       </p:sp>
       <p:sp>
         <p:nvSpPr>
-          <p:cNvPr id="22" name="Text 20"/>
+          <p:cNvPr id="21" name="Text 19"/>
           <p:cNvSpPr/>
           <p:nvPr/>
         </p:nvSpPr>
         <p:spPr>
           <a:xfrm>
             <a:off x="566928" y="3291840"/>
-            <a:ext cx="6858000" cy="329184"/>
+            <a:ext cx="1920240" cy="329184"/>
           </a:xfrm>
           <a:prstGeom prst="rect">
             <a:avLst/>
@@ -4436,13 +4435,57 @@
             <a:r>
               <a:rPr lang="en-US" sz="1200" dirty="0">
                 <a:solidFill>
+                  <a:srgbClr val="5B6B73"/>
+                </a:solidFill>
+                <a:latin typeface="맑은 고딕" pitchFamily="34" charset="0"/>
+                <a:ea typeface="맑은 고딕" pitchFamily="34" charset="-122"/>
+                <a:cs typeface="맑은 고딕" pitchFamily="34" charset="-120"/>
+              </a:rPr>
+              <a:t>주차</a:t>
+            </a:r>
+            <a:endParaRPr lang="en-US" sz="1200" dirty="0"/>
+          </a:p>
+        </p:txBody>
+      </p:sp>
+      <p:sp>
+        <p:nvSpPr>
+          <p:cNvPr id="22" name="Text 20"/>
+          <p:cNvSpPr/>
+          <p:nvPr/>
+        </p:nvSpPr>
+        <p:spPr>
+          <a:xfrm>
+            <a:off x="2487168" y="3291840"/>
+            <a:ext cx="4937760" cy="329184"/>
+          </a:xfrm>
+          <a:prstGeom prst="rect">
+            <a:avLst/>
+          </a:prstGeom>
+          <a:noFill/>
+          <a:ln/>
+        </p:spPr>
+        <p:txBody>
+          <a:bodyPr wrap="square" lIns="0" tIns="0" rIns="0" bIns="0" rtlCol="0" anchor="ctr">
+            <a:normAutofit/>
+          </a:bodyPr>
+          <a:lstStyle/>
+          <a:p>
+            <a:pPr indent="0" marL="0">
+              <a:lnSpc>
+                <a:spcPct val="115000"/>
+              </a:lnSpc>
+              <a:buNone/>
+            </a:pPr>
+            <a:r>
+              <a:rPr lang="en-US" sz="1200" b="1" dirty="0">
+                <a:solidFill>
                   <a:srgbClr val="132A3A"/>
                 </a:solidFill>
                 <a:latin typeface="맑은 고딕" pitchFamily="34" charset="0"/>
                 <a:ea typeface="맑은 고딕" pitchFamily="34" charset="-122"/>
                 <a:cs typeface="맑은 고딕" pitchFamily="34" charset="-120"/>
               </a:rPr>
-              <a:t>층수</a:t>
+              <a:t>자주식 -대</a:t>
             </a:r>
             <a:endParaRPr lang="en-US" sz="1200" dirty="0"/>
           </a:p>
@@ -4509,7 +4552,7 @@
                 <a:ea typeface="맑은 고딕" pitchFamily="34" charset="-122"/>
                 <a:cs typeface="맑은 고딕" pitchFamily="34" charset="-120"/>
               </a:rPr>
-              <a:t>주차</a:t>
+              <a:t>엘리베이터</a:t>
             </a:r>
             <a:endParaRPr lang="en-US" sz="1200" dirty="0"/>
           </a:p>
@@ -4553,7 +4596,7 @@
                 <a:ea typeface="맑은 고딕" pitchFamily="34" charset="-122"/>
                 <a:cs typeface="맑은 고딕" pitchFamily="34" charset="-120"/>
               </a:rPr>
-              <a:t>자주식 -대</a:t>
+              <a:t>-대</a:t>
             </a:r>
             <a:endParaRPr lang="en-US" sz="1200" dirty="0"/>
           </a:p>
@@ -4567,31 +4610,170 @@
         </p:nvSpPr>
         <p:spPr>
           <a:xfrm>
-            <a:off x="566928" y="3950208"/>
-            <a:ext cx="6858000" cy="0"/>
+            <a:off x="7604608" y="1371600"/>
+            <a:ext cx="0" cy="4754880"/>
           </a:xfrm>
           <a:prstGeom prst="line">
             <a:avLst/>
           </a:prstGeom>
           <a:noFill/>
-          <a:ln w="3810">
+          <a:ln w="8890">
             <a:solidFill>
-              <a:srgbClr val="CBD5E0"/>
+              <a:srgbClr val="B8860B"/>
             </a:solidFill>
             <a:prstDash val="solid"/>
           </a:ln>
         </p:spPr>
       </p:sp>
-      <p:sp>
-        <p:nvSpPr>
-          <p:cNvPr id="27" name="Text 25"/>
-          <p:cNvSpPr/>
-          <p:nvPr/>
-        </p:nvSpPr>
-        <p:spPr>
-          <a:xfrm>
-            <a:off x="566928" y="3950208"/>
-            <a:ext cx="1920240" cy="329184"/>
+      <p:pic>
+        <p:nvPicPr>
+          <p:cNvPr id="27" name="Image 0" descr="preencoded.png">    </p:cNvPr>
+          <p:cNvPicPr>
+            <a:picLocks noChangeAspect="1"/>
+          </p:cNvPicPr>
+          <p:nvPr/>
+        </p:nvPicPr>
+        <p:blipFill>
+          <a:blip r:embed="rId1"/>
+          <a:srcRect l="0" r="0" t="6508" b="6508"/>
+          <a:stretch/>
+        </p:blipFill>
+        <p:spPr>
+          <a:xfrm>
+            <a:off x="7784287" y="1645920"/>
+            <a:ext cx="3840480" cy="2505456"/>
+          </a:xfrm>
+          <a:prstGeom prst="rect">
+            <a:avLst/>
+          </a:prstGeom>
+        </p:spPr>
+      </p:pic>
+      <p:sp>
+        <p:nvSpPr>
+          <p:cNvPr id="28" name="Shape 25"/>
+          <p:cNvSpPr/>
+          <p:nvPr/>
+        </p:nvSpPr>
+        <p:spPr>
+          <a:xfrm>
+            <a:off x="7784287" y="4288536"/>
+            <a:ext cx="3840480" cy="777240"/>
+          </a:xfrm>
+          <a:prstGeom prst="roundRect">
+            <a:avLst>
+              <a:gd name="adj" fmla="val 5882"/>
+            </a:avLst>
+          </a:prstGeom>
+          <a:solidFill>
+            <a:srgbClr val="F6F1E4"/>
+          </a:solidFill>
+          <a:ln w="9525">
+            <a:solidFill>
+              <a:srgbClr val="D4C89A"/>
+            </a:solidFill>
+            <a:prstDash val="solid"/>
+          </a:ln>
+        </p:spPr>
+      </p:sp>
+      <p:sp>
+        <p:nvSpPr>
+          <p:cNvPr id="29" name="Shape 26"/>
+          <p:cNvSpPr/>
+          <p:nvPr/>
+        </p:nvSpPr>
+        <p:spPr>
+          <a:xfrm>
+            <a:off x="7784287" y="4361688"/>
+            <a:ext cx="45720" cy="630936"/>
+          </a:xfrm>
+          <a:prstGeom prst="rect">
+            <a:avLst/>
+          </a:prstGeom>
+          <a:solidFill>
+            <a:srgbClr val="B8860B"/>
+          </a:solidFill>
+          <a:ln w="12700">
+            <a:solidFill>
+              <a:srgbClr val="B8860B"/>
+            </a:solidFill>
+            <a:prstDash val="solid"/>
+          </a:ln>
+        </p:spPr>
+      </p:sp>
+      <p:sp>
+        <p:nvSpPr>
+          <p:cNvPr id="30" name="Text 27"/>
+          <p:cNvSpPr/>
+          <p:nvPr/>
+        </p:nvSpPr>
+        <p:spPr>
+          <a:xfrm>
+            <a:off x="7967167" y="4398264"/>
+            <a:ext cx="3547872" cy="237744"/>
+          </a:xfrm>
+          <a:prstGeom prst="rect">
+            <a:avLst/>
+          </a:prstGeom>
+          <a:noFill/>
+          <a:ln/>
+        </p:spPr>
+        <p:txBody>
+          <a:bodyPr wrap="square" lIns="0" tIns="0" rIns="0" bIns="0" rtlCol="0" anchor="ctr"/>
+          <a:lstStyle/>
+          <a:p>
+            <a:pPr indent="0" marL="0">
+              <a:buNone/>
+            </a:pPr>
+            <a:r>
+              <a:rPr lang="en-US" sz="1100" b="1" dirty="0">
+                <a:solidFill>
+                  <a:srgbClr val="8B6508"/>
+                </a:solidFill>
+                <a:latin typeface="맑은 고딕" pitchFamily="34" charset="0"/>
+                <a:ea typeface="맑은 고딕" pitchFamily="34" charset="-122"/>
+                <a:cs typeface="맑은 고딕" pitchFamily="34" charset="-120"/>
+              </a:rPr>
+              <a:t>자산 하이라이트</a:t>
+            </a:r>
+            <a:endParaRPr lang="en-US" sz="1100" dirty="0"/>
+          </a:p>
+        </p:txBody>
+      </p:sp>
+      <p:sp>
+        <p:nvSpPr>
+          <p:cNvPr id="31" name="Shape 28"/>
+          <p:cNvSpPr/>
+          <p:nvPr/>
+        </p:nvSpPr>
+        <p:spPr>
+          <a:xfrm>
+            <a:off x="7985455" y="4814316"/>
+            <a:ext cx="54864" cy="54864"/>
+          </a:xfrm>
+          <a:prstGeom prst="rect">
+            <a:avLst/>
+          </a:prstGeom>
+          <a:solidFill>
+            <a:srgbClr val="B8860B"/>
+          </a:solidFill>
+          <a:ln w="12700">
+            <a:solidFill>
+              <a:srgbClr val="B8860B"/>
+            </a:solidFill>
+            <a:prstDash val="solid"/>
+          </a:ln>
+        </p:spPr>
+      </p:sp>
+      <p:sp>
+        <p:nvSpPr>
+          <p:cNvPr id="32" name="Text 29"/>
+          <p:cNvSpPr/>
+          <p:nvPr/>
+        </p:nvSpPr>
+        <p:spPr>
+          <a:xfrm>
+            <a:off x="8113471" y="4709160"/>
+            <a:ext cx="3383280" cy="265176"/>
           </a:xfrm>
           <a:prstGeom prst="rect">
             <a:avLst/>
@@ -4606,57 +4788,10 @@
           <a:lstStyle/>
           <a:p>
             <a:pPr indent="0" marL="0">
-              <a:lnSpc>
-                <a:spcPct val="115000"/>
-              </a:lnSpc>
-              <a:buNone/>
-            </a:pPr>
-            <a:r>
-              <a:rPr lang="en-US" sz="1200" dirty="0">
-                <a:solidFill>
-                  <a:srgbClr val="5B6B73"/>
-                </a:solidFill>
-                <a:latin typeface="맑은 고딕" pitchFamily="34" charset="0"/>
-                <a:ea typeface="맑은 고딕" pitchFamily="34" charset="-122"/>
-                <a:cs typeface="맑은 고딕" pitchFamily="34" charset="-120"/>
-              </a:rPr>
-              <a:t>엘리베이터</a:t>
-            </a:r>
-            <a:endParaRPr lang="en-US" sz="1200" dirty="0"/>
-          </a:p>
-        </p:txBody>
-      </p:sp>
-      <p:sp>
-        <p:nvSpPr>
-          <p:cNvPr id="28" name="Text 26"/>
-          <p:cNvSpPr/>
-          <p:nvPr/>
-        </p:nvSpPr>
-        <p:spPr>
-          <a:xfrm>
-            <a:off x="2487168" y="3950208"/>
-            <a:ext cx="4937760" cy="329184"/>
-          </a:xfrm>
-          <a:prstGeom prst="rect">
-            <a:avLst/>
-          </a:prstGeom>
-          <a:noFill/>
-          <a:ln/>
-        </p:spPr>
-        <p:txBody>
-          <a:bodyPr wrap="square" lIns="0" tIns="0" rIns="0" bIns="0" rtlCol="0" anchor="ctr">
-            <a:normAutofit/>
-          </a:bodyPr>
-          <a:lstStyle/>
-          <a:p>
-            <a:pPr indent="0" marL="0">
-              <a:lnSpc>
-                <a:spcPct val="115000"/>
-              </a:lnSpc>
-              <a:buNone/>
-            </a:pPr>
-            <a:r>
-              <a:rPr lang="en-US" sz="1200" b="1" dirty="0">
+              <a:buNone/>
+            </a:pPr>
+            <a:r>
+              <a:rPr lang="en-US" sz="1050" dirty="0">
                 <a:solidFill>
                   <a:srgbClr val="132A3A"/>
                 </a:solidFill>
@@ -4664,21 +4799,21 @@
                 <a:ea typeface="맑은 고딕" pitchFamily="34" charset="-122"/>
                 <a:cs typeface="맑은 고딕" pitchFamily="34" charset="-120"/>
               </a:rPr>
-              <a:t>-대</a:t>
-            </a:r>
-            <a:endParaRPr lang="en-US" sz="1200" dirty="0"/>
-          </a:p>
-        </p:txBody>
-      </p:sp>
-      <p:sp>
-        <p:nvSpPr>
-          <p:cNvPr id="29" name="Shape 27"/>
-          <p:cNvSpPr/>
-          <p:nvPr/>
-        </p:nvSpPr>
-        <p:spPr>
-          <a:xfrm>
-            <a:off x="566928" y="4389120"/>
+              <a:t>대지 651.2㎡ · 도시지역·상업지역</a:t>
+            </a:r>
+            <a:endParaRPr lang="en-US" sz="1050" dirty="0"/>
+          </a:p>
+        </p:txBody>
+      </p:sp>
+      <p:sp>
+        <p:nvSpPr>
+          <p:cNvPr id="33" name="Shape 30"/>
+          <p:cNvSpPr/>
+          <p:nvPr/>
+        </p:nvSpPr>
+        <p:spPr>
+          <a:xfrm>
+            <a:off x="566928" y="4059936"/>
             <a:ext cx="6858000" cy="1005840"/>
           </a:xfrm>
           <a:prstGeom prst="rect">
@@ -4697,13 +4832,13 @@
       </p:sp>
       <p:sp>
         <p:nvSpPr>
-          <p:cNvPr id="30" name="Text 28"/>
-          <p:cNvSpPr/>
-          <p:nvPr/>
-        </p:nvSpPr>
-        <p:spPr>
-          <a:xfrm>
-            <a:off x="749808" y="4389120"/>
+          <p:cNvPr id="34" name="Text 31"/>
+          <p:cNvSpPr/>
+          <p:nvPr/>
+        </p:nvSpPr>
+        <p:spPr>
+          <a:xfrm>
+            <a:off x="749808" y="4059936"/>
             <a:ext cx="2726741" cy="502920"/>
           </a:xfrm>
           <a:prstGeom prst="rect">
@@ -4736,13 +4871,13 @@
       </p:sp>
       <p:sp>
         <p:nvSpPr>
-          <p:cNvPr id="31" name="Text 29"/>
-          <p:cNvSpPr/>
-          <p:nvPr/>
-        </p:nvSpPr>
-        <p:spPr>
-          <a:xfrm>
-            <a:off x="3476549" y="4389120"/>
+          <p:cNvPr id="35" name="Text 32"/>
+          <p:cNvSpPr/>
+          <p:nvPr/>
+        </p:nvSpPr>
+        <p:spPr>
+          <a:xfrm>
+            <a:off x="3476549" y="4059936"/>
             <a:ext cx="3765499" cy="502920"/>
           </a:xfrm>
           <a:prstGeom prst="rect">
@@ -4775,13 +4910,13 @@
       </p:sp>
       <p:sp>
         <p:nvSpPr>
-          <p:cNvPr id="32" name="Shape 30"/>
-          <p:cNvSpPr/>
-          <p:nvPr/>
-        </p:nvSpPr>
-        <p:spPr>
-          <a:xfrm>
-            <a:off x="704088" y="4892040"/>
+          <p:cNvPr id="36" name="Shape 33"/>
+          <p:cNvSpPr/>
+          <p:nvPr/>
+        </p:nvSpPr>
+        <p:spPr>
+          <a:xfrm>
+            <a:off x="704088" y="4562856"/>
             <a:ext cx="6583680" cy="0"/>
           </a:xfrm>
           <a:prstGeom prst="line">
@@ -4798,13 +4933,13 @@
       </p:sp>
       <p:sp>
         <p:nvSpPr>
-          <p:cNvPr id="33" name="Text 31"/>
-          <p:cNvSpPr/>
-          <p:nvPr/>
-        </p:nvSpPr>
-        <p:spPr>
-          <a:xfrm>
-            <a:off x="749808" y="4892040"/>
+          <p:cNvPr id="37" name="Text 34"/>
+          <p:cNvSpPr/>
+          <p:nvPr/>
+        </p:nvSpPr>
+        <p:spPr>
+          <a:xfrm>
+            <a:off x="749808" y="4562856"/>
             <a:ext cx="2726741" cy="457200"/>
           </a:xfrm>
           <a:prstGeom prst="rect">
@@ -4837,13 +4972,13 @@
       </p:sp>
       <p:sp>
         <p:nvSpPr>
-          <p:cNvPr id="34" name="Text 32"/>
-          <p:cNvSpPr/>
-          <p:nvPr/>
-        </p:nvSpPr>
-        <p:spPr>
-          <a:xfrm>
-            <a:off x="3476549" y="4892040"/>
+          <p:cNvPr id="38" name="Text 35"/>
+          <p:cNvSpPr/>
+          <p:nvPr/>
+        </p:nvSpPr>
+        <p:spPr>
+          <a:xfrm>
+            <a:off x="3476549" y="4562856"/>
             <a:ext cx="3765499" cy="457200"/>
           </a:xfrm>
           <a:prstGeom prst="rect">
@@ -4876,374 +5011,7 @@
       </p:sp>
       <p:sp>
         <p:nvSpPr>
-          <p:cNvPr id="35" name="Shape 33"/>
-          <p:cNvSpPr/>
-          <p:nvPr/>
-        </p:nvSpPr>
-        <p:spPr>
-          <a:xfrm>
-            <a:off x="7604608" y="1371600"/>
-            <a:ext cx="0" cy="4754880"/>
-          </a:xfrm>
-          <a:prstGeom prst="line">
-            <a:avLst/>
-          </a:prstGeom>
-          <a:noFill/>
-          <a:ln w="8890">
-            <a:solidFill>
-              <a:srgbClr val="B8860B"/>
-            </a:solidFill>
-            <a:prstDash val="solid"/>
-          </a:ln>
-        </p:spPr>
-      </p:sp>
-      <p:sp>
-        <p:nvSpPr>
-          <p:cNvPr id="36" name="Shape 34"/>
-          <p:cNvSpPr/>
-          <p:nvPr/>
-        </p:nvSpPr>
-        <p:spPr>
-          <a:xfrm>
-            <a:off x="7784287" y="1645920"/>
-            <a:ext cx="3840480" cy="2103120"/>
-          </a:xfrm>
-          <a:prstGeom prst="roundRect">
-            <a:avLst>
-              <a:gd name="adj" fmla="val 2609"/>
-            </a:avLst>
-          </a:prstGeom>
-          <a:solidFill>
-            <a:srgbClr val="E8F4F8"/>
-          </a:solidFill>
-          <a:ln/>
-        </p:spPr>
-      </p:sp>
-      <p:sp>
-        <p:nvSpPr>
-          <p:cNvPr id="37" name="Shape 35"/>
-          <p:cNvSpPr/>
-          <p:nvPr/>
-        </p:nvSpPr>
-        <p:spPr>
-          <a:xfrm>
-            <a:off x="7784287" y="1700784"/>
-            <a:ext cx="36576" cy="1993392"/>
-          </a:xfrm>
-          <a:prstGeom prst="rect">
-            <a:avLst/>
-          </a:prstGeom>
-          <a:solidFill>
-            <a:srgbClr val="2E6E82"/>
-          </a:solidFill>
-          <a:ln/>
-        </p:spPr>
-      </p:sp>
-      <p:sp>
-        <p:nvSpPr>
-          <p:cNvPr id="38" name="Text 36"/>
-          <p:cNvSpPr/>
-          <p:nvPr/>
-        </p:nvSpPr>
-        <p:spPr>
-          <a:xfrm>
-            <a:off x="7930591" y="1737360"/>
-            <a:ext cx="3584448" cy="201168"/>
-          </a:xfrm>
-          <a:prstGeom prst="rect">
-            <a:avLst/>
-          </a:prstGeom>
-          <a:noFill/>
-          <a:ln/>
-        </p:spPr>
-        <p:txBody>
-          <a:bodyPr wrap="square" lIns="0" tIns="0" rIns="0" bIns="0" rtlCol="0" anchor="ctr"/>
-          <a:lstStyle/>
-          <a:p>
-            <a:pPr indent="0" marL="0">
-              <a:buNone/>
-            </a:pPr>
-            <a:r>
-              <a:rPr lang="en-US" sz="1050" b="1" dirty="0">
-                <a:solidFill>
-                  <a:srgbClr val="2E6E82"/>
-                </a:solidFill>
-                <a:latin typeface="맑은 고딕" pitchFamily="34" charset="0"/>
-                <a:ea typeface="맑은 고딕" pitchFamily="34" charset="-122"/>
-                <a:cs typeface="맑은 고딕" pitchFamily="34" charset="-120"/>
-              </a:rPr>
-              <a:t>입지 및 자산 개요</a:t>
-            </a:r>
-            <a:endParaRPr lang="en-US" sz="1050" dirty="0"/>
-          </a:p>
-        </p:txBody>
-      </p:sp>
-      <p:sp>
-        <p:nvSpPr>
-          <p:cNvPr id="39" name="Text 37"/>
-          <p:cNvSpPr/>
-          <p:nvPr/>
-        </p:nvSpPr>
-        <p:spPr>
-          <a:xfrm>
-            <a:off x="7930591" y="1938528"/>
-            <a:ext cx="3584448" cy="1773936"/>
-          </a:xfrm>
-          <a:prstGeom prst="rect">
-            <a:avLst/>
-          </a:prstGeom>
-          <a:noFill/>
-          <a:ln/>
-        </p:spPr>
-        <p:txBody>
-          <a:bodyPr wrap="square" lIns="0" tIns="0" rIns="0" bIns="0" rtlCol="0" anchor="t"/>
-          <a:lstStyle/>
-          <a:p>
-            <a:pPr marL="342900" indent="-342900">
-              <a:lnSpc>
-                <a:spcPct val="108000"/>
-              </a:lnSpc>
-              <a:buSzPct val="100000"/>
-              <a:buChar char="•"/>
-            </a:pPr>
-            <a:r>
-              <a:rPr lang="en-US" sz="980" dirty="0">
-                <a:solidFill>
-                  <a:srgbClr val="2B2B2B"/>
-                </a:solidFill>
-                <a:latin typeface="맑은 고딕" pitchFamily="34" charset="0"/>
-                <a:ea typeface="맑은 고딕" pitchFamily="34" charset="-122"/>
-                <a:cs typeface="맑은 고딕" pitchFamily="34" charset="-120"/>
-              </a:rPr>
-              <a:t>투자 검토 대상 상업용 자산</a:t>
-            </a:r>
-            <a:endParaRPr lang="en-US" sz="980" dirty="0"/>
-          </a:p>
-          <a:p>
-            <a:pPr marL="342900" indent="-342900">
-              <a:lnSpc>
-                <a:spcPct val="108000"/>
-              </a:lnSpc>
-              <a:spcBef>
-                <a:spcPts val="300"/>
-              </a:spcBef>
-              <a:buSzPct val="100000"/>
-              <a:buChar char="•"/>
-            </a:pPr>
-            <a:r>
-              <a:rPr lang="en-US" sz="980" dirty="0">
-                <a:solidFill>
-                  <a:srgbClr val="2B2B2B"/>
-                </a:solidFill>
-                <a:latin typeface="맑은 고딕" pitchFamily="34" charset="0"/>
-                <a:ea typeface="맑은 고딕" pitchFamily="34" charset="-122"/>
-                <a:cs typeface="맑은 고딕" pitchFamily="34" charset="-120"/>
-              </a:rPr>
-              <a:t>권리관계 및 임대차 계약 구조 분석</a:t>
-            </a:r>
-            <a:endParaRPr lang="en-US" sz="980" dirty="0"/>
-          </a:p>
-          <a:p>
-            <a:pPr marL="342900" indent="-342900">
-              <a:lnSpc>
-                <a:spcPct val="108000"/>
-              </a:lnSpc>
-              <a:spcBef>
-                <a:spcPts val="300"/>
-              </a:spcBef>
-              <a:buSzPct val="100000"/>
-              <a:buChar char="•"/>
-            </a:pPr>
-            <a:r>
-              <a:rPr lang="en-US" sz="980" dirty="0">
-                <a:solidFill>
-                  <a:srgbClr val="2B2B2B"/>
-                </a:solidFill>
-                <a:latin typeface="맑은 고딕" pitchFamily="34" charset="0"/>
-                <a:ea typeface="맑은 고딕" pitchFamily="34" charset="-122"/>
-                <a:cs typeface="맑은 고딕" pitchFamily="34" charset="-120"/>
-              </a:rPr>
-              <a:t>상세 인접 인프라 및 입지 환경 분석</a:t>
-            </a:r>
-            <a:endParaRPr lang="en-US" sz="980" dirty="0"/>
-          </a:p>
-        </p:txBody>
-      </p:sp>
-      <p:sp>
-        <p:nvSpPr>
-          <p:cNvPr id="40" name="Shape 38"/>
-          <p:cNvSpPr/>
-          <p:nvPr/>
-        </p:nvSpPr>
-        <p:spPr>
-          <a:xfrm>
-            <a:off x="7784287" y="3977640"/>
-            <a:ext cx="3840480" cy="2148840"/>
-          </a:xfrm>
-          <a:prstGeom prst="roundRect">
-            <a:avLst>
-              <a:gd name="adj" fmla="val 2553"/>
-            </a:avLst>
-          </a:prstGeom>
-          <a:solidFill>
-            <a:srgbClr val="E8F4F8"/>
-          </a:solidFill>
-          <a:ln/>
-        </p:spPr>
-      </p:sp>
-      <p:sp>
-        <p:nvSpPr>
-          <p:cNvPr id="41" name="Shape 39"/>
-          <p:cNvSpPr/>
-          <p:nvPr/>
-        </p:nvSpPr>
-        <p:spPr>
-          <a:xfrm>
-            <a:off x="7784287" y="4032504"/>
-            <a:ext cx="36576" cy="2039112"/>
-          </a:xfrm>
-          <a:prstGeom prst="rect">
-            <a:avLst/>
-          </a:prstGeom>
-          <a:solidFill>
-            <a:srgbClr val="2E6E82"/>
-          </a:solidFill>
-          <a:ln/>
-        </p:spPr>
-      </p:sp>
-      <p:sp>
-        <p:nvSpPr>
-          <p:cNvPr id="42" name="Text 40"/>
-          <p:cNvSpPr/>
-          <p:nvPr/>
-        </p:nvSpPr>
-        <p:spPr>
-          <a:xfrm>
-            <a:off x="7930591" y="4069080"/>
-            <a:ext cx="3584448" cy="201168"/>
-          </a:xfrm>
-          <a:prstGeom prst="rect">
-            <a:avLst/>
-          </a:prstGeom>
-          <a:noFill/>
-          <a:ln/>
-        </p:spPr>
-        <p:txBody>
-          <a:bodyPr wrap="square" lIns="0" tIns="0" rIns="0" bIns="0" rtlCol="0" anchor="ctr"/>
-          <a:lstStyle/>
-          <a:p>
-            <a:pPr indent="0" marL="0">
-              <a:buNone/>
-            </a:pPr>
-            <a:r>
-              <a:rPr lang="en-US" sz="1050" b="1" dirty="0">
-                <a:solidFill>
-                  <a:srgbClr val="2E6E82"/>
-                </a:solidFill>
-                <a:latin typeface="맑은 고딕" pitchFamily="34" charset="0"/>
-                <a:ea typeface="맑은 고딕" pitchFamily="34" charset="-122"/>
-                <a:cs typeface="맑은 고딕" pitchFamily="34" charset="-120"/>
-              </a:rPr>
-              <a:t>투자 수익 및 운영 현황</a:t>
-            </a:r>
-            <a:endParaRPr lang="en-US" sz="1050" dirty="0"/>
-          </a:p>
-        </p:txBody>
-      </p:sp>
-      <p:sp>
-        <p:nvSpPr>
-          <p:cNvPr id="43" name="Text 41"/>
-          <p:cNvSpPr/>
-          <p:nvPr/>
-        </p:nvSpPr>
-        <p:spPr>
-          <a:xfrm>
-            <a:off x="7930591" y="4270248"/>
-            <a:ext cx="3584448" cy="1819656"/>
-          </a:xfrm>
-          <a:prstGeom prst="rect">
-            <a:avLst/>
-          </a:prstGeom>
-          <a:noFill/>
-          <a:ln/>
-        </p:spPr>
-        <p:txBody>
-          <a:bodyPr wrap="square" lIns="0" tIns="0" rIns="0" bIns="0" rtlCol="0" anchor="t"/>
-          <a:lstStyle/>
-          <a:p>
-            <a:pPr marL="342900" indent="-342900">
-              <a:lnSpc>
-                <a:spcPct val="108000"/>
-              </a:lnSpc>
-              <a:buSzPct val="100000"/>
-              <a:buChar char="•"/>
-            </a:pPr>
-            <a:r>
-              <a:rPr lang="en-US" sz="980" dirty="0">
-                <a:solidFill>
-                  <a:srgbClr val="2B2B2B"/>
-                </a:solidFill>
-                <a:latin typeface="맑은 고딕" pitchFamily="34" charset="0"/>
-                <a:ea typeface="맑은 고딕" pitchFamily="34" charset="-122"/>
-                <a:cs typeface="맑은 고딕" pitchFamily="34" charset="-120"/>
-              </a:rPr>
-              <a:t>투자 검토 대상 자산</a:t>
-            </a:r>
-            <a:endParaRPr lang="en-US" sz="980" dirty="0"/>
-          </a:p>
-          <a:p>
-            <a:pPr marL="342900" indent="-342900">
-              <a:lnSpc>
-                <a:spcPct val="108000"/>
-              </a:lnSpc>
-              <a:spcBef>
-                <a:spcPts val="300"/>
-              </a:spcBef>
-              <a:buSzPct val="100000"/>
-              <a:buChar char="•"/>
-            </a:pPr>
-            <a:r>
-              <a:rPr lang="en-US" sz="980" dirty="0">
-                <a:solidFill>
-                  <a:srgbClr val="2B2B2B"/>
-                </a:solidFill>
-                <a:latin typeface="맑은 고딕" pitchFamily="34" charset="0"/>
-                <a:ea typeface="맑은 고딕" pitchFamily="34" charset="-122"/>
-                <a:cs typeface="맑은 고딕" pitchFamily="34" charset="-120"/>
-              </a:rPr>
-              <a:t>임대차 계약 조건 및 운영비 구조 분석</a:t>
-            </a:r>
-            <a:endParaRPr lang="en-US" sz="980" dirty="0"/>
-          </a:p>
-          <a:p>
-            <a:pPr marL="342900" indent="-342900">
-              <a:lnSpc>
-                <a:spcPct val="108000"/>
-              </a:lnSpc>
-              <a:spcBef>
-                <a:spcPts val="300"/>
-              </a:spcBef>
-              <a:buSzPct val="100000"/>
-              <a:buChar char="•"/>
-            </a:pPr>
-            <a:r>
-              <a:rPr lang="en-US" sz="980" dirty="0">
-                <a:solidFill>
-                  <a:srgbClr val="2B2B2B"/>
-                </a:solidFill>
-                <a:latin typeface="맑은 고딕" pitchFamily="34" charset="0"/>
-                <a:ea typeface="맑은 고딕" pitchFamily="34" charset="-122"/>
-                <a:cs typeface="맑은 고딕" pitchFamily="34" charset="-120"/>
-              </a:rPr>
-              <a:t>매입 후 운용 계획에 따른 수익성 분석</a:t>
-            </a:r>
-            <a:endParaRPr lang="en-US" sz="980" dirty="0"/>
-          </a:p>
-        </p:txBody>
-      </p:sp>
-      <p:sp>
-        <p:nvSpPr>
-          <p:cNvPr id="44" name="Text 42"/>
+          <p:cNvPr id="39" name="Text 36"/>
           <p:cNvSpPr/>
           <p:nvPr/>
         </p:nvSpPr>
@@ -5282,7 +5050,7 @@
       </p:sp>
       <p:sp>
         <p:nvSpPr>
-          <p:cNvPr id="45" name="Text 43"/>
+          <p:cNvPr id="40" name="Text 37"/>
           <p:cNvSpPr/>
           <p:nvPr/>
         </p:nvSpPr>
@@ -5418,46 +5186,7 @@
         </p:nvSpPr>
         <p:spPr>
           <a:xfrm>
-            <a:off x="1133856" y="457200"/>
-            <a:ext cx="10490911" cy="182880"/>
-          </a:xfrm>
-          <a:prstGeom prst="rect">
-            <a:avLst/>
-          </a:prstGeom>
-          <a:noFill/>
-          <a:ln/>
-        </p:spPr>
-        <p:txBody>
-          <a:bodyPr wrap="square" lIns="0" tIns="0" rIns="0" bIns="0" rtlCol="0" anchor="ctr"/>
-          <a:lstStyle/>
-          <a:p>
-            <a:pPr indent="0" marL="0">
-              <a:buNone/>
-            </a:pPr>
-            <a:r>
-              <a:rPr lang="en-US" sz="950" b="1" spc="200" kern="0" dirty="0">
-                <a:solidFill>
-                  <a:srgbClr val="B8860B"/>
-                </a:solidFill>
-                <a:latin typeface="Arial" pitchFamily="34" charset="0"/>
-                <a:ea typeface="Arial" pitchFamily="34" charset="-122"/>
-                <a:cs typeface="Arial" pitchFamily="34" charset="-120"/>
-              </a:rPr>
-              <a:t>입지 정보</a:t>
-            </a:r>
-            <a:endParaRPr lang="en-US" sz="950" dirty="0"/>
-          </a:p>
-        </p:txBody>
-      </p:sp>
-      <p:sp>
-        <p:nvSpPr>
-          <p:cNvPr id="5" name="Text 3"/>
-          <p:cNvSpPr/>
-          <p:nvPr/>
-        </p:nvSpPr>
-        <p:spPr>
-          <a:xfrm>
-            <a:off x="1133856" y="640080"/>
+            <a:off x="1133856" y="466344"/>
             <a:ext cx="10490911" cy="365760"/>
           </a:xfrm>
           <a:prstGeom prst="rect">
@@ -5492,7 +5221,7 @@
       </p:sp>
       <p:pic>
         <p:nvPicPr>
-          <p:cNvPr id="6" name="Image 0" descr="preencoded.png">    </p:cNvPr>
+          <p:cNvPr id="5" name="Image 0" descr="preencoded.png">    </p:cNvPr>
           <p:cNvPicPr>
             <a:picLocks noChangeAspect="1"/>
           </p:cNvPicPr>
@@ -5516,7 +5245,183 @@
       </p:pic>
       <p:sp>
         <p:nvSpPr>
+          <p:cNvPr id="6" name="Shape 3"/>
+          <p:cNvSpPr/>
+          <p:nvPr/>
+        </p:nvSpPr>
+        <p:spPr>
+          <a:xfrm>
+            <a:off x="704088" y="5184648"/>
+            <a:ext cx="3200400" cy="320040"/>
+          </a:xfrm>
+          <a:prstGeom prst="roundRect">
+            <a:avLst>
+              <a:gd name="adj" fmla="val 11429"/>
+            </a:avLst>
+          </a:prstGeom>
+          <a:solidFill>
+            <a:srgbClr val="FFFFFF">
+              <a:alpha val="90000"/>
+            </a:srgbClr>
+          </a:solidFill>
+          <a:ln w="10160">
+            <a:solidFill>
+              <a:srgbClr val="CBD5E1"/>
+            </a:solidFill>
+            <a:prstDash val="solid"/>
+          </a:ln>
+        </p:spPr>
+      </p:sp>
+      <p:sp>
+        <p:nvSpPr>
           <p:cNvPr id="7" name="Text 4"/>
+          <p:cNvSpPr/>
+          <p:nvPr/>
+        </p:nvSpPr>
+        <p:spPr>
+          <a:xfrm>
+            <a:off x="749808" y="5202936"/>
+            <a:ext cx="3108960" cy="274320"/>
+          </a:xfrm>
+          <a:prstGeom prst="rect">
+            <a:avLst/>
+          </a:prstGeom>
+          <a:noFill/>
+          <a:ln/>
+        </p:spPr>
+        <p:txBody>
+          <a:bodyPr wrap="square" rtlCol="0" anchor="ctr"/>
+          <a:lstStyle/>
+          <a:p>
+            <a:pPr indent="0" marL="0">
+              <a:buNone/>
+            </a:pPr>
+            <a:r>
+              <a:rPr lang="en-US" sz="900" b="1" dirty="0">
+                <a:solidFill>
+                  <a:srgbClr val="B8860B"/>
+                </a:solidFill>
+                <a:latin typeface="맑은 고딕" pitchFamily="34" charset="0"/>
+                <a:ea typeface="맑은 고딕" pitchFamily="34" charset="-122"/>
+                <a:cs typeface="맑은 고딕" pitchFamily="34" charset="-120"/>
+              </a:rPr>
+              <a:t>★ </a:t>
+            </a:r>
+            <a:pPr indent="0" marL="0">
+              <a:buNone/>
+            </a:pPr>
+            <a:r>
+              <a:rPr lang="en-US" sz="850" b="1" dirty="0">
+                <a:solidFill>
+                  <a:srgbClr val="1E293B"/>
+                </a:solidFill>
+                <a:latin typeface="맑은 고딕" pitchFamily="34" charset="0"/>
+                <a:ea typeface="맑은 고딕" pitchFamily="34" charset="-122"/>
+                <a:cs typeface="맑은 고딕" pitchFamily="34" charset="-120"/>
+              </a:rPr>
+              <a:t>대상 자산(본건)   </a:t>
+            </a:r>
+            <a:pPr indent="0" marL="0">
+              <a:buNone/>
+            </a:pPr>
+            <a:r>
+              <a:rPr lang="en-US" sz="1000" b="1" dirty="0">
+                <a:solidFill>
+                  <a:srgbClr val="B8860B"/>
+                </a:solidFill>
+                <a:latin typeface="맑은 고딕" pitchFamily="34" charset="0"/>
+                <a:ea typeface="맑은 고딕" pitchFamily="34" charset="-122"/>
+                <a:cs typeface="맑은 고딕" pitchFamily="34" charset="-120"/>
+              </a:rPr>
+              <a:t>╌ </a:t>
+            </a:r>
+            <a:pPr indent="0" marL="0">
+              <a:buNone/>
+            </a:pPr>
+            <a:r>
+              <a:rPr lang="en-US" sz="850" dirty="0">
+                <a:solidFill>
+                  <a:srgbClr val="475569"/>
+                </a:solidFill>
+                <a:latin typeface="맑은 고딕" pitchFamily="34" charset="0"/>
+                <a:ea typeface="맑은 고딕" pitchFamily="34" charset="-122"/>
+                <a:cs typeface="맑은 고딕" pitchFamily="34" charset="-120"/>
+              </a:rPr>
+              <a:t>도보 5분 반경 (약 400m)</a:t>
+            </a:r>
+            <a:endParaRPr lang="en-US" sz="900" dirty="0"/>
+          </a:p>
+        </p:txBody>
+      </p:sp>
+      <p:sp>
+        <p:nvSpPr>
+          <p:cNvPr id="8" name="Shape 5"/>
+          <p:cNvSpPr/>
+          <p:nvPr/>
+        </p:nvSpPr>
+        <p:spPr>
+          <a:xfrm>
+            <a:off x="2715768" y="3739896"/>
+            <a:ext cx="822960" cy="219456"/>
+          </a:xfrm>
+          <a:prstGeom prst="roundRect">
+            <a:avLst>
+              <a:gd name="adj" fmla="val 16667"/>
+            </a:avLst>
+          </a:prstGeom>
+          <a:solidFill>
+            <a:srgbClr val="132A3A"/>
+          </a:solidFill>
+          <a:ln w="12700">
+            <a:solidFill>
+              <a:srgbClr val="FFFFFF"/>
+            </a:solidFill>
+            <a:prstDash val="solid"/>
+          </a:ln>
+        </p:spPr>
+      </p:sp>
+      <p:sp>
+        <p:nvSpPr>
+          <p:cNvPr id="9" name="Text 6"/>
+          <p:cNvSpPr/>
+          <p:nvPr/>
+        </p:nvSpPr>
+        <p:spPr>
+          <a:xfrm>
+            <a:off x="2715768" y="3739896"/>
+            <a:ext cx="822960" cy="219456"/>
+          </a:xfrm>
+          <a:prstGeom prst="rect">
+            <a:avLst/>
+          </a:prstGeom>
+          <a:noFill/>
+          <a:ln/>
+        </p:spPr>
+        <p:txBody>
+          <a:bodyPr wrap="square" rtlCol="0" anchor="ctr"/>
+          <a:lstStyle/>
+          <a:p>
+            <a:pPr algn="ctr" indent="0" marL="0">
+              <a:buNone/>
+            </a:pPr>
+            <a:r>
+              <a:rPr lang="en-US" sz="900" b="1" dirty="0">
+                <a:solidFill>
+                  <a:srgbClr val="FFFFFF"/>
+                </a:solidFill>
+                <a:latin typeface="맑은 고딕" pitchFamily="34" charset="0"/>
+                <a:ea typeface="맑은 고딕" pitchFamily="34" charset="-122"/>
+                <a:cs typeface="맑은 고딕" pitchFamily="34" charset="-120"/>
+              </a:rPr>
+              <a:t>★ 본건</a:t>
+            </a:r>
+            <a:endParaRPr lang="en-US" sz="900" dirty="0"/>
+          </a:p>
+        </p:txBody>
+      </p:sp>
+      <p:sp>
+        <p:nvSpPr>
+          <p:cNvPr id="10" name="Text 7"/>
           <p:cNvSpPr/>
           <p:nvPr/>
         </p:nvSpPr>
@@ -5555,7 +5460,7 @@
       </p:sp>
       <p:sp>
         <p:nvSpPr>
-          <p:cNvPr id="8" name="Text 5"/>
+          <p:cNvPr id="11" name="Text 8"/>
           <p:cNvSpPr/>
           <p:nvPr/>
         </p:nvSpPr>
@@ -5599,7 +5504,7 @@
       </p:sp>
       <p:sp>
         <p:nvSpPr>
-          <p:cNvPr id="9" name="Text 6"/>
+          <p:cNvPr id="12" name="Text 9"/>
           <p:cNvSpPr/>
           <p:nvPr/>
         </p:nvSpPr>
@@ -5643,7 +5548,7 @@
       </p:sp>
       <p:sp>
         <p:nvSpPr>
-          <p:cNvPr id="10" name="Shape 7"/>
+          <p:cNvPr id="13" name="Shape 10"/>
           <p:cNvSpPr/>
           <p:nvPr/>
         </p:nvSpPr>
@@ -5666,7 +5571,7 @@
       </p:sp>
       <p:sp>
         <p:nvSpPr>
-          <p:cNvPr id="11" name="Text 8"/>
+          <p:cNvPr id="14" name="Text 11"/>
           <p:cNvSpPr/>
           <p:nvPr/>
         </p:nvSpPr>
@@ -5710,7 +5615,7 @@
       </p:sp>
       <p:sp>
         <p:nvSpPr>
-          <p:cNvPr id="12" name="Text 9"/>
+          <p:cNvPr id="15" name="Text 12"/>
           <p:cNvSpPr/>
           <p:nvPr/>
         </p:nvSpPr>
@@ -5754,7 +5659,7 @@
       </p:sp>
       <p:sp>
         <p:nvSpPr>
-          <p:cNvPr id="13" name="Shape 10"/>
+          <p:cNvPr id="16" name="Shape 13"/>
           <p:cNvSpPr/>
           <p:nvPr/>
         </p:nvSpPr>
@@ -5777,7 +5682,7 @@
       </p:sp>
       <p:sp>
         <p:nvSpPr>
-          <p:cNvPr id="14" name="Text 11"/>
+          <p:cNvPr id="17" name="Text 14"/>
           <p:cNvSpPr/>
           <p:nvPr/>
         </p:nvSpPr>
@@ -5821,7 +5726,7 @@
       </p:sp>
       <p:sp>
         <p:nvSpPr>
-          <p:cNvPr id="15" name="Text 12"/>
+          <p:cNvPr id="18" name="Text 15"/>
           <p:cNvSpPr/>
           <p:nvPr/>
         </p:nvSpPr>
@@ -5865,7 +5770,7 @@
       </p:sp>
       <p:sp>
         <p:nvSpPr>
-          <p:cNvPr id="16" name="Shape 13"/>
+          <p:cNvPr id="19" name="Shape 16"/>
           <p:cNvSpPr/>
           <p:nvPr/>
         </p:nvSpPr>
@@ -5887,7 +5792,7 @@
       </p:sp>
       <p:sp>
         <p:nvSpPr>
-          <p:cNvPr id="17" name="Shape 14"/>
+          <p:cNvPr id="20" name="Shape 17"/>
           <p:cNvSpPr/>
           <p:nvPr/>
         </p:nvSpPr>
@@ -5907,7 +5812,7 @@
       </p:sp>
       <p:sp>
         <p:nvSpPr>
-          <p:cNvPr id="18" name="Text 15"/>
+          <p:cNvPr id="21" name="Text 18"/>
           <p:cNvSpPr/>
           <p:nvPr/>
         </p:nvSpPr>
@@ -5946,7 +5851,7 @@
       </p:sp>
       <p:sp>
         <p:nvSpPr>
-          <p:cNvPr id="19" name="Text 16"/>
+          <p:cNvPr id="22" name="Text 19"/>
           <p:cNvSpPr/>
           <p:nvPr/>
         </p:nvSpPr>
@@ -5989,7 +5894,7 @@
       </p:sp>
       <p:sp>
         <p:nvSpPr>
-          <p:cNvPr id="20" name="Text 17"/>
+          <p:cNvPr id="23" name="Text 20"/>
           <p:cNvSpPr/>
           <p:nvPr/>
         </p:nvSpPr>
@@ -6028,7 +5933,7 @@
       </p:sp>
       <p:sp>
         <p:nvSpPr>
-          <p:cNvPr id="21" name="Text 18"/>
+          <p:cNvPr id="24" name="Text 21"/>
           <p:cNvSpPr/>
           <p:nvPr/>
         </p:nvSpPr>
@@ -6164,46 +6069,7 @@
         </p:nvSpPr>
         <p:spPr>
           <a:xfrm>
-            <a:off x="1133856" y="457200"/>
-            <a:ext cx="10490911" cy="182880"/>
-          </a:xfrm>
-          <a:prstGeom prst="rect">
-            <a:avLst/>
-          </a:prstGeom>
-          <a:noFill/>
-          <a:ln/>
-        </p:spPr>
-        <p:txBody>
-          <a:bodyPr wrap="square" lIns="0" tIns="0" rIns="0" bIns="0" rtlCol="0" anchor="ctr"/>
-          <a:lstStyle/>
-          <a:p>
-            <a:pPr indent="0" marL="0">
-              <a:buNone/>
-            </a:pPr>
-            <a:r>
-              <a:rPr lang="en-US" sz="950" b="1" spc="200" kern="0" dirty="0">
-                <a:solidFill>
-                  <a:srgbClr val="B8860B"/>
-                </a:solidFill>
-                <a:latin typeface="Arial" pitchFamily="34" charset="0"/>
-                <a:ea typeface="Arial" pitchFamily="34" charset="-122"/>
-                <a:cs typeface="Arial" pitchFamily="34" charset="-120"/>
-              </a:rPr>
-              <a:t>토지 정보</a:t>
-            </a:r>
-            <a:endParaRPr lang="en-US" sz="950" dirty="0"/>
-          </a:p>
-        </p:txBody>
-      </p:sp>
-      <p:sp>
-        <p:nvSpPr>
-          <p:cNvPr id="5" name="Text 3"/>
-          <p:cNvSpPr/>
-          <p:nvPr/>
-        </p:nvSpPr>
-        <p:spPr>
-          <a:xfrm>
-            <a:off x="1133856" y="640080"/>
+            <a:off x="1133856" y="466344"/>
             <a:ext cx="10490911" cy="365760"/>
           </a:xfrm>
           <a:prstGeom prst="rect">
@@ -6238,7 +6104,7 @@
       </p:sp>
       <p:sp>
         <p:nvSpPr>
-          <p:cNvPr id="6" name="Text 4"/>
+          <p:cNvPr id="5" name="Text 3"/>
           <p:cNvSpPr/>
           <p:nvPr/>
         </p:nvSpPr>
@@ -6277,7 +6143,7 @@
       </p:sp>
       <p:sp>
         <p:nvSpPr>
-          <p:cNvPr id="7" name="Text 5"/>
+          <p:cNvPr id="6" name="Text 4"/>
           <p:cNvSpPr/>
           <p:nvPr/>
         </p:nvSpPr>
@@ -6321,7 +6187,7 @@
       </p:sp>
       <p:sp>
         <p:nvSpPr>
-          <p:cNvPr id="8" name="Text 6"/>
+          <p:cNvPr id="7" name="Text 5"/>
           <p:cNvSpPr/>
           <p:nvPr/>
         </p:nvSpPr>
@@ -6365,7 +6231,7 @@
       </p:sp>
       <p:sp>
         <p:nvSpPr>
-          <p:cNvPr id="9" name="Shape 7"/>
+          <p:cNvPr id="8" name="Shape 6"/>
           <p:cNvSpPr/>
           <p:nvPr/>
         </p:nvSpPr>
@@ -6388,7 +6254,7 @@
       </p:sp>
       <p:sp>
         <p:nvSpPr>
-          <p:cNvPr id="10" name="Text 8"/>
+          <p:cNvPr id="9" name="Text 7"/>
           <p:cNvSpPr/>
           <p:nvPr/>
         </p:nvSpPr>
@@ -6432,7 +6298,7 @@
       </p:sp>
       <p:sp>
         <p:nvSpPr>
-          <p:cNvPr id="11" name="Text 9"/>
+          <p:cNvPr id="10" name="Text 8"/>
           <p:cNvSpPr/>
           <p:nvPr/>
         </p:nvSpPr>
@@ -6476,7 +6342,7 @@
       </p:sp>
       <p:sp>
         <p:nvSpPr>
-          <p:cNvPr id="12" name="Shape 10"/>
+          <p:cNvPr id="11" name="Shape 9"/>
           <p:cNvSpPr/>
           <p:nvPr/>
         </p:nvSpPr>
@@ -6499,7 +6365,7 @@
       </p:sp>
       <p:sp>
         <p:nvSpPr>
-          <p:cNvPr id="13" name="Text 11"/>
+          <p:cNvPr id="12" name="Text 10"/>
           <p:cNvSpPr/>
           <p:nvPr/>
         </p:nvSpPr>
@@ -6543,7 +6409,7 @@
       </p:sp>
       <p:sp>
         <p:nvSpPr>
-          <p:cNvPr id="14" name="Text 12"/>
+          <p:cNvPr id="13" name="Text 11"/>
           <p:cNvSpPr/>
           <p:nvPr/>
         </p:nvSpPr>
@@ -6587,7 +6453,7 @@
       </p:sp>
       <p:sp>
         <p:nvSpPr>
-          <p:cNvPr id="15" name="Shape 13"/>
+          <p:cNvPr id="14" name="Shape 12"/>
           <p:cNvSpPr/>
           <p:nvPr/>
         </p:nvSpPr>
@@ -6610,7 +6476,7 @@
       </p:sp>
       <p:sp>
         <p:nvSpPr>
-          <p:cNvPr id="16" name="Text 14"/>
+          <p:cNvPr id="15" name="Text 13"/>
           <p:cNvSpPr/>
           <p:nvPr/>
         </p:nvSpPr>
@@ -6654,7 +6520,7 @@
       </p:sp>
       <p:sp>
         <p:nvSpPr>
-          <p:cNvPr id="17" name="Text 15"/>
+          <p:cNvPr id="16" name="Text 14"/>
           <p:cNvSpPr/>
           <p:nvPr/>
         </p:nvSpPr>
@@ -6698,7 +6564,7 @@
       </p:sp>
       <p:sp>
         <p:nvSpPr>
-          <p:cNvPr id="18" name="Shape 16"/>
+          <p:cNvPr id="17" name="Shape 15"/>
           <p:cNvSpPr/>
           <p:nvPr/>
         </p:nvSpPr>
@@ -6721,7 +6587,7 @@
       </p:sp>
       <p:sp>
         <p:nvSpPr>
-          <p:cNvPr id="19" name="Text 17"/>
+          <p:cNvPr id="18" name="Text 16"/>
           <p:cNvSpPr/>
           <p:nvPr/>
         </p:nvSpPr>
@@ -6765,7 +6631,7 @@
       </p:sp>
       <p:sp>
         <p:nvSpPr>
-          <p:cNvPr id="20" name="Text 18"/>
+          <p:cNvPr id="19" name="Text 17"/>
           <p:cNvSpPr/>
           <p:nvPr/>
         </p:nvSpPr>
@@ -6809,7 +6675,7 @@
       </p:sp>
       <p:sp>
         <p:nvSpPr>
-          <p:cNvPr id="21" name="Shape 19"/>
+          <p:cNvPr id="20" name="Shape 18"/>
           <p:cNvSpPr/>
           <p:nvPr/>
         </p:nvSpPr>
@@ -6832,7 +6698,7 @@
       </p:sp>
       <p:sp>
         <p:nvSpPr>
-          <p:cNvPr id="22" name="Text 20"/>
+          <p:cNvPr id="21" name="Text 19"/>
           <p:cNvSpPr/>
           <p:nvPr/>
         </p:nvSpPr>
@@ -6876,7 +6742,7 @@
       </p:sp>
       <p:sp>
         <p:nvSpPr>
-          <p:cNvPr id="23" name="Text 21"/>
+          <p:cNvPr id="22" name="Text 20"/>
           <p:cNvSpPr/>
           <p:nvPr/>
         </p:nvSpPr>
@@ -6920,7 +6786,7 @@
       </p:sp>
       <p:sp>
         <p:nvSpPr>
-          <p:cNvPr id="24" name="Shape 22"/>
+          <p:cNvPr id="23" name="Shape 21"/>
           <p:cNvSpPr/>
           <p:nvPr/>
         </p:nvSpPr>
@@ -6943,7 +6809,7 @@
       </p:sp>
       <p:sp>
         <p:nvSpPr>
-          <p:cNvPr id="25" name="Shape 23"/>
+          <p:cNvPr id="24" name="Shape 22"/>
           <p:cNvSpPr/>
           <p:nvPr/>
         </p:nvSpPr>
@@ -6965,7 +6831,7 @@
       </p:sp>
       <p:sp>
         <p:nvSpPr>
-          <p:cNvPr id="26" name="Shape 24"/>
+          <p:cNvPr id="25" name="Shape 23"/>
           <p:cNvSpPr/>
           <p:nvPr/>
         </p:nvSpPr>
@@ -6985,7 +6851,7 @@
       </p:sp>
       <p:sp>
         <p:nvSpPr>
-          <p:cNvPr id="27" name="Text 25"/>
+          <p:cNvPr id="26" name="Text 24"/>
           <p:cNvSpPr/>
           <p:nvPr/>
         </p:nvSpPr>
@@ -7024,7 +6890,7 @@
       </p:sp>
       <p:sp>
         <p:nvSpPr>
-          <p:cNvPr id="28" name="Text 26"/>
+          <p:cNvPr id="27" name="Text 25"/>
           <p:cNvSpPr/>
           <p:nvPr/>
         </p:nvSpPr>
@@ -7115,7 +6981,7 @@
       </p:sp>
       <p:sp>
         <p:nvSpPr>
-          <p:cNvPr id="29" name="Text 27"/>
+          <p:cNvPr id="28" name="Text 26"/>
           <p:cNvSpPr/>
           <p:nvPr/>
         </p:nvSpPr>
@@ -7154,7 +7020,7 @@
       </p:sp>
       <p:sp>
         <p:nvSpPr>
-          <p:cNvPr id="30" name="Text 28"/>
+          <p:cNvPr id="29" name="Text 27"/>
           <p:cNvSpPr/>
           <p:nvPr/>
         </p:nvSpPr>
@@ -7290,46 +7156,7 @@
         </p:nvSpPr>
         <p:spPr>
           <a:xfrm>
-            <a:off x="1133856" y="457200"/>
-            <a:ext cx="10490911" cy="182880"/>
-          </a:xfrm>
-          <a:prstGeom prst="rect">
-            <a:avLst/>
-          </a:prstGeom>
-          <a:noFill/>
-          <a:ln/>
-        </p:spPr>
-        <p:txBody>
-          <a:bodyPr wrap="square" lIns="0" tIns="0" rIns="0" bIns="0" rtlCol="0" anchor="ctr"/>
-          <a:lstStyle/>
-          <a:p>
-            <a:pPr indent="0" marL="0">
-              <a:buNone/>
-            </a:pPr>
-            <a:r>
-              <a:rPr lang="en-US" sz="950" b="1" spc="200" kern="0" dirty="0">
-                <a:solidFill>
-                  <a:srgbClr val="B8860B"/>
-                </a:solidFill>
-                <a:latin typeface="Arial" pitchFamily="34" charset="0"/>
-                <a:ea typeface="Arial" pitchFamily="34" charset="-122"/>
-                <a:cs typeface="Arial" pitchFamily="34" charset="-120"/>
-              </a:rPr>
-              <a:t>렌트롤</a:t>
-            </a:r>
-            <a:endParaRPr lang="en-US" sz="950" dirty="0"/>
-          </a:p>
-        </p:txBody>
-      </p:sp>
-      <p:sp>
-        <p:nvSpPr>
-          <p:cNvPr id="5" name="Text 3"/>
-          <p:cNvSpPr/>
-          <p:nvPr/>
-        </p:nvSpPr>
-        <p:spPr>
-          <a:xfrm>
-            <a:off x="1133856" y="640080"/>
+            <a:off x="1133856" y="466344"/>
             <a:ext cx="10490911" cy="365760"/>
           </a:xfrm>
           <a:prstGeom prst="rect">
@@ -7364,7 +7191,7 @@
       </p:sp>
       <p:sp>
         <p:nvSpPr>
-          <p:cNvPr id="6" name="Shape 4"/>
+          <p:cNvPr id="5" name="Shape 3"/>
           <p:cNvSpPr/>
           <p:nvPr/>
         </p:nvSpPr>
@@ -7391,7 +7218,7 @@
       </p:sp>
       <p:sp>
         <p:nvSpPr>
-          <p:cNvPr id="7" name="Shape 5"/>
+          <p:cNvPr id="6" name="Shape 4"/>
           <p:cNvSpPr/>
           <p:nvPr/>
         </p:nvSpPr>
@@ -7418,7 +7245,7 @@
       </p:sp>
       <p:sp>
         <p:nvSpPr>
-          <p:cNvPr id="8" name="Text 6"/>
+          <p:cNvPr id="7" name="Text 5"/>
           <p:cNvSpPr/>
           <p:nvPr/>
         </p:nvSpPr>
@@ -7457,7 +7284,7 @@
       </p:sp>
       <p:sp>
         <p:nvSpPr>
-          <p:cNvPr id="9" name="Text 7"/>
+          <p:cNvPr id="8" name="Text 6"/>
           <p:cNvSpPr/>
           <p:nvPr/>
         </p:nvSpPr>
@@ -7496,7 +7323,7 @@
       </p:sp>
       <p:sp>
         <p:nvSpPr>
-          <p:cNvPr id="10" name="Text 8"/>
+          <p:cNvPr id="9" name="Text 7"/>
           <p:cNvSpPr/>
           <p:nvPr/>
         </p:nvSpPr>
@@ -7538,7 +7365,7 @@
       </p:sp>
       <p:sp>
         <p:nvSpPr>
-          <p:cNvPr id="11" name="Shape 9"/>
+          <p:cNvPr id="10" name="Shape 8"/>
           <p:cNvSpPr/>
           <p:nvPr/>
         </p:nvSpPr>
@@ -7561,7 +7388,7 @@
       </p:sp>
       <p:sp>
         <p:nvSpPr>
-          <p:cNvPr id="12" name="Shape 10"/>
+          <p:cNvPr id="11" name="Shape 9"/>
           <p:cNvSpPr/>
           <p:nvPr/>
         </p:nvSpPr>
@@ -7581,7 +7408,7 @@
       </p:sp>
       <p:sp>
         <p:nvSpPr>
-          <p:cNvPr id="13" name="Text 11"/>
+          <p:cNvPr id="12" name="Text 10"/>
           <p:cNvSpPr/>
           <p:nvPr/>
         </p:nvSpPr>
@@ -7623,7 +7450,7 @@
       </p:sp>
       <p:sp>
         <p:nvSpPr>
-          <p:cNvPr id="14" name="Shape 12"/>
+          <p:cNvPr id="13" name="Shape 11"/>
           <p:cNvSpPr/>
           <p:nvPr/>
         </p:nvSpPr>
@@ -7643,7 +7470,7 @@
       </p:sp>
       <p:sp>
         <p:nvSpPr>
-          <p:cNvPr id="15" name="Text 13"/>
+          <p:cNvPr id="14" name="Text 12"/>
           <p:cNvSpPr/>
           <p:nvPr/>
         </p:nvSpPr>
@@ -7685,7 +7512,7 @@
       </p:sp>
       <p:sp>
         <p:nvSpPr>
-          <p:cNvPr id="16" name="Shape 14"/>
+          <p:cNvPr id="15" name="Shape 13"/>
           <p:cNvSpPr/>
           <p:nvPr/>
         </p:nvSpPr>
@@ -7705,7 +7532,7 @@
       </p:sp>
       <p:sp>
         <p:nvSpPr>
-          <p:cNvPr id="17" name="Text 15"/>
+          <p:cNvPr id="16" name="Text 14"/>
           <p:cNvSpPr/>
           <p:nvPr/>
         </p:nvSpPr>
@@ -7747,7 +7574,7 @@
       </p:sp>
       <p:sp>
         <p:nvSpPr>
-          <p:cNvPr id="18" name="Shape 16"/>
+          <p:cNvPr id="17" name="Shape 15"/>
           <p:cNvSpPr/>
           <p:nvPr/>
         </p:nvSpPr>
@@ -7767,7 +7594,7 @@
       </p:sp>
       <p:sp>
         <p:nvSpPr>
-          <p:cNvPr id="19" name="Text 17"/>
+          <p:cNvPr id="18" name="Text 16"/>
           <p:cNvSpPr/>
           <p:nvPr/>
         </p:nvSpPr>
@@ -7809,7 +7636,7 @@
       </p:sp>
       <p:sp>
         <p:nvSpPr>
-          <p:cNvPr id="20" name="Text 18"/>
+          <p:cNvPr id="19" name="Text 17"/>
           <p:cNvSpPr/>
           <p:nvPr/>
         </p:nvSpPr>
@@ -7848,7 +7675,7 @@
       </p:sp>
       <p:sp>
         <p:nvSpPr>
-          <p:cNvPr id="21" name="Text 19"/>
+          <p:cNvPr id="20" name="Text 18"/>
           <p:cNvSpPr/>
           <p:nvPr/>
         </p:nvSpPr>
@@ -7984,46 +7811,7 @@
         </p:nvSpPr>
         <p:spPr>
           <a:xfrm>
-            <a:off x="1133856" y="457200"/>
-            <a:ext cx="10490911" cy="182880"/>
-          </a:xfrm>
-          <a:prstGeom prst="rect">
-            <a:avLst/>
-          </a:prstGeom>
-          <a:noFill/>
-          <a:ln/>
-        </p:spPr>
-        <p:txBody>
-          <a:bodyPr wrap="square" lIns="0" tIns="0" rIns="0" bIns="0" rtlCol="0" anchor="ctr"/>
-          <a:lstStyle/>
-          <a:p>
-            <a:pPr indent="0" marL="0">
-              <a:buNone/>
-            </a:pPr>
-            <a:r>
-              <a:rPr lang="en-US" sz="950" b="1" spc="200" kern="0" dirty="0">
-                <a:solidFill>
-                  <a:srgbClr val="B8860B"/>
-                </a:solidFill>
-                <a:latin typeface="Arial" pitchFamily="34" charset="0"/>
-                <a:ea typeface="Arial" pitchFamily="34" charset="-122"/>
-                <a:cs typeface="Arial" pitchFamily="34" charset="-120"/>
-              </a:rPr>
-              <a:t>수익률</a:t>
-            </a:r>
-            <a:endParaRPr lang="en-US" sz="950" dirty="0"/>
-          </a:p>
-        </p:txBody>
-      </p:sp>
-      <p:sp>
-        <p:nvSpPr>
-          <p:cNvPr id="5" name="Text 3"/>
-          <p:cNvSpPr/>
-          <p:nvPr/>
-        </p:nvSpPr>
-        <p:spPr>
-          <a:xfrm>
-            <a:off x="1133856" y="640080"/>
+            <a:off x="1133856" y="466344"/>
             <a:ext cx="10490911" cy="365760"/>
           </a:xfrm>
           <a:prstGeom prst="rect">
@@ -8058,18 +7846,18 @@
       </p:sp>
       <p:sp>
         <p:nvSpPr>
-          <p:cNvPr id="6" name="Shape 4"/>
-          <p:cNvSpPr/>
-          <p:nvPr/>
-        </p:nvSpPr>
-        <p:spPr>
-          <a:xfrm>
-            <a:off x="566928" y="1371600"/>
-            <a:ext cx="5120640" cy="3840480"/>
+          <p:cNvPr id="5" name="Shape 3"/>
+          <p:cNvSpPr/>
+          <p:nvPr/>
+        </p:nvSpPr>
+        <p:spPr>
+          <a:xfrm>
+            <a:off x="566928" y="1325880"/>
+            <a:ext cx="5120640" cy="4023360"/>
           </a:xfrm>
           <a:prstGeom prst="roundRect">
             <a:avLst>
-              <a:gd name="adj" fmla="val 1905"/>
+              <a:gd name="adj" fmla="val 1818"/>
             </a:avLst>
           </a:prstGeom>
           <a:solidFill>
@@ -8085,18 +7873,18 @@
       </p:sp>
       <p:sp>
         <p:nvSpPr>
-          <p:cNvPr id="7" name="Shape 5"/>
-          <p:cNvSpPr/>
-          <p:nvPr/>
-        </p:nvSpPr>
-        <p:spPr>
-          <a:xfrm>
-            <a:off x="795528" y="1600200"/>
-            <a:ext cx="4663440" cy="1005840"/>
+          <p:cNvPr id="6" name="Shape 4"/>
+          <p:cNvSpPr/>
+          <p:nvPr/>
+        </p:nvSpPr>
+        <p:spPr>
+          <a:xfrm>
+            <a:off x="795528" y="1508760"/>
+            <a:ext cx="4663440" cy="566928"/>
           </a:xfrm>
           <a:prstGeom prst="roundRect">
             <a:avLst>
-              <a:gd name="adj" fmla="val 7273"/>
+              <a:gd name="adj" fmla="val 12903"/>
             </a:avLst>
           </a:prstGeom>
           <a:solidFill>
@@ -8107,69 +7895,71 @@
       </p:sp>
       <p:sp>
         <p:nvSpPr>
+          <p:cNvPr id="7" name="Text 5"/>
+          <p:cNvSpPr/>
+          <p:nvPr/>
+        </p:nvSpPr>
+        <p:spPr>
+          <a:xfrm>
+            <a:off x="978408" y="1581912"/>
+            <a:ext cx="2880360" cy="420624"/>
+          </a:xfrm>
+          <a:prstGeom prst="rect">
+            <a:avLst/>
+          </a:prstGeom>
+          <a:noFill/>
+          <a:ln/>
+        </p:spPr>
+        <p:txBody>
+          <a:bodyPr wrap="square" lIns="0" tIns="0" rIns="0" bIns="0" rtlCol="0" anchor="ctr">
+            <a:normAutofit/>
+          </a:bodyPr>
+          <a:lstStyle/>
+          <a:p>
+            <a:pPr indent="0" marL="0">
+              <a:buNone/>
+            </a:pPr>
+            <a:r>
+              <a:rPr lang="en-US" sz="1050" b="1" dirty="0">
+                <a:solidFill>
+                  <a:srgbClr val="FFFFFF"/>
+                </a:solidFill>
+                <a:latin typeface="맑은 고딕" pitchFamily="34" charset="0"/>
+                <a:ea typeface="맑은 고딕" pitchFamily="34" charset="-122"/>
+                <a:cs typeface="맑은 고딕" pitchFamily="34" charset="-120"/>
+              </a:rPr>
+              <a:t>임대수익률 (Gross, 매매가−보증금 대비)</a:t>
+            </a:r>
+            <a:endParaRPr lang="en-US" sz="1050" dirty="0"/>
+          </a:p>
+        </p:txBody>
+      </p:sp>
+      <p:sp>
+        <p:nvSpPr>
           <p:cNvPr id="8" name="Text 6"/>
           <p:cNvSpPr/>
           <p:nvPr/>
         </p:nvSpPr>
         <p:spPr>
           <a:xfrm>
-            <a:off x="1024128" y="1600200"/>
-            <a:ext cx="2286000" cy="1005840"/>
-          </a:xfrm>
-          <a:prstGeom prst="rect">
-            <a:avLst/>
-          </a:prstGeom>
-          <a:noFill/>
-          <a:ln/>
-        </p:spPr>
-        <p:txBody>
-          <a:bodyPr wrap="square" rtlCol="0" anchor="ctr"/>
-          <a:lstStyle/>
-          <a:p>
-            <a:pPr indent="0" marL="0">
-              <a:buNone/>
-            </a:pPr>
-            <a:r>
-              <a:rPr lang="en-US" sz="1600" b="1" dirty="0">
-                <a:solidFill>
-                  <a:srgbClr val="FFFFFF"/>
-                </a:solidFill>
-                <a:latin typeface="맑은 고딕" pitchFamily="34" charset="0"/>
-                <a:ea typeface="맑은 고딕" pitchFamily="34" charset="-122"/>
-                <a:cs typeface="맑은 고딕" pitchFamily="34" charset="-120"/>
-              </a:rPr>
-              <a:t>수익률</a:t>
-            </a:r>
-            <a:endParaRPr lang="en-US" sz="1600" dirty="0"/>
-          </a:p>
-        </p:txBody>
-      </p:sp>
-      <p:sp>
-        <p:nvSpPr>
-          <p:cNvPr id="9" name="Text 7"/>
-          <p:cNvSpPr/>
-          <p:nvPr/>
-        </p:nvSpPr>
-        <p:spPr>
-          <a:xfrm>
-            <a:off x="2487168" y="1600200"/>
-            <a:ext cx="2743200" cy="1005840"/>
-          </a:xfrm>
-          <a:prstGeom prst="rect">
-            <a:avLst/>
-          </a:prstGeom>
-          <a:noFill/>
-          <a:ln/>
-        </p:spPr>
-        <p:txBody>
-          <a:bodyPr wrap="square" rtlCol="0" anchor="ctr"/>
+            <a:off x="3904488" y="1581912"/>
+            <a:ext cx="1417320" cy="420624"/>
+          </a:xfrm>
+          <a:prstGeom prst="rect">
+            <a:avLst/>
+          </a:prstGeom>
+          <a:noFill/>
+          <a:ln/>
+        </p:spPr>
+        <p:txBody>
+          <a:bodyPr wrap="square" lIns="0" tIns="0" rIns="0" bIns="0" rtlCol="0" anchor="ctr"/>
           <a:lstStyle/>
           <a:p>
             <a:pPr algn="r" indent="0" marL="0">
               <a:buNone/>
             </a:pPr>
             <a:r>
-              <a:rPr lang="en-US" sz="2800" b="1" dirty="0">
+              <a:rPr lang="en-US" sz="2400" b="1" dirty="0">
                 <a:solidFill>
                   <a:srgbClr val="B8860B"/>
                 </a:solidFill>
@@ -8179,7 +7969,46 @@
               </a:rPr>
               <a:t>0.00%</a:t>
             </a:r>
-            <a:endParaRPr lang="en-US" sz="2800" dirty="0"/>
+            <a:endParaRPr lang="en-US" sz="2400" dirty="0"/>
+          </a:p>
+        </p:txBody>
+      </p:sp>
+      <p:sp>
+        <p:nvSpPr>
+          <p:cNvPr id="9" name="Text 7"/>
+          <p:cNvSpPr/>
+          <p:nvPr/>
+        </p:nvSpPr>
+        <p:spPr>
+          <a:xfrm>
+            <a:off x="886968" y="2185416"/>
+            <a:ext cx="2743200" cy="347472"/>
+          </a:xfrm>
+          <a:prstGeom prst="rect">
+            <a:avLst/>
+          </a:prstGeom>
+          <a:noFill/>
+          <a:ln/>
+        </p:spPr>
+        <p:txBody>
+          <a:bodyPr wrap="square" rtlCol="0" anchor="ctr"/>
+          <a:lstStyle/>
+          <a:p>
+            <a:pPr indent="0" marL="0">
+              <a:buNone/>
+            </a:pPr>
+            <a:r>
+              <a:rPr lang="en-US" sz="1100" dirty="0">
+                <a:solidFill>
+                  <a:srgbClr val="5B6B73"/>
+                </a:solidFill>
+                <a:latin typeface="맑은 고딕" pitchFamily="34" charset="0"/>
+                <a:ea typeface="맑은 고딕" pitchFamily="34" charset="-122"/>
+                <a:cs typeface="맑은 고딕" pitchFamily="34" charset="-120"/>
+              </a:rPr>
+              <a:t>연간 임대수입</a:t>
+            </a:r>
+            <a:endParaRPr lang="en-US" sz="1100" dirty="0"/>
           </a:p>
         </p:txBody>
       </p:sp>
@@ -8191,46 +8020,7 @@
         </p:nvSpPr>
         <p:spPr>
           <a:xfrm>
-            <a:off x="886968" y="2834640"/>
-            <a:ext cx="2743200" cy="347472"/>
-          </a:xfrm>
-          <a:prstGeom prst="rect">
-            <a:avLst/>
-          </a:prstGeom>
-          <a:noFill/>
-          <a:ln/>
-        </p:spPr>
-        <p:txBody>
-          <a:bodyPr wrap="square" rtlCol="0" anchor="ctr"/>
-          <a:lstStyle/>
-          <a:p>
-            <a:pPr indent="0" marL="0">
-              <a:buNone/>
-            </a:pPr>
-            <a:r>
-              <a:rPr lang="en-US" sz="1100" dirty="0">
-                <a:solidFill>
-                  <a:srgbClr val="5B6B73"/>
-                </a:solidFill>
-                <a:latin typeface="맑은 고딕" pitchFamily="34" charset="0"/>
-                <a:ea typeface="맑은 고딕" pitchFamily="34" charset="-122"/>
-                <a:cs typeface="맑은 고딕" pitchFamily="34" charset="-120"/>
-              </a:rPr>
-              <a:t>연간 임대수입</a:t>
-            </a:r>
-            <a:endParaRPr lang="en-US" sz="1100" dirty="0"/>
-          </a:p>
-        </p:txBody>
-      </p:sp>
-      <p:sp>
-        <p:nvSpPr>
-          <p:cNvPr id="11" name="Text 9"/>
-          <p:cNvSpPr/>
-          <p:nvPr/>
-        </p:nvSpPr>
-        <p:spPr>
-          <a:xfrm>
-            <a:off x="3127248" y="2834640"/>
+            <a:off x="3127248" y="2185416"/>
             <a:ext cx="2194560" cy="347472"/>
           </a:xfrm>
           <a:prstGeom prst="rect">
@@ -8263,13 +8053,13 @@
       </p:sp>
       <p:sp>
         <p:nvSpPr>
-          <p:cNvPr id="12" name="Shape 10"/>
-          <p:cNvSpPr/>
-          <p:nvPr/>
-        </p:nvSpPr>
-        <p:spPr>
-          <a:xfrm>
-            <a:off x="795528" y="3182112"/>
+          <p:cNvPr id="11" name="Shape 9"/>
+          <p:cNvSpPr/>
+          <p:nvPr/>
+        </p:nvSpPr>
+        <p:spPr>
+          <a:xfrm>
+            <a:off x="795528" y="2532888"/>
             <a:ext cx="4663440" cy="0"/>
           </a:xfrm>
           <a:prstGeom prst="line">
@@ -8286,52 +8076,52 @@
       </p:sp>
       <p:sp>
         <p:nvSpPr>
+          <p:cNvPr id="12" name="Text 10"/>
+          <p:cNvSpPr/>
+          <p:nvPr/>
+        </p:nvSpPr>
+        <p:spPr>
+          <a:xfrm>
+            <a:off x="886968" y="2532888"/>
+            <a:ext cx="2743200" cy="347472"/>
+          </a:xfrm>
+          <a:prstGeom prst="rect">
+            <a:avLst/>
+          </a:prstGeom>
+          <a:noFill/>
+          <a:ln/>
+        </p:spPr>
+        <p:txBody>
+          <a:bodyPr wrap="square" rtlCol="0" anchor="ctr"/>
+          <a:lstStyle/>
+          <a:p>
+            <a:pPr indent="0" marL="0">
+              <a:buNone/>
+            </a:pPr>
+            <a:r>
+              <a:rPr lang="en-US" sz="1100" dirty="0">
+                <a:solidFill>
+                  <a:srgbClr val="5B6B73"/>
+                </a:solidFill>
+                <a:latin typeface="맑은 고딕" pitchFamily="34" charset="0"/>
+                <a:ea typeface="맑은 고딕" pitchFamily="34" charset="-122"/>
+                <a:cs typeface="맑은 고딕" pitchFamily="34" charset="-120"/>
+              </a:rPr>
+              <a:t>승계 보증금</a:t>
+            </a:r>
+            <a:endParaRPr lang="en-US" sz="1100" dirty="0"/>
+          </a:p>
+        </p:txBody>
+      </p:sp>
+      <p:sp>
+        <p:nvSpPr>
           <p:cNvPr id="13" name="Text 11"/>
           <p:cNvSpPr/>
           <p:nvPr/>
         </p:nvSpPr>
         <p:spPr>
           <a:xfrm>
-            <a:off x="886968" y="3182112"/>
-            <a:ext cx="2743200" cy="347472"/>
-          </a:xfrm>
-          <a:prstGeom prst="rect">
-            <a:avLst/>
-          </a:prstGeom>
-          <a:noFill/>
-          <a:ln/>
-        </p:spPr>
-        <p:txBody>
-          <a:bodyPr wrap="square" rtlCol="0" anchor="ctr"/>
-          <a:lstStyle/>
-          <a:p>
-            <a:pPr indent="0" marL="0">
-              <a:buNone/>
-            </a:pPr>
-            <a:r>
-              <a:rPr lang="en-US" sz="1100" dirty="0">
-                <a:solidFill>
-                  <a:srgbClr val="5B6B73"/>
-                </a:solidFill>
-                <a:latin typeface="맑은 고딕" pitchFamily="34" charset="0"/>
-                <a:ea typeface="맑은 고딕" pitchFamily="34" charset="-122"/>
-                <a:cs typeface="맑은 고딕" pitchFamily="34" charset="-120"/>
-              </a:rPr>
-              <a:t>승계 보증금</a:t>
-            </a:r>
-            <a:endParaRPr lang="en-US" sz="1100" dirty="0"/>
-          </a:p>
-        </p:txBody>
-      </p:sp>
-      <p:sp>
-        <p:nvSpPr>
-          <p:cNvPr id="14" name="Text 12"/>
-          <p:cNvSpPr/>
-          <p:nvPr/>
-        </p:nvSpPr>
-        <p:spPr>
-          <a:xfrm>
-            <a:off x="3127248" y="3182112"/>
+            <a:off x="3127248" y="2532888"/>
             <a:ext cx="2194560" cy="347472"/>
           </a:xfrm>
           <a:prstGeom prst="rect">
@@ -8364,13 +8154,13 @@
       </p:sp>
       <p:sp>
         <p:nvSpPr>
-          <p:cNvPr id="15" name="Shape 13"/>
-          <p:cNvSpPr/>
-          <p:nvPr/>
-        </p:nvSpPr>
-        <p:spPr>
-          <a:xfrm>
-            <a:off x="795528" y="3529584"/>
+          <p:cNvPr id="14" name="Shape 12"/>
+          <p:cNvSpPr/>
+          <p:nvPr/>
+        </p:nvSpPr>
+        <p:spPr>
+          <a:xfrm>
+            <a:off x="795528" y="2880360"/>
             <a:ext cx="4663440" cy="0"/>
           </a:xfrm>
           <a:prstGeom prst="line">
@@ -8387,52 +8177,52 @@
       </p:sp>
       <p:sp>
         <p:nvSpPr>
+          <p:cNvPr id="15" name="Text 13"/>
+          <p:cNvSpPr/>
+          <p:nvPr/>
+        </p:nvSpPr>
+        <p:spPr>
+          <a:xfrm>
+            <a:off x="886968" y="2880360"/>
+            <a:ext cx="2743200" cy="347472"/>
+          </a:xfrm>
+          <a:prstGeom prst="rect">
+            <a:avLst/>
+          </a:prstGeom>
+          <a:noFill/>
+          <a:ln/>
+        </p:spPr>
+        <p:txBody>
+          <a:bodyPr wrap="square" rtlCol="0" anchor="ctr"/>
+          <a:lstStyle/>
+          <a:p>
+            <a:pPr indent="0" marL="0">
+              <a:buNone/>
+            </a:pPr>
+            <a:r>
+              <a:rPr lang="en-US" sz="1100" dirty="0">
+                <a:solidFill>
+                  <a:srgbClr val="5B6B73"/>
+                </a:solidFill>
+                <a:latin typeface="맑은 고딕" pitchFamily="34" charset="0"/>
+                <a:ea typeface="맑은 고딕" pitchFamily="34" charset="-122"/>
+                <a:cs typeface="맑은 고딕" pitchFamily="34" charset="-120"/>
+              </a:rPr>
+              <a:t>매매가</a:t>
+            </a:r>
+            <a:endParaRPr lang="en-US" sz="1100" dirty="0"/>
+          </a:p>
+        </p:txBody>
+      </p:sp>
+      <p:sp>
+        <p:nvSpPr>
           <p:cNvPr id="16" name="Text 14"/>
           <p:cNvSpPr/>
           <p:nvPr/>
         </p:nvSpPr>
         <p:spPr>
           <a:xfrm>
-            <a:off x="886968" y="3529584"/>
-            <a:ext cx="2743200" cy="347472"/>
-          </a:xfrm>
-          <a:prstGeom prst="rect">
-            <a:avLst/>
-          </a:prstGeom>
-          <a:noFill/>
-          <a:ln/>
-        </p:spPr>
-        <p:txBody>
-          <a:bodyPr wrap="square" rtlCol="0" anchor="ctr"/>
-          <a:lstStyle/>
-          <a:p>
-            <a:pPr indent="0" marL="0">
-              <a:buNone/>
-            </a:pPr>
-            <a:r>
-              <a:rPr lang="en-US" sz="1100" dirty="0">
-                <a:solidFill>
-                  <a:srgbClr val="5B6B73"/>
-                </a:solidFill>
-                <a:latin typeface="맑은 고딕" pitchFamily="34" charset="0"/>
-                <a:ea typeface="맑은 고딕" pitchFamily="34" charset="-122"/>
-                <a:cs typeface="맑은 고딕" pitchFamily="34" charset="-120"/>
-              </a:rPr>
-              <a:t>매매가</a:t>
-            </a:r>
-            <a:endParaRPr lang="en-US" sz="1100" dirty="0"/>
-          </a:p>
-        </p:txBody>
-      </p:sp>
-      <p:sp>
-        <p:nvSpPr>
-          <p:cNvPr id="17" name="Text 15"/>
-          <p:cNvSpPr/>
-          <p:nvPr/>
-        </p:nvSpPr>
-        <p:spPr>
-          <a:xfrm>
-            <a:off x="3127248" y="3529584"/>
+            <a:off x="3127248" y="2880360"/>
             <a:ext cx="2194560" cy="347472"/>
           </a:xfrm>
           <a:prstGeom prst="rect">
@@ -8465,13 +8255,13 @@
       </p:sp>
       <p:sp>
         <p:nvSpPr>
-          <p:cNvPr id="18" name="Shape 16"/>
-          <p:cNvSpPr/>
-          <p:nvPr/>
-        </p:nvSpPr>
-        <p:spPr>
-          <a:xfrm>
-            <a:off x="795528" y="3877056"/>
+          <p:cNvPr id="17" name="Shape 15"/>
+          <p:cNvSpPr/>
+          <p:nvPr/>
+        </p:nvSpPr>
+        <p:spPr>
+          <a:xfrm>
+            <a:off x="795528" y="3227832"/>
             <a:ext cx="4663440" cy="0"/>
           </a:xfrm>
           <a:prstGeom prst="line">
@@ -8488,52 +8278,52 @@
       </p:sp>
       <p:sp>
         <p:nvSpPr>
+          <p:cNvPr id="18" name="Text 16"/>
+          <p:cNvSpPr/>
+          <p:nvPr/>
+        </p:nvSpPr>
+        <p:spPr>
+          <a:xfrm>
+            <a:off x="886968" y="3227832"/>
+            <a:ext cx="2743200" cy="347472"/>
+          </a:xfrm>
+          <a:prstGeom prst="rect">
+            <a:avLst/>
+          </a:prstGeom>
+          <a:noFill/>
+          <a:ln/>
+        </p:spPr>
+        <p:txBody>
+          <a:bodyPr wrap="square" rtlCol="0" anchor="ctr"/>
+          <a:lstStyle/>
+          <a:p>
+            <a:pPr indent="0" marL="0">
+              <a:buNone/>
+            </a:pPr>
+            <a:r>
+              <a:rPr lang="en-US" sz="1100" dirty="0">
+                <a:solidFill>
+                  <a:srgbClr val="5B6B73"/>
+                </a:solidFill>
+                <a:latin typeface="맑은 고딕" pitchFamily="34" charset="0"/>
+                <a:ea typeface="맑은 고딕" pitchFamily="34" charset="-122"/>
+                <a:cs typeface="맑은 고딕" pitchFamily="34" charset="-120"/>
+              </a:rPr>
+              <a:t>보증금 차감 매입가 (매매가−보증금)</a:t>
+            </a:r>
+            <a:endParaRPr lang="en-US" sz="1100" dirty="0"/>
+          </a:p>
+        </p:txBody>
+      </p:sp>
+      <p:sp>
+        <p:nvSpPr>
           <p:cNvPr id="19" name="Text 17"/>
           <p:cNvSpPr/>
           <p:nvPr/>
         </p:nvSpPr>
         <p:spPr>
           <a:xfrm>
-            <a:off x="886968" y="3877056"/>
-            <a:ext cx="2743200" cy="347472"/>
-          </a:xfrm>
-          <a:prstGeom prst="rect">
-            <a:avLst/>
-          </a:prstGeom>
-          <a:noFill/>
-          <a:ln/>
-        </p:spPr>
-        <p:txBody>
-          <a:bodyPr wrap="square" rtlCol="0" anchor="ctr"/>
-          <a:lstStyle/>
-          <a:p>
-            <a:pPr indent="0" marL="0">
-              <a:buNone/>
-            </a:pPr>
-            <a:r>
-              <a:rPr lang="en-US" sz="1100" dirty="0">
-                <a:solidFill>
-                  <a:srgbClr val="5B6B73"/>
-                </a:solidFill>
-                <a:latin typeface="맑은 고딕" pitchFamily="34" charset="0"/>
-                <a:ea typeface="맑은 고딕" pitchFamily="34" charset="-122"/>
-                <a:cs typeface="맑은 고딕" pitchFamily="34" charset="-120"/>
-              </a:rPr>
-              <a:t>순투자금 (매매가 − 보증금)</a:t>
-            </a:r>
-            <a:endParaRPr lang="en-US" sz="1100" dirty="0"/>
-          </a:p>
-        </p:txBody>
-      </p:sp>
-      <p:sp>
-        <p:nvSpPr>
-          <p:cNvPr id="20" name="Text 18"/>
-          <p:cNvSpPr/>
-          <p:nvPr/>
-        </p:nvSpPr>
-        <p:spPr>
-          <a:xfrm>
-            <a:off x="3127248" y="3877056"/>
+            <a:off x="3127248" y="3227832"/>
             <a:ext cx="2194560" cy="347472"/>
           </a:xfrm>
           <a:prstGeom prst="rect">
@@ -8566,13 +8356,13 @@
       </p:sp>
       <p:sp>
         <p:nvSpPr>
-          <p:cNvPr id="21" name="Shape 19"/>
-          <p:cNvSpPr/>
-          <p:nvPr/>
-        </p:nvSpPr>
-        <p:spPr>
-          <a:xfrm>
-            <a:off x="795528" y="4224528"/>
+          <p:cNvPr id="20" name="Shape 18"/>
+          <p:cNvSpPr/>
+          <p:nvPr/>
+        </p:nvSpPr>
+        <p:spPr>
+          <a:xfrm>
+            <a:off x="795528" y="3575304"/>
             <a:ext cx="4663440" cy="0"/>
           </a:xfrm>
           <a:prstGeom prst="line">
@@ -8589,18 +8379,18 @@
       </p:sp>
       <p:sp>
         <p:nvSpPr>
-          <p:cNvPr id="22" name="Shape 20"/>
-          <p:cNvSpPr/>
-          <p:nvPr/>
-        </p:nvSpPr>
-        <p:spPr>
-          <a:xfrm>
-            <a:off x="6053328" y="1371600"/>
-            <a:ext cx="5571439" cy="3840480"/>
+          <p:cNvPr id="21" name="Shape 19"/>
+          <p:cNvSpPr/>
+          <p:nvPr/>
+        </p:nvSpPr>
+        <p:spPr>
+          <a:xfrm>
+            <a:off x="6053328" y="1325880"/>
+            <a:ext cx="5571439" cy="4023360"/>
           </a:xfrm>
           <a:prstGeom prst="roundRect">
             <a:avLst>
-              <a:gd name="adj" fmla="val 1429"/>
+              <a:gd name="adj" fmla="val 1364"/>
             </a:avLst>
           </a:prstGeom>
           <a:solidFill>
@@ -8616,13 +8406,13 @@
       </p:sp>
       <p:sp>
         <p:nvSpPr>
-          <p:cNvPr id="23" name="Shape 21"/>
-          <p:cNvSpPr/>
-          <p:nvPr/>
-        </p:nvSpPr>
-        <p:spPr>
-          <a:xfrm>
-            <a:off x="6309360" y="1591056"/>
+          <p:cNvPr id="22" name="Shape 20"/>
+          <p:cNvSpPr/>
+          <p:nvPr/>
+        </p:nvSpPr>
+        <p:spPr>
+          <a:xfrm>
+            <a:off x="6309360" y="1545336"/>
             <a:ext cx="1554480" cy="219456"/>
           </a:xfrm>
           <a:prstGeom prst="roundRect">
@@ -8643,14 +8433,53 @@
       </p:sp>
       <p:sp>
         <p:nvSpPr>
+          <p:cNvPr id="23" name="Text 21"/>
+          <p:cNvSpPr/>
+          <p:nvPr/>
+        </p:nvSpPr>
+        <p:spPr>
+          <a:xfrm>
+            <a:off x="6309360" y="1545336"/>
+            <a:ext cx="1554480" cy="219456"/>
+          </a:xfrm>
+          <a:prstGeom prst="rect">
+            <a:avLst/>
+          </a:prstGeom>
+          <a:noFill/>
+          <a:ln/>
+        </p:spPr>
+        <p:txBody>
+          <a:bodyPr wrap="square" lIns="0" tIns="0" rIns="0" bIns="0" rtlCol="0" anchor="ctr"/>
+          <a:lstStyle/>
+          <a:p>
+            <a:pPr algn="ctr" indent="0" marL="0">
+              <a:buNone/>
+            </a:pPr>
+            <a:r>
+              <a:rPr lang="en-US" sz="850" b="1" dirty="0">
+                <a:solidFill>
+                  <a:srgbClr val="8B6508"/>
+                </a:solidFill>
+                <a:latin typeface="맑은 고딕" pitchFamily="34" charset="0"/>
+                <a:ea typeface="맑은 고딕" pitchFamily="34" charset="-122"/>
+                <a:cs typeface="맑은 고딕" pitchFamily="34" charset="-120"/>
+              </a:rPr>
+              <a:t>[ 공시지가 열람 안내 ]</a:t>
+            </a:r>
+            <a:endParaRPr lang="en-US" sz="850" dirty="0"/>
+          </a:p>
+        </p:txBody>
+      </p:sp>
+      <p:sp>
+        <p:nvSpPr>
           <p:cNvPr id="24" name="Text 22"/>
           <p:cNvSpPr/>
           <p:nvPr/>
         </p:nvSpPr>
         <p:spPr>
           <a:xfrm>
-            <a:off x="6309360" y="1591056"/>
-            <a:ext cx="1554480" cy="219456"/>
+            <a:off x="6309360" y="1837944"/>
+            <a:ext cx="5059375" cy="274320"/>
           </a:xfrm>
           <a:prstGeom prst="rect">
             <a:avLst/>
@@ -8662,21 +8491,21 @@
           <a:bodyPr wrap="square" lIns="0" tIns="0" rIns="0" bIns="0" rtlCol="0" anchor="ctr"/>
           <a:lstStyle/>
           <a:p>
-            <a:pPr algn="ctr" indent="0" marL="0">
-              <a:buNone/>
-            </a:pPr>
-            <a:r>
-              <a:rPr lang="en-US" sz="850" b="1" dirty="0">
-                <a:solidFill>
-                  <a:srgbClr val="8B6508"/>
-                </a:solidFill>
-                <a:latin typeface="맑은 고딕" pitchFamily="34" charset="0"/>
-                <a:ea typeface="맑은 고딕" pitchFamily="34" charset="-122"/>
-                <a:cs typeface="맑은 고딕" pitchFamily="34" charset="-120"/>
-              </a:rPr>
-              <a:t>[ 공시지가 열람 안내 ]</a:t>
-            </a:r>
-            <a:endParaRPr lang="en-US" sz="850" dirty="0"/>
+            <a:pPr indent="0" marL="0">
+              <a:buNone/>
+            </a:pPr>
+            <a:r>
+              <a:rPr lang="en-US" sz="1200" b="1" dirty="0">
+                <a:solidFill>
+                  <a:srgbClr val="132A3A"/>
+                </a:solidFill>
+                <a:latin typeface="맑은 고딕" pitchFamily="34" charset="0"/>
+                <a:ea typeface="맑은 고딕" pitchFamily="34" charset="-122"/>
+                <a:cs typeface="맑은 고딕" pitchFamily="34" charset="-120"/>
+              </a:rPr>
+              <a:t>개별공시지가 및 토지 가치 평가 안내</a:t>
+            </a:r>
+            <a:endParaRPr lang="en-US" sz="1200" dirty="0"/>
           </a:p>
         </p:txBody>
       </p:sp>
@@ -8688,47 +8517,8 @@
         </p:nvSpPr>
         <p:spPr>
           <a:xfrm>
-            <a:off x="6309360" y="1883664"/>
-            <a:ext cx="5059375" cy="274320"/>
-          </a:xfrm>
-          <a:prstGeom prst="rect">
-            <a:avLst/>
-          </a:prstGeom>
-          <a:noFill/>
-          <a:ln/>
-        </p:spPr>
-        <p:txBody>
-          <a:bodyPr wrap="square" lIns="0" tIns="0" rIns="0" bIns="0" rtlCol="0" anchor="ctr"/>
-          <a:lstStyle/>
-          <a:p>
-            <a:pPr indent="0" marL="0">
-              <a:buNone/>
-            </a:pPr>
-            <a:r>
-              <a:rPr lang="en-US" sz="1200" b="1" dirty="0">
-                <a:solidFill>
-                  <a:srgbClr val="132A3A"/>
-                </a:solidFill>
-                <a:latin typeface="맑은 고딕" pitchFamily="34" charset="0"/>
-                <a:ea typeface="맑은 고딕" pitchFamily="34" charset="-122"/>
-                <a:cs typeface="맑은 고딕" pitchFamily="34" charset="-120"/>
-              </a:rPr>
-              <a:t>개별공시지가 및 토지 가치 평가 안내</a:t>
-            </a:r>
-            <a:endParaRPr lang="en-US" sz="1200" dirty="0"/>
-          </a:p>
-        </p:txBody>
-      </p:sp>
-      <p:sp>
-        <p:nvSpPr>
-          <p:cNvPr id="26" name="Text 24"/>
-          <p:cNvSpPr/>
-          <p:nvPr/>
-        </p:nvSpPr>
-        <p:spPr>
-          <a:xfrm>
-            <a:off x="6309360" y="2194560"/>
-            <a:ext cx="5059375" cy="384048"/>
+            <a:off x="6309360" y="2148840"/>
+            <a:ext cx="5059375" cy="402336"/>
           </a:xfrm>
           <a:prstGeom prst="rect">
             <a:avLst/>
@@ -8763,13 +8553,13 @@
       </p:sp>
       <p:sp>
         <p:nvSpPr>
-          <p:cNvPr id="27" name="Shape 25"/>
-          <p:cNvSpPr/>
-          <p:nvPr/>
-        </p:nvSpPr>
-        <p:spPr>
-          <a:xfrm>
-            <a:off x="6309360" y="2633472"/>
+          <p:cNvPr id="26" name="Shape 24"/>
+          <p:cNvSpPr/>
+          <p:nvPr/>
+        </p:nvSpPr>
+        <p:spPr>
+          <a:xfrm>
+            <a:off x="6309360" y="2606040"/>
             <a:ext cx="5059375" cy="0"/>
           </a:xfrm>
           <a:prstGeom prst="line">
@@ -8786,13 +8576,13 @@
       </p:sp>
       <p:sp>
         <p:nvSpPr>
-          <p:cNvPr id="28" name="Shape 26"/>
-          <p:cNvSpPr/>
-          <p:nvPr/>
-        </p:nvSpPr>
-        <p:spPr>
-          <a:xfrm>
-            <a:off x="6345936" y="2779776"/>
+          <p:cNvPr id="27" name="Shape 25"/>
+          <p:cNvSpPr/>
+          <p:nvPr/>
+        </p:nvSpPr>
+        <p:spPr>
+          <a:xfrm>
+            <a:off x="6345936" y="2752344"/>
             <a:ext cx="64008" cy="64008"/>
           </a:xfrm>
           <a:prstGeom prst="rect">
@@ -8806,14 +8596,14 @@
       </p:sp>
       <p:sp>
         <p:nvSpPr>
-          <p:cNvPr id="29" name="Text 27"/>
-          <p:cNvSpPr/>
-          <p:nvPr/>
-        </p:nvSpPr>
-        <p:spPr>
-          <a:xfrm>
-            <a:off x="6473952" y="2724912"/>
-            <a:ext cx="4839919" cy="530352"/>
+          <p:cNvPr id="28" name="Text 26"/>
+          <p:cNvSpPr/>
+          <p:nvPr/>
+        </p:nvSpPr>
+        <p:spPr>
+          <a:xfrm>
+            <a:off x="6473952" y="2697480"/>
+            <a:ext cx="4839919" cy="571500"/>
           </a:xfrm>
           <a:prstGeom prst="rect">
             <a:avLst/>
@@ -8848,13 +8638,13 @@
       </p:sp>
       <p:sp>
         <p:nvSpPr>
-          <p:cNvPr id="30" name="Shape 28"/>
-          <p:cNvSpPr/>
-          <p:nvPr/>
-        </p:nvSpPr>
-        <p:spPr>
-          <a:xfrm>
-            <a:off x="6345936" y="3346704"/>
+          <p:cNvPr id="29" name="Shape 27"/>
+          <p:cNvSpPr/>
+          <p:nvPr/>
+        </p:nvSpPr>
+        <p:spPr>
+          <a:xfrm>
+            <a:off x="6345936" y="3360420"/>
             <a:ext cx="64008" cy="64008"/>
           </a:xfrm>
           <a:prstGeom prst="rect">
@@ -8868,14 +8658,14 @@
       </p:sp>
       <p:sp>
         <p:nvSpPr>
-          <p:cNvPr id="31" name="Text 29"/>
-          <p:cNvSpPr/>
-          <p:nvPr/>
-        </p:nvSpPr>
-        <p:spPr>
-          <a:xfrm>
-            <a:off x="6473952" y="3291840"/>
-            <a:ext cx="4839919" cy="530352"/>
+          <p:cNvPr id="30" name="Text 28"/>
+          <p:cNvSpPr/>
+          <p:nvPr/>
+        </p:nvSpPr>
+        <p:spPr>
+          <a:xfrm>
+            <a:off x="6473952" y="3305556"/>
+            <a:ext cx="4839919" cy="571500"/>
           </a:xfrm>
           <a:prstGeom prst="rect">
             <a:avLst/>
@@ -8910,13 +8700,13 @@
       </p:sp>
       <p:sp>
         <p:nvSpPr>
-          <p:cNvPr id="32" name="Shape 30"/>
-          <p:cNvSpPr/>
-          <p:nvPr/>
-        </p:nvSpPr>
-        <p:spPr>
-          <a:xfrm>
-            <a:off x="6345936" y="3913632"/>
+          <p:cNvPr id="31" name="Shape 29"/>
+          <p:cNvSpPr/>
+          <p:nvPr/>
+        </p:nvSpPr>
+        <p:spPr>
+          <a:xfrm>
+            <a:off x="6345936" y="3968496"/>
             <a:ext cx="64008" cy="64008"/>
           </a:xfrm>
           <a:prstGeom prst="rect">
@@ -8930,14 +8720,14 @@
       </p:sp>
       <p:sp>
         <p:nvSpPr>
-          <p:cNvPr id="33" name="Text 31"/>
-          <p:cNvSpPr/>
-          <p:nvPr/>
-        </p:nvSpPr>
-        <p:spPr>
-          <a:xfrm>
-            <a:off x="6473952" y="3858768"/>
-            <a:ext cx="4839919" cy="530352"/>
+          <p:cNvPr id="32" name="Text 30"/>
+          <p:cNvSpPr/>
+          <p:nvPr/>
+        </p:nvSpPr>
+        <p:spPr>
+          <a:xfrm>
+            <a:off x="6473952" y="3913632"/>
+            <a:ext cx="4839919" cy="571500"/>
           </a:xfrm>
           <a:prstGeom prst="rect">
             <a:avLst/>
@@ -8972,13 +8762,13 @@
       </p:sp>
       <p:sp>
         <p:nvSpPr>
-          <p:cNvPr id="34" name="Shape 32"/>
-          <p:cNvSpPr/>
-          <p:nvPr/>
-        </p:nvSpPr>
-        <p:spPr>
-          <a:xfrm>
-            <a:off x="6345936" y="4480560"/>
+          <p:cNvPr id="33" name="Shape 31"/>
+          <p:cNvSpPr/>
+          <p:nvPr/>
+        </p:nvSpPr>
+        <p:spPr>
+          <a:xfrm>
+            <a:off x="6345936" y="4576572"/>
             <a:ext cx="64008" cy="64008"/>
           </a:xfrm>
           <a:prstGeom prst="rect">
@@ -8992,14 +8782,14 @@
       </p:sp>
       <p:sp>
         <p:nvSpPr>
-          <p:cNvPr id="35" name="Text 33"/>
-          <p:cNvSpPr/>
-          <p:nvPr/>
-        </p:nvSpPr>
-        <p:spPr>
-          <a:xfrm>
-            <a:off x="6473952" y="4425696"/>
-            <a:ext cx="4839919" cy="530352"/>
+          <p:cNvPr id="34" name="Text 32"/>
+          <p:cNvSpPr/>
+          <p:nvPr/>
+        </p:nvSpPr>
+        <p:spPr>
+          <a:xfrm>
+            <a:off x="6473952" y="4521708"/>
+            <a:ext cx="4839919" cy="571500"/>
           </a:xfrm>
           <a:prstGeom prst="rect">
             <a:avLst/>
@@ -9029,6 +8819,47 @@
               <a:t>보유세(재산세·종합부동산세) 과세표준 기준액 산출 및 세무 영향 점검</a:t>
             </a:r>
             <a:endParaRPr lang="en-US" sz="920" dirty="0"/>
+          </a:p>
+        </p:txBody>
+      </p:sp>
+      <p:sp>
+        <p:nvSpPr>
+          <p:cNvPr id="35" name="Text 33"/>
+          <p:cNvSpPr/>
+          <p:nvPr/>
+        </p:nvSpPr>
+        <p:spPr>
+          <a:xfrm>
+            <a:off x="566928" y="5952744"/>
+            <a:ext cx="11057839" cy="219456"/>
+          </a:xfrm>
+          <a:prstGeom prst="rect">
+            <a:avLst/>
+          </a:prstGeom>
+          <a:noFill/>
+          <a:ln/>
+        </p:spPr>
+        <p:txBody>
+          <a:bodyPr wrap="square" lIns="0" tIns="0" rIns="0" bIns="0" rtlCol="0" anchor="ctr">
+            <a:normAutofit/>
+          </a:bodyPr>
+          <a:lstStyle/>
+          <a:p>
+            <a:pPr indent="0" marL="0">
+              <a:buNone/>
+            </a:pPr>
+            <a:r>
+              <a:rPr lang="en-US" sz="800" dirty="0">
+                <a:solidFill>
+                  <a:srgbClr val="8A8A8A"/>
+                </a:solidFill>
+                <a:latin typeface="맑은 고딕" pitchFamily="34" charset="0"/>
+                <a:ea typeface="맑은 고딕" pitchFamily="34" charset="-122"/>
+                <a:cs typeface="맑은 고딕" pitchFamily="34" charset="-120"/>
+              </a:rPr>
+              <a:t>※ 운영비율 가정, 공실충당 5%, 보증금 승계 가정. 임대수익률은 운영비 차감 전, Cap Rate는 차감 후.</a:t>
+            </a:r>
+            <a:endParaRPr lang="en-US" sz="800" dirty="0"/>
           </a:p>
         </p:txBody>
       </p:sp>
@@ -9209,46 +9040,7 @@
         </p:nvSpPr>
         <p:spPr>
           <a:xfrm>
-            <a:off x="1133856" y="457200"/>
-            <a:ext cx="10490911" cy="182880"/>
-          </a:xfrm>
-          <a:prstGeom prst="rect">
-            <a:avLst/>
-          </a:prstGeom>
-          <a:noFill/>
-          <a:ln/>
-        </p:spPr>
-        <p:txBody>
-          <a:bodyPr wrap="square" lIns="0" tIns="0" rIns="0" bIns="0" rtlCol="0" anchor="ctr"/>
-          <a:lstStyle/>
-          <a:p>
-            <a:pPr indent="0" marL="0">
-              <a:buNone/>
-            </a:pPr>
-            <a:r>
-              <a:rPr lang="en-US" sz="950" b="1" spc="200" kern="0" dirty="0">
-                <a:solidFill>
-                  <a:srgbClr val="B8860B"/>
-                </a:solidFill>
-                <a:latin typeface="Arial" pitchFamily="34" charset="0"/>
-                <a:ea typeface="Arial" pitchFamily="34" charset="-122"/>
-                <a:cs typeface="Arial" pitchFamily="34" charset="-120"/>
-              </a:rPr>
-              <a:t>Gallery</a:t>
-            </a:r>
-            <a:endParaRPr lang="en-US" sz="950" dirty="0"/>
-          </a:p>
-        </p:txBody>
-      </p:sp>
-      <p:sp>
-        <p:nvSpPr>
-          <p:cNvPr id="5" name="Text 3"/>
-          <p:cNvSpPr/>
-          <p:nvPr/>
-        </p:nvSpPr>
-        <p:spPr>
-          <a:xfrm>
-            <a:off x="1133856" y="640080"/>
+            <a:off x="1133856" y="466344"/>
             <a:ext cx="10490911" cy="365760"/>
           </a:xfrm>
           <a:prstGeom prst="rect">
@@ -9283,68 +9075,199 @@
       </p:sp>
       <p:sp>
         <p:nvSpPr>
-          <p:cNvPr id="6" name="Shape 4"/>
-          <p:cNvSpPr/>
-          <p:nvPr/>
-        </p:nvSpPr>
-        <p:spPr>
-          <a:xfrm>
-            <a:off x="566928" y="1371600"/>
-            <a:ext cx="11057839" cy="4572000"/>
+          <p:cNvPr id="5" name="Shape 3"/>
+          <p:cNvSpPr/>
+          <p:nvPr/>
+        </p:nvSpPr>
+        <p:spPr>
+          <a:xfrm>
+            <a:off x="566928" y="1234440"/>
+            <a:ext cx="3600602" cy="2290572"/>
           </a:xfrm>
           <a:prstGeom prst="roundRect">
             <a:avLst>
-              <a:gd name="adj" fmla="val 1200"/>
+              <a:gd name="adj" fmla="val 2395"/>
             </a:avLst>
           </a:prstGeom>
           <a:solidFill>
-            <a:srgbClr val="F3F6F7"/>
+            <a:srgbClr val="F0F0F0"/>
           </a:solidFill>
           <a:ln w="6350">
             <a:solidFill>
-              <a:srgbClr val="CBD5E0"/>
+              <a:srgbClr val="E0E0E0"/>
             </a:solidFill>
             <a:prstDash val="solid"/>
           </a:ln>
         </p:spPr>
       </p:sp>
-      <p:sp>
-        <p:nvSpPr>
-          <p:cNvPr id="7" name="Shape 5"/>
-          <p:cNvSpPr/>
-          <p:nvPr/>
-        </p:nvSpPr>
-        <p:spPr>
-          <a:xfrm>
-            <a:off x="822960" y="1591056"/>
-            <a:ext cx="1316736" cy="219456"/>
+      <p:pic>
+        <p:nvPicPr>
+          <p:cNvPr id="6" name="Image 0" descr="preencoded.png">    </p:cNvPr>
+          <p:cNvPicPr>
+            <a:picLocks noChangeAspect="1"/>
+          </p:cNvPicPr>
+          <p:nvPr/>
+        </p:nvPicPr>
+        <p:blipFill>
+          <a:blip r:embed="rId1"/>
+          <a:stretch>
+            <a:fillRect/>
+          </a:stretch>
+        </p:blipFill>
+        <p:spPr>
+          <a:xfrm>
+            <a:off x="1508265" y="1234440"/>
+            <a:ext cx="1717929" cy="2290572"/>
+          </a:xfrm>
+          <a:prstGeom prst="rect">
+            <a:avLst/>
+          </a:prstGeom>
+        </p:spPr>
+      </p:pic>
+      <p:sp>
+        <p:nvSpPr>
+          <p:cNvPr id="7" name="Shape 4"/>
+          <p:cNvSpPr/>
+          <p:nvPr/>
+        </p:nvSpPr>
+        <p:spPr>
+          <a:xfrm>
+            <a:off x="640080" y="1307592"/>
+            <a:ext cx="868680" cy="237744"/>
+          </a:xfrm>
+          <a:prstGeom prst="rect">
+            <a:avLst/>
+          </a:prstGeom>
+          <a:solidFill>
+            <a:srgbClr val="10161F">
+              <a:alpha val="80000"/>
+            </a:srgbClr>
+          </a:solidFill>
+          <a:ln/>
+        </p:spPr>
+      </p:sp>
+      <p:sp>
+        <p:nvSpPr>
+          <p:cNvPr id="8" name="Text 5"/>
+          <p:cNvSpPr/>
+          <p:nvPr/>
+        </p:nvSpPr>
+        <p:spPr>
+          <a:xfrm>
+            <a:off x="640080" y="1307592"/>
+            <a:ext cx="868680" cy="237744"/>
+          </a:xfrm>
+          <a:prstGeom prst="rect">
+            <a:avLst/>
+          </a:prstGeom>
+          <a:noFill/>
+          <a:ln/>
+        </p:spPr>
+        <p:txBody>
+          <a:bodyPr wrap="square" lIns="0" tIns="0" rIns="0" bIns="0" rtlCol="0" anchor="ctr"/>
+          <a:lstStyle/>
+          <a:p>
+            <a:pPr algn="ctr" indent="0" marL="0">
+              <a:buNone/>
+            </a:pPr>
+            <a:r>
+              <a:rPr lang="en-US" sz="900" b="1" dirty="0">
+                <a:solidFill>
+                  <a:srgbClr val="FFFFFF"/>
+                </a:solidFill>
+                <a:latin typeface="맑은 고딕" pitchFamily="34" charset="0"/>
+                <a:ea typeface="맑은 고딕" pitchFamily="34" charset="-122"/>
+                <a:cs typeface="맑은 고딕" pitchFamily="34" charset="-120"/>
+              </a:rPr>
+              <a:t>건물 외관</a:t>
+            </a:r>
+            <a:endParaRPr lang="en-US" sz="900" dirty="0"/>
+          </a:p>
+        </p:txBody>
+      </p:sp>
+      <p:sp>
+        <p:nvSpPr>
+          <p:cNvPr id="9" name="Shape 6"/>
+          <p:cNvSpPr/>
+          <p:nvPr/>
+        </p:nvSpPr>
+        <p:spPr>
+          <a:xfrm>
+            <a:off x="4295546" y="1234440"/>
+            <a:ext cx="3600602" cy="2290572"/>
           </a:xfrm>
           <a:prstGeom prst="roundRect">
             <a:avLst>
-              <a:gd name="adj" fmla="val 50000"/>
+              <a:gd name="adj" fmla="val 2395"/>
             </a:avLst>
           </a:prstGeom>
           <a:solidFill>
-            <a:srgbClr val="E8F4F8"/>
+            <a:srgbClr val="F0F0F0"/>
           </a:solidFill>
           <a:ln w="6350">
             <a:solidFill>
-              <a:srgbClr val="2E6E82"/>
+              <a:srgbClr val="E0E0E0"/>
             </a:solidFill>
             <a:prstDash val="solid"/>
           </a:ln>
         </p:spPr>
       </p:sp>
-      <p:sp>
-        <p:nvSpPr>
-          <p:cNvPr id="8" name="Text 6"/>
-          <p:cNvSpPr/>
-          <p:nvPr/>
-        </p:nvSpPr>
-        <p:spPr>
-          <a:xfrm>
-            <a:off x="822960" y="1591056"/>
-            <a:ext cx="1316736" cy="219456"/>
+      <p:pic>
+        <p:nvPicPr>
+          <p:cNvPr id="10" name="Image 1" descr="preencoded.png">    </p:cNvPr>
+          <p:cNvPicPr>
+            <a:picLocks noChangeAspect="1"/>
+          </p:cNvPicPr>
+          <p:nvPr/>
+        </p:nvPicPr>
+        <p:blipFill>
+          <a:blip r:embed="rId2"/>
+          <a:stretch>
+            <a:fillRect/>
+          </a:stretch>
+        </p:blipFill>
+        <p:spPr>
+          <a:xfrm>
+            <a:off x="4568800" y="1234440"/>
+            <a:ext cx="3054096" cy="2290572"/>
+          </a:xfrm>
+          <a:prstGeom prst="rect">
+            <a:avLst/>
+          </a:prstGeom>
+        </p:spPr>
+      </p:pic>
+      <p:sp>
+        <p:nvSpPr>
+          <p:cNvPr id="11" name="Shape 7"/>
+          <p:cNvSpPr/>
+          <p:nvPr/>
+        </p:nvSpPr>
+        <p:spPr>
+          <a:xfrm>
+            <a:off x="4295546" y="3232404"/>
+            <a:ext cx="3600602" cy="292608"/>
+          </a:xfrm>
+          <a:prstGeom prst="rect">
+            <a:avLst/>
+          </a:prstGeom>
+          <a:solidFill>
+            <a:srgbClr val="000000">
+              <a:alpha val="60000"/>
+            </a:srgbClr>
+          </a:solidFill>
+          <a:ln/>
+        </p:spPr>
+      </p:sp>
+      <p:sp>
+        <p:nvSpPr>
+          <p:cNvPr id="12" name="Text 8"/>
+          <p:cNvSpPr/>
+          <p:nvPr/>
+        </p:nvSpPr>
+        <p:spPr>
+          <a:xfrm>
+            <a:off x="4405274" y="3232404"/>
+            <a:ext cx="3381146" cy="292608"/>
           </a:xfrm>
           <a:prstGeom prst="rect">
             <a:avLst/>
@@ -9356,379 +9279,475 @@
           <a:bodyPr wrap="square" lIns="0" tIns="0" rIns="0" bIns="0" rtlCol="0" anchor="ctr"/>
           <a:lstStyle/>
           <a:p>
-            <a:pPr algn="ctr" indent="0" marL="0">
-              <a:buNone/>
-            </a:pPr>
-            <a:r>
-              <a:rPr lang="en-US" sz="850" b="1" dirty="0">
-                <a:solidFill>
-                  <a:srgbClr val="2E6E82"/>
-                </a:solidFill>
-                <a:latin typeface="맑은 고딕" pitchFamily="34" charset="0"/>
-                <a:ea typeface="맑은 고딕" pitchFamily="34" charset="-122"/>
-                <a:cs typeface="맑은 고딕" pitchFamily="34" charset="-120"/>
-              </a:rPr>
-              <a:t>[ 현장 실사 예정 ]</a:t>
-            </a:r>
-            <a:endParaRPr lang="en-US" sz="850" dirty="0"/>
-          </a:p>
-        </p:txBody>
-      </p:sp>
-      <p:sp>
-        <p:nvSpPr>
-          <p:cNvPr id="9" name="Text 7"/>
-          <p:cNvSpPr/>
-          <p:nvPr/>
-        </p:nvSpPr>
-        <p:spPr>
-          <a:xfrm>
-            <a:off x="822960" y="1883664"/>
-            <a:ext cx="10545775" cy="274320"/>
-          </a:xfrm>
-          <a:prstGeom prst="rect">
-            <a:avLst/>
-          </a:prstGeom>
-          <a:noFill/>
-          <a:ln/>
-        </p:spPr>
-        <p:txBody>
-          <a:bodyPr wrap="square" lIns="0" tIns="0" rIns="0" bIns="0" rtlCol="0" anchor="ctr"/>
-          <a:lstStyle/>
-          <a:p>
-            <a:pPr indent="0" marL="0">
-              <a:buNone/>
-            </a:pPr>
-            <a:r>
-              <a:rPr lang="en-US" sz="1200" b="1" dirty="0">
-                <a:solidFill>
-                  <a:srgbClr val="132A3A"/>
-                </a:solidFill>
-                <a:latin typeface="맑은 고딕" pitchFamily="34" charset="0"/>
-                <a:ea typeface="맑은 고딕" pitchFamily="34" charset="-122"/>
-                <a:cs typeface="맑은 고딕" pitchFamily="34" charset="-120"/>
-              </a:rPr>
-              <a:t>건축물 현황 및 물리적 실사 점검 안내</a:t>
-            </a:r>
-            <a:endParaRPr lang="en-US" sz="1200" dirty="0"/>
-          </a:p>
-        </p:txBody>
-      </p:sp>
-      <p:sp>
-        <p:nvSpPr>
-          <p:cNvPr id="10" name="Text 8"/>
-          <p:cNvSpPr/>
-          <p:nvPr/>
-        </p:nvSpPr>
-        <p:spPr>
-          <a:xfrm>
-            <a:off x="822960" y="2194560"/>
-            <a:ext cx="10545775" cy="457200"/>
-          </a:xfrm>
-          <a:prstGeom prst="rect">
-            <a:avLst/>
-          </a:prstGeom>
-          <a:noFill/>
-          <a:ln/>
-        </p:spPr>
-        <p:txBody>
-          <a:bodyPr wrap="square" lIns="0" tIns="0" rIns="0" bIns="0" rtlCol="0" anchor="t"/>
-          <a:lstStyle/>
-          <a:p>
-            <a:pPr indent="0" marL="0">
-              <a:lnSpc>
-                <a:spcPct val="115000"/>
-              </a:lnSpc>
-              <a:buNone/>
-            </a:pPr>
-            <a:r>
-              <a:rPr lang="en-US" sz="950" dirty="0">
-                <a:solidFill>
-                  <a:srgbClr val="5B6B73"/>
-                </a:solidFill>
-                <a:latin typeface="맑은 고딕" pitchFamily="34" charset="0"/>
-                <a:ea typeface="맑은 고딕" pitchFamily="34" charset="-122"/>
-                <a:cs typeface="맑은 고딕" pitchFamily="34" charset="-120"/>
-              </a:rPr>
-              <a:t>본 자산의 내·외관 상태 및 주요 설비 사양은 매수 실사 절차 진행 시 현장 방문 조사를 통해 상세 확인 및 촬영이 진행됩니다.</a:t>
-            </a:r>
-            <a:endParaRPr lang="en-US" sz="950" dirty="0"/>
-          </a:p>
-        </p:txBody>
-      </p:sp>
-      <p:sp>
-        <p:nvSpPr>
-          <p:cNvPr id="11" name="Shape 9"/>
-          <p:cNvSpPr/>
-          <p:nvPr/>
-        </p:nvSpPr>
-        <p:spPr>
-          <a:xfrm>
-            <a:off x="822960" y="2706624"/>
-            <a:ext cx="10545775" cy="0"/>
-          </a:xfrm>
-          <a:prstGeom prst="line">
-            <a:avLst/>
-          </a:prstGeom>
-          <a:noFill/>
-          <a:ln w="5080">
+            <a:pPr indent="0" marL="0">
+              <a:buNone/>
+            </a:pPr>
+            <a:r>
+              <a:rPr lang="en-US" sz="900" dirty="0">
+                <a:solidFill>
+                  <a:srgbClr val="FFFFFF"/>
+                </a:solidFill>
+                <a:latin typeface="맑은 고딕" pitchFamily="34" charset="0"/>
+                <a:ea typeface="맑은 고딕" pitchFamily="34" charset="-122"/>
+                <a:cs typeface="맑은 고딕" pitchFamily="34" charset="-120"/>
+              </a:rPr>
+              <a:t>주변 도로 및 접근로</a:t>
+            </a:r>
+            <a:endParaRPr lang="en-US" sz="900" dirty="0"/>
+          </a:p>
+        </p:txBody>
+      </p:sp>
+      <p:sp>
+        <p:nvSpPr>
+          <p:cNvPr id="13" name="Shape 9"/>
+          <p:cNvSpPr/>
+          <p:nvPr/>
+        </p:nvSpPr>
+        <p:spPr>
+          <a:xfrm>
+            <a:off x="8024165" y="1234440"/>
+            <a:ext cx="3600602" cy="2290572"/>
+          </a:xfrm>
+          <a:prstGeom prst="roundRect">
+            <a:avLst>
+              <a:gd name="adj" fmla="val 2395"/>
+            </a:avLst>
+          </a:prstGeom>
+          <a:solidFill>
+            <a:srgbClr val="F0F0F0"/>
+          </a:solidFill>
+          <a:ln w="6350">
             <a:solidFill>
-              <a:srgbClr val="CBD5E0"/>
+              <a:srgbClr val="E0E0E0"/>
             </a:solidFill>
             <a:prstDash val="solid"/>
           </a:ln>
         </p:spPr>
       </p:sp>
-      <p:sp>
-        <p:nvSpPr>
-          <p:cNvPr id="12" name="Shape 10"/>
-          <p:cNvSpPr/>
-          <p:nvPr/>
-        </p:nvSpPr>
-        <p:spPr>
-          <a:xfrm>
-            <a:off x="859536" y="2852928"/>
-            <a:ext cx="64008" cy="64008"/>
+      <p:pic>
+        <p:nvPicPr>
+          <p:cNvPr id="14" name="Image 2" descr="preencoded.png">    </p:cNvPr>
+          <p:cNvPicPr>
+            <a:picLocks noChangeAspect="1"/>
+          </p:cNvPicPr>
+          <p:nvPr/>
+        </p:nvPicPr>
+        <p:blipFill>
+          <a:blip r:embed="rId3"/>
+          <a:stretch>
+            <a:fillRect/>
+          </a:stretch>
+        </p:blipFill>
+        <p:spPr>
+          <a:xfrm>
+            <a:off x="8965502" y="1234440"/>
+            <a:ext cx="1717929" cy="2290572"/>
+          </a:xfrm>
+          <a:prstGeom prst="rect">
+            <a:avLst/>
+          </a:prstGeom>
+        </p:spPr>
+      </p:pic>
+      <p:sp>
+        <p:nvSpPr>
+          <p:cNvPr id="15" name="Shape 10"/>
+          <p:cNvSpPr/>
+          <p:nvPr/>
+        </p:nvSpPr>
+        <p:spPr>
+          <a:xfrm>
+            <a:off x="8097317" y="1307592"/>
+            <a:ext cx="868680" cy="237744"/>
           </a:xfrm>
           <a:prstGeom prst="rect">
             <a:avLst/>
           </a:prstGeom>
           <a:solidFill>
-            <a:srgbClr val="B8860B"/>
+            <a:srgbClr val="10161F">
+              <a:alpha val="80000"/>
+            </a:srgbClr>
           </a:solidFill>
           <a:ln/>
         </p:spPr>
       </p:sp>
       <p:sp>
         <p:nvSpPr>
-          <p:cNvPr id="13" name="Text 11"/>
-          <p:cNvSpPr/>
-          <p:nvPr/>
-        </p:nvSpPr>
-        <p:spPr>
-          <a:xfrm>
-            <a:off x="987552" y="2798064"/>
-            <a:ext cx="10326319" cy="694944"/>
-          </a:xfrm>
-          <a:prstGeom prst="rect">
-            <a:avLst/>
-          </a:prstGeom>
-          <a:noFill/>
-          <a:ln/>
-        </p:spPr>
-        <p:txBody>
-          <a:bodyPr wrap="square" lIns="0" tIns="0" rIns="0" bIns="0" rtlCol="0" anchor="t"/>
-          <a:lstStyle/>
-          <a:p>
-            <a:pPr indent="0" marL="0">
-              <a:lnSpc>
-                <a:spcPct val="112000"/>
-              </a:lnSpc>
-              <a:buNone/>
-            </a:pPr>
-            <a:r>
-              <a:rPr lang="en-US" sz="920" dirty="0">
-                <a:solidFill>
-                  <a:srgbClr val="2B2B2B"/>
-                </a:solidFill>
-                <a:latin typeface="맑은 고딕" pitchFamily="34" charset="0"/>
-                <a:ea typeface="맑은 고딕" pitchFamily="34" charset="-122"/>
-                <a:cs typeface="맑은 고딕" pitchFamily="34" charset="-120"/>
-              </a:rPr>
-              <a:t>외관 파사드 마감재 보존 상태 및 균열·누수 흔적 정밀 점검</a:t>
-            </a:r>
-            <a:endParaRPr lang="en-US" sz="920" dirty="0"/>
-          </a:p>
-        </p:txBody>
-      </p:sp>
-      <p:sp>
-        <p:nvSpPr>
-          <p:cNvPr id="14" name="Shape 12"/>
-          <p:cNvSpPr/>
-          <p:nvPr/>
-        </p:nvSpPr>
-        <p:spPr>
-          <a:xfrm>
-            <a:off x="859536" y="3584448"/>
-            <a:ext cx="64008" cy="64008"/>
-          </a:xfrm>
-          <a:prstGeom prst="rect">
-            <a:avLst/>
+          <p:cNvPr id="16" name="Text 11"/>
+          <p:cNvSpPr/>
+          <p:nvPr/>
+        </p:nvSpPr>
+        <p:spPr>
+          <a:xfrm>
+            <a:off x="8097317" y="1307592"/>
+            <a:ext cx="868680" cy="237744"/>
+          </a:xfrm>
+          <a:prstGeom prst="rect">
+            <a:avLst/>
+          </a:prstGeom>
+          <a:noFill/>
+          <a:ln/>
+        </p:spPr>
+        <p:txBody>
+          <a:bodyPr wrap="square" lIns="0" tIns="0" rIns="0" bIns="0" rtlCol="0" anchor="ctr"/>
+          <a:lstStyle/>
+          <a:p>
+            <a:pPr algn="ctr" indent="0" marL="0">
+              <a:buNone/>
+            </a:pPr>
+            <a:r>
+              <a:rPr lang="en-US" sz="900" b="1" dirty="0">
+                <a:solidFill>
+                  <a:srgbClr val="FFFFFF"/>
+                </a:solidFill>
+                <a:latin typeface="맑은 고딕" pitchFamily="34" charset="0"/>
+                <a:ea typeface="맑은 고딕" pitchFamily="34" charset="-122"/>
+                <a:cs typeface="맑은 고딕" pitchFamily="34" charset="-120"/>
+              </a:rPr>
+              <a:t>1층 로비</a:t>
+            </a:r>
+            <a:endParaRPr lang="en-US" sz="900" dirty="0"/>
+          </a:p>
+        </p:txBody>
+      </p:sp>
+      <p:sp>
+        <p:nvSpPr>
+          <p:cNvPr id="17" name="Shape 12"/>
+          <p:cNvSpPr/>
+          <p:nvPr/>
+        </p:nvSpPr>
+        <p:spPr>
+          <a:xfrm>
+            <a:off x="566928" y="3653028"/>
+            <a:ext cx="3600602" cy="2290572"/>
+          </a:xfrm>
+          <a:prstGeom prst="roundRect">
+            <a:avLst>
+              <a:gd name="adj" fmla="val 2395"/>
+            </a:avLst>
           </a:prstGeom>
           <a:solidFill>
-            <a:srgbClr val="B8860B"/>
+            <a:srgbClr val="F0F0F0"/>
           </a:solidFill>
-          <a:ln/>
-        </p:spPr>
-      </p:sp>
-      <p:sp>
-        <p:nvSpPr>
-          <p:cNvPr id="15" name="Text 13"/>
-          <p:cNvSpPr/>
-          <p:nvPr/>
-        </p:nvSpPr>
-        <p:spPr>
-          <a:xfrm>
-            <a:off x="987552" y="3529584"/>
-            <a:ext cx="10326319" cy="694944"/>
-          </a:xfrm>
-          <a:prstGeom prst="rect">
-            <a:avLst/>
-          </a:prstGeom>
-          <a:noFill/>
-          <a:ln/>
-        </p:spPr>
-        <p:txBody>
-          <a:bodyPr wrap="square" lIns="0" tIns="0" rIns="0" bIns="0" rtlCol="0" anchor="t"/>
-          <a:lstStyle/>
-          <a:p>
-            <a:pPr indent="0" marL="0">
-              <a:lnSpc>
-                <a:spcPct val="112000"/>
-              </a:lnSpc>
-              <a:buNone/>
-            </a:pPr>
-            <a:r>
-              <a:rPr lang="en-US" sz="920" dirty="0">
-                <a:solidFill>
-                  <a:srgbClr val="2B2B2B"/>
-                </a:solidFill>
-                <a:latin typeface="맑은 고딕" pitchFamily="34" charset="0"/>
-                <a:ea typeface="맑은 고딕" pitchFamily="34" charset="-122"/>
-                <a:cs typeface="맑은 고딕" pitchFamily="34" charset="-120"/>
-              </a:rPr>
-              <a:t>승강기, 기계식 주차설비, 수배전반 등 핵심 설비 내구연한 및 정기검사 이력</a:t>
-            </a:r>
-            <a:endParaRPr lang="en-US" sz="920" dirty="0"/>
-          </a:p>
-        </p:txBody>
-      </p:sp>
-      <p:sp>
-        <p:nvSpPr>
-          <p:cNvPr id="16" name="Shape 14"/>
-          <p:cNvSpPr/>
-          <p:nvPr/>
-        </p:nvSpPr>
-        <p:spPr>
-          <a:xfrm>
-            <a:off x="859536" y="4315968"/>
-            <a:ext cx="64008" cy="64008"/>
+          <a:ln w="6350">
+            <a:solidFill>
+              <a:srgbClr val="E0E0E0"/>
+            </a:solidFill>
+            <a:prstDash val="solid"/>
+          </a:ln>
+        </p:spPr>
+      </p:sp>
+      <p:pic>
+        <p:nvPicPr>
+          <p:cNvPr id="18" name="Image 3" descr="preencoded.png">    </p:cNvPr>
+          <p:cNvPicPr>
+            <a:picLocks noChangeAspect="1"/>
+          </p:cNvPicPr>
+          <p:nvPr/>
+        </p:nvPicPr>
+        <p:blipFill>
+          <a:blip r:embed="rId4"/>
+          <a:stretch>
+            <a:fillRect/>
+          </a:stretch>
+        </p:blipFill>
+        <p:spPr>
+          <a:xfrm>
+            <a:off x="1003150" y="3653028"/>
+            <a:ext cx="2728158" cy="2290572"/>
+          </a:xfrm>
+          <a:prstGeom prst="rect">
+            <a:avLst/>
+          </a:prstGeom>
+        </p:spPr>
+      </p:pic>
+      <p:sp>
+        <p:nvSpPr>
+          <p:cNvPr id="19" name="Shape 13"/>
+          <p:cNvSpPr/>
+          <p:nvPr/>
+        </p:nvSpPr>
+        <p:spPr>
+          <a:xfrm>
+            <a:off x="566928" y="5650992"/>
+            <a:ext cx="3600602" cy="292608"/>
           </a:xfrm>
           <a:prstGeom prst="rect">
             <a:avLst/>
           </a:prstGeom>
           <a:solidFill>
-            <a:srgbClr val="B8860B"/>
+            <a:srgbClr val="000000">
+              <a:alpha val="60000"/>
+            </a:srgbClr>
           </a:solidFill>
           <a:ln/>
         </p:spPr>
       </p:sp>
       <p:sp>
         <p:nvSpPr>
-          <p:cNvPr id="17" name="Text 15"/>
-          <p:cNvSpPr/>
-          <p:nvPr/>
-        </p:nvSpPr>
-        <p:spPr>
-          <a:xfrm>
-            <a:off x="987552" y="4261104"/>
-            <a:ext cx="10326319" cy="694944"/>
-          </a:xfrm>
-          <a:prstGeom prst="rect">
-            <a:avLst/>
-          </a:prstGeom>
-          <a:noFill/>
-          <a:ln/>
-        </p:spPr>
-        <p:txBody>
-          <a:bodyPr wrap="square" lIns="0" tIns="0" rIns="0" bIns="0" rtlCol="0" anchor="t"/>
-          <a:lstStyle/>
-          <a:p>
-            <a:pPr indent="0" marL="0">
-              <a:lnSpc>
-                <a:spcPct val="112000"/>
-              </a:lnSpc>
-              <a:buNone/>
-            </a:pPr>
-            <a:r>
-              <a:rPr lang="en-US" sz="920" dirty="0">
-                <a:solidFill>
-                  <a:srgbClr val="2B2B2B"/>
-                </a:solidFill>
-                <a:latin typeface="맑은 고딕" pitchFamily="34" charset="0"/>
-                <a:ea typeface="맑은 고딕" pitchFamily="34" charset="-122"/>
-                <a:cs typeface="맑은 고딕" pitchFamily="34" charset="-120"/>
-              </a:rPr>
-              <a:t>옥상 방수 상태, 지하층 결로/누수 여부 및 공용부(계단실·화장실) 관리 컨디션</a:t>
-            </a:r>
-            <a:endParaRPr lang="en-US" sz="920" dirty="0"/>
-          </a:p>
-        </p:txBody>
-      </p:sp>
-      <p:sp>
-        <p:nvSpPr>
-          <p:cNvPr id="18" name="Shape 16"/>
-          <p:cNvSpPr/>
-          <p:nvPr/>
-        </p:nvSpPr>
-        <p:spPr>
-          <a:xfrm>
-            <a:off x="859536" y="5047488"/>
-            <a:ext cx="64008" cy="64008"/>
-          </a:xfrm>
-          <a:prstGeom prst="rect">
-            <a:avLst/>
+          <p:cNvPr id="20" name="Text 14"/>
+          <p:cNvSpPr/>
+          <p:nvPr/>
+        </p:nvSpPr>
+        <p:spPr>
+          <a:xfrm>
+            <a:off x="676656" y="5650992"/>
+            <a:ext cx="3381146" cy="292608"/>
+          </a:xfrm>
+          <a:prstGeom prst="rect">
+            <a:avLst/>
+          </a:prstGeom>
+          <a:noFill/>
+          <a:ln/>
+        </p:spPr>
+        <p:txBody>
+          <a:bodyPr wrap="square" lIns="0" tIns="0" rIns="0" bIns="0" rtlCol="0" anchor="ctr"/>
+          <a:lstStyle/>
+          <a:p>
+            <a:pPr indent="0" marL="0">
+              <a:buNone/>
+            </a:pPr>
+            <a:r>
+              <a:rPr lang="en-US" sz="900" dirty="0">
+                <a:solidFill>
+                  <a:srgbClr val="FFFFFF"/>
+                </a:solidFill>
+                <a:latin typeface="맑은 고딕" pitchFamily="34" charset="0"/>
+                <a:ea typeface="맑은 고딕" pitchFamily="34" charset="-122"/>
+                <a:cs typeface="맑은 고딕" pitchFamily="34" charset="-120"/>
+              </a:rPr>
+              <a:t>실내 전용 공간</a:t>
+            </a:r>
+            <a:endParaRPr lang="en-US" sz="900" dirty="0"/>
+          </a:p>
+        </p:txBody>
+      </p:sp>
+      <p:sp>
+        <p:nvSpPr>
+          <p:cNvPr id="21" name="Shape 15"/>
+          <p:cNvSpPr/>
+          <p:nvPr/>
+        </p:nvSpPr>
+        <p:spPr>
+          <a:xfrm>
+            <a:off x="4295546" y="3653028"/>
+            <a:ext cx="3600602" cy="2290572"/>
+          </a:xfrm>
+          <a:prstGeom prst="roundRect">
+            <a:avLst>
+              <a:gd name="adj" fmla="val 2395"/>
+            </a:avLst>
           </a:prstGeom>
           <a:solidFill>
-            <a:srgbClr val="B8860B"/>
+            <a:srgbClr val="F0F0F0"/>
           </a:solidFill>
-          <a:ln/>
-        </p:spPr>
-      </p:sp>
-      <p:sp>
-        <p:nvSpPr>
-          <p:cNvPr id="19" name="Text 17"/>
-          <p:cNvSpPr/>
-          <p:nvPr/>
-        </p:nvSpPr>
-        <p:spPr>
-          <a:xfrm>
-            <a:off x="987552" y="4992624"/>
-            <a:ext cx="10326319" cy="694944"/>
-          </a:xfrm>
-          <a:prstGeom prst="rect">
-            <a:avLst/>
-          </a:prstGeom>
-          <a:noFill/>
-          <a:ln/>
-        </p:spPr>
-        <p:txBody>
-          <a:bodyPr wrap="square" lIns="0" tIns="0" rIns="0" bIns="0" rtlCol="0" anchor="t"/>
-          <a:lstStyle/>
-          <a:p>
-            <a:pPr indent="0" marL="0">
-              <a:lnSpc>
-                <a:spcPct val="112000"/>
-              </a:lnSpc>
-              <a:buNone/>
-            </a:pPr>
-            <a:r>
-              <a:rPr lang="en-US" sz="920" dirty="0">
-                <a:solidFill>
-                  <a:srgbClr val="2B2B2B"/>
-                </a:solidFill>
-                <a:latin typeface="맑은 고딕" pitchFamily="34" charset="0"/>
-                <a:ea typeface="맑은 고딕" pitchFamily="34" charset="-122"/>
-                <a:cs typeface="맑은 고딕" pitchFamily="34" charset="-120"/>
-              </a:rPr>
-              <a:t>법정 주차대수 확보 여부, 주차장 진입로 회전반경 및 층고 실측 검증</a:t>
-            </a:r>
-            <a:endParaRPr lang="en-US" sz="920" dirty="0"/>
-          </a:p>
-        </p:txBody>
-      </p:sp>
-      <p:sp>
-        <p:nvSpPr>
-          <p:cNvPr id="20" name="Text 18"/>
+          <a:ln w="6350">
+            <a:solidFill>
+              <a:srgbClr val="E0E0E0"/>
+            </a:solidFill>
+            <a:prstDash val="solid"/>
+          </a:ln>
+        </p:spPr>
+      </p:sp>
+      <p:pic>
+        <p:nvPicPr>
+          <p:cNvPr id="22" name="Image 4" descr="preencoded.png">    </p:cNvPr>
+          <p:cNvPicPr>
+            <a:picLocks noChangeAspect="1"/>
+          </p:cNvPicPr>
+          <p:nvPr/>
+        </p:nvPicPr>
+        <p:blipFill>
+          <a:blip r:embed="rId5"/>
+          <a:stretch>
+            <a:fillRect/>
+          </a:stretch>
+        </p:blipFill>
+        <p:spPr>
+          <a:xfrm>
+            <a:off x="4303157" y="3653028"/>
+            <a:ext cx="3585381" cy="2290572"/>
+          </a:xfrm>
+          <a:prstGeom prst="rect">
+            <a:avLst/>
+          </a:prstGeom>
+        </p:spPr>
+      </p:pic>
+      <p:sp>
+        <p:nvSpPr>
+          <p:cNvPr id="23" name="Shape 16"/>
+          <p:cNvSpPr/>
+          <p:nvPr/>
+        </p:nvSpPr>
+        <p:spPr>
+          <a:xfrm>
+            <a:off x="4295546" y="5650992"/>
+            <a:ext cx="3600602" cy="292608"/>
+          </a:xfrm>
+          <a:prstGeom prst="rect">
+            <a:avLst/>
+          </a:prstGeom>
+          <a:solidFill>
+            <a:srgbClr val="000000">
+              <a:alpha val="60000"/>
+            </a:srgbClr>
+          </a:solidFill>
+          <a:ln/>
+        </p:spPr>
+      </p:sp>
+      <p:sp>
+        <p:nvSpPr>
+          <p:cNvPr id="24" name="Text 17"/>
+          <p:cNvSpPr/>
+          <p:nvPr/>
+        </p:nvSpPr>
+        <p:spPr>
+          <a:xfrm>
+            <a:off x="4405274" y="5650992"/>
+            <a:ext cx="3381146" cy="292608"/>
+          </a:xfrm>
+          <a:prstGeom prst="rect">
+            <a:avLst/>
+          </a:prstGeom>
+          <a:noFill/>
+          <a:ln/>
+        </p:spPr>
+        <p:txBody>
+          <a:bodyPr wrap="square" lIns="0" tIns="0" rIns="0" bIns="0" rtlCol="0" anchor="ctr"/>
+          <a:lstStyle/>
+          <a:p>
+            <a:pPr indent="0" marL="0">
+              <a:buNone/>
+            </a:pPr>
+            <a:r>
+              <a:rPr lang="en-US" sz="900" dirty="0">
+                <a:solidFill>
+                  <a:srgbClr val="FFFFFF"/>
+                </a:solidFill>
+                <a:latin typeface="맑은 고딕" pitchFamily="34" charset="0"/>
+                <a:ea typeface="맑은 고딕" pitchFamily="34" charset="-122"/>
+                <a:cs typeface="맑은 고딕" pitchFamily="34" charset="-120"/>
+              </a:rPr>
+              <a:t>실내 전용 공간</a:t>
+            </a:r>
+            <a:endParaRPr lang="en-US" sz="900" dirty="0"/>
+          </a:p>
+        </p:txBody>
+      </p:sp>
+      <p:sp>
+        <p:nvSpPr>
+          <p:cNvPr id="25" name="Shape 18"/>
+          <p:cNvSpPr/>
+          <p:nvPr/>
+        </p:nvSpPr>
+        <p:spPr>
+          <a:xfrm>
+            <a:off x="8024165" y="3653028"/>
+            <a:ext cx="3600602" cy="2290572"/>
+          </a:xfrm>
+          <a:prstGeom prst="roundRect">
+            <a:avLst>
+              <a:gd name="adj" fmla="val 2395"/>
+            </a:avLst>
+          </a:prstGeom>
+          <a:solidFill>
+            <a:srgbClr val="F0F0F0"/>
+          </a:solidFill>
+          <a:ln w="6350">
+            <a:solidFill>
+              <a:srgbClr val="E0E0E0"/>
+            </a:solidFill>
+            <a:prstDash val="solid"/>
+          </a:ln>
+        </p:spPr>
+      </p:sp>
+      <p:pic>
+        <p:nvPicPr>
+          <p:cNvPr id="26" name="Image 5" descr="preencoded.png">    </p:cNvPr>
+          <p:cNvPicPr>
+            <a:picLocks noChangeAspect="1"/>
+          </p:cNvPicPr>
+          <p:nvPr/>
+        </p:nvPicPr>
+        <p:blipFill>
+          <a:blip r:embed="rId6"/>
+          <a:stretch>
+            <a:fillRect/>
+          </a:stretch>
+        </p:blipFill>
+        <p:spPr>
+          <a:xfrm>
+            <a:off x="8024165" y="3878559"/>
+            <a:ext cx="3600602" cy="1839509"/>
+          </a:xfrm>
+          <a:prstGeom prst="rect">
+            <a:avLst/>
+          </a:prstGeom>
+        </p:spPr>
+      </p:pic>
+      <p:sp>
+        <p:nvSpPr>
+          <p:cNvPr id="27" name="Shape 19"/>
+          <p:cNvSpPr/>
+          <p:nvPr/>
+        </p:nvSpPr>
+        <p:spPr>
+          <a:xfrm>
+            <a:off x="8024165" y="5650992"/>
+            <a:ext cx="3600602" cy="292608"/>
+          </a:xfrm>
+          <a:prstGeom prst="rect">
+            <a:avLst/>
+          </a:prstGeom>
+          <a:solidFill>
+            <a:srgbClr val="000000">
+              <a:alpha val="60000"/>
+            </a:srgbClr>
+          </a:solidFill>
+          <a:ln/>
+        </p:spPr>
+      </p:sp>
+      <p:sp>
+        <p:nvSpPr>
+          <p:cNvPr id="28" name="Text 20"/>
+          <p:cNvSpPr/>
+          <p:nvPr/>
+        </p:nvSpPr>
+        <p:spPr>
+          <a:xfrm>
+            <a:off x="8133893" y="5650992"/>
+            <a:ext cx="3381146" cy="292608"/>
+          </a:xfrm>
+          <a:prstGeom prst="rect">
+            <a:avLst/>
+          </a:prstGeom>
+          <a:noFill/>
+          <a:ln/>
+        </p:spPr>
+        <p:txBody>
+          <a:bodyPr wrap="square" lIns="0" tIns="0" rIns="0" bIns="0" rtlCol="0" anchor="ctr"/>
+          <a:lstStyle/>
+          <a:p>
+            <a:pPr indent="0" marL="0">
+              <a:buNone/>
+            </a:pPr>
+            <a:r>
+              <a:rPr lang="en-US" sz="900" dirty="0">
+                <a:solidFill>
+                  <a:srgbClr val="FFFFFF"/>
+                </a:solidFill>
+                <a:latin typeface="맑은 고딕" pitchFamily="34" charset="0"/>
+                <a:ea typeface="맑은 고딕" pitchFamily="34" charset="-122"/>
+                <a:cs typeface="맑은 고딕" pitchFamily="34" charset="-120"/>
+              </a:rPr>
+              <a:t>실내 전용 공간</a:t>
+            </a:r>
+            <a:endParaRPr lang="en-US" sz="900" dirty="0"/>
+          </a:p>
+        </p:txBody>
+      </p:sp>
+      <p:sp>
+        <p:nvSpPr>
+          <p:cNvPr id="29" name="Text 21"/>
           <p:cNvSpPr/>
           <p:nvPr/>
         </p:nvSpPr>
@@ -9767,7 +9786,7 @@
       </p:sp>
       <p:sp>
         <p:nvSpPr>
-          <p:cNvPr id="21" name="Text 19"/>
+          <p:cNvPr id="30" name="Text 22"/>
           <p:cNvSpPr/>
           <p:nvPr/>
         </p:nvSpPr>
@@ -9903,46 +9922,7 @@
         </p:nvSpPr>
         <p:spPr>
           <a:xfrm>
-            <a:off x="1133856" y="457200"/>
-            <a:ext cx="10490911" cy="182880"/>
-          </a:xfrm>
-          <a:prstGeom prst="rect">
-            <a:avLst/>
-          </a:prstGeom>
-          <a:noFill/>
-          <a:ln/>
-        </p:spPr>
-        <p:txBody>
-          <a:bodyPr wrap="square" lIns="0" tIns="0" rIns="0" bIns="0" rtlCol="0" anchor="ctr"/>
-          <a:lstStyle/>
-          <a:p>
-            <a:pPr indent="0" marL="0">
-              <a:buNone/>
-            </a:pPr>
-            <a:r>
-              <a:rPr lang="en-US" sz="950" b="1" spc="200" kern="0" dirty="0">
-                <a:solidFill>
-                  <a:srgbClr val="B8860B"/>
-                </a:solidFill>
-                <a:latin typeface="Arial" pitchFamily="34" charset="0"/>
-                <a:ea typeface="Arial" pitchFamily="34" charset="-122"/>
-                <a:cs typeface="Arial" pitchFamily="34" charset="-120"/>
-              </a:rPr>
-              <a:t>문의/유의</a:t>
-            </a:r>
-            <a:endParaRPr lang="en-US" sz="950" dirty="0"/>
-          </a:p>
-        </p:txBody>
-      </p:sp>
-      <p:sp>
-        <p:nvSpPr>
-          <p:cNvPr id="5" name="Text 3"/>
-          <p:cNvSpPr/>
-          <p:nvPr/>
-        </p:nvSpPr>
-        <p:spPr>
-          <a:xfrm>
-            <a:off x="1133856" y="658368"/>
+            <a:off x="1133856" y="438912"/>
             <a:ext cx="10490911" cy="420624"/>
           </a:xfrm>
           <a:prstGeom prst="rect">
@@ -9977,7 +9957,7 @@
       </p:sp>
       <p:sp>
         <p:nvSpPr>
-          <p:cNvPr id="6" name="Shape 4"/>
+          <p:cNvPr id="5" name="Shape 3"/>
           <p:cNvSpPr/>
           <p:nvPr/>
         </p:nvSpPr>
@@ -9999,7 +9979,7 @@
       </p:sp>
       <p:sp>
         <p:nvSpPr>
-          <p:cNvPr id="7" name="Shape 5"/>
+          <p:cNvPr id="6" name="Shape 4"/>
           <p:cNvSpPr/>
           <p:nvPr/>
         </p:nvSpPr>
@@ -10019,7 +9999,7 @@
       </p:sp>
       <p:sp>
         <p:nvSpPr>
-          <p:cNvPr id="8" name="Text 6"/>
+          <p:cNvPr id="7" name="Text 5"/>
           <p:cNvSpPr/>
           <p:nvPr/>
         </p:nvSpPr>
@@ -10058,7 +10038,7 @@
       </p:sp>
       <p:sp>
         <p:nvSpPr>
-          <p:cNvPr id="9" name="Text 7"/>
+          <p:cNvPr id="8" name="Text 6"/>
           <p:cNvSpPr/>
           <p:nvPr/>
         </p:nvSpPr>
@@ -10097,7 +10077,7 @@
       </p:sp>
       <p:sp>
         <p:nvSpPr>
-          <p:cNvPr id="10" name="Text 8"/>
+          <p:cNvPr id="9" name="Text 7"/>
           <p:cNvSpPr/>
           <p:nvPr/>
         </p:nvSpPr>
@@ -10136,7 +10116,7 @@
       </p:sp>
       <p:sp>
         <p:nvSpPr>
-          <p:cNvPr id="11" name="Text 9"/>
+          <p:cNvPr id="10" name="Text 8"/>
           <p:cNvSpPr/>
           <p:nvPr/>
         </p:nvSpPr>
@@ -10175,7 +10155,7 @@
       </p:sp>
       <p:sp>
         <p:nvSpPr>
-          <p:cNvPr id="12" name="Shape 10"/>
+          <p:cNvPr id="11" name="Shape 9"/>
           <p:cNvSpPr/>
           <p:nvPr/>
         </p:nvSpPr>
@@ -10197,7 +10177,7 @@
       </p:sp>
       <p:sp>
         <p:nvSpPr>
-          <p:cNvPr id="13" name="Shape 11"/>
+          <p:cNvPr id="12" name="Shape 10"/>
           <p:cNvSpPr/>
           <p:nvPr/>
         </p:nvSpPr>
@@ -10217,7 +10197,7 @@
       </p:sp>
       <p:sp>
         <p:nvSpPr>
-          <p:cNvPr id="14" name="Text 12"/>
+          <p:cNvPr id="13" name="Text 11"/>
           <p:cNvSpPr/>
           <p:nvPr/>
         </p:nvSpPr>
@@ -10256,7 +10236,7 @@
       </p:sp>
       <p:sp>
         <p:nvSpPr>
-          <p:cNvPr id="15" name="Text 13"/>
+          <p:cNvPr id="14" name="Text 12"/>
           <p:cNvSpPr/>
           <p:nvPr/>
         </p:nvSpPr>
@@ -10295,7 +10275,7 @@
       </p:sp>
       <p:sp>
         <p:nvSpPr>
-          <p:cNvPr id="16" name="Text 14"/>
+          <p:cNvPr id="15" name="Text 13"/>
           <p:cNvSpPr/>
           <p:nvPr/>
         </p:nvSpPr>
@@ -10334,7 +10314,7 @@
       </p:sp>
       <p:sp>
         <p:nvSpPr>
-          <p:cNvPr id="17" name="Text 15"/>
+          <p:cNvPr id="16" name="Text 14"/>
           <p:cNvSpPr/>
           <p:nvPr/>
         </p:nvSpPr>
@@ -10373,7 +10353,7 @@
       </p:sp>
       <p:sp>
         <p:nvSpPr>
-          <p:cNvPr id="18" name="Shape 16"/>
+          <p:cNvPr id="17" name="Shape 15"/>
           <p:cNvSpPr/>
           <p:nvPr/>
         </p:nvSpPr>
@@ -10395,7 +10375,7 @@
       </p:sp>
       <p:sp>
         <p:nvSpPr>
-          <p:cNvPr id="19" name="Shape 17"/>
+          <p:cNvPr id="18" name="Shape 16"/>
           <p:cNvSpPr/>
           <p:nvPr/>
         </p:nvSpPr>
@@ -10415,7 +10395,7 @@
       </p:sp>
       <p:sp>
         <p:nvSpPr>
-          <p:cNvPr id="20" name="Text 18"/>
+          <p:cNvPr id="19" name="Text 17"/>
           <p:cNvSpPr/>
           <p:nvPr/>
         </p:nvSpPr>
@@ -10454,7 +10434,7 @@
       </p:sp>
       <p:sp>
         <p:nvSpPr>
-          <p:cNvPr id="21" name="Text 19"/>
+          <p:cNvPr id="20" name="Text 18"/>
           <p:cNvSpPr/>
           <p:nvPr/>
         </p:nvSpPr>
@@ -10493,7 +10473,7 @@
       </p:sp>
       <p:sp>
         <p:nvSpPr>
-          <p:cNvPr id="22" name="Text 20"/>
+          <p:cNvPr id="21" name="Text 19"/>
           <p:cNvSpPr/>
           <p:nvPr/>
         </p:nvSpPr>
@@ -10532,7 +10512,7 @@
       </p:sp>
       <p:sp>
         <p:nvSpPr>
-          <p:cNvPr id="23" name="Text 21"/>
+          <p:cNvPr id="22" name="Text 20"/>
           <p:cNvSpPr/>
           <p:nvPr/>
         </p:nvSpPr>
@@ -10571,7 +10551,7 @@
       </p:sp>
       <p:sp>
         <p:nvSpPr>
-          <p:cNvPr id="24" name="Shape 22"/>
+          <p:cNvPr id="23" name="Shape 21"/>
           <p:cNvSpPr/>
           <p:nvPr/>
         </p:nvSpPr>
@@ -10593,7 +10573,7 @@
       </p:sp>
       <p:sp>
         <p:nvSpPr>
-          <p:cNvPr id="25" name="Text 23"/>
+          <p:cNvPr id="24" name="Text 22"/>
           <p:cNvSpPr/>
           <p:nvPr/>
         </p:nvSpPr>
@@ -10632,7 +10612,7 @@
       </p:sp>
       <p:sp>
         <p:nvSpPr>
-          <p:cNvPr id="26" name="Text 24"/>
+          <p:cNvPr id="25" name="Text 23"/>
           <p:cNvSpPr/>
           <p:nvPr/>
         </p:nvSpPr>
@@ -10671,7 +10651,7 @@
       </p:sp>
       <p:sp>
         <p:nvSpPr>
-          <p:cNvPr id="27" name="Shape 25"/>
+          <p:cNvPr id="26" name="Shape 24"/>
           <p:cNvSpPr/>
           <p:nvPr/>
         </p:nvSpPr>
@@ -10693,7 +10673,7 @@
       </p:sp>
       <p:sp>
         <p:nvSpPr>
-          <p:cNvPr id="28" name="Text 26"/>
+          <p:cNvPr id="27" name="Text 25"/>
           <p:cNvSpPr/>
           <p:nvPr/>
         </p:nvSpPr>
@@ -10732,7 +10712,7 @@
       </p:sp>
       <p:sp>
         <p:nvSpPr>
-          <p:cNvPr id="29" name="Text 27"/>
+          <p:cNvPr id="28" name="Text 26"/>
           <p:cNvSpPr/>
           <p:nvPr/>
         </p:nvSpPr>
@@ -10771,7 +10751,7 @@
       </p:sp>
       <p:sp>
         <p:nvSpPr>
-          <p:cNvPr id="30" name="Shape 28"/>
+          <p:cNvPr id="29" name="Shape 27"/>
           <p:cNvSpPr/>
           <p:nvPr/>
         </p:nvSpPr>
@@ -10793,7 +10773,7 @@
       </p:sp>
       <p:sp>
         <p:nvSpPr>
-          <p:cNvPr id="31" name="Text 29"/>
+          <p:cNvPr id="30" name="Text 28"/>
           <p:cNvSpPr/>
           <p:nvPr/>
         </p:nvSpPr>
@@ -10832,7 +10812,7 @@
       </p:sp>
       <p:sp>
         <p:nvSpPr>
-          <p:cNvPr id="32" name="Text 30"/>
+          <p:cNvPr id="31" name="Text 29"/>
           <p:cNvSpPr/>
           <p:nvPr/>
         </p:nvSpPr>
@@ -10871,7 +10851,7 @@
       </p:sp>
       <p:sp>
         <p:nvSpPr>
-          <p:cNvPr id="33" name="Shape 31"/>
+          <p:cNvPr id="32" name="Shape 30"/>
           <p:cNvSpPr/>
           <p:nvPr/>
         </p:nvSpPr>
@@ -10893,7 +10873,7 @@
       </p:sp>
       <p:sp>
         <p:nvSpPr>
-          <p:cNvPr id="34" name="Text 32"/>
+          <p:cNvPr id="33" name="Text 31"/>
           <p:cNvSpPr/>
           <p:nvPr/>
         </p:nvSpPr>
@@ -10932,7 +10912,7 @@
       </p:sp>
       <p:sp>
         <p:nvSpPr>
-          <p:cNvPr id="35" name="Text 33"/>
+          <p:cNvPr id="34" name="Text 32"/>
           <p:cNvSpPr/>
           <p:nvPr/>
         </p:nvSpPr>
@@ -10971,7 +10951,7 @@
       </p:sp>
       <p:sp>
         <p:nvSpPr>
-          <p:cNvPr id="36" name="Shape 34"/>
+          <p:cNvPr id="35" name="Shape 33"/>
           <p:cNvSpPr/>
           <p:nvPr/>
         </p:nvSpPr>
@@ -10993,7 +10973,7 @@
       </p:sp>
       <p:sp>
         <p:nvSpPr>
-          <p:cNvPr id="37" name="Text 35"/>
+          <p:cNvPr id="36" name="Text 34"/>
           <p:cNvSpPr/>
           <p:nvPr/>
         </p:nvSpPr>
@@ -11032,7 +11012,7 @@
       </p:sp>
       <p:sp>
         <p:nvSpPr>
-          <p:cNvPr id="38" name="Text 36"/>
+          <p:cNvPr id="37" name="Text 35"/>
           <p:cNvSpPr/>
           <p:nvPr/>
         </p:nvSpPr>
@@ -11071,7 +11051,7 @@
       </p:sp>
       <p:sp>
         <p:nvSpPr>
-          <p:cNvPr id="39" name="Text 37"/>
+          <p:cNvPr id="38" name="Text 36"/>
           <p:cNvSpPr/>
           <p:nvPr/>
         </p:nvSpPr>
@@ -11110,7 +11090,7 @@
       </p:sp>
       <p:sp>
         <p:nvSpPr>
-          <p:cNvPr id="40" name="Shape 38"/>
+          <p:cNvPr id="39" name="Shape 37"/>
           <p:cNvSpPr/>
           <p:nvPr/>
         </p:nvSpPr>
@@ -11137,7 +11117,7 @@
       </p:sp>
       <p:sp>
         <p:nvSpPr>
-          <p:cNvPr id="41" name="Text 39"/>
+          <p:cNvPr id="40" name="Text 38"/>
           <p:cNvSpPr/>
           <p:nvPr/>
         </p:nvSpPr>
@@ -11168,7 +11148,7 @@
                 <a:ea typeface="맑은 고딕" pitchFamily="34" charset="-122"/>
                 <a:cs typeface="맑은 고딕" pitchFamily="34" charset="-120"/>
               </a:rPr>
-              <a:t>📞  담당자  </a:t>
+              <a:t>담당자</a:t>
             </a:r>
             <a:endParaRPr lang="en-US" sz="1100" dirty="0"/>
           </a:p>
@@ -11176,7 +11156,7 @@
       </p:sp>
       <p:sp>
         <p:nvSpPr>
-          <p:cNvPr id="42" name="Text 40"/>
+          <p:cNvPr id="41" name="Text 39"/>
           <p:cNvSpPr/>
           <p:nvPr/>
         </p:nvSpPr>
@@ -11215,7 +11195,7 @@
       </p:sp>
       <p:sp>
         <p:nvSpPr>
-          <p:cNvPr id="43" name="Text 41"/>
+          <p:cNvPr id="42" name="Text 40"/>
           <p:cNvSpPr/>
           <p:nvPr/>
         </p:nvSpPr>
@@ -11254,7 +11234,7 @@
       </p:sp>
       <p:sp>
         <p:nvSpPr>
-          <p:cNvPr id="44" name="Text 42"/>
+          <p:cNvPr id="43" name="Text 41"/>
           <p:cNvSpPr/>
           <p:nvPr/>
         </p:nvSpPr>
@@ -11293,7 +11273,7 @@
       </p:sp>
       <p:sp>
         <p:nvSpPr>
-          <p:cNvPr id="45" name="Shape 43"/>
+          <p:cNvPr id="44" name="Shape 42"/>
           <p:cNvSpPr/>
           <p:nvPr/>
         </p:nvSpPr>
@@ -11315,7 +11295,7 @@
       </p:sp>
       <p:sp>
         <p:nvSpPr>
-          <p:cNvPr id="46" name="Text 44"/>
+          <p:cNvPr id="45" name="Text 43"/>
           <p:cNvSpPr/>
           <p:nvPr/>
         </p:nvSpPr>
@@ -11357,7 +11337,7 @@
       </p:sp>
       <p:sp>
         <p:nvSpPr>
-          <p:cNvPr id="47" name="Shape 45"/>
+          <p:cNvPr id="46" name="Shape 44"/>
           <p:cNvSpPr/>
           <p:nvPr/>
         </p:nvSpPr>
@@ -11377,7 +11357,7 @@
       </p:sp>
       <p:sp>
         <p:nvSpPr>
-          <p:cNvPr id="48" name="Text 46"/>
+          <p:cNvPr id="47" name="Text 45"/>
           <p:cNvSpPr/>
           <p:nvPr/>
         </p:nvSpPr>
@@ -11416,7 +11396,7 @@
       </p:sp>
       <p:sp>
         <p:nvSpPr>
-          <p:cNvPr id="49" name="Text 47"/>
+          <p:cNvPr id="48" name="Text 46"/>
           <p:cNvSpPr/>
           <p:nvPr/>
         </p:nvSpPr>
@@ -11455,7 +11435,7 @@
       </p:sp>
       <p:sp>
         <p:nvSpPr>
-          <p:cNvPr id="50" name="Text 48"/>
+          <p:cNvPr id="49" name="Text 47"/>
           <p:cNvSpPr/>
           <p:nvPr/>
         </p:nvSpPr>
